--- a/soutenance/output.pptx
+++ b/soutenance/output.pptx
@@ -4,6 +4,9 @@
   <p:sldMasterIdLst>
     <p:sldMasterId id="2147483648" r:id="rId1"/>
   </p:sldMasterIdLst>
+  <p:notesMasterIdLst>
+    <p:notesMasterId r:id="rId36"/>
+  </p:notesMasterIdLst>
   <p:sldIdLst>
     <p:sldId id="256" r:id="rId2"/>
     <p:sldId id="257" r:id="rId3"/>
@@ -40,9 +43,6 @@
     <p:sldId id="288" r:id="rId34"/>
     <p:sldId id="289" r:id="rId35"/>
   </p:sldIdLst>
-  <p:notesMasterIdLst>
-    <p:notesMasterId r:id="rId36"/>
-  </p:notesMasterIdLst>
   <p:sldSz cx="12192000" cy="6858000"/>
   <p:notesSz cx="6858000" cy="12192000"/>
   <p:defaultTextStyle>
@@ -137,6 +137,11 @@
       </a:defRPr>
     </a:lvl9pPr>
   </p:defaultTextStyle>
+  <p:extLst>
+    <p:ext uri="{EFAFB233-063F-42B5-8137-9DF3F51BA10A}">
+      <p15:sldGuideLst xmlns:p15="http://schemas.microsoft.com/office/powerpoint/2012/main"/>
+    </p:ext>
+  </p:extLst>
 </p:presentation>
 </file>
 
@@ -162,234 +167,10 @@
           <a:chExt cx="0" cy="0"/>
         </a:xfrm>
       </p:grpSpPr>
-      <p:sp>
-        <p:nvSpPr>
-          <p:cNvPr id="2" name="Header Placeholder 1"/>
-          <p:cNvSpPr>
-            <a:spLocks noGrp="1"/>
-          </p:cNvSpPr>
-          <p:nvPr>
-            <p:ph type="hdr" sz="quarter"/>
-          </p:nvPr>
-        </p:nvSpPr>
-        <p:spPr>
-          <a:xfrm>
-            <a:off x="0" y="0"/>
-            <a:ext cx="2971800" cy="458788"/>
-          </a:xfrm>
-          <a:prstGeom prst="rect">
-            <a:avLst/>
-          </a:prstGeom>
-        </p:spPr>
-        <p:txBody>
-          <a:bodyPr vert="horz" lIns="91440" tIns="45720" rIns="91440" bIns="45720" rtlCol="0"/>
-          <a:lstStyle>
-            <a:lvl1pPr algn="l">
-              <a:defRPr sz="1200"/>
-            </a:lvl1pPr>
-          </a:lstStyle>
-          <a:p>
-            <a:endParaRPr lang="en-US"/>
-          </a:p>
-        </p:txBody>
-      </p:sp>
-      <p:sp>
-        <p:nvSpPr>
-          <p:cNvPr id="3" name="Date Placeholder 2"/>
-          <p:cNvSpPr>
-            <a:spLocks noGrp="1"/>
-          </p:cNvSpPr>
-          <p:nvPr>
-            <p:ph type="dt" idx="1"/>
-          </p:nvPr>
-        </p:nvSpPr>
-        <p:spPr>
-          <a:xfrm>
-            <a:off x="3884613" y="0"/>
-            <a:ext cx="2971800" cy="458788"/>
-          </a:xfrm>
-          <a:prstGeom prst="rect">
-            <a:avLst/>
-          </a:prstGeom>
-        </p:spPr>
-        <p:txBody>
-          <a:bodyPr vert="horz" lIns="91440" tIns="45720" rIns="91440" bIns="45720" rtlCol="0"/>
-          <a:lstStyle>
-            <a:lvl1pPr algn="r">
-              <a:defRPr sz="1200"/>
-            </a:lvl1pPr>
-          </a:lstStyle>
-          <a:p>
-            <a:fld id="{5282F153-3F37-0F45-9E97-73ACFA13230C}" type="datetimeFigureOut">
-              <a:rPr lang="en-US"/>
-              <a:t>7/23/19</a:t>
-            </a:fld>
-            <a:endParaRPr lang="en-US"/>
-          </a:p>
-        </p:txBody>
-      </p:sp>
-      <p:sp>
-        <p:nvSpPr>
-          <p:cNvPr id="4" name="Slide Image Placeholder 3"/>
-          <p:cNvSpPr>
-            <a:spLocks noGrp="1" noRot="1" noChangeAspect="1"/>
-          </p:cNvSpPr>
-          <p:nvPr>
-            <p:ph type="sldImg" idx="2"/>
-          </p:nvPr>
-        </p:nvSpPr>
-        <p:spPr>
-          <a:xfrm>
-            <a:off x="685800" y="1143000"/>
-            <a:ext cx="5486400" cy="3086100"/>
-          </a:xfrm>
-          <a:prstGeom prst="rect">
-            <a:avLst/>
-          </a:prstGeom>
-          <a:noFill/>
-          <a:ln w="12700">
-            <a:solidFill>
-              <a:prstClr val="black"/>
-            </a:solidFill>
-          </a:ln>
-        </p:spPr>
-        <p:txBody>
-          <a:bodyPr vert="horz" lIns="91440" tIns="45720" rIns="91440" bIns="45720" rtlCol="0" anchor="ctr"/>
-          <a:lstStyle/>
-          <a:p>
-            <a:endParaRPr lang="en-US"/>
-          </a:p>
-        </p:txBody>
-      </p:sp>
-      <p:sp>
-        <p:nvSpPr>
-          <p:cNvPr id="5" name="Notes Placeholder 4"/>
-          <p:cNvSpPr>
-            <a:spLocks noGrp="1"/>
-          </p:cNvSpPr>
-          <p:nvPr>
-            <p:ph type="body" sz="quarter" idx="3"/>
-          </p:nvPr>
-        </p:nvSpPr>
-        <p:spPr>
-          <a:xfrm>
-            <a:off x="685800" y="4400550"/>
-            <a:ext cx="5486400" cy="3600450"/>
-          </a:xfrm>
-          <a:prstGeom prst="rect">
-            <a:avLst/>
-          </a:prstGeom>
-        </p:spPr>
-        <p:txBody>
-          <a:bodyPr vert="horz" lIns="91440" tIns="45720" rIns="91440" bIns="45720" rtlCol="0"/>
-          <a:lstStyle/>
-          <a:p>
-            <a:pPr lvl="0"/>
-            <a:r>
-              <a:rPr lang="en-US"/>
-              <a:t>Click to edit Master text styles</a:t>
-            </a:r>
-          </a:p>
-          <a:p>
-            <a:pPr lvl="1"/>
-            <a:r>
-              <a:rPr lang="en-US"/>
-              <a:t>Second level</a:t>
-            </a:r>
-          </a:p>
-          <a:p>
-            <a:pPr lvl="2"/>
-            <a:r>
-              <a:rPr lang="en-US"/>
-              <a:t>Third level</a:t>
-            </a:r>
-          </a:p>
-          <a:p>
-            <a:pPr lvl="3"/>
-            <a:r>
-              <a:rPr lang="en-US"/>
-              <a:t>Fourth level</a:t>
-            </a:r>
-          </a:p>
-          <a:p>
-            <a:pPr lvl="4"/>
-            <a:r>
-              <a:rPr lang="en-US"/>
-              <a:t>Fifth level</a:t>
-            </a:r>
-          </a:p>
-        </p:txBody>
-      </p:sp>
-      <p:sp>
-        <p:nvSpPr>
-          <p:cNvPr id="6" name="Footer Placeholder 5"/>
-          <p:cNvSpPr>
-            <a:spLocks noGrp="1"/>
-          </p:cNvSpPr>
-          <p:nvPr>
-            <p:ph type="ftr" sz="quarter" idx="4"/>
-          </p:nvPr>
-        </p:nvSpPr>
-        <p:spPr>
-          <a:xfrm>
-            <a:off x="0" y="8685213"/>
-            <a:ext cx="2971800" cy="458787"/>
-          </a:xfrm>
-          <a:prstGeom prst="rect">
-            <a:avLst/>
-          </a:prstGeom>
-        </p:spPr>
-        <p:txBody>
-          <a:bodyPr vert="horz" lIns="91440" tIns="45720" rIns="91440" bIns="45720" rtlCol="0" anchor="b"/>
-          <a:lstStyle>
-            <a:lvl1pPr algn="l">
-              <a:defRPr sz="1200"/>
-            </a:lvl1pPr>
-          </a:lstStyle>
-          <a:p>
-            <a:endParaRPr lang="en-US"/>
-          </a:p>
-        </p:txBody>
-      </p:sp>
-      <p:sp>
-        <p:nvSpPr>
-          <p:cNvPr id="7" name="Slide Number Placeholder 6"/>
-          <p:cNvSpPr>
-            <a:spLocks noGrp="1"/>
-          </p:cNvSpPr>
-          <p:nvPr>
-            <p:ph type="sldNum" sz="quarter" idx="5"/>
-          </p:nvPr>
-        </p:nvSpPr>
-        <p:spPr>
-          <a:xfrm>
-            <a:off x="3884613" y="8685213"/>
-            <a:ext cx="2971800" cy="458787"/>
-          </a:xfrm>
-          <a:prstGeom prst="rect">
-            <a:avLst/>
-          </a:prstGeom>
-        </p:spPr>
-        <p:txBody>
-          <a:bodyPr vert="horz" lIns="91440" tIns="45720" rIns="91440" bIns="45720" rtlCol="0" anchor="b"/>
-          <a:lstStyle>
-            <a:lvl1pPr algn="r">
-              <a:defRPr sz="1200"/>
-            </a:lvl1pPr>
-          </a:lstStyle>
-          <a:p>
-            <a:fld id="{CE5E9CC1-C706-0F49-92D6-E571CC5EEA8F}" type="slidenum">
-              <a:rPr lang="en-US"/>
-              <a:t>‹#›</a:t>
-            </a:fld>
-            <a:endParaRPr lang="en-US"/>
-          </a:p>
-        </p:txBody>
-      </p:sp>
     </p:spTree>
     <p:extLst>
       <p:ext uri="{BB962C8B-B14F-4D97-AF65-F5344CB8AC3E}">
-        <p14:creationId xmlns:p14="http://schemas.microsoft.com/office/powerpoint/2010/main" val="1024086991"/>
+        <p14:creationId xmlns:p14="http://schemas.microsoft.com/office/powerpoint/2010/main" val="2563374878"/>
       </p:ext>
     </p:extLst>
   </p:cSld>
@@ -533,10 +314,6 @@
           <a:bodyPr/>
           <a:lstStyle/>
           <a:p>
-            <a:r>
-              <a:rPr lang="en-US" dirty="0"/>
-              <a:t/>
-            </a:r>
             <a:endParaRPr lang="en-US" dirty="0"/>
           </a:p>
         </p:txBody>
@@ -621,10 +398,6 @@
           <a:bodyPr/>
           <a:lstStyle/>
           <a:p>
-            <a:r>
-              <a:rPr lang="en-US" dirty="0"/>
-              <a:t/>
-            </a:r>
             <a:endParaRPr lang="en-US" dirty="0"/>
           </a:p>
         </p:txBody>
@@ -709,10 +482,6 @@
           <a:bodyPr/>
           <a:lstStyle/>
           <a:p>
-            <a:r>
-              <a:rPr lang="en-US" dirty="0"/>
-              <a:t/>
-            </a:r>
             <a:endParaRPr lang="en-US" dirty="0"/>
           </a:p>
         </p:txBody>
@@ -797,10 +566,6 @@
           <a:bodyPr/>
           <a:lstStyle/>
           <a:p>
-            <a:r>
-              <a:rPr lang="en-US" dirty="0"/>
-              <a:t/>
-            </a:r>
             <a:endParaRPr lang="en-US" dirty="0"/>
           </a:p>
         </p:txBody>
@@ -885,10 +650,6 @@
           <a:bodyPr/>
           <a:lstStyle/>
           <a:p>
-            <a:r>
-              <a:rPr lang="en-US" dirty="0"/>
-              <a:t/>
-            </a:r>
             <a:endParaRPr lang="en-US" dirty="0"/>
           </a:p>
         </p:txBody>
@@ -973,10 +734,6 @@
           <a:bodyPr/>
           <a:lstStyle/>
           <a:p>
-            <a:r>
-              <a:rPr lang="en-US" dirty="0"/>
-              <a:t/>
-            </a:r>
             <a:endParaRPr lang="en-US" dirty="0"/>
           </a:p>
         </p:txBody>
@@ -1061,10 +818,6 @@
           <a:bodyPr/>
           <a:lstStyle/>
           <a:p>
-            <a:r>
-              <a:rPr lang="en-US" dirty="0"/>
-              <a:t/>
-            </a:r>
             <a:endParaRPr lang="en-US" dirty="0"/>
           </a:p>
         </p:txBody>
@@ -1149,10 +902,6 @@
           <a:bodyPr/>
           <a:lstStyle/>
           <a:p>
-            <a:r>
-              <a:rPr lang="en-US" dirty="0"/>
-              <a:t/>
-            </a:r>
             <a:endParaRPr lang="en-US" dirty="0"/>
           </a:p>
         </p:txBody>
@@ -1237,10 +986,6 @@
           <a:bodyPr/>
           <a:lstStyle/>
           <a:p>
-            <a:r>
-              <a:rPr lang="en-US" dirty="0"/>
-              <a:t/>
-            </a:r>
             <a:endParaRPr lang="en-US" dirty="0"/>
           </a:p>
         </p:txBody>
@@ -1325,10 +1070,6 @@
           <a:bodyPr/>
           <a:lstStyle/>
           <a:p>
-            <a:r>
-              <a:rPr lang="en-US" dirty="0"/>
-              <a:t/>
-            </a:r>
             <a:endParaRPr lang="en-US" dirty="0"/>
           </a:p>
         </p:txBody>
@@ -1413,10 +1154,6 @@
           <a:bodyPr/>
           <a:lstStyle/>
           <a:p>
-            <a:r>
-              <a:rPr lang="en-US" dirty="0"/>
-              <a:t/>
-            </a:r>
             <a:endParaRPr lang="en-US" dirty="0"/>
           </a:p>
         </p:txBody>
@@ -1501,10 +1238,6 @@
           <a:bodyPr/>
           <a:lstStyle/>
           <a:p>
-            <a:r>
-              <a:rPr lang="en-US" dirty="0"/>
-              <a:t/>
-            </a:r>
             <a:endParaRPr lang="en-US" dirty="0"/>
           </a:p>
         </p:txBody>
@@ -1589,10 +1322,6 @@
           <a:bodyPr/>
           <a:lstStyle/>
           <a:p>
-            <a:r>
-              <a:rPr lang="en-US" dirty="0"/>
-              <a:t/>
-            </a:r>
             <a:endParaRPr lang="en-US" dirty="0"/>
           </a:p>
         </p:txBody>
@@ -1677,10 +1406,6 @@
           <a:bodyPr/>
           <a:lstStyle/>
           <a:p>
-            <a:r>
-              <a:rPr lang="en-US" dirty="0"/>
-              <a:t/>
-            </a:r>
             <a:endParaRPr lang="en-US" dirty="0"/>
           </a:p>
         </p:txBody>
@@ -1765,10 +1490,6 @@
           <a:bodyPr/>
           <a:lstStyle/>
           <a:p>
-            <a:r>
-              <a:rPr lang="en-US" dirty="0"/>
-              <a:t/>
-            </a:r>
             <a:endParaRPr lang="en-US" dirty="0"/>
           </a:p>
         </p:txBody>
@@ -1853,10 +1574,6 @@
           <a:bodyPr/>
           <a:lstStyle/>
           <a:p>
-            <a:r>
-              <a:rPr lang="en-US" dirty="0"/>
-              <a:t/>
-            </a:r>
             <a:endParaRPr lang="en-US" dirty="0"/>
           </a:p>
         </p:txBody>
@@ -1941,10 +1658,6 @@
           <a:bodyPr/>
           <a:lstStyle/>
           <a:p>
-            <a:r>
-              <a:rPr lang="en-US" dirty="0"/>
-              <a:t/>
-            </a:r>
             <a:endParaRPr lang="en-US" dirty="0"/>
           </a:p>
         </p:txBody>
@@ -2029,10 +1742,6 @@
           <a:bodyPr/>
           <a:lstStyle/>
           <a:p>
-            <a:r>
-              <a:rPr lang="en-US" dirty="0"/>
-              <a:t/>
-            </a:r>
             <a:endParaRPr lang="en-US" dirty="0"/>
           </a:p>
         </p:txBody>
@@ -2117,10 +1826,6 @@
           <a:bodyPr/>
           <a:lstStyle/>
           <a:p>
-            <a:r>
-              <a:rPr lang="en-US" dirty="0"/>
-              <a:t/>
-            </a:r>
             <a:endParaRPr lang="en-US" dirty="0"/>
           </a:p>
         </p:txBody>
@@ -2205,10 +1910,6 @@
           <a:bodyPr/>
           <a:lstStyle/>
           <a:p>
-            <a:r>
-              <a:rPr lang="en-US" dirty="0"/>
-              <a:t/>
-            </a:r>
             <a:endParaRPr lang="en-US" dirty="0"/>
           </a:p>
         </p:txBody>
@@ -2293,10 +1994,6 @@
           <a:bodyPr/>
           <a:lstStyle/>
           <a:p>
-            <a:r>
-              <a:rPr lang="en-US" dirty="0"/>
-              <a:t/>
-            </a:r>
             <a:endParaRPr lang="en-US" dirty="0"/>
           </a:p>
         </p:txBody>
@@ -2381,10 +2078,6 @@
           <a:bodyPr/>
           <a:lstStyle/>
           <a:p>
-            <a:r>
-              <a:rPr lang="en-US" dirty="0"/>
-              <a:t/>
-            </a:r>
             <a:endParaRPr lang="en-US" dirty="0"/>
           </a:p>
         </p:txBody>
@@ -2469,10 +2162,6 @@
           <a:bodyPr/>
           <a:lstStyle/>
           <a:p>
-            <a:r>
-              <a:rPr lang="en-US" dirty="0"/>
-              <a:t/>
-            </a:r>
             <a:endParaRPr lang="en-US" dirty="0"/>
           </a:p>
         </p:txBody>
@@ -2557,10 +2246,6 @@
           <a:bodyPr/>
           <a:lstStyle/>
           <a:p>
-            <a:r>
-              <a:rPr lang="en-US" dirty="0"/>
-              <a:t/>
-            </a:r>
             <a:endParaRPr lang="en-US" dirty="0"/>
           </a:p>
         </p:txBody>
@@ -2645,10 +2330,6 @@
           <a:bodyPr/>
           <a:lstStyle/>
           <a:p>
-            <a:r>
-              <a:rPr lang="en-US" dirty="0"/>
-              <a:t/>
-            </a:r>
             <a:endParaRPr lang="en-US" dirty="0"/>
           </a:p>
         </p:txBody>
@@ -2733,10 +2414,6 @@
           <a:bodyPr/>
           <a:lstStyle/>
           <a:p>
-            <a:r>
-              <a:rPr lang="en-US" dirty="0"/>
-              <a:t/>
-            </a:r>
             <a:endParaRPr lang="en-US" dirty="0"/>
           </a:p>
         </p:txBody>
@@ -2821,10 +2498,6 @@
           <a:bodyPr/>
           <a:lstStyle/>
           <a:p>
-            <a:r>
-              <a:rPr lang="en-US" dirty="0"/>
-              <a:t/>
-            </a:r>
             <a:endParaRPr lang="en-US" dirty="0"/>
           </a:p>
         </p:txBody>
@@ -2909,10 +2582,6 @@
           <a:bodyPr/>
           <a:lstStyle/>
           <a:p>
-            <a:r>
-              <a:rPr lang="en-US" dirty="0"/>
-              <a:t/>
-            </a:r>
             <a:endParaRPr lang="en-US" dirty="0"/>
           </a:p>
         </p:txBody>
@@ -2997,10 +2666,6 @@
           <a:bodyPr/>
           <a:lstStyle/>
           <a:p>
-            <a:r>
-              <a:rPr lang="en-US" dirty="0"/>
-              <a:t/>
-            </a:r>
             <a:endParaRPr lang="en-US" dirty="0"/>
           </a:p>
         </p:txBody>
@@ -3085,10 +2750,6 @@
           <a:bodyPr/>
           <a:lstStyle/>
           <a:p>
-            <a:r>
-              <a:rPr lang="en-US" dirty="0"/>
-              <a:t/>
-            </a:r>
             <a:endParaRPr lang="en-US" dirty="0"/>
           </a:p>
         </p:txBody>
@@ -3173,10 +2834,6 @@
           <a:bodyPr/>
           <a:lstStyle/>
           <a:p>
-            <a:r>
-              <a:rPr lang="en-US" dirty="0"/>
-              <a:t/>
-            </a:r>
             <a:endParaRPr lang="en-US" dirty="0"/>
           </a:p>
         </p:txBody>
@@ -3261,10 +2918,6 @@
           <a:bodyPr/>
           <a:lstStyle/>
           <a:p>
-            <a:r>
-              <a:rPr lang="en-US" dirty="0"/>
-              <a:t/>
-            </a:r>
             <a:endParaRPr lang="en-US" dirty="0"/>
           </a:p>
         </p:txBody>
@@ -3349,10 +3002,6 @@
           <a:bodyPr/>
           <a:lstStyle/>
           <a:p>
-            <a:r>
-              <a:rPr lang="en-US" dirty="0"/>
-              <a:t/>
-            </a:r>
             <a:endParaRPr lang="en-US" dirty="0"/>
           </a:p>
         </p:txBody>
@@ -3437,10 +3086,6 @@
           <a:bodyPr/>
           <a:lstStyle/>
           <a:p>
-            <a:r>
-              <a:rPr lang="en-US" dirty="0"/>
-              <a:t/>
-            </a:r>
             <a:endParaRPr lang="en-US" dirty="0"/>
           </a:p>
         </p:txBody>
@@ -3514,6 +3159,11 @@
 <file path=ppt/slideMasters/slideMaster1.xml><?xml version="1.0" encoding="utf-8"?>
 <p:sldMaster xmlns:a="http://schemas.openxmlformats.org/drawingml/2006/main" xmlns:r="http://schemas.openxmlformats.org/officeDocument/2006/relationships" xmlns:p="http://schemas.openxmlformats.org/presentationml/2006/main">
   <p:cSld>
+    <p:bg>
+      <p:bgRef idx="1001">
+        <a:schemeClr val="bg1"/>
+      </p:bgRef>
+    </p:bg>
     <p:spTree>
       <p:nvGrpSpPr>
         <p:cNvPr id="1" name=""/>
@@ -3796,6 +3446,7 @@
         <a:solidFill>
           <a:srgbClr val="0B3D56"/>
         </a:solidFill>
+        <a:effectLst/>
       </p:bgPr>
     </p:bg>
     <p:spTree>
@@ -3820,8 +3471,8 @@
         </p:nvSpPr>
         <p:spPr>
           <a:xfrm>
-            <a:off x="8778240" y="-2011680"/>
-            <a:ext cx="5943600" cy="5943600"/>
+            <a:off x="9605818" y="-2011679"/>
+            <a:ext cx="5116021" cy="4754879"/>
           </a:xfrm>
           <a:prstGeom prst="ellipse">
             <a:avLst/>
@@ -3852,9 +3503,159 @@
           <a:ln/>
         </p:spPr>
       </p:sp>
-      <p:sp>
-        <p:nvSpPr>
-          <p:cNvPr id="4" name="Text 2"/>
+      <p:pic>
+        <p:nvPicPr>
+          <p:cNvPr id="4" name="Image 0" descr="assets/logo_univ.jpeg"/>
+          <p:cNvPicPr>
+            <a:picLocks noChangeAspect="1"/>
+          </p:cNvPicPr>
+          <p:nvPr/>
+        </p:nvPicPr>
+        <p:blipFill>
+          <a:blip r:embed="rId3"/>
+          <a:stretch>
+            <a:fillRect/>
+          </a:stretch>
+        </p:blipFill>
+        <p:spPr>
+          <a:xfrm>
+            <a:off x="640080" y="411020"/>
+            <a:ext cx="1937170" cy="660399"/>
+          </a:xfrm>
+          <a:prstGeom prst="roundRect">
+            <a:avLst>
+              <a:gd name="adj" fmla="val 4167"/>
+            </a:avLst>
+          </a:prstGeom>
+          <a:solidFill>
+            <a:srgbClr val="FFFFFF"/>
+          </a:solidFill>
+          <a:ln w="76200" cap="sq">
+            <a:solidFill>
+              <a:srgbClr val="EAEAEA"/>
+            </a:solidFill>
+            <a:miter lim="800000"/>
+          </a:ln>
+          <a:effectLst>
+            <a:reflection blurRad="12700" stA="33000" endPos="28000" dist="5000" dir="5400000" sy="-100000" algn="bl" rotWithShape="0"/>
+          </a:effectLst>
+          <a:scene3d>
+            <a:camera prst="orthographicFront"/>
+            <a:lightRig rig="threePt" dir="t">
+              <a:rot lat="0" lon="0" rev="2700000"/>
+            </a:lightRig>
+          </a:scene3d>
+          <a:sp3d contourW="6350">
+            <a:bevelT h="38100"/>
+            <a:contourClr>
+              <a:srgbClr val="C0C0C0"/>
+            </a:contourClr>
+          </a:sp3d>
+        </p:spPr>
+      </p:pic>
+      <p:pic>
+        <p:nvPicPr>
+          <p:cNvPr id="5" name="Image 1" descr="assets/logo_cfa.png"/>
+          <p:cNvPicPr>
+            <a:picLocks noChangeAspect="1"/>
+          </p:cNvPicPr>
+          <p:nvPr/>
+        </p:nvPicPr>
+        <p:blipFill>
+          <a:blip r:embed="rId4"/>
+          <a:stretch>
+            <a:fillRect/>
+          </a:stretch>
+        </p:blipFill>
+        <p:spPr>
+          <a:xfrm>
+            <a:off x="3566159" y="621792"/>
+            <a:ext cx="1846349" cy="660399"/>
+          </a:xfrm>
+          <a:prstGeom prst="roundRect">
+            <a:avLst>
+              <a:gd name="adj" fmla="val 4167"/>
+            </a:avLst>
+          </a:prstGeom>
+          <a:solidFill>
+            <a:srgbClr val="FFFFFF"/>
+          </a:solidFill>
+          <a:ln w="76200" cap="sq">
+            <a:solidFill>
+              <a:srgbClr val="EAEAEA"/>
+            </a:solidFill>
+            <a:miter lim="800000"/>
+          </a:ln>
+          <a:effectLst>
+            <a:reflection blurRad="12700" stA="33000" endPos="28000" dist="5000" dir="5400000" sy="-100000" algn="bl" rotWithShape="0"/>
+          </a:effectLst>
+          <a:scene3d>
+            <a:camera prst="orthographicFront"/>
+            <a:lightRig rig="threePt" dir="t">
+              <a:rot lat="0" lon="0" rev="2700000"/>
+            </a:lightRig>
+          </a:scene3d>
+          <a:sp3d contourW="6350">
+            <a:bevelT h="38100"/>
+            <a:contourClr>
+              <a:srgbClr val="C0C0C0"/>
+            </a:contourClr>
+          </a:sp3d>
+        </p:spPr>
+      </p:pic>
+      <p:pic>
+        <p:nvPicPr>
+          <p:cNvPr id="6" name="Image 2" descr="assets/logo_isoar.jpeg"/>
+          <p:cNvPicPr>
+            <a:picLocks noChangeAspect="1"/>
+          </p:cNvPicPr>
+          <p:nvPr/>
+        </p:nvPicPr>
+        <p:blipFill>
+          <a:blip r:embed="rId5"/>
+          <a:stretch>
+            <a:fillRect/>
+          </a:stretch>
+        </p:blipFill>
+        <p:spPr>
+          <a:xfrm>
+            <a:off x="6407960" y="468744"/>
+            <a:ext cx="1714498" cy="685799"/>
+          </a:xfrm>
+          <a:prstGeom prst="roundRect">
+            <a:avLst>
+              <a:gd name="adj" fmla="val 4167"/>
+            </a:avLst>
+          </a:prstGeom>
+          <a:solidFill>
+            <a:srgbClr val="FFFFFF"/>
+          </a:solidFill>
+          <a:ln w="76200" cap="sq">
+            <a:solidFill>
+              <a:srgbClr val="EAEAEA"/>
+            </a:solidFill>
+            <a:miter lim="800000"/>
+          </a:ln>
+          <a:effectLst>
+            <a:reflection blurRad="12700" stA="33000" endPos="28000" dist="5000" dir="5400000" sy="-100000" algn="bl" rotWithShape="0"/>
+          </a:effectLst>
+          <a:scene3d>
+            <a:camera prst="orthographicFront"/>
+            <a:lightRig rig="threePt" dir="t">
+              <a:rot lat="0" lon="0" rev="2700000"/>
+            </a:lightRig>
+          </a:scene3d>
+          <a:sp3d contourW="6350">
+            <a:bevelT h="38100"/>
+            <a:contourClr>
+              <a:srgbClr val="C0C0C0"/>
+            </a:contourClr>
+          </a:sp3d>
+        </p:spPr>
+      </p:pic>
+      <p:sp>
+        <p:nvSpPr>
+          <p:cNvPr id="7" name="Text 2"/>
           <p:cNvSpPr/>
           <p:nvPr/>
         </p:nvSpPr>
@@ -3873,11 +3674,11 @@
           <a:bodyPr wrap="square" rtlCol="0" anchor="ctr"/>
           <a:lstStyle/>
           <a:p>
-            <a:pPr indent="0" marL="0">
+            <a:pPr marL="0" indent="0">
               <a:buNone/>
             </a:pPr>
             <a:r>
-              <a:rPr lang="en-US" sz="1400" b="1" spc="300" kern="0" dirty="0">
+              <a:rPr lang="en-US" sz="1400" b="1" kern="0" spc="300" dirty="0">
                 <a:solidFill>
                   <a:srgbClr val="E67E22"/>
                 </a:solidFill>
@@ -3893,7 +3694,7 @@
       </p:sp>
       <p:sp>
         <p:nvSpPr>
-          <p:cNvPr id="5" name="Text 3"/>
+          <p:cNvPr id="8" name="Text 3"/>
           <p:cNvSpPr/>
           <p:nvPr/>
         </p:nvSpPr>
@@ -3912,7 +3713,7 @@
           <a:bodyPr wrap="square" rtlCol="0" anchor="ctr"/>
           <a:lstStyle/>
           <a:p>
-            <a:pPr indent="0" marL="0">
+            <a:pPr marL="0" indent="0">
               <a:buNone/>
             </a:pPr>
             <a:r>
@@ -3932,7 +3733,7 @@
       </p:sp>
       <p:sp>
         <p:nvSpPr>
-          <p:cNvPr id="6" name="Text 4"/>
+          <p:cNvPr id="9" name="Text 4"/>
           <p:cNvSpPr/>
           <p:nvPr/>
         </p:nvSpPr>
@@ -3951,27 +3752,16 @@
           <a:bodyPr wrap="square" rtlCol="0" anchor="ctr"/>
           <a:lstStyle/>
           <a:p>
-            <a:pPr indent="0" marL="0">
+            <a:pPr marL="0" indent="0">
               <a:buNone/>
             </a:pPr>
-            <a:r>
-              <a:rPr lang="en-US" sz="1700" i="1" dirty="0">
-                <a:solidFill>
-                  <a:srgbClr val="CADCFC"/>
-                </a:solidFill>
-                <a:latin typeface="Calibri" pitchFamily="34" charset="0"/>
-                <a:ea typeface="Calibri" pitchFamily="34" charset="-122"/>
-                <a:cs typeface="Calibri" pitchFamily="34" charset="-120"/>
-              </a:rPr>
-              <a:t>Synthèse de l'activité en entreprise &amp; présentation du mémoire</a:t>
-            </a:r>
             <a:endParaRPr lang="en-US" sz="1700" dirty="0"/>
           </a:p>
         </p:txBody>
       </p:sp>
       <p:sp>
         <p:nvSpPr>
-          <p:cNvPr id="7" name="Shape 5"/>
+          <p:cNvPr id="10" name="Shape 5"/>
           <p:cNvSpPr/>
           <p:nvPr/>
         </p:nvSpPr>
@@ -3994,7 +3784,7 @@
       </p:sp>
       <p:sp>
         <p:nvSpPr>
-          <p:cNvPr id="8" name="Text 6"/>
+          <p:cNvPr id="11" name="Text 6"/>
           <p:cNvSpPr/>
           <p:nvPr/>
         </p:nvSpPr>
@@ -4013,14 +3803,14 @@
           <a:bodyPr wrap="square" rtlCol="0" anchor="ctr"/>
           <a:lstStyle/>
           <a:p>
-            <a:pPr indent="0" marL="0">
+            <a:pPr marL="0" indent="0">
               <a:lnSpc>
                 <a:spcPts val="2400"/>
               </a:lnSpc>
               <a:buNone/>
             </a:pPr>
             <a:r>
-              <a:rPr lang="en-US" sz="1400" b="1" dirty="0">
+              <a:rPr lang="en-US" b="1" dirty="0">
                 <a:solidFill>
                   <a:srgbClr val="CADCFC"/>
                 </a:solidFill>
@@ -4030,14 +3820,8 @@
               </a:rPr>
               <a:t>Réalisé par : </a:t>
             </a:r>
-            <a:pPr indent="0" marL="0">
-              <a:lnSpc>
-                <a:spcPts val="2400"/>
-              </a:lnSpc>
-              <a:buNone/>
-            </a:pPr>
-            <a:r>
-              <a:rPr lang="en-US" sz="1400" dirty="0">
+            <a:r>
+              <a:rPr lang="en-US" dirty="0">
                 <a:solidFill>
                   <a:srgbClr val="FFFFFF"/>
                 </a:solidFill>
@@ -4048,14 +3832,8 @@
               <a:t>Lamia BELKADI
 </a:t>
             </a:r>
-            <a:pPr indent="0" marL="0">
-              <a:lnSpc>
-                <a:spcPts val="2400"/>
-              </a:lnSpc>
-              <a:buNone/>
-            </a:pPr>
-            <a:r>
-              <a:rPr lang="en-US" sz="1400" b="1" dirty="0">
+            <a:r>
+              <a:rPr lang="en-US" b="1" dirty="0">
                 <a:solidFill>
                   <a:srgbClr val="CADCFC"/>
                 </a:solidFill>
@@ -4065,14 +3843,8 @@
               </a:rPr>
               <a:t>Tuteur pédagogique : </a:t>
             </a:r>
-            <a:pPr indent="0" marL="0">
-              <a:lnSpc>
-                <a:spcPts val="2400"/>
-              </a:lnSpc>
-              <a:buNone/>
-            </a:pPr>
-            <a:r>
-              <a:rPr lang="en-US" sz="1400" dirty="0">
+            <a:r>
+              <a:rPr lang="en-US" dirty="0">
                 <a:solidFill>
                   <a:srgbClr val="FFFFFF"/>
                 </a:solidFill>
@@ -4083,14 +3855,8 @@
               <a:t>M. Bachir DJAFRI
 </a:t>
             </a:r>
-            <a:pPr indent="0" marL="0">
-              <a:lnSpc>
-                <a:spcPts val="2400"/>
-              </a:lnSpc>
-              <a:buNone/>
-            </a:pPr>
-            <a:r>
-              <a:rPr lang="en-US" sz="1400" b="1" dirty="0">
+            <a:r>
+              <a:rPr lang="en-US" b="1" dirty="0">
                 <a:solidFill>
                   <a:srgbClr val="CADCFC"/>
                 </a:solidFill>
@@ -4100,14 +3866,8 @@
               </a:rPr>
               <a:t>Maître d'apprentissage : </a:t>
             </a:r>
-            <a:pPr indent="0" marL="0">
-              <a:lnSpc>
-                <a:spcPts val="2400"/>
-              </a:lnSpc>
-              <a:buNone/>
-            </a:pPr>
-            <a:r>
-              <a:rPr lang="en-US" sz="1400" dirty="0">
+            <a:r>
+              <a:rPr lang="en-US" dirty="0">
                 <a:solidFill>
                   <a:srgbClr val="FFFFFF"/>
                 </a:solidFill>
@@ -4118,14 +3878,8 @@
               <a:t>M. Anthony CORTEZ
 </a:t>
             </a:r>
-            <a:pPr indent="0" marL="0">
-              <a:lnSpc>
-                <a:spcPts val="2400"/>
-              </a:lnSpc>
-              <a:buNone/>
-            </a:pPr>
-            <a:r>
-              <a:rPr lang="en-US" sz="1400" b="1" dirty="0">
+            <a:r>
+              <a:rPr lang="en-US" b="1" dirty="0">
                 <a:solidFill>
                   <a:srgbClr val="CADCFC"/>
                 </a:solidFill>
@@ -4135,14 +3889,8 @@
               </a:rPr>
               <a:t>Entreprise d'accueil : </a:t>
             </a:r>
-            <a:pPr indent="0" marL="0">
-              <a:lnSpc>
-                <a:spcPts val="2400"/>
-              </a:lnSpc>
-              <a:buNone/>
-            </a:pPr>
-            <a:r>
-              <a:rPr lang="en-US" sz="1400" dirty="0">
+            <a:r>
+              <a:rPr lang="en-US" dirty="0">
                 <a:solidFill>
                   <a:srgbClr val="FFFFFF"/>
                 </a:solidFill>
@@ -4152,7 +3900,7 @@
               </a:rPr>
               <a:t>ISOAR — Année universitaire 2025/2026</a:t>
             </a:r>
-            <a:endParaRPr lang="en-US" sz="1400" dirty="0"/>
+            <a:endParaRPr lang="en-US" dirty="0"/>
           </a:p>
         </p:txBody>
       </p:sp>
@@ -4172,6 +3920,7 @@
         <a:solidFill>
           <a:srgbClr val="FFFFFF"/>
         </a:solidFill>
+        <a:effectLst/>
       </p:bgPr>
     </p:bg>
     <p:spTree>
@@ -4209,11 +3958,11 @@
           <a:bodyPr wrap="square" rtlCol="0" anchor="ctr"/>
           <a:lstStyle/>
           <a:p>
-            <a:pPr indent="0" marL="0">
+            <a:pPr marL="0" indent="0">
               <a:buNone/>
             </a:pPr>
             <a:r>
-              <a:rPr lang="en-US" sz="1200" b="1" spc="200" kern="0" dirty="0">
+              <a:rPr lang="en-US" sz="1200" b="1" kern="0" spc="200" dirty="0">
                 <a:solidFill>
                   <a:srgbClr val="E67E22"/>
                 </a:solidFill>
@@ -4248,7 +3997,7 @@
           <a:bodyPr wrap="square" rtlCol="0" anchor="ctr"/>
           <a:lstStyle/>
           <a:p>
-            <a:pPr algn="l" indent="0" marL="0">
+            <a:pPr marL="0" indent="0" algn="l">
               <a:buNone/>
             </a:pPr>
             <a:r>
@@ -4287,7 +4036,7 @@
           <a:bodyPr wrap="square" rtlCol="0" anchor="ctr"/>
           <a:lstStyle/>
           <a:p>
-            <a:pPr algn="r" indent="0" marL="0">
+            <a:pPr marL="0" indent="0" algn="r">
               <a:buNone/>
             </a:pPr>
             <a:r>
@@ -4411,7 +4160,7 @@
           </a:solidFill>
           <a:ln/>
           <a:effectLst>
-            <a:outerShdw sx="100000" sy="100000" kx="0" ky="0" algn="bl" rotWithShape="0" blurRad="76200" dist="25400" dir="5400000">
+            <a:outerShdw blurRad="76200" dist="25400" dir="5400000" algn="bl" rotWithShape="0">
               <a:srgbClr val="1A1A1A">
                 <a:alpha val="18000"/>
               </a:srgbClr>
@@ -4440,7 +4189,7 @@
           <a:bodyPr wrap="square" rtlCol="0" anchor="ctr"/>
           <a:lstStyle/>
           <a:p>
-            <a:pPr indent="0" marL="0">
+            <a:pPr marL="0" indent="0">
               <a:buNone/>
             </a:pPr>
             <a:r>
@@ -4479,7 +4228,7 @@
           </a:solidFill>
           <a:ln/>
           <a:effectLst>
-            <a:outerShdw sx="100000" sy="100000" kx="0" ky="0" algn="bl" rotWithShape="0" blurRad="76200" dist="25400" dir="5400000">
+            <a:outerShdw blurRad="76200" dist="25400" dir="5400000" algn="bl" rotWithShape="0">
               <a:srgbClr val="1A1A1A">
                 <a:alpha val="18000"/>
               </a:srgbClr>
@@ -4508,7 +4257,7 @@
           <a:bodyPr wrap="square" rtlCol="0" anchor="ctr"/>
           <a:lstStyle/>
           <a:p>
-            <a:pPr indent="0" marL="0">
+            <a:pPr marL="0" indent="0">
               <a:buNone/>
             </a:pPr>
             <a:r>
@@ -4547,7 +4296,7 @@
           <a:bodyPr wrap="square" rtlCol="0" anchor="ctr"/>
           <a:lstStyle/>
           <a:p>
-            <a:pPr indent="0" marL="0">
+            <a:pPr marL="0" indent="0">
               <a:buNone/>
             </a:pPr>
             <a:r>
@@ -4586,7 +4335,7 @@
           </a:solidFill>
           <a:ln/>
           <a:effectLst>
-            <a:outerShdw sx="100000" sy="100000" kx="0" ky="0" algn="bl" rotWithShape="0" blurRad="76200" dist="25400" dir="5400000">
+            <a:outerShdw blurRad="76200" dist="25400" dir="5400000" algn="bl" rotWithShape="0">
               <a:srgbClr val="1A1A1A">
                 <a:alpha val="18000"/>
               </a:srgbClr>
@@ -4615,7 +4364,7 @@
           <a:bodyPr wrap="square" rtlCol="0" anchor="ctr"/>
           <a:lstStyle/>
           <a:p>
-            <a:pPr indent="0" marL="0">
+            <a:pPr marL="0" indent="0">
               <a:buNone/>
             </a:pPr>
             <a:r>
@@ -4654,7 +4403,7 @@
           <a:bodyPr wrap="square" rtlCol="0" anchor="ctr"/>
           <a:lstStyle/>
           <a:p>
-            <a:pPr indent="0" marL="0">
+            <a:pPr marL="0" indent="0">
               <a:buNone/>
             </a:pPr>
             <a:r>
@@ -4693,7 +4442,7 @@
           </a:solidFill>
           <a:ln/>
           <a:effectLst>
-            <a:outerShdw sx="100000" sy="100000" kx="0" ky="0" algn="bl" rotWithShape="0" blurRad="76200" dist="25400" dir="5400000">
+            <a:outerShdw blurRad="76200" dist="25400" dir="5400000" algn="bl" rotWithShape="0">
               <a:srgbClr val="1A1A1A">
                 <a:alpha val="18000"/>
               </a:srgbClr>
@@ -4722,7 +4471,7 @@
           <a:bodyPr wrap="square" rtlCol="0" anchor="ctr"/>
           <a:lstStyle/>
           <a:p>
-            <a:pPr indent="0" marL="0">
+            <a:pPr marL="0" indent="0">
               <a:buNone/>
             </a:pPr>
             <a:r>
@@ -4761,7 +4510,7 @@
           <a:bodyPr wrap="square" rtlCol="0" anchor="ctr"/>
           <a:lstStyle/>
           <a:p>
-            <a:pPr indent="0" marL="0">
+            <a:pPr marL="0" indent="0">
               <a:buNone/>
             </a:pPr>
             <a:r>
@@ -4795,6 +4544,7 @@
         <a:solidFill>
           <a:srgbClr val="FFFFFF"/>
         </a:solidFill>
+        <a:effectLst/>
       </p:bgPr>
     </p:bg>
     <p:spTree>
@@ -4832,11 +4582,11 @@
           <a:bodyPr wrap="square" rtlCol="0" anchor="ctr"/>
           <a:lstStyle/>
           <a:p>
-            <a:pPr indent="0" marL="0">
+            <a:pPr marL="0" indent="0">
               <a:buNone/>
             </a:pPr>
             <a:r>
-              <a:rPr lang="en-US" sz="1200" b="1" spc="200" kern="0" dirty="0">
+              <a:rPr lang="en-US" sz="1200" b="1" kern="0" spc="200" dirty="0">
                 <a:solidFill>
                   <a:srgbClr val="E67E22"/>
                 </a:solidFill>
@@ -4871,7 +4621,7 @@
           <a:bodyPr wrap="square" rtlCol="0" anchor="ctr"/>
           <a:lstStyle/>
           <a:p>
-            <a:pPr algn="l" indent="0" marL="0">
+            <a:pPr marL="0" indent="0" algn="l">
               <a:buNone/>
             </a:pPr>
             <a:r>
@@ -4910,7 +4660,7 @@
           <a:bodyPr wrap="square" rtlCol="0" anchor="ctr"/>
           <a:lstStyle/>
           <a:p>
-            <a:pPr algn="r" indent="0" marL="0">
+            <a:pPr marL="0" indent="0" algn="r">
               <a:buNone/>
             </a:pPr>
             <a:r>
@@ -4949,7 +4699,7 @@
           <a:bodyPr wrap="square" rtlCol="0" anchor="ctr"/>
           <a:lstStyle/>
           <a:p>
-            <a:pPr indent="0" marL="0">
+            <a:pPr marL="0" indent="0">
               <a:buNone/>
             </a:pPr>
             <a:r>
@@ -4983,17 +4733,41 @@
         </p:nvGraphicFramePr>
         <p:xfrm>
           <a:off x="548640" y="2057400"/>
-          <a:ext cx="11109960" cy="914400"/>
+          <a:ext cx="11109960" cy="3566160"/>
         </p:xfrm>
         <a:graphic>
           <a:graphicData uri="http://schemas.openxmlformats.org/drawingml/2006/table">
             <a:tbl>
               <a:tblPr/>
               <a:tblGrid>
-                <a:gridCol w="2331720"/>
-                <a:gridCol w="3520440"/>
-                <a:gridCol w="2103120"/>
-                <a:gridCol w="3154680"/>
+                <a:gridCol w="2331720">
+                  <a:extLst>
+                    <a:ext uri="{9D8B030D-6E8A-4147-A177-3AD203B41FA5}">
+                      <a16:colId xmlns:a16="http://schemas.microsoft.com/office/drawing/2014/main" val="20000"/>
+                    </a:ext>
+                  </a:extLst>
+                </a:gridCol>
+                <a:gridCol w="3520440">
+                  <a:extLst>
+                    <a:ext uri="{9D8B030D-6E8A-4147-A177-3AD203B41FA5}">
+                      <a16:colId xmlns:a16="http://schemas.microsoft.com/office/drawing/2014/main" val="20001"/>
+                    </a:ext>
+                  </a:extLst>
+                </a:gridCol>
+                <a:gridCol w="2103120">
+                  <a:extLst>
+                    <a:ext uri="{9D8B030D-6E8A-4147-A177-3AD203B41FA5}">
+                      <a16:colId xmlns:a16="http://schemas.microsoft.com/office/drawing/2014/main" val="20002"/>
+                    </a:ext>
+                  </a:extLst>
+                </a:gridCol>
+                <a:gridCol w="3154680">
+                  <a:extLst>
+                    <a:ext uri="{9D8B030D-6E8A-4147-A177-3AD203B41FA5}">
+                      <a16:colId xmlns:a16="http://schemas.microsoft.com/office/drawing/2014/main" val="20003"/>
+                    </a:ext>
+                  </a:extLst>
+                </a:gridCol>
               </a:tblGrid>
               <a:tr h="713232">
                 <a:tc>
@@ -5001,7 +4775,7 @@
                     <a:bodyPr/>
                     <a:lstStyle/>
                     <a:p>
-                      <a:pPr algn="l" indent="0" marL="0">
+                      <a:pPr marL="0" indent="0" algn="l">
                         <a:buNone/>
                       </a:pPr>
                       <a:r>
@@ -5022,7 +4796,7 @@
                       </a:endParaRPr>
                     </a:p>
                   </a:txBody>
-                  <a:tcPr marL="91440" marR="91440" marT="45720" marB="45720" anchor="ctr">
+                  <a:tcPr anchor="ctr">
                     <a:lnL w="9525" cap="flat" cmpd="sng" algn="ctr">
                       <a:solidFill>
                         <a:srgbClr val="DDE3E6"/>
@@ -5069,7 +4843,7 @@
                     <a:bodyPr/>
                     <a:lstStyle/>
                     <a:p>
-                      <a:pPr algn="l" indent="0" marL="0">
+                      <a:pPr marL="0" indent="0" algn="l">
                         <a:buNone/>
                       </a:pPr>
                       <a:r>
@@ -5090,7 +4864,7 @@
                       </a:endParaRPr>
                     </a:p>
                   </a:txBody>
-                  <a:tcPr marL="91440" marR="91440" marT="45720" marB="45720" anchor="ctr">
+                  <a:tcPr anchor="ctr">
                     <a:lnL w="9525" cap="flat" cmpd="sng" algn="ctr">
                       <a:solidFill>
                         <a:srgbClr val="DDE3E6"/>
@@ -5137,7 +4911,7 @@
                     <a:bodyPr/>
                     <a:lstStyle/>
                     <a:p>
-                      <a:pPr algn="l" indent="0" marL="0">
+                      <a:pPr marL="0" indent="0" algn="l">
                         <a:buNone/>
                       </a:pPr>
                       <a:r>
@@ -5158,7 +4932,7 @@
                       </a:endParaRPr>
                     </a:p>
                   </a:txBody>
-                  <a:tcPr marL="91440" marR="91440" marT="45720" marB="45720" anchor="ctr">
+                  <a:tcPr anchor="ctr">
                     <a:lnL w="9525" cap="flat" cmpd="sng" algn="ctr">
                       <a:solidFill>
                         <a:srgbClr val="DDE3E6"/>
@@ -5205,7 +4979,7 @@
                     <a:bodyPr/>
                     <a:lstStyle/>
                     <a:p>
-                      <a:pPr algn="l" indent="0" marL="0">
+                      <a:pPr marL="0" indent="0" algn="l">
                         <a:buNone/>
                       </a:pPr>
                       <a:r>
@@ -5226,7 +5000,7 @@
                       </a:endParaRPr>
                     </a:p>
                   </a:txBody>
-                  <a:tcPr marL="91440" marR="91440" marT="45720" marB="45720" anchor="ctr">
+                  <a:tcPr anchor="ctr">
                     <a:lnL w="9525" cap="flat" cmpd="sng" algn="ctr">
                       <a:solidFill>
                         <a:srgbClr val="DDE3E6"/>
@@ -5268,6 +5042,11 @@
                     </a:solidFill>
                   </a:tcPr>
                 </a:tc>
+                <a:extLst>
+                  <a:ext uri="{0D108BD9-81ED-4DB2-BD59-A6C34878D82A}">
+                    <a16:rowId xmlns:a16="http://schemas.microsoft.com/office/drawing/2014/main" val="10000"/>
+                  </a:ext>
+                </a:extLst>
               </a:tr>
               <a:tr h="713232">
                 <a:tc>
@@ -5275,7 +5054,7 @@
                     <a:bodyPr/>
                     <a:lstStyle/>
                     <a:p>
-                      <a:pPr algn="l" indent="0" marL="0">
+                      <a:pPr marL="0" indent="0" algn="l">
                         <a:buNone/>
                       </a:pPr>
                       <a:r>
@@ -5296,7 +5075,7 @@
                       </a:endParaRPr>
                     </a:p>
                   </a:txBody>
-                  <a:tcPr marL="91440" marR="91440" marT="45720" marB="45720" anchor="ctr">
+                  <a:tcPr anchor="ctr">
                     <a:lnL w="9525" cap="flat" cmpd="sng" algn="ctr">
                       <a:solidFill>
                         <a:srgbClr val="DDE3E6"/>
@@ -5343,7 +5122,7 @@
                     <a:bodyPr/>
                     <a:lstStyle/>
                     <a:p>
-                      <a:pPr algn="l" indent="0" marL="0">
+                      <a:pPr marL="0" indent="0" algn="l">
                         <a:buNone/>
                       </a:pPr>
                       <a:r>
@@ -5364,7 +5143,7 @@
                       </a:endParaRPr>
                     </a:p>
                   </a:txBody>
-                  <a:tcPr marL="91440" marR="91440" marT="45720" marB="45720" anchor="ctr">
+                  <a:tcPr anchor="ctr">
                     <a:lnL w="9525" cap="flat" cmpd="sng" algn="ctr">
                       <a:solidFill>
                         <a:srgbClr val="DDE3E6"/>
@@ -5411,7 +5190,7 @@
                     <a:bodyPr/>
                     <a:lstStyle/>
                     <a:p>
-                      <a:pPr algn="l" indent="0" marL="0">
+                      <a:pPr marL="0" indent="0" algn="l">
                         <a:buNone/>
                       </a:pPr>
                       <a:r>
@@ -5432,7 +5211,7 @@
                       </a:endParaRPr>
                     </a:p>
                   </a:txBody>
-                  <a:tcPr marL="91440" marR="91440" marT="45720" marB="45720" anchor="ctr">
+                  <a:tcPr anchor="ctr">
                     <a:lnL w="9525" cap="flat" cmpd="sng" algn="ctr">
                       <a:solidFill>
                         <a:srgbClr val="DDE3E6"/>
@@ -5479,7 +5258,7 @@
                     <a:bodyPr/>
                     <a:lstStyle/>
                     <a:p>
-                      <a:pPr algn="l" indent="0" marL="0">
+                      <a:pPr marL="0" indent="0" algn="l">
                         <a:buNone/>
                       </a:pPr>
                       <a:r>
@@ -5500,7 +5279,7 @@
                       </a:endParaRPr>
                     </a:p>
                   </a:txBody>
-                  <a:tcPr marL="91440" marR="91440" marT="45720" marB="45720" anchor="ctr">
+                  <a:tcPr anchor="ctr">
                     <a:lnL w="9525" cap="flat" cmpd="sng" algn="ctr">
                       <a:solidFill>
                         <a:srgbClr val="DDE3E6"/>
@@ -5542,6 +5321,11 @@
                     </a:solidFill>
                   </a:tcPr>
                 </a:tc>
+                <a:extLst>
+                  <a:ext uri="{0D108BD9-81ED-4DB2-BD59-A6C34878D82A}">
+                    <a16:rowId xmlns:a16="http://schemas.microsoft.com/office/drawing/2014/main" val="10001"/>
+                  </a:ext>
+                </a:extLst>
               </a:tr>
               <a:tr h="713232">
                 <a:tc>
@@ -5549,7 +5333,7 @@
                     <a:bodyPr/>
                     <a:lstStyle/>
                     <a:p>
-                      <a:pPr algn="l" indent="0" marL="0">
+                      <a:pPr marL="0" indent="0" algn="l">
                         <a:buNone/>
                       </a:pPr>
                       <a:r>
@@ -5570,7 +5354,7 @@
                       </a:endParaRPr>
                     </a:p>
                   </a:txBody>
-                  <a:tcPr marL="91440" marR="91440" marT="45720" marB="45720" anchor="ctr">
+                  <a:tcPr anchor="ctr">
                     <a:lnL w="9525" cap="flat" cmpd="sng" algn="ctr">
                       <a:solidFill>
                         <a:srgbClr val="DDE3E6"/>
@@ -5617,7 +5401,7 @@
                     <a:bodyPr/>
                     <a:lstStyle/>
                     <a:p>
-                      <a:pPr algn="l" indent="0" marL="0">
+                      <a:pPr marL="0" indent="0" algn="l">
                         <a:buNone/>
                       </a:pPr>
                       <a:r>
@@ -5638,7 +5422,7 @@
                       </a:endParaRPr>
                     </a:p>
                   </a:txBody>
-                  <a:tcPr marL="91440" marR="91440" marT="45720" marB="45720" anchor="ctr">
+                  <a:tcPr anchor="ctr">
                     <a:lnL w="9525" cap="flat" cmpd="sng" algn="ctr">
                       <a:solidFill>
                         <a:srgbClr val="DDE3E6"/>
@@ -5685,7 +5469,7 @@
                     <a:bodyPr/>
                     <a:lstStyle/>
                     <a:p>
-                      <a:pPr algn="l" indent="0" marL="0">
+                      <a:pPr marL="0" indent="0" algn="l">
                         <a:buNone/>
                       </a:pPr>
                       <a:r>
@@ -5706,7 +5490,7 @@
                       </a:endParaRPr>
                     </a:p>
                   </a:txBody>
-                  <a:tcPr marL="91440" marR="91440" marT="45720" marB="45720" anchor="ctr">
+                  <a:tcPr anchor="ctr">
                     <a:lnL w="9525" cap="flat" cmpd="sng" algn="ctr">
                       <a:solidFill>
                         <a:srgbClr val="DDE3E6"/>
@@ -5753,7 +5537,7 @@
                     <a:bodyPr/>
                     <a:lstStyle/>
                     <a:p>
-                      <a:pPr algn="l" indent="0" marL="0">
+                      <a:pPr marL="0" indent="0" algn="l">
                         <a:buNone/>
                       </a:pPr>
                       <a:r>
@@ -5774,7 +5558,7 @@
                       </a:endParaRPr>
                     </a:p>
                   </a:txBody>
-                  <a:tcPr marL="91440" marR="91440" marT="45720" marB="45720" anchor="ctr">
+                  <a:tcPr anchor="ctr">
                     <a:lnL w="9525" cap="flat" cmpd="sng" algn="ctr">
                       <a:solidFill>
                         <a:srgbClr val="DDE3E6"/>
@@ -5816,6 +5600,11 @@
                     </a:solidFill>
                   </a:tcPr>
                 </a:tc>
+                <a:extLst>
+                  <a:ext uri="{0D108BD9-81ED-4DB2-BD59-A6C34878D82A}">
+                    <a16:rowId xmlns:a16="http://schemas.microsoft.com/office/drawing/2014/main" val="10002"/>
+                  </a:ext>
+                </a:extLst>
               </a:tr>
               <a:tr h="713232">
                 <a:tc>
@@ -5823,7 +5612,7 @@
                     <a:bodyPr/>
                     <a:lstStyle/>
                     <a:p>
-                      <a:pPr algn="l" indent="0" marL="0">
+                      <a:pPr marL="0" indent="0" algn="l">
                         <a:buNone/>
                       </a:pPr>
                       <a:r>
@@ -5844,7 +5633,7 @@
                       </a:endParaRPr>
                     </a:p>
                   </a:txBody>
-                  <a:tcPr marL="91440" marR="91440" marT="45720" marB="45720" anchor="ctr">
+                  <a:tcPr anchor="ctr">
                     <a:lnL w="9525" cap="flat" cmpd="sng" algn="ctr">
                       <a:solidFill>
                         <a:srgbClr val="DDE3E6"/>
@@ -5891,7 +5680,7 @@
                     <a:bodyPr/>
                     <a:lstStyle/>
                     <a:p>
-                      <a:pPr algn="l" indent="0" marL="0">
+                      <a:pPr marL="0" indent="0" algn="l">
                         <a:buNone/>
                       </a:pPr>
                       <a:r>
@@ -5912,7 +5701,7 @@
                       </a:endParaRPr>
                     </a:p>
                   </a:txBody>
-                  <a:tcPr marL="91440" marR="91440" marT="45720" marB="45720" anchor="ctr">
+                  <a:tcPr anchor="ctr">
                     <a:lnL w="9525" cap="flat" cmpd="sng" algn="ctr">
                       <a:solidFill>
                         <a:srgbClr val="DDE3E6"/>
@@ -5959,7 +5748,7 @@
                     <a:bodyPr/>
                     <a:lstStyle/>
                     <a:p>
-                      <a:pPr algn="l" indent="0" marL="0">
+                      <a:pPr marL="0" indent="0" algn="l">
                         <a:buNone/>
                       </a:pPr>
                       <a:r>
@@ -5980,7 +5769,7 @@
                       </a:endParaRPr>
                     </a:p>
                   </a:txBody>
-                  <a:tcPr marL="91440" marR="91440" marT="45720" marB="45720" anchor="ctr">
+                  <a:tcPr anchor="ctr">
                     <a:lnL w="9525" cap="flat" cmpd="sng" algn="ctr">
                       <a:solidFill>
                         <a:srgbClr val="DDE3E6"/>
@@ -6027,7 +5816,7 @@
                     <a:bodyPr/>
                     <a:lstStyle/>
                     <a:p>
-                      <a:pPr algn="l" indent="0" marL="0">
+                      <a:pPr marL="0" indent="0" algn="l">
                         <a:buNone/>
                       </a:pPr>
                       <a:r>
@@ -6048,7 +5837,7 @@
                       </a:endParaRPr>
                     </a:p>
                   </a:txBody>
-                  <a:tcPr marL="91440" marR="91440" marT="45720" marB="45720" anchor="ctr">
+                  <a:tcPr anchor="ctr">
                     <a:lnL w="9525" cap="flat" cmpd="sng" algn="ctr">
                       <a:solidFill>
                         <a:srgbClr val="DDE3E6"/>
@@ -6090,6 +5879,11 @@
                     </a:solidFill>
                   </a:tcPr>
                 </a:tc>
+                <a:extLst>
+                  <a:ext uri="{0D108BD9-81ED-4DB2-BD59-A6C34878D82A}">
+                    <a16:rowId xmlns:a16="http://schemas.microsoft.com/office/drawing/2014/main" val="10003"/>
+                  </a:ext>
+                </a:extLst>
               </a:tr>
               <a:tr h="713232">
                 <a:tc>
@@ -6097,7 +5891,7 @@
                     <a:bodyPr/>
                     <a:lstStyle/>
                     <a:p>
-                      <a:pPr algn="l" indent="0" marL="0">
+                      <a:pPr marL="0" indent="0" algn="l">
                         <a:buNone/>
                       </a:pPr>
                       <a:r>
@@ -6118,7 +5912,7 @@
                       </a:endParaRPr>
                     </a:p>
                   </a:txBody>
-                  <a:tcPr marL="91440" marR="91440" marT="45720" marB="45720" anchor="ctr">
+                  <a:tcPr anchor="ctr">
                     <a:lnL w="9525" cap="flat" cmpd="sng" algn="ctr">
                       <a:solidFill>
                         <a:srgbClr val="DDE3E6"/>
@@ -6165,7 +5959,7 @@
                     <a:bodyPr/>
                     <a:lstStyle/>
                     <a:p>
-                      <a:pPr algn="l" indent="0" marL="0">
+                      <a:pPr marL="0" indent="0" algn="l">
                         <a:buNone/>
                       </a:pPr>
                       <a:r>
@@ -6186,7 +5980,7 @@
                       </a:endParaRPr>
                     </a:p>
                   </a:txBody>
-                  <a:tcPr marL="91440" marR="91440" marT="45720" marB="45720" anchor="ctr">
+                  <a:tcPr anchor="ctr">
                     <a:lnL w="9525" cap="flat" cmpd="sng" algn="ctr">
                       <a:solidFill>
                         <a:srgbClr val="DDE3E6"/>
@@ -6233,7 +6027,7 @@
                     <a:bodyPr/>
                     <a:lstStyle/>
                     <a:p>
-                      <a:pPr algn="l" indent="0" marL="0">
+                      <a:pPr marL="0" indent="0" algn="l">
                         <a:buNone/>
                       </a:pPr>
                       <a:r>
@@ -6254,7 +6048,7 @@
                       </a:endParaRPr>
                     </a:p>
                   </a:txBody>
-                  <a:tcPr marL="91440" marR="91440" marT="45720" marB="45720" anchor="ctr">
+                  <a:tcPr anchor="ctr">
                     <a:lnL w="9525" cap="flat" cmpd="sng" algn="ctr">
                       <a:solidFill>
                         <a:srgbClr val="DDE3E6"/>
@@ -6301,7 +6095,7 @@
                     <a:bodyPr/>
                     <a:lstStyle/>
                     <a:p>
-                      <a:pPr algn="l" indent="0" marL="0">
+                      <a:pPr marL="0" indent="0" algn="l">
                         <a:buNone/>
                       </a:pPr>
                       <a:r>
@@ -6322,7 +6116,7 @@
                       </a:endParaRPr>
                     </a:p>
                   </a:txBody>
-                  <a:tcPr marL="91440" marR="91440" marT="45720" marB="45720" anchor="ctr">
+                  <a:tcPr anchor="ctr">
                     <a:lnL w="9525" cap="flat" cmpd="sng" algn="ctr">
                       <a:solidFill>
                         <a:srgbClr val="DDE3E6"/>
@@ -6364,6 +6158,11 @@
                     </a:solidFill>
                   </a:tcPr>
                 </a:tc>
+                <a:extLst>
+                  <a:ext uri="{0D108BD9-81ED-4DB2-BD59-A6C34878D82A}">
+                    <a16:rowId xmlns:a16="http://schemas.microsoft.com/office/drawing/2014/main" val="10004"/>
+                  </a:ext>
+                </a:extLst>
               </a:tr>
             </a:tbl>
           </a:graphicData>
@@ -6390,7 +6189,7 @@
           </a:solidFill>
           <a:ln/>
           <a:effectLst>
-            <a:outerShdw sx="100000" sy="100000" kx="0" ky="0" algn="bl" rotWithShape="0" blurRad="76200" dist="25400" dir="5400000">
+            <a:outerShdw blurRad="76200" dist="25400" dir="5400000" algn="bl" rotWithShape="0">
               <a:srgbClr val="1A1A1A">
                 <a:alpha val="18000"/>
               </a:srgbClr>
@@ -6419,7 +6218,7 @@
           <a:bodyPr wrap="square" rtlCol="0" anchor="ctr"/>
           <a:lstStyle/>
           <a:p>
-            <a:pPr indent="0" marL="0">
+            <a:pPr marL="0" indent="0">
               <a:buNone/>
             </a:pPr>
             <a:r>
@@ -6453,6 +6252,7 @@
         <a:solidFill>
           <a:srgbClr val="FFFFFF"/>
         </a:solidFill>
+        <a:effectLst/>
       </p:bgPr>
     </p:bg>
     <p:spTree>
@@ -6490,11 +6290,11 @@
           <a:bodyPr wrap="square" rtlCol="0" anchor="ctr"/>
           <a:lstStyle/>
           <a:p>
-            <a:pPr indent="0" marL="0">
+            <a:pPr marL="0" indent="0">
               <a:buNone/>
             </a:pPr>
             <a:r>
-              <a:rPr lang="en-US" sz="1200" b="1" spc="200" kern="0" dirty="0">
+              <a:rPr lang="en-US" sz="1200" b="1" kern="0" spc="200" dirty="0">
                 <a:solidFill>
                   <a:srgbClr val="E67E22"/>
                 </a:solidFill>
@@ -6529,7 +6329,7 @@
           <a:bodyPr wrap="square" rtlCol="0" anchor="ctr"/>
           <a:lstStyle/>
           <a:p>
-            <a:pPr algn="l" indent="0" marL="0">
+            <a:pPr marL="0" indent="0" algn="l">
               <a:buNone/>
             </a:pPr>
             <a:r>
@@ -6568,7 +6368,7 @@
           <a:bodyPr wrap="square" rtlCol="0" anchor="ctr"/>
           <a:lstStyle/>
           <a:p>
-            <a:pPr algn="r" indent="0" marL="0">
+            <a:pPr marL="0" indent="0" algn="r">
               <a:buNone/>
             </a:pPr>
             <a:r>
@@ -6607,7 +6407,7 @@
           </a:solidFill>
           <a:ln/>
           <a:effectLst>
-            <a:outerShdw sx="100000" sy="100000" kx="0" ky="0" algn="bl" rotWithShape="0" blurRad="76200" dist="25400" dir="5400000">
+            <a:outerShdw blurRad="76200" dist="25400" dir="5400000" algn="bl" rotWithShape="0">
               <a:srgbClr val="1A1A1A">
                 <a:alpha val="18000"/>
               </a:srgbClr>
@@ -6636,7 +6436,7 @@
           <a:bodyPr wrap="square" rtlCol="0" anchor="ctr"/>
           <a:lstStyle/>
           <a:p>
-            <a:pPr indent="0" marL="0">
+            <a:pPr marL="0" indent="0">
               <a:buNone/>
             </a:pPr>
             <a:r>
@@ -6760,7 +6560,7 @@
           </a:solidFill>
           <a:ln/>
           <a:effectLst>
-            <a:outerShdw sx="100000" sy="100000" kx="0" ky="0" algn="bl" rotWithShape="0" blurRad="76200" dist="25400" dir="5400000">
+            <a:outerShdw blurRad="76200" dist="25400" dir="5400000" algn="bl" rotWithShape="0">
               <a:srgbClr val="1A1A1A">
                 <a:alpha val="18000"/>
               </a:srgbClr>
@@ -6789,7 +6589,7 @@
           <a:bodyPr wrap="square" rtlCol="0" anchor="ctr"/>
           <a:lstStyle/>
           <a:p>
-            <a:pPr indent="0" marL="0">
+            <a:pPr marL="0" indent="0">
               <a:buNone/>
             </a:pPr>
             <a:r>
@@ -6957,7 +6757,7 @@
           <a:bodyPr wrap="square" rtlCol="0" anchor="ctr"/>
           <a:lstStyle/>
           <a:p>
-            <a:pPr algn="ctr" indent="0" marL="0">
+            <a:pPr marL="0" indent="0" algn="ctr">
               <a:buNone/>
             </a:pPr>
             <a:r>
@@ -6991,6 +6791,7 @@
         <a:solidFill>
           <a:srgbClr val="FFFFFF"/>
         </a:solidFill>
+        <a:effectLst/>
       </p:bgPr>
     </p:bg>
     <p:spTree>
@@ -7028,11 +6829,11 @@
           <a:bodyPr wrap="square" rtlCol="0" anchor="ctr"/>
           <a:lstStyle/>
           <a:p>
-            <a:pPr indent="0" marL="0">
+            <a:pPr marL="0" indent="0">
               <a:buNone/>
             </a:pPr>
             <a:r>
-              <a:rPr lang="en-US" sz="1200" b="1" spc="200" kern="0" dirty="0">
+              <a:rPr lang="en-US" sz="1200" b="1" kern="0" spc="200" dirty="0">
                 <a:solidFill>
                   <a:srgbClr val="E67E22"/>
                 </a:solidFill>
@@ -7067,7 +6868,7 @@
           <a:bodyPr wrap="square" rtlCol="0" anchor="ctr"/>
           <a:lstStyle/>
           <a:p>
-            <a:pPr algn="l" indent="0" marL="0">
+            <a:pPr marL="0" indent="0" algn="l">
               <a:buNone/>
             </a:pPr>
             <a:r>
@@ -7106,7 +6907,7 @@
           <a:bodyPr wrap="square" rtlCol="0" anchor="ctr"/>
           <a:lstStyle/>
           <a:p>
-            <a:pPr algn="r" indent="0" marL="0">
+            <a:pPr marL="0" indent="0" algn="r">
               <a:buNone/>
             </a:pPr>
             <a:r>
@@ -7140,18 +6941,48 @@
         </p:nvGraphicFramePr>
         <p:xfrm>
           <a:off x="822960" y="1965960"/>
-          <a:ext cx="10561320" cy="914400"/>
+          <a:ext cx="10561320" cy="3840480"/>
         </p:xfrm>
         <a:graphic>
           <a:graphicData uri="http://schemas.openxmlformats.org/drawingml/2006/table">
             <a:tbl>
               <a:tblPr/>
               <a:tblGrid>
-                <a:gridCol w="3566160"/>
-                <a:gridCol w="1737360"/>
-                <a:gridCol w="1737360"/>
-                <a:gridCol w="1737360"/>
-                <a:gridCol w="1783080"/>
+                <a:gridCol w="3566160">
+                  <a:extLst>
+                    <a:ext uri="{9D8B030D-6E8A-4147-A177-3AD203B41FA5}">
+                      <a16:colId xmlns:a16="http://schemas.microsoft.com/office/drawing/2014/main" val="20000"/>
+                    </a:ext>
+                  </a:extLst>
+                </a:gridCol>
+                <a:gridCol w="1737360">
+                  <a:extLst>
+                    <a:ext uri="{9D8B030D-6E8A-4147-A177-3AD203B41FA5}">
+                      <a16:colId xmlns:a16="http://schemas.microsoft.com/office/drawing/2014/main" val="20001"/>
+                    </a:ext>
+                  </a:extLst>
+                </a:gridCol>
+                <a:gridCol w="1737360">
+                  <a:extLst>
+                    <a:ext uri="{9D8B030D-6E8A-4147-A177-3AD203B41FA5}">
+                      <a16:colId xmlns:a16="http://schemas.microsoft.com/office/drawing/2014/main" val="20002"/>
+                    </a:ext>
+                  </a:extLst>
+                </a:gridCol>
+                <a:gridCol w="1737360">
+                  <a:extLst>
+                    <a:ext uri="{9D8B030D-6E8A-4147-A177-3AD203B41FA5}">
+                      <a16:colId xmlns:a16="http://schemas.microsoft.com/office/drawing/2014/main" val="20003"/>
+                    </a:ext>
+                  </a:extLst>
+                </a:gridCol>
+                <a:gridCol w="1783080">
+                  <a:extLst>
+                    <a:ext uri="{9D8B030D-6E8A-4147-A177-3AD203B41FA5}">
+                      <a16:colId xmlns:a16="http://schemas.microsoft.com/office/drawing/2014/main" val="20004"/>
+                    </a:ext>
+                  </a:extLst>
+                </a:gridCol>
               </a:tblGrid>
               <a:tr h="640080">
                 <a:tc>
@@ -7159,7 +6990,7 @@
                     <a:bodyPr/>
                     <a:lstStyle/>
                     <a:p>
-                      <a:pPr algn="ctr" indent="0" marL="0">
+                      <a:pPr marL="0" indent="0" algn="ctr">
                         <a:buNone/>
                       </a:pPr>
                       <a:r>
@@ -7180,7 +7011,7 @@
                       </a:endParaRPr>
                     </a:p>
                   </a:txBody>
-                  <a:tcPr marL="91440" marR="91440" marT="45720" marB="45720" anchor="ctr">
+                  <a:tcPr anchor="ctr">
                     <a:lnL w="9525" cap="flat" cmpd="sng" algn="ctr">
                       <a:solidFill>
                         <a:srgbClr val="DDE3E6"/>
@@ -7227,7 +7058,7 @@
                     <a:bodyPr/>
                     <a:lstStyle/>
                     <a:p>
-                      <a:pPr algn="ctr" indent="0" marL="0">
+                      <a:pPr marL="0" indent="0" algn="ctr">
                         <a:buNone/>
                       </a:pPr>
                       <a:r>
@@ -7248,7 +7079,7 @@
                       </a:endParaRPr>
                     </a:p>
                   </a:txBody>
-                  <a:tcPr marL="91440" marR="91440" marT="45720" marB="45720" anchor="ctr">
+                  <a:tcPr anchor="ctr">
                     <a:lnL w="9525" cap="flat" cmpd="sng" algn="ctr">
                       <a:solidFill>
                         <a:srgbClr val="DDE3E6"/>
@@ -7295,7 +7126,7 @@
                     <a:bodyPr/>
                     <a:lstStyle/>
                     <a:p>
-                      <a:pPr algn="ctr" indent="0" marL="0">
+                      <a:pPr marL="0" indent="0" algn="ctr">
                         <a:buNone/>
                       </a:pPr>
                       <a:r>
@@ -7316,7 +7147,7 @@
                       </a:endParaRPr>
                     </a:p>
                   </a:txBody>
-                  <a:tcPr marL="91440" marR="91440" marT="45720" marB="45720" anchor="ctr">
+                  <a:tcPr anchor="ctr">
                     <a:lnL w="9525" cap="flat" cmpd="sng" algn="ctr">
                       <a:solidFill>
                         <a:srgbClr val="DDE3E6"/>
@@ -7363,7 +7194,7 @@
                     <a:bodyPr/>
                     <a:lstStyle/>
                     <a:p>
-                      <a:pPr algn="ctr" indent="0" marL="0">
+                      <a:pPr marL="0" indent="0" algn="ctr">
                         <a:buNone/>
                       </a:pPr>
                       <a:r>
@@ -7384,7 +7215,7 @@
                       </a:endParaRPr>
                     </a:p>
                   </a:txBody>
-                  <a:tcPr marL="91440" marR="91440" marT="45720" marB="45720" anchor="ctr">
+                  <a:tcPr anchor="ctr">
                     <a:lnL w="9525" cap="flat" cmpd="sng" algn="ctr">
                       <a:solidFill>
                         <a:srgbClr val="DDE3E6"/>
@@ -7431,7 +7262,7 @@
                     <a:bodyPr/>
                     <a:lstStyle/>
                     <a:p>
-                      <a:pPr algn="ctr" indent="0" marL="0">
+                      <a:pPr marL="0" indent="0" algn="ctr">
                         <a:buNone/>
                       </a:pPr>
                       <a:r>
@@ -7452,7 +7283,7 @@
                       </a:endParaRPr>
                     </a:p>
                   </a:txBody>
-                  <a:tcPr marL="91440" marR="91440" marT="45720" marB="45720" anchor="ctr">
+                  <a:tcPr anchor="ctr">
                     <a:lnL w="9525" cap="flat" cmpd="sng" algn="ctr">
                       <a:solidFill>
                         <a:srgbClr val="DDE3E6"/>
@@ -7494,6 +7325,11 @@
                     </a:solidFill>
                   </a:tcPr>
                 </a:tc>
+                <a:extLst>
+                  <a:ext uri="{0D108BD9-81ED-4DB2-BD59-A6C34878D82A}">
+                    <a16:rowId xmlns:a16="http://schemas.microsoft.com/office/drawing/2014/main" val="10000"/>
+                  </a:ext>
+                </a:extLst>
               </a:tr>
               <a:tr h="640080">
                 <a:tc>
@@ -7501,7 +7337,7 @@
                     <a:bodyPr/>
                     <a:lstStyle/>
                     <a:p>
-                      <a:pPr algn="l" indent="0" marL="0">
+                      <a:pPr marL="0" indent="0" algn="l">
                         <a:buNone/>
                       </a:pPr>
                       <a:r>
@@ -7522,7 +7358,7 @@
                       </a:endParaRPr>
                     </a:p>
                   </a:txBody>
-                  <a:tcPr marL="91440" marR="91440" marT="45720" marB="45720" anchor="ctr">
+                  <a:tcPr anchor="ctr">
                     <a:lnL w="9525" cap="flat" cmpd="sng" algn="ctr">
                       <a:solidFill>
                         <a:srgbClr val="DDE3E6"/>
@@ -7569,7 +7405,7 @@
                     <a:bodyPr/>
                     <a:lstStyle/>
                     <a:p>
-                      <a:pPr algn="ctr" indent="0" marL="0">
+                      <a:pPr marL="0" indent="0" algn="ctr">
                         <a:buNone/>
                       </a:pPr>
                       <a:r>
@@ -7590,7 +7426,7 @@
                       </a:endParaRPr>
                     </a:p>
                   </a:txBody>
-                  <a:tcPr marL="91440" marR="91440" marT="45720" marB="45720" anchor="ctr">
+                  <a:tcPr anchor="ctr">
                     <a:lnL w="9525" cap="flat" cmpd="sng" algn="ctr">
                       <a:solidFill>
                         <a:srgbClr val="DDE3E6"/>
@@ -7637,7 +7473,7 @@
                     <a:bodyPr/>
                     <a:lstStyle/>
                     <a:p>
-                      <a:pPr algn="ctr" indent="0" marL="0">
+                      <a:pPr marL="0" indent="0" algn="ctr">
                         <a:buNone/>
                       </a:pPr>
                       <a:r>
@@ -7658,7 +7494,7 @@
                       </a:endParaRPr>
                     </a:p>
                   </a:txBody>
-                  <a:tcPr marL="91440" marR="91440" marT="45720" marB="45720" anchor="ctr">
+                  <a:tcPr anchor="ctr">
                     <a:lnL w="9525" cap="flat" cmpd="sng" algn="ctr">
                       <a:solidFill>
                         <a:srgbClr val="DDE3E6"/>
@@ -7705,7 +7541,7 @@
                     <a:bodyPr/>
                     <a:lstStyle/>
                     <a:p>
-                      <a:pPr algn="ctr" indent="0" marL="0">
+                      <a:pPr marL="0" indent="0" algn="ctr">
                         <a:buNone/>
                       </a:pPr>
                       <a:r>
@@ -7726,7 +7562,7 @@
                       </a:endParaRPr>
                     </a:p>
                   </a:txBody>
-                  <a:tcPr marL="91440" marR="91440" marT="45720" marB="45720" anchor="ctr">
+                  <a:tcPr anchor="ctr">
                     <a:lnL w="9525" cap="flat" cmpd="sng" algn="ctr">
                       <a:solidFill>
                         <a:srgbClr val="DDE3E6"/>
@@ -7773,7 +7609,7 @@
                     <a:bodyPr/>
                     <a:lstStyle/>
                     <a:p>
-                      <a:pPr algn="ctr" indent="0" marL="0">
+                      <a:pPr marL="0" indent="0" algn="ctr">
                         <a:buNone/>
                       </a:pPr>
                       <a:r>
@@ -7794,7 +7630,7 @@
                       </a:endParaRPr>
                     </a:p>
                   </a:txBody>
-                  <a:tcPr marL="91440" marR="91440" marT="45720" marB="45720" anchor="ctr">
+                  <a:tcPr anchor="ctr">
                     <a:lnL w="9525" cap="flat" cmpd="sng" algn="ctr">
                       <a:solidFill>
                         <a:srgbClr val="DDE3E6"/>
@@ -7836,6 +7672,11 @@
                     </a:solidFill>
                   </a:tcPr>
                 </a:tc>
+                <a:extLst>
+                  <a:ext uri="{0D108BD9-81ED-4DB2-BD59-A6C34878D82A}">
+                    <a16:rowId xmlns:a16="http://schemas.microsoft.com/office/drawing/2014/main" val="10001"/>
+                  </a:ext>
+                </a:extLst>
               </a:tr>
               <a:tr h="640080">
                 <a:tc>
@@ -7843,7 +7684,7 @@
                     <a:bodyPr/>
                     <a:lstStyle/>
                     <a:p>
-                      <a:pPr algn="l" indent="0" marL="0">
+                      <a:pPr marL="0" indent="0" algn="l">
                         <a:buNone/>
                       </a:pPr>
                       <a:r>
@@ -7864,7 +7705,7 @@
                       </a:endParaRPr>
                     </a:p>
                   </a:txBody>
-                  <a:tcPr marL="91440" marR="91440" marT="45720" marB="45720" anchor="ctr">
+                  <a:tcPr anchor="ctr">
                     <a:lnL w="9525" cap="flat" cmpd="sng" algn="ctr">
                       <a:solidFill>
                         <a:srgbClr val="DDE3E6"/>
@@ -7911,7 +7752,7 @@
                     <a:bodyPr/>
                     <a:lstStyle/>
                     <a:p>
-                      <a:pPr algn="ctr" indent="0" marL="0">
+                      <a:pPr marL="0" indent="0" algn="ctr">
                         <a:buNone/>
                       </a:pPr>
                       <a:r>
@@ -7932,7 +7773,7 @@
                       </a:endParaRPr>
                     </a:p>
                   </a:txBody>
-                  <a:tcPr marL="91440" marR="91440" marT="45720" marB="45720" anchor="ctr">
+                  <a:tcPr anchor="ctr">
                     <a:lnL w="9525" cap="flat" cmpd="sng" algn="ctr">
                       <a:solidFill>
                         <a:srgbClr val="DDE3E6"/>
@@ -7979,7 +7820,7 @@
                     <a:bodyPr/>
                     <a:lstStyle/>
                     <a:p>
-                      <a:pPr algn="ctr" indent="0" marL="0">
+                      <a:pPr marL="0" indent="0" algn="ctr">
                         <a:buNone/>
                       </a:pPr>
                       <a:r>
@@ -8000,7 +7841,7 @@
                       </a:endParaRPr>
                     </a:p>
                   </a:txBody>
-                  <a:tcPr marL="91440" marR="91440" marT="45720" marB="45720" anchor="ctr">
+                  <a:tcPr anchor="ctr">
                     <a:lnL w="9525" cap="flat" cmpd="sng" algn="ctr">
                       <a:solidFill>
                         <a:srgbClr val="DDE3E6"/>
@@ -8047,7 +7888,7 @@
                     <a:bodyPr/>
                     <a:lstStyle/>
                     <a:p>
-                      <a:pPr algn="ctr" indent="0" marL="0">
+                      <a:pPr marL="0" indent="0" algn="ctr">
                         <a:buNone/>
                       </a:pPr>
                       <a:r>
@@ -8068,7 +7909,7 @@
                       </a:endParaRPr>
                     </a:p>
                   </a:txBody>
-                  <a:tcPr marL="91440" marR="91440" marT="45720" marB="45720" anchor="ctr">
+                  <a:tcPr anchor="ctr">
                     <a:lnL w="9525" cap="flat" cmpd="sng" algn="ctr">
                       <a:solidFill>
                         <a:srgbClr val="DDE3E6"/>
@@ -8115,7 +7956,7 @@
                     <a:bodyPr/>
                     <a:lstStyle/>
                     <a:p>
-                      <a:pPr algn="ctr" indent="0" marL="0">
+                      <a:pPr marL="0" indent="0" algn="ctr">
                         <a:buNone/>
                       </a:pPr>
                       <a:r>
@@ -8136,7 +7977,7 @@
                       </a:endParaRPr>
                     </a:p>
                   </a:txBody>
-                  <a:tcPr marL="91440" marR="91440" marT="45720" marB="45720" anchor="ctr">
+                  <a:tcPr anchor="ctr">
                     <a:lnL w="9525" cap="flat" cmpd="sng" algn="ctr">
                       <a:solidFill>
                         <a:srgbClr val="DDE3E6"/>
@@ -8178,6 +8019,11 @@
                     </a:solidFill>
                   </a:tcPr>
                 </a:tc>
+                <a:extLst>
+                  <a:ext uri="{0D108BD9-81ED-4DB2-BD59-A6C34878D82A}">
+                    <a16:rowId xmlns:a16="http://schemas.microsoft.com/office/drawing/2014/main" val="10002"/>
+                  </a:ext>
+                </a:extLst>
               </a:tr>
               <a:tr h="640080">
                 <a:tc>
@@ -8185,7 +8031,7 @@
                     <a:bodyPr/>
                     <a:lstStyle/>
                     <a:p>
-                      <a:pPr algn="l" indent="0" marL="0">
+                      <a:pPr marL="0" indent="0" algn="l">
                         <a:buNone/>
                       </a:pPr>
                       <a:r>
@@ -8206,7 +8052,7 @@
                       </a:endParaRPr>
                     </a:p>
                   </a:txBody>
-                  <a:tcPr marL="91440" marR="91440" marT="45720" marB="45720" anchor="ctr">
+                  <a:tcPr anchor="ctr">
                     <a:lnL w="9525" cap="flat" cmpd="sng" algn="ctr">
                       <a:solidFill>
                         <a:srgbClr val="DDE3E6"/>
@@ -8253,7 +8099,7 @@
                     <a:bodyPr/>
                     <a:lstStyle/>
                     <a:p>
-                      <a:pPr algn="ctr" indent="0" marL="0">
+                      <a:pPr marL="0" indent="0" algn="ctr">
                         <a:buNone/>
                       </a:pPr>
                       <a:r>
@@ -8274,7 +8120,7 @@
                       </a:endParaRPr>
                     </a:p>
                   </a:txBody>
-                  <a:tcPr marL="91440" marR="91440" marT="45720" marB="45720" anchor="ctr">
+                  <a:tcPr anchor="ctr">
                     <a:lnL w="9525" cap="flat" cmpd="sng" algn="ctr">
                       <a:solidFill>
                         <a:srgbClr val="DDE3E6"/>
@@ -8321,7 +8167,7 @@
                     <a:bodyPr/>
                     <a:lstStyle/>
                     <a:p>
-                      <a:pPr algn="ctr" indent="0" marL="0">
+                      <a:pPr marL="0" indent="0" algn="ctr">
                         <a:buNone/>
                       </a:pPr>
                       <a:r>
@@ -8342,7 +8188,7 @@
                       </a:endParaRPr>
                     </a:p>
                   </a:txBody>
-                  <a:tcPr marL="91440" marR="91440" marT="45720" marB="45720" anchor="ctr">
+                  <a:tcPr anchor="ctr">
                     <a:lnL w="9525" cap="flat" cmpd="sng" algn="ctr">
                       <a:solidFill>
                         <a:srgbClr val="DDE3E6"/>
@@ -8389,7 +8235,7 @@
                     <a:bodyPr/>
                     <a:lstStyle/>
                     <a:p>
-                      <a:pPr algn="ctr" indent="0" marL="0">
+                      <a:pPr marL="0" indent="0" algn="ctr">
                         <a:buNone/>
                       </a:pPr>
                       <a:r>
@@ -8410,7 +8256,7 @@
                       </a:endParaRPr>
                     </a:p>
                   </a:txBody>
-                  <a:tcPr marL="91440" marR="91440" marT="45720" marB="45720" anchor="ctr">
+                  <a:tcPr anchor="ctr">
                     <a:lnL w="9525" cap="flat" cmpd="sng" algn="ctr">
                       <a:solidFill>
                         <a:srgbClr val="DDE3E6"/>
@@ -8457,7 +8303,7 @@
                     <a:bodyPr/>
                     <a:lstStyle/>
                     <a:p>
-                      <a:pPr algn="ctr" indent="0" marL="0">
+                      <a:pPr marL="0" indent="0" algn="ctr">
                         <a:buNone/>
                       </a:pPr>
                       <a:r>
@@ -8478,7 +8324,7 @@
                       </a:endParaRPr>
                     </a:p>
                   </a:txBody>
-                  <a:tcPr marL="91440" marR="91440" marT="45720" marB="45720" anchor="ctr">
+                  <a:tcPr anchor="ctr">
                     <a:lnL w="9525" cap="flat" cmpd="sng" algn="ctr">
                       <a:solidFill>
                         <a:srgbClr val="DDE3E6"/>
@@ -8520,6 +8366,11 @@
                     </a:solidFill>
                   </a:tcPr>
                 </a:tc>
+                <a:extLst>
+                  <a:ext uri="{0D108BD9-81ED-4DB2-BD59-A6C34878D82A}">
+                    <a16:rowId xmlns:a16="http://schemas.microsoft.com/office/drawing/2014/main" val="10003"/>
+                  </a:ext>
+                </a:extLst>
               </a:tr>
               <a:tr h="640080">
                 <a:tc>
@@ -8527,7 +8378,7 @@
                     <a:bodyPr/>
                     <a:lstStyle/>
                     <a:p>
-                      <a:pPr algn="l" indent="0" marL="0">
+                      <a:pPr marL="0" indent="0" algn="l">
                         <a:buNone/>
                       </a:pPr>
                       <a:r>
@@ -8548,7 +8399,7 @@
                       </a:endParaRPr>
                     </a:p>
                   </a:txBody>
-                  <a:tcPr marL="91440" marR="91440" marT="45720" marB="45720" anchor="ctr">
+                  <a:tcPr anchor="ctr">
                     <a:lnL w="9525" cap="flat" cmpd="sng" algn="ctr">
                       <a:solidFill>
                         <a:srgbClr val="DDE3E6"/>
@@ -8595,7 +8446,7 @@
                     <a:bodyPr/>
                     <a:lstStyle/>
                     <a:p>
-                      <a:pPr algn="ctr" indent="0" marL="0">
+                      <a:pPr marL="0" indent="0" algn="ctr">
                         <a:buNone/>
                       </a:pPr>
                       <a:r>
@@ -8616,7 +8467,7 @@
                       </a:endParaRPr>
                     </a:p>
                   </a:txBody>
-                  <a:tcPr marL="91440" marR="91440" marT="45720" marB="45720" anchor="ctr">
+                  <a:tcPr anchor="ctr">
                     <a:lnL w="9525" cap="flat" cmpd="sng" algn="ctr">
                       <a:solidFill>
                         <a:srgbClr val="DDE3E6"/>
@@ -8663,7 +8514,7 @@
                     <a:bodyPr/>
                     <a:lstStyle/>
                     <a:p>
-                      <a:pPr algn="ctr" indent="0" marL="0">
+                      <a:pPr marL="0" indent="0" algn="ctr">
                         <a:buNone/>
                       </a:pPr>
                       <a:r>
@@ -8684,7 +8535,7 @@
                       </a:endParaRPr>
                     </a:p>
                   </a:txBody>
-                  <a:tcPr marL="91440" marR="91440" marT="45720" marB="45720" anchor="ctr">
+                  <a:tcPr anchor="ctr">
                     <a:lnL w="9525" cap="flat" cmpd="sng" algn="ctr">
                       <a:solidFill>
                         <a:srgbClr val="DDE3E6"/>
@@ -8731,7 +8582,7 @@
                     <a:bodyPr/>
                     <a:lstStyle/>
                     <a:p>
-                      <a:pPr algn="ctr" indent="0" marL="0">
+                      <a:pPr marL="0" indent="0" algn="ctr">
                         <a:buNone/>
                       </a:pPr>
                       <a:r>
@@ -8752,7 +8603,7 @@
                       </a:endParaRPr>
                     </a:p>
                   </a:txBody>
-                  <a:tcPr marL="91440" marR="91440" marT="45720" marB="45720" anchor="ctr">
+                  <a:tcPr anchor="ctr">
                     <a:lnL w="9525" cap="flat" cmpd="sng" algn="ctr">
                       <a:solidFill>
                         <a:srgbClr val="DDE3E6"/>
@@ -8799,7 +8650,7 @@
                     <a:bodyPr/>
                     <a:lstStyle/>
                     <a:p>
-                      <a:pPr algn="ctr" indent="0" marL="0">
+                      <a:pPr marL="0" indent="0" algn="ctr">
                         <a:buNone/>
                       </a:pPr>
                       <a:r>
@@ -8820,7 +8671,7 @@
                       </a:endParaRPr>
                     </a:p>
                   </a:txBody>
-                  <a:tcPr marL="91440" marR="91440" marT="45720" marB="45720" anchor="ctr">
+                  <a:tcPr anchor="ctr">
                     <a:lnL w="9525" cap="flat" cmpd="sng" algn="ctr">
                       <a:solidFill>
                         <a:srgbClr val="DDE3E6"/>
@@ -8862,6 +8713,11 @@
                     </a:solidFill>
                   </a:tcPr>
                 </a:tc>
+                <a:extLst>
+                  <a:ext uri="{0D108BD9-81ED-4DB2-BD59-A6C34878D82A}">
+                    <a16:rowId xmlns:a16="http://schemas.microsoft.com/office/drawing/2014/main" val="10004"/>
+                  </a:ext>
+                </a:extLst>
               </a:tr>
               <a:tr h="640080">
                 <a:tc>
@@ -8869,7 +8725,7 @@
                     <a:bodyPr/>
                     <a:lstStyle/>
                     <a:p>
-                      <a:pPr algn="l" indent="0" marL="0">
+                      <a:pPr marL="0" indent="0" algn="l">
                         <a:buNone/>
                       </a:pPr>
                       <a:r>
@@ -8890,7 +8746,7 @@
                       </a:endParaRPr>
                     </a:p>
                   </a:txBody>
-                  <a:tcPr marL="91440" marR="91440" marT="45720" marB="45720" anchor="ctr">
+                  <a:tcPr anchor="ctr">
                     <a:lnL w="9525" cap="flat" cmpd="sng" algn="ctr">
                       <a:solidFill>
                         <a:srgbClr val="DDE3E6"/>
@@ -8937,7 +8793,7 @@
                     <a:bodyPr/>
                     <a:lstStyle/>
                     <a:p>
-                      <a:pPr algn="ctr" indent="0" marL="0">
+                      <a:pPr marL="0" indent="0" algn="ctr">
                         <a:buNone/>
                       </a:pPr>
                       <a:r>
@@ -8958,7 +8814,7 @@
                       </a:endParaRPr>
                     </a:p>
                   </a:txBody>
-                  <a:tcPr marL="91440" marR="91440" marT="45720" marB="45720" anchor="ctr">
+                  <a:tcPr anchor="ctr">
                     <a:lnL w="9525" cap="flat" cmpd="sng" algn="ctr">
                       <a:solidFill>
                         <a:srgbClr val="DDE3E6"/>
@@ -9005,7 +8861,7 @@
                     <a:bodyPr/>
                     <a:lstStyle/>
                     <a:p>
-                      <a:pPr algn="ctr" indent="0" marL="0">
+                      <a:pPr marL="0" indent="0" algn="ctr">
                         <a:buNone/>
                       </a:pPr>
                       <a:r>
@@ -9026,7 +8882,7 @@
                       </a:endParaRPr>
                     </a:p>
                   </a:txBody>
-                  <a:tcPr marL="91440" marR="91440" marT="45720" marB="45720" anchor="ctr">
+                  <a:tcPr anchor="ctr">
                     <a:lnL w="9525" cap="flat" cmpd="sng" algn="ctr">
                       <a:solidFill>
                         <a:srgbClr val="DDE3E6"/>
@@ -9073,7 +8929,7 @@
                     <a:bodyPr/>
                     <a:lstStyle/>
                     <a:p>
-                      <a:pPr algn="ctr" indent="0" marL="0">
+                      <a:pPr marL="0" indent="0" algn="ctr">
                         <a:buNone/>
                       </a:pPr>
                       <a:r>
@@ -9094,7 +8950,7 @@
                       </a:endParaRPr>
                     </a:p>
                   </a:txBody>
-                  <a:tcPr marL="91440" marR="91440" marT="45720" marB="45720" anchor="ctr">
+                  <a:tcPr anchor="ctr">
                     <a:lnL w="9525" cap="flat" cmpd="sng" algn="ctr">
                       <a:solidFill>
                         <a:srgbClr val="DDE3E6"/>
@@ -9141,7 +8997,7 @@
                     <a:bodyPr/>
                     <a:lstStyle/>
                     <a:p>
-                      <a:pPr algn="ctr" indent="0" marL="0">
+                      <a:pPr marL="0" indent="0" algn="ctr">
                         <a:buNone/>
                       </a:pPr>
                       <a:r>
@@ -9162,7 +9018,7 @@
                       </a:endParaRPr>
                     </a:p>
                   </a:txBody>
-                  <a:tcPr marL="91440" marR="91440" marT="45720" marB="45720" anchor="ctr">
+                  <a:tcPr anchor="ctr">
                     <a:lnL w="9525" cap="flat" cmpd="sng" algn="ctr">
                       <a:solidFill>
                         <a:srgbClr val="DDE3E6"/>
@@ -9204,6 +9060,11 @@
                     </a:solidFill>
                   </a:tcPr>
                 </a:tc>
+                <a:extLst>
+                  <a:ext uri="{0D108BD9-81ED-4DB2-BD59-A6C34878D82A}">
+                    <a16:rowId xmlns:a16="http://schemas.microsoft.com/office/drawing/2014/main" val="10005"/>
+                  </a:ext>
+                </a:extLst>
               </a:tr>
             </a:tbl>
           </a:graphicData>
@@ -9230,7 +9091,7 @@
           <a:bodyPr wrap="square" rtlCol="0" anchor="t"/>
           <a:lstStyle/>
           <a:p>
-            <a:pPr indent="0" marL="0">
+            <a:pPr marL="0" indent="0">
               <a:buNone/>
             </a:pPr>
             <a:r>
@@ -9264,6 +9125,7 @@
         <a:solidFill>
           <a:srgbClr val="FFFFFF"/>
         </a:solidFill>
+        <a:effectLst/>
       </p:bgPr>
     </p:bg>
     <p:spTree>
@@ -9301,11 +9163,11 @@
           <a:bodyPr wrap="square" rtlCol="0" anchor="ctr"/>
           <a:lstStyle/>
           <a:p>
-            <a:pPr indent="0" marL="0">
+            <a:pPr marL="0" indent="0">
               <a:buNone/>
             </a:pPr>
             <a:r>
-              <a:rPr lang="en-US" sz="1200" b="1" spc="200" kern="0" dirty="0">
+              <a:rPr lang="en-US" sz="1200" b="1" kern="0" spc="200" dirty="0">
                 <a:solidFill>
                   <a:srgbClr val="E67E22"/>
                 </a:solidFill>
@@ -9340,7 +9202,7 @@
           <a:bodyPr wrap="square" rtlCol="0" anchor="ctr"/>
           <a:lstStyle/>
           <a:p>
-            <a:pPr algn="l" indent="0" marL="0">
+            <a:pPr marL="0" indent="0" algn="l">
               <a:buNone/>
             </a:pPr>
             <a:r>
@@ -9379,7 +9241,7 @@
           <a:bodyPr wrap="square" rtlCol="0" anchor="ctr"/>
           <a:lstStyle/>
           <a:p>
-            <a:pPr algn="r" indent="0" marL="0">
+            <a:pPr marL="0" indent="0" algn="r">
               <a:buNone/>
             </a:pPr>
             <a:r>
@@ -9418,7 +9280,7 @@
           </a:solidFill>
           <a:ln/>
           <a:effectLst>
-            <a:outerShdw sx="100000" sy="100000" kx="0" ky="0" algn="bl" rotWithShape="0" blurRad="76200" dist="25400" dir="5400000">
+            <a:outerShdw blurRad="76200" dist="25400" dir="5400000" algn="bl" rotWithShape="0">
               <a:srgbClr val="1A1A1A">
                 <a:alpha val="18000"/>
               </a:srgbClr>
@@ -9447,7 +9309,7 @@
           <a:bodyPr wrap="square" rtlCol="0" anchor="ctr"/>
           <a:lstStyle/>
           <a:p>
-            <a:pPr algn="ctr" indent="0" marL="0">
+            <a:pPr marL="0" indent="0" algn="ctr">
               <a:buNone/>
             </a:pPr>
             <a:r>
@@ -9508,7 +9370,7 @@
           <a:bodyPr wrap="square" rtlCol="0" anchor="ctr"/>
           <a:lstStyle/>
           <a:p>
-            <a:pPr algn="ctr" indent="0" marL="0">
+            <a:pPr marL="0" indent="0" algn="ctr">
               <a:buNone/>
             </a:pPr>
             <a:r>
@@ -9547,7 +9409,7 @@
           <a:bodyPr wrap="square" rtlCol="0" anchor="ctr"/>
           <a:lstStyle/>
           <a:p>
-            <a:pPr indent="0" marL="0">
+            <a:pPr marL="0" indent="0">
               <a:buNone/>
             </a:pPr>
             <a:r>
@@ -9608,7 +9470,7 @@
           <a:bodyPr wrap="square" rtlCol="0" anchor="ctr"/>
           <a:lstStyle/>
           <a:p>
-            <a:pPr algn="ctr" indent="0" marL="0">
+            <a:pPr marL="0" indent="0" algn="ctr">
               <a:buNone/>
             </a:pPr>
             <a:r>
@@ -9647,7 +9509,7 @@
           <a:bodyPr wrap="square" rtlCol="0" anchor="ctr"/>
           <a:lstStyle/>
           <a:p>
-            <a:pPr indent="0" marL="0">
+            <a:pPr marL="0" indent="0">
               <a:buNone/>
             </a:pPr>
             <a:r>
@@ -9708,7 +9570,7 @@
           <a:bodyPr wrap="square" rtlCol="0" anchor="ctr"/>
           <a:lstStyle/>
           <a:p>
-            <a:pPr algn="ctr" indent="0" marL="0">
+            <a:pPr marL="0" indent="0" algn="ctr">
               <a:buNone/>
             </a:pPr>
             <a:r>
@@ -9747,7 +9609,7 @@
           <a:bodyPr wrap="square" rtlCol="0" anchor="ctr"/>
           <a:lstStyle/>
           <a:p>
-            <a:pPr indent="0" marL="0">
+            <a:pPr marL="0" indent="0">
               <a:buNone/>
             </a:pPr>
             <a:r>
@@ -9786,7 +9648,7 @@
           </a:solidFill>
           <a:ln/>
           <a:effectLst>
-            <a:outerShdw sx="100000" sy="100000" kx="0" ky="0" algn="bl" rotWithShape="0" blurRad="76200" dist="25400" dir="5400000">
+            <a:outerShdw blurRad="76200" dist="25400" dir="5400000" algn="bl" rotWithShape="0">
               <a:srgbClr val="1A1A1A">
                 <a:alpha val="18000"/>
               </a:srgbClr>
@@ -9815,7 +9677,7 @@
           <a:bodyPr wrap="square" rtlCol="0" anchor="ctr"/>
           <a:lstStyle/>
           <a:p>
-            <a:pPr indent="0" marL="0">
+            <a:pPr marL="0" indent="0">
               <a:buNone/>
             </a:pPr>
             <a:r>
@@ -9955,6 +9817,7 @@
         <a:solidFill>
           <a:srgbClr val="FFFFFF"/>
         </a:solidFill>
+        <a:effectLst/>
       </p:bgPr>
     </p:bg>
     <p:spTree>
@@ -9992,11 +9855,11 @@
           <a:bodyPr wrap="square" rtlCol="0" anchor="ctr"/>
           <a:lstStyle/>
           <a:p>
-            <a:pPr indent="0" marL="0">
+            <a:pPr marL="0" indent="0">
               <a:buNone/>
             </a:pPr>
             <a:r>
-              <a:rPr lang="en-US" sz="1200" b="1" spc="200" kern="0" dirty="0">
+              <a:rPr lang="en-US" sz="1200" b="1" kern="0" spc="200" dirty="0">
                 <a:solidFill>
                   <a:srgbClr val="E67E22"/>
                 </a:solidFill>
@@ -10031,7 +9894,7 @@
           <a:bodyPr wrap="square" rtlCol="0" anchor="ctr"/>
           <a:lstStyle/>
           <a:p>
-            <a:pPr algn="l" indent="0" marL="0">
+            <a:pPr marL="0" indent="0" algn="l">
               <a:buNone/>
             </a:pPr>
             <a:r>
@@ -10070,7 +9933,7 @@
           <a:bodyPr wrap="square" rtlCol="0" anchor="ctr"/>
           <a:lstStyle/>
           <a:p>
-            <a:pPr algn="r" indent="0" marL="0">
+            <a:pPr marL="0" indent="0" algn="r">
               <a:buNone/>
             </a:pPr>
             <a:r>
@@ -10109,7 +9972,7 @@
           </a:solidFill>
           <a:ln/>
           <a:effectLst>
-            <a:outerShdw sx="100000" sy="100000" kx="0" ky="0" algn="bl" rotWithShape="0" blurRad="76200" dist="25400" dir="5400000">
+            <a:outerShdw blurRad="76200" dist="25400" dir="5400000" algn="bl" rotWithShape="0">
               <a:srgbClr val="1A1A1A">
                 <a:alpha val="18000"/>
               </a:srgbClr>
@@ -10138,7 +10001,7 @@
           <a:bodyPr wrap="square" rtlCol="0" anchor="ctr"/>
           <a:lstStyle/>
           <a:p>
-            <a:pPr algn="ctr" indent="0" marL="0">
+            <a:pPr marL="0" indent="0" algn="ctr">
               <a:buNone/>
             </a:pPr>
             <a:r>
@@ -10177,7 +10040,7 @@
           </a:solidFill>
           <a:ln/>
           <a:effectLst>
-            <a:outerShdw sx="100000" sy="100000" kx="0" ky="0" algn="bl" rotWithShape="0" blurRad="76200" dist="25400" dir="5400000">
+            <a:outerShdw blurRad="76200" dist="25400" dir="5400000" algn="bl" rotWithShape="0">
               <a:srgbClr val="1A1A1A">
                 <a:alpha val="18000"/>
               </a:srgbClr>
@@ -10206,7 +10069,7 @@
           <a:bodyPr wrap="square" rtlCol="0" anchor="ctr"/>
           <a:lstStyle/>
           <a:p>
-            <a:pPr indent="0" marL="0">
+            <a:pPr marL="0" indent="0">
               <a:buNone/>
             </a:pPr>
             <a:r>
@@ -10245,7 +10108,7 @@
           <a:bodyPr wrap="square" rtlCol="0" anchor="t"/>
           <a:lstStyle/>
           <a:p>
-            <a:pPr indent="0" marL="0">
+            <a:pPr marL="0" indent="0">
               <a:lnSpc>
                 <a:spcPts val="1500"/>
               </a:lnSpc>
@@ -10287,7 +10150,7 @@
           </a:solidFill>
           <a:ln/>
           <a:effectLst>
-            <a:outerShdw sx="100000" sy="100000" kx="0" ky="0" algn="bl" rotWithShape="0" blurRad="76200" dist="25400" dir="5400000">
+            <a:outerShdw blurRad="76200" dist="25400" dir="5400000" algn="bl" rotWithShape="0">
               <a:srgbClr val="1A1A1A">
                 <a:alpha val="18000"/>
               </a:srgbClr>
@@ -10316,7 +10179,7 @@
           <a:bodyPr wrap="square" rtlCol="0" anchor="ctr"/>
           <a:lstStyle/>
           <a:p>
-            <a:pPr indent="0" marL="0">
+            <a:pPr marL="0" indent="0">
               <a:buNone/>
             </a:pPr>
             <a:r>
@@ -10355,7 +10218,7 @@
           <a:bodyPr wrap="square" rtlCol="0" anchor="t"/>
           <a:lstStyle/>
           <a:p>
-            <a:pPr indent="0" marL="0">
+            <a:pPr marL="0" indent="0">
               <a:lnSpc>
                 <a:spcPts val="1500"/>
               </a:lnSpc>
@@ -10397,7 +10260,7 @@
           </a:solidFill>
           <a:ln/>
           <a:effectLst>
-            <a:outerShdw sx="100000" sy="100000" kx="0" ky="0" algn="bl" rotWithShape="0" blurRad="76200" dist="25400" dir="5400000">
+            <a:outerShdw blurRad="76200" dist="25400" dir="5400000" algn="bl" rotWithShape="0">
               <a:srgbClr val="1A1A1A">
                 <a:alpha val="18000"/>
               </a:srgbClr>
@@ -10426,7 +10289,7 @@
           <a:bodyPr wrap="square" rtlCol="0" anchor="ctr"/>
           <a:lstStyle/>
           <a:p>
-            <a:pPr indent="0" marL="0">
+            <a:pPr marL="0" indent="0">
               <a:buNone/>
             </a:pPr>
             <a:r>
@@ -10465,7 +10328,7 @@
           <a:bodyPr wrap="square" rtlCol="0" anchor="t"/>
           <a:lstStyle/>
           <a:p>
-            <a:pPr indent="0" marL="0">
+            <a:pPr marL="0" indent="0">
               <a:lnSpc>
                 <a:spcPts val="1500"/>
               </a:lnSpc>
@@ -10507,7 +10370,7 @@
           <a:bodyPr wrap="square" rtlCol="0" anchor="ctr"/>
           <a:lstStyle/>
           <a:p>
-            <a:pPr algn="ctr" indent="0" marL="0">
+            <a:pPr marL="0" indent="0" algn="ctr">
               <a:buNone/>
             </a:pPr>
             <a:r>
@@ -10541,6 +10404,7 @@
         <a:solidFill>
           <a:srgbClr val="FFFFFF"/>
         </a:solidFill>
+        <a:effectLst/>
       </p:bgPr>
     </p:bg>
     <p:spTree>
@@ -10578,11 +10442,11 @@
           <a:bodyPr wrap="square" rtlCol="0" anchor="ctr"/>
           <a:lstStyle/>
           <a:p>
-            <a:pPr indent="0" marL="0">
+            <a:pPr marL="0" indent="0">
               <a:buNone/>
             </a:pPr>
             <a:r>
-              <a:rPr lang="en-US" sz="1200" b="1" spc="200" kern="0" dirty="0">
+              <a:rPr lang="en-US" sz="1200" b="1" kern="0" spc="200" dirty="0">
                 <a:solidFill>
                   <a:srgbClr val="E67E22"/>
                 </a:solidFill>
@@ -10617,7 +10481,7 @@
           <a:bodyPr wrap="square" rtlCol="0" anchor="ctr"/>
           <a:lstStyle/>
           <a:p>
-            <a:pPr algn="l" indent="0" marL="0">
+            <a:pPr marL="0" indent="0" algn="l">
               <a:buNone/>
             </a:pPr>
             <a:r>
@@ -10656,7 +10520,7 @@
           <a:bodyPr wrap="square" rtlCol="0" anchor="ctr"/>
           <a:lstStyle/>
           <a:p>
-            <a:pPr algn="r" indent="0" marL="0">
+            <a:pPr marL="0" indent="0" algn="r">
               <a:buNone/>
             </a:pPr>
             <a:r>
@@ -10695,7 +10559,7 @@
           <a:bodyPr wrap="square" rtlCol="0" anchor="ctr"/>
           <a:lstStyle/>
           <a:p>
-            <a:pPr indent="0" marL="0">
+            <a:pPr marL="0" indent="0">
               <a:buNone/>
             </a:pPr>
             <a:r>
@@ -10734,7 +10598,7 @@
           </a:solidFill>
           <a:ln/>
           <a:effectLst>
-            <a:outerShdw sx="100000" sy="100000" kx="0" ky="0" algn="bl" rotWithShape="0" blurRad="76200" dist="25400" dir="5400000">
+            <a:outerShdw blurRad="76200" dist="25400" dir="5400000" algn="bl" rotWithShape="0">
               <a:srgbClr val="1A1A1A">
                 <a:alpha val="18000"/>
               </a:srgbClr>
@@ -10783,7 +10647,7 @@
           <a:bodyPr wrap="square" rtlCol="0" anchor="ctr"/>
           <a:lstStyle/>
           <a:p>
-            <a:pPr algn="ctr" indent="0" marL="0">
+            <a:pPr marL="0" indent="0" algn="ctr">
               <a:buNone/>
             </a:pPr>
             <a:r>
@@ -10819,7 +10683,7 @@
           <a:bodyPr wrap="square" rtlCol="0" anchor="ctr"/>
           <a:lstStyle/>
           <a:p>
-            <a:pPr indent="0" marL="0">
+            <a:pPr marL="0" indent="0">
               <a:buNone/>
             </a:pPr>
             <a:r>
@@ -10858,7 +10722,7 @@
           <a:bodyPr wrap="square" rtlCol="0" anchor="t"/>
           <a:lstStyle/>
           <a:p>
-            <a:pPr indent="0" marL="0">
+            <a:pPr marL="0" indent="0">
               <a:lnSpc>
                 <a:spcPts val="1500"/>
               </a:lnSpc>
@@ -10900,7 +10764,7 @@
           </a:solidFill>
           <a:ln/>
           <a:effectLst>
-            <a:outerShdw sx="100000" sy="100000" kx="0" ky="0" algn="bl" rotWithShape="0" blurRad="76200" dist="25400" dir="5400000">
+            <a:outerShdw blurRad="76200" dist="25400" dir="5400000" algn="bl" rotWithShape="0">
               <a:srgbClr val="1A1A1A">
                 <a:alpha val="18000"/>
               </a:srgbClr>
@@ -10949,7 +10813,7 @@
           <a:bodyPr wrap="square" rtlCol="0" anchor="ctr"/>
           <a:lstStyle/>
           <a:p>
-            <a:pPr algn="ctr" indent="0" marL="0">
+            <a:pPr marL="0" indent="0" algn="ctr">
               <a:buNone/>
             </a:pPr>
             <a:r>
@@ -10985,7 +10849,7 @@
           <a:bodyPr wrap="square" rtlCol="0" anchor="ctr"/>
           <a:lstStyle/>
           <a:p>
-            <a:pPr indent="0" marL="0">
+            <a:pPr marL="0" indent="0">
               <a:buNone/>
             </a:pPr>
             <a:r>
@@ -11024,7 +10888,7 @@
           <a:bodyPr wrap="square" rtlCol="0" anchor="t"/>
           <a:lstStyle/>
           <a:p>
-            <a:pPr indent="0" marL="0">
+            <a:pPr marL="0" indent="0">
               <a:lnSpc>
                 <a:spcPts val="1500"/>
               </a:lnSpc>
@@ -11066,7 +10930,7 @@
           </a:solidFill>
           <a:ln/>
           <a:effectLst>
-            <a:outerShdw sx="100000" sy="100000" kx="0" ky="0" algn="bl" rotWithShape="0" blurRad="76200" dist="25400" dir="5400000">
+            <a:outerShdw blurRad="76200" dist="25400" dir="5400000" algn="bl" rotWithShape="0">
               <a:srgbClr val="1A1A1A">
                 <a:alpha val="18000"/>
               </a:srgbClr>
@@ -11115,7 +10979,7 @@
           <a:bodyPr wrap="square" rtlCol="0" anchor="ctr"/>
           <a:lstStyle/>
           <a:p>
-            <a:pPr algn="ctr" indent="0" marL="0">
+            <a:pPr marL="0" indent="0" algn="ctr">
               <a:buNone/>
             </a:pPr>
             <a:r>
@@ -11151,7 +11015,7 @@
           <a:bodyPr wrap="square" rtlCol="0" anchor="ctr"/>
           <a:lstStyle/>
           <a:p>
-            <a:pPr indent="0" marL="0">
+            <a:pPr marL="0" indent="0">
               <a:buNone/>
             </a:pPr>
             <a:r>
@@ -11190,7 +11054,7 @@
           <a:bodyPr wrap="square" rtlCol="0" anchor="t"/>
           <a:lstStyle/>
           <a:p>
-            <a:pPr indent="0" marL="0">
+            <a:pPr marL="0" indent="0">
               <a:lnSpc>
                 <a:spcPts val="1500"/>
               </a:lnSpc>
@@ -11227,6 +11091,7 @@
         <a:solidFill>
           <a:srgbClr val="FFFFFF"/>
         </a:solidFill>
+        <a:effectLst/>
       </p:bgPr>
     </p:bg>
     <p:spTree>
@@ -11264,11 +11129,11 @@
           <a:bodyPr wrap="square" rtlCol="0" anchor="ctr"/>
           <a:lstStyle/>
           <a:p>
-            <a:pPr indent="0" marL="0">
+            <a:pPr marL="0" indent="0">
               <a:buNone/>
             </a:pPr>
             <a:r>
-              <a:rPr lang="en-US" sz="1200" b="1" spc="200" kern="0" dirty="0">
+              <a:rPr lang="en-US" sz="1200" b="1" kern="0" spc="200" dirty="0">
                 <a:solidFill>
                   <a:srgbClr val="E67E22"/>
                 </a:solidFill>
@@ -11303,7 +11168,7 @@
           <a:bodyPr wrap="square" rtlCol="0" anchor="ctr"/>
           <a:lstStyle/>
           <a:p>
-            <a:pPr algn="l" indent="0" marL="0">
+            <a:pPr marL="0" indent="0" algn="l">
               <a:buNone/>
             </a:pPr>
             <a:r>
@@ -11342,7 +11207,7 @@
           <a:bodyPr wrap="square" rtlCol="0" anchor="ctr"/>
           <a:lstStyle/>
           <a:p>
-            <a:pPr algn="r" indent="0" marL="0">
+            <a:pPr marL="0" indent="0" algn="r">
               <a:buNone/>
             </a:pPr>
             <a:r>
@@ -11376,17 +11241,41 @@
         </p:nvGraphicFramePr>
         <p:xfrm>
           <a:off x="548640" y="1737360"/>
-          <a:ext cx="11109960" cy="914400"/>
+          <a:ext cx="11109960" cy="3108960"/>
         </p:xfrm>
         <a:graphic>
           <a:graphicData uri="http://schemas.openxmlformats.org/drawingml/2006/table">
             <a:tbl>
               <a:tblPr/>
               <a:tblGrid>
-                <a:gridCol w="2606040"/>
-                <a:gridCol w="4709160"/>
-                <a:gridCol w="1965960"/>
-                <a:gridCol w="1828800"/>
+                <a:gridCol w="2606040">
+                  <a:extLst>
+                    <a:ext uri="{9D8B030D-6E8A-4147-A177-3AD203B41FA5}">
+                      <a16:colId xmlns:a16="http://schemas.microsoft.com/office/drawing/2014/main" val="20000"/>
+                    </a:ext>
+                  </a:extLst>
+                </a:gridCol>
+                <a:gridCol w="4709160">
+                  <a:extLst>
+                    <a:ext uri="{9D8B030D-6E8A-4147-A177-3AD203B41FA5}">
+                      <a16:colId xmlns:a16="http://schemas.microsoft.com/office/drawing/2014/main" val="20001"/>
+                    </a:ext>
+                  </a:extLst>
+                </a:gridCol>
+                <a:gridCol w="1965960">
+                  <a:extLst>
+                    <a:ext uri="{9D8B030D-6E8A-4147-A177-3AD203B41FA5}">
+                      <a16:colId xmlns:a16="http://schemas.microsoft.com/office/drawing/2014/main" val="20002"/>
+                    </a:ext>
+                  </a:extLst>
+                </a:gridCol>
+                <a:gridCol w="1828800">
+                  <a:extLst>
+                    <a:ext uri="{9D8B030D-6E8A-4147-A177-3AD203B41FA5}">
+                      <a16:colId xmlns:a16="http://schemas.microsoft.com/office/drawing/2014/main" val="20003"/>
+                    </a:ext>
+                  </a:extLst>
+                </a:gridCol>
               </a:tblGrid>
               <a:tr h="777240">
                 <a:tc>
@@ -11394,7 +11283,7 @@
                     <a:bodyPr/>
                     <a:lstStyle/>
                     <a:p>
-                      <a:pPr algn="ctr" indent="0" marL="0">
+                      <a:pPr marL="0" indent="0" algn="ctr">
                         <a:buNone/>
                       </a:pPr>
                       <a:r>
@@ -11415,7 +11304,7 @@
                       </a:endParaRPr>
                     </a:p>
                   </a:txBody>
-                  <a:tcPr marL="91440" marR="91440" marT="45720" marB="45720" anchor="ctr">
+                  <a:tcPr anchor="ctr">
                     <a:lnL w="9525" cap="flat" cmpd="sng" algn="ctr">
                       <a:solidFill>
                         <a:srgbClr val="DDE3E6"/>
@@ -11462,7 +11351,7 @@
                     <a:bodyPr/>
                     <a:lstStyle/>
                     <a:p>
-                      <a:pPr algn="ctr" indent="0" marL="0">
+                      <a:pPr marL="0" indent="0" algn="ctr">
                         <a:buNone/>
                       </a:pPr>
                       <a:r>
@@ -11483,7 +11372,7 @@
                       </a:endParaRPr>
                     </a:p>
                   </a:txBody>
-                  <a:tcPr marL="91440" marR="91440" marT="45720" marB="45720" anchor="ctr">
+                  <a:tcPr anchor="ctr">
                     <a:lnL w="9525" cap="flat" cmpd="sng" algn="ctr">
                       <a:solidFill>
                         <a:srgbClr val="DDE3E6"/>
@@ -11530,7 +11419,7 @@
                     <a:bodyPr/>
                     <a:lstStyle/>
                     <a:p>
-                      <a:pPr algn="ctr" indent="0" marL="0">
+                      <a:pPr marL="0" indent="0" algn="ctr">
                         <a:buNone/>
                       </a:pPr>
                       <a:r>
@@ -11551,7 +11440,7 @@
                       </a:endParaRPr>
                     </a:p>
                   </a:txBody>
-                  <a:tcPr marL="91440" marR="91440" marT="45720" marB="45720" anchor="ctr">
+                  <a:tcPr anchor="ctr">
                     <a:lnL w="9525" cap="flat" cmpd="sng" algn="ctr">
                       <a:solidFill>
                         <a:srgbClr val="DDE3E6"/>
@@ -11598,7 +11487,7 @@
                     <a:bodyPr/>
                     <a:lstStyle/>
                     <a:p>
-                      <a:pPr algn="ctr" indent="0" marL="0">
+                      <a:pPr marL="0" indent="0" algn="ctr">
                         <a:buNone/>
                       </a:pPr>
                       <a:r>
@@ -11619,7 +11508,7 @@
                       </a:endParaRPr>
                     </a:p>
                   </a:txBody>
-                  <a:tcPr marL="91440" marR="91440" marT="45720" marB="45720" anchor="ctr">
+                  <a:tcPr anchor="ctr">
                     <a:lnL w="9525" cap="flat" cmpd="sng" algn="ctr">
                       <a:solidFill>
                         <a:srgbClr val="DDE3E6"/>
@@ -11661,6 +11550,11 @@
                     </a:solidFill>
                   </a:tcPr>
                 </a:tc>
+                <a:extLst>
+                  <a:ext uri="{0D108BD9-81ED-4DB2-BD59-A6C34878D82A}">
+                    <a16:rowId xmlns:a16="http://schemas.microsoft.com/office/drawing/2014/main" val="10000"/>
+                  </a:ext>
+                </a:extLst>
               </a:tr>
               <a:tr h="777240">
                 <a:tc>
@@ -11668,7 +11562,7 @@
                     <a:bodyPr/>
                     <a:lstStyle/>
                     <a:p>
-                      <a:pPr algn="l" indent="0" marL="0">
+                      <a:pPr marL="0" indent="0" algn="l">
                         <a:buNone/>
                       </a:pPr>
                       <a:r>
@@ -11689,7 +11583,7 @@
                       </a:endParaRPr>
                     </a:p>
                   </a:txBody>
-                  <a:tcPr marL="91440" marR="91440" marT="45720" marB="45720" anchor="ctr">
+                  <a:tcPr anchor="ctr">
                     <a:lnL w="9525" cap="flat" cmpd="sng" algn="ctr">
                       <a:solidFill>
                         <a:srgbClr val="DDE3E6"/>
@@ -11736,7 +11630,7 @@
                     <a:bodyPr/>
                     <a:lstStyle/>
                     <a:p>
-                      <a:pPr algn="ctr" indent="0" marL="0">
+                      <a:pPr marL="0" indent="0" algn="ctr">
                         <a:buNone/>
                       </a:pPr>
                       <a:r>
@@ -11757,7 +11651,7 @@
                       </a:endParaRPr>
                     </a:p>
                   </a:txBody>
-                  <a:tcPr marL="91440" marR="91440" marT="45720" marB="45720" anchor="ctr">
+                  <a:tcPr anchor="ctr">
                     <a:lnL w="9525" cap="flat" cmpd="sng" algn="ctr">
                       <a:solidFill>
                         <a:srgbClr val="DDE3E6"/>
@@ -11804,7 +11698,7 @@
                     <a:bodyPr/>
                     <a:lstStyle/>
                     <a:p>
-                      <a:pPr algn="ctr" indent="0" marL="0">
+                      <a:pPr marL="0" indent="0" algn="ctr">
                         <a:buNone/>
                       </a:pPr>
                       <a:r>
@@ -11825,7 +11719,7 @@
                       </a:endParaRPr>
                     </a:p>
                   </a:txBody>
-                  <a:tcPr marL="91440" marR="91440" marT="45720" marB="45720" anchor="ctr">
+                  <a:tcPr anchor="ctr">
                     <a:lnL w="9525" cap="flat" cmpd="sng" algn="ctr">
                       <a:solidFill>
                         <a:srgbClr val="DDE3E6"/>
@@ -11872,7 +11766,7 @@
                     <a:bodyPr/>
                     <a:lstStyle/>
                     <a:p>
-                      <a:pPr algn="ctr" indent="0" marL="0">
+                      <a:pPr marL="0" indent="0" algn="ctr">
                         <a:buNone/>
                       </a:pPr>
                       <a:r>
@@ -11893,7 +11787,7 @@
                       </a:endParaRPr>
                     </a:p>
                   </a:txBody>
-                  <a:tcPr marL="91440" marR="91440" marT="45720" marB="45720" anchor="ctr">
+                  <a:tcPr anchor="ctr">
                     <a:lnL w="9525" cap="flat" cmpd="sng" algn="ctr">
                       <a:solidFill>
                         <a:srgbClr val="DDE3E6"/>
@@ -11935,6 +11829,11 @@
                     </a:solidFill>
                   </a:tcPr>
                 </a:tc>
+                <a:extLst>
+                  <a:ext uri="{0D108BD9-81ED-4DB2-BD59-A6C34878D82A}">
+                    <a16:rowId xmlns:a16="http://schemas.microsoft.com/office/drawing/2014/main" val="10001"/>
+                  </a:ext>
+                </a:extLst>
               </a:tr>
               <a:tr h="777240">
                 <a:tc>
@@ -11942,7 +11841,7 @@
                     <a:bodyPr/>
                     <a:lstStyle/>
                     <a:p>
-                      <a:pPr algn="l" indent="0" marL="0">
+                      <a:pPr marL="0" indent="0" algn="l">
                         <a:buNone/>
                       </a:pPr>
                       <a:r>
@@ -11963,7 +11862,7 @@
                       </a:endParaRPr>
                     </a:p>
                   </a:txBody>
-                  <a:tcPr marL="91440" marR="91440" marT="45720" marB="45720" anchor="ctr">
+                  <a:tcPr anchor="ctr">
                     <a:lnL w="9525" cap="flat" cmpd="sng" algn="ctr">
                       <a:solidFill>
                         <a:srgbClr val="DDE3E6"/>
@@ -12010,7 +11909,7 @@
                     <a:bodyPr/>
                     <a:lstStyle/>
                     <a:p>
-                      <a:pPr algn="ctr" indent="0" marL="0">
+                      <a:pPr marL="0" indent="0" algn="ctr">
                         <a:buNone/>
                       </a:pPr>
                       <a:r>
@@ -12031,7 +11930,7 @@
                       </a:endParaRPr>
                     </a:p>
                   </a:txBody>
-                  <a:tcPr marL="91440" marR="91440" marT="45720" marB="45720" anchor="ctr">
+                  <a:tcPr anchor="ctr">
                     <a:lnL w="9525" cap="flat" cmpd="sng" algn="ctr">
                       <a:solidFill>
                         <a:srgbClr val="DDE3E6"/>
@@ -12078,7 +11977,7 @@
                     <a:bodyPr/>
                     <a:lstStyle/>
                     <a:p>
-                      <a:pPr algn="ctr" indent="0" marL="0">
+                      <a:pPr marL="0" indent="0" algn="ctr">
                         <a:buNone/>
                       </a:pPr>
                       <a:r>
@@ -12099,7 +11998,7 @@
                       </a:endParaRPr>
                     </a:p>
                   </a:txBody>
-                  <a:tcPr marL="91440" marR="91440" marT="45720" marB="45720" anchor="ctr">
+                  <a:tcPr anchor="ctr">
                     <a:lnL w="9525" cap="flat" cmpd="sng" algn="ctr">
                       <a:solidFill>
                         <a:srgbClr val="DDE3E6"/>
@@ -12146,7 +12045,7 @@
                     <a:bodyPr/>
                     <a:lstStyle/>
                     <a:p>
-                      <a:pPr algn="ctr" indent="0" marL="0">
+                      <a:pPr marL="0" indent="0" algn="ctr">
                         <a:buNone/>
                       </a:pPr>
                       <a:r>
@@ -12167,7 +12066,7 @@
                       </a:endParaRPr>
                     </a:p>
                   </a:txBody>
-                  <a:tcPr marL="91440" marR="91440" marT="45720" marB="45720" anchor="ctr">
+                  <a:tcPr anchor="ctr">
                     <a:lnL w="9525" cap="flat" cmpd="sng" algn="ctr">
                       <a:solidFill>
                         <a:srgbClr val="DDE3E6"/>
@@ -12209,6 +12108,11 @@
                     </a:solidFill>
                   </a:tcPr>
                 </a:tc>
+                <a:extLst>
+                  <a:ext uri="{0D108BD9-81ED-4DB2-BD59-A6C34878D82A}">
+                    <a16:rowId xmlns:a16="http://schemas.microsoft.com/office/drawing/2014/main" val="10002"/>
+                  </a:ext>
+                </a:extLst>
               </a:tr>
               <a:tr h="777240">
                 <a:tc>
@@ -12216,7 +12120,7 @@
                     <a:bodyPr/>
                     <a:lstStyle/>
                     <a:p>
-                      <a:pPr algn="l" indent="0" marL="0">
+                      <a:pPr marL="0" indent="0" algn="l">
                         <a:buNone/>
                       </a:pPr>
                       <a:r>
@@ -12237,7 +12141,7 @@
                       </a:endParaRPr>
                     </a:p>
                   </a:txBody>
-                  <a:tcPr marL="91440" marR="91440" marT="45720" marB="45720" anchor="ctr">
+                  <a:tcPr anchor="ctr">
                     <a:lnL w="9525" cap="flat" cmpd="sng" algn="ctr">
                       <a:solidFill>
                         <a:srgbClr val="DDE3E6"/>
@@ -12284,7 +12188,7 @@
                     <a:bodyPr/>
                     <a:lstStyle/>
                     <a:p>
-                      <a:pPr algn="ctr" indent="0" marL="0">
+                      <a:pPr marL="0" indent="0" algn="ctr">
                         <a:buNone/>
                       </a:pPr>
                       <a:r>
@@ -12305,7 +12209,7 @@
                       </a:endParaRPr>
                     </a:p>
                   </a:txBody>
-                  <a:tcPr marL="91440" marR="91440" marT="45720" marB="45720" anchor="ctr">
+                  <a:tcPr anchor="ctr">
                     <a:lnL w="9525" cap="flat" cmpd="sng" algn="ctr">
                       <a:solidFill>
                         <a:srgbClr val="DDE3E6"/>
@@ -12352,7 +12256,7 @@
                     <a:bodyPr/>
                     <a:lstStyle/>
                     <a:p>
-                      <a:pPr algn="ctr" indent="0" marL="0">
+                      <a:pPr marL="0" indent="0" algn="ctr">
                         <a:buNone/>
                       </a:pPr>
                       <a:r>
@@ -12373,7 +12277,7 @@
                       </a:endParaRPr>
                     </a:p>
                   </a:txBody>
-                  <a:tcPr marL="91440" marR="91440" marT="45720" marB="45720" anchor="ctr">
+                  <a:tcPr anchor="ctr">
                     <a:lnL w="9525" cap="flat" cmpd="sng" algn="ctr">
                       <a:solidFill>
                         <a:srgbClr val="DDE3E6"/>
@@ -12420,7 +12324,7 @@
                     <a:bodyPr/>
                     <a:lstStyle/>
                     <a:p>
-                      <a:pPr algn="ctr" indent="0" marL="0">
+                      <a:pPr marL="0" indent="0" algn="ctr">
                         <a:buNone/>
                       </a:pPr>
                       <a:r>
@@ -12441,7 +12345,7 @@
                       </a:endParaRPr>
                     </a:p>
                   </a:txBody>
-                  <a:tcPr marL="91440" marR="91440" marT="45720" marB="45720" anchor="ctr">
+                  <a:tcPr anchor="ctr">
                     <a:lnL w="9525" cap="flat" cmpd="sng" algn="ctr">
                       <a:solidFill>
                         <a:srgbClr val="DDE3E6"/>
@@ -12483,6 +12387,11 @@
                     </a:solidFill>
                   </a:tcPr>
                 </a:tc>
+                <a:extLst>
+                  <a:ext uri="{0D108BD9-81ED-4DB2-BD59-A6C34878D82A}">
+                    <a16:rowId xmlns:a16="http://schemas.microsoft.com/office/drawing/2014/main" val="10003"/>
+                  </a:ext>
+                </a:extLst>
               </a:tr>
             </a:tbl>
           </a:graphicData>
@@ -12509,7 +12418,7 @@
           <a:bodyPr wrap="square" rtlCol="0" anchor="ctr"/>
           <a:lstStyle/>
           <a:p>
-            <a:pPr algn="ctr" indent="0" marL="0">
+            <a:pPr marL="0" indent="0" algn="ctr">
               <a:buNone/>
             </a:pPr>
             <a:r>
@@ -12548,7 +12457,7 @@
           </a:solidFill>
           <a:ln/>
           <a:effectLst>
-            <a:outerShdw sx="100000" sy="100000" kx="0" ky="0" algn="bl" rotWithShape="0" blurRad="76200" dist="25400" dir="5400000">
+            <a:outerShdw blurRad="76200" dist="25400" dir="5400000" algn="bl" rotWithShape="0">
               <a:srgbClr val="1A1A1A">
                 <a:alpha val="18000"/>
               </a:srgbClr>
@@ -12577,7 +12486,7 @@
           <a:bodyPr wrap="square" rtlCol="0" anchor="ctr"/>
           <a:lstStyle/>
           <a:p>
-            <a:pPr indent="0" marL="0">
+            <a:pPr marL="0" indent="0">
               <a:buNone/>
             </a:pPr>
             <a:r>
@@ -12611,6 +12520,7 @@
         <a:solidFill>
           <a:srgbClr val="FFFFFF"/>
         </a:solidFill>
+        <a:effectLst/>
       </p:bgPr>
     </p:bg>
     <p:spTree>
@@ -12648,11 +12558,11 @@
           <a:bodyPr wrap="square" rtlCol="0" anchor="ctr"/>
           <a:lstStyle/>
           <a:p>
-            <a:pPr indent="0" marL="0">
+            <a:pPr marL="0" indent="0">
               <a:buNone/>
             </a:pPr>
             <a:r>
-              <a:rPr lang="en-US" sz="1200" b="1" spc="200" kern="0" dirty="0">
+              <a:rPr lang="en-US" sz="1200" b="1" kern="0" spc="200" dirty="0">
                 <a:solidFill>
                   <a:srgbClr val="E67E22"/>
                 </a:solidFill>
@@ -12687,7 +12597,7 @@
           <a:bodyPr wrap="square" rtlCol="0" anchor="ctr"/>
           <a:lstStyle/>
           <a:p>
-            <a:pPr algn="l" indent="0" marL="0">
+            <a:pPr marL="0" indent="0" algn="l">
               <a:buNone/>
             </a:pPr>
             <a:r>
@@ -12726,7 +12636,7 @@
           <a:bodyPr wrap="square" rtlCol="0" anchor="ctr"/>
           <a:lstStyle/>
           <a:p>
-            <a:pPr algn="r" indent="0" marL="0">
+            <a:pPr marL="0" indent="0" algn="r">
               <a:buNone/>
             </a:pPr>
             <a:r>
@@ -12746,7 +12656,60 @@
       </p:sp>
       <p:sp>
         <p:nvSpPr>
-          <p:cNvPr id="5" name="Text 3"/>
+          <p:cNvPr id="5" name="Shape 3"/>
+          <p:cNvSpPr/>
+          <p:nvPr/>
+        </p:nvSpPr>
+        <p:spPr>
+          <a:xfrm>
+            <a:off x="3848483" y="1490472"/>
+            <a:ext cx="4464555" cy="5111496"/>
+          </a:xfrm>
+          <a:prstGeom prst="roundRect">
+            <a:avLst>
+              <a:gd name="adj" fmla="val 1639"/>
+            </a:avLst>
+          </a:prstGeom>
+          <a:solidFill>
+            <a:srgbClr val="FFFFFF"/>
+          </a:solidFill>
+          <a:ln/>
+          <a:effectLst>
+            <a:outerShdw blurRad="76200" dist="25400" dir="5400000" algn="bl" rotWithShape="0">
+              <a:srgbClr val="1A1A1A">
+                <a:alpha val="18000"/>
+              </a:srgbClr>
+            </a:outerShdw>
+          </a:effectLst>
+        </p:spPr>
+      </p:sp>
+      <p:pic>
+        <p:nvPicPr>
+          <p:cNvPr id="6" name="Image 0" descr="assets/decision_engine.png"/>
+          <p:cNvPicPr>
+            <a:picLocks noChangeAspect="1"/>
+          </p:cNvPicPr>
+          <p:nvPr/>
+        </p:nvPicPr>
+        <p:blipFill>
+          <a:blip r:embed="rId3"/>
+          <a:stretch>
+            <a:fillRect/>
+          </a:stretch>
+        </p:blipFill>
+        <p:spPr>
+          <a:xfrm>
+            <a:off x="3958211" y="1600200"/>
+            <a:ext cx="4245099" cy="4892040"/>
+          </a:xfrm>
+          <a:prstGeom prst="rect">
+            <a:avLst/>
+          </a:prstGeom>
+        </p:spPr>
+      </p:pic>
+      <p:sp>
+        <p:nvSpPr>
+          <p:cNvPr id="7" name="Text 4"/>
           <p:cNvSpPr/>
           <p:nvPr/>
         </p:nvSpPr>
@@ -12765,7 +12728,7 @@
           <a:bodyPr wrap="square" rtlCol="0" anchor="ctr"/>
           <a:lstStyle/>
           <a:p>
-            <a:pPr algn="r" indent="0" marL="0">
+            <a:pPr marL="0" indent="0" algn="r">
               <a:buNone/>
             </a:pPr>
             <a:r>
@@ -12785,7 +12748,7 @@
       </p:sp>
       <p:sp>
         <p:nvSpPr>
-          <p:cNvPr id="6" name="Text 4"/>
+          <p:cNvPr id="8" name="Text 5"/>
           <p:cNvSpPr/>
           <p:nvPr/>
         </p:nvSpPr>
@@ -12804,7 +12767,7 @@
           <a:bodyPr wrap="square" rtlCol="0" anchor="t"/>
           <a:lstStyle/>
           <a:p>
-            <a:pPr algn="r" marL="228600" indent="-228600">
+            <a:pPr marL="228600" indent="-228600" algn="r">
               <a:spcAft>
                 <a:spcPts val="1400"/>
               </a:spcAft>
@@ -12825,7 +12788,7 @@
             <a:endParaRPr lang="en-US" sz="1150" dirty="0"/>
           </a:p>
           <a:p>
-            <a:pPr algn="r" marL="228600" indent="-228600">
+            <a:pPr marL="228600" indent="-228600" algn="r">
               <a:spcAft>
                 <a:spcPts val="1400"/>
               </a:spcAft>
@@ -12846,7 +12809,7 @@
             <a:endParaRPr lang="en-US" sz="1150" dirty="0"/>
           </a:p>
           <a:p>
-            <a:pPr algn="r" marL="228600" indent="-228600">
+            <a:pPr marL="228600" indent="-228600" algn="r">
               <a:spcAft>
                 <a:spcPts val="1400"/>
               </a:spcAft>
@@ -12884,6 +12847,7 @@
         <a:solidFill>
           <a:srgbClr val="FFFFFF"/>
         </a:solidFill>
+        <a:effectLst/>
       </p:bgPr>
     </p:bg>
     <p:spTree>
@@ -12921,11 +12885,11 @@
           <a:bodyPr wrap="square" rtlCol="0" anchor="ctr"/>
           <a:lstStyle/>
           <a:p>
-            <a:pPr indent="0" marL="0">
+            <a:pPr marL="0" indent="0">
               <a:buNone/>
             </a:pPr>
             <a:r>
-              <a:rPr lang="en-US" sz="1200" b="1" spc="200" kern="0" dirty="0">
+              <a:rPr lang="en-US" sz="1200" b="1" kern="0" spc="200" dirty="0">
                 <a:solidFill>
                   <a:srgbClr val="E67E22"/>
                 </a:solidFill>
@@ -12960,7 +12924,7 @@
           <a:bodyPr wrap="square" rtlCol="0" anchor="ctr"/>
           <a:lstStyle/>
           <a:p>
-            <a:pPr algn="l" indent="0" marL="0">
+            <a:pPr marL="0" indent="0" algn="l">
               <a:buNone/>
             </a:pPr>
             <a:r>
@@ -12999,7 +12963,7 @@
           <a:bodyPr wrap="square" rtlCol="0" anchor="ctr"/>
           <a:lstStyle/>
           <a:p>
-            <a:pPr algn="r" indent="0" marL="0">
+            <a:pPr marL="0" indent="0" algn="r">
               <a:buNone/>
             </a:pPr>
             <a:r>
@@ -13038,7 +13002,7 @@
           </a:solidFill>
           <a:ln/>
           <a:effectLst>
-            <a:outerShdw sx="100000" sy="100000" kx="0" ky="0" algn="bl" rotWithShape="0" blurRad="76200" dist="25400" dir="5400000">
+            <a:outerShdw blurRad="76200" dist="25400" dir="5400000" algn="bl" rotWithShape="0">
               <a:srgbClr val="1A1A1A">
                 <a:alpha val="18000"/>
               </a:srgbClr>
@@ -13087,7 +13051,7 @@
           <a:bodyPr wrap="square" rtlCol="0" anchor="ctr"/>
           <a:lstStyle/>
           <a:p>
-            <a:pPr algn="ctr" indent="0" marL="0">
+            <a:pPr marL="0" indent="0" algn="ctr">
               <a:buNone/>
             </a:pPr>
             <a:r>
@@ -13123,7 +13087,7 @@
           <a:bodyPr wrap="square" rtlCol="0" anchor="ctr"/>
           <a:lstStyle/>
           <a:p>
-            <a:pPr algn="ctr" indent="0" marL="0">
+            <a:pPr marL="0" indent="0" algn="ctr">
               <a:buNone/>
             </a:pPr>
             <a:r>
@@ -13162,7 +13126,7 @@
           <a:bodyPr wrap="square" rtlCol="0" anchor="t"/>
           <a:lstStyle/>
           <a:p>
-            <a:pPr indent="0" marL="0">
+            <a:pPr marL="0" indent="0">
               <a:lnSpc>
                 <a:spcPts val="1600"/>
               </a:lnSpc>
@@ -13204,7 +13168,7 @@
           </a:solidFill>
           <a:ln/>
           <a:effectLst>
-            <a:outerShdw sx="100000" sy="100000" kx="0" ky="0" algn="bl" rotWithShape="0" blurRad="76200" dist="25400" dir="5400000">
+            <a:outerShdw blurRad="76200" dist="25400" dir="5400000" algn="bl" rotWithShape="0">
               <a:srgbClr val="1A1A1A">
                 <a:alpha val="18000"/>
               </a:srgbClr>
@@ -13253,7 +13217,7 @@
           <a:bodyPr wrap="square" rtlCol="0" anchor="ctr"/>
           <a:lstStyle/>
           <a:p>
-            <a:pPr algn="ctr" indent="0" marL="0">
+            <a:pPr marL="0" indent="0" algn="ctr">
               <a:buNone/>
             </a:pPr>
             <a:r>
@@ -13289,7 +13253,7 @@
           <a:bodyPr wrap="square" rtlCol="0" anchor="ctr"/>
           <a:lstStyle/>
           <a:p>
-            <a:pPr algn="ctr" indent="0" marL="0">
+            <a:pPr marL="0" indent="0" algn="ctr">
               <a:buNone/>
             </a:pPr>
             <a:r>
@@ -13328,7 +13292,7 @@
           <a:bodyPr wrap="square" rtlCol="0" anchor="t"/>
           <a:lstStyle/>
           <a:p>
-            <a:pPr indent="0" marL="0">
+            <a:pPr marL="0" indent="0">
               <a:lnSpc>
                 <a:spcPts val="1600"/>
               </a:lnSpc>
@@ -13370,7 +13334,7 @@
           </a:solidFill>
           <a:ln/>
           <a:effectLst>
-            <a:outerShdw sx="100000" sy="100000" kx="0" ky="0" algn="bl" rotWithShape="0" blurRad="76200" dist="25400" dir="5400000">
+            <a:outerShdw blurRad="76200" dist="25400" dir="5400000" algn="bl" rotWithShape="0">
               <a:srgbClr val="1A1A1A">
                 <a:alpha val="18000"/>
               </a:srgbClr>
@@ -13419,7 +13383,7 @@
           <a:bodyPr wrap="square" rtlCol="0" anchor="ctr"/>
           <a:lstStyle/>
           <a:p>
-            <a:pPr algn="ctr" indent="0" marL="0">
+            <a:pPr marL="0" indent="0" algn="ctr">
               <a:buNone/>
             </a:pPr>
             <a:r>
@@ -13455,7 +13419,7 @@
           <a:bodyPr wrap="square" rtlCol="0" anchor="ctr"/>
           <a:lstStyle/>
           <a:p>
-            <a:pPr algn="ctr" indent="0" marL="0">
+            <a:pPr marL="0" indent="0" algn="ctr">
               <a:buNone/>
             </a:pPr>
             <a:r>
@@ -13494,7 +13458,7 @@
           <a:bodyPr wrap="square" rtlCol="0" anchor="t"/>
           <a:lstStyle/>
           <a:p>
-            <a:pPr indent="0" marL="0">
+            <a:pPr marL="0" indent="0">
               <a:lnSpc>
                 <a:spcPts val="1600"/>
               </a:lnSpc>
@@ -13531,6 +13495,7 @@
         <a:solidFill>
           <a:srgbClr val="FFFFFF"/>
         </a:solidFill>
+        <a:effectLst/>
       </p:bgPr>
     </p:bg>
     <p:spTree>
@@ -13568,96 +13533,85 @@
           <a:bodyPr wrap="square" rtlCol="0" anchor="ctr"/>
           <a:lstStyle/>
           <a:p>
-            <a:pPr indent="0" marL="0">
+            <a:pPr marL="0" indent="0">
               <a:buNone/>
             </a:pPr>
-            <a:r>
-              <a:rPr lang="en-US" sz="1200" b="1" spc="200" kern="0" dirty="0">
-                <a:solidFill>
-                  <a:srgbClr val="E67E22"/>
+            <a:endParaRPr lang="en-US" sz="1200" dirty="0"/>
+          </a:p>
+        </p:txBody>
+      </p:sp>
+      <p:sp>
+        <p:nvSpPr>
+          <p:cNvPr id="3" name="Text 1"/>
+          <p:cNvSpPr/>
+          <p:nvPr/>
+        </p:nvSpPr>
+        <p:spPr>
+          <a:xfrm>
+            <a:off x="548640" y="658368"/>
+            <a:ext cx="11064240" cy="822960"/>
+          </a:xfrm>
+          <a:prstGeom prst="rect">
+            <a:avLst/>
+          </a:prstGeom>
+          <a:noFill/>
+          <a:ln/>
+        </p:spPr>
+        <p:txBody>
+          <a:bodyPr wrap="square" rtlCol="0" anchor="ctr"/>
+          <a:lstStyle/>
+          <a:p>
+            <a:pPr marL="0" indent="0" algn="l">
+              <a:buNone/>
+            </a:pPr>
+            <a:r>
+              <a:rPr lang="en-US" sz="3000" b="1" dirty="0">
+                <a:solidFill>
+                  <a:srgbClr val="0B3D56"/>
+                </a:solidFill>
+                <a:latin typeface="Cambria" pitchFamily="34" charset="0"/>
+                <a:ea typeface="Cambria" pitchFamily="34" charset="-122"/>
+                <a:cs typeface="Cambria" pitchFamily="34" charset="-120"/>
+              </a:rPr>
+              <a:t>Plan de la présentation</a:t>
+            </a:r>
+            <a:endParaRPr lang="en-US" sz="3000" dirty="0"/>
+          </a:p>
+        </p:txBody>
+      </p:sp>
+      <p:sp>
+        <p:nvSpPr>
+          <p:cNvPr id="4" name="Text 2"/>
+          <p:cNvSpPr/>
+          <p:nvPr/>
+        </p:nvSpPr>
+        <p:spPr>
+          <a:xfrm>
+            <a:off x="11503152" y="6473952"/>
+            <a:ext cx="457200" cy="274320"/>
+          </a:xfrm>
+          <a:prstGeom prst="rect">
+            <a:avLst/>
+          </a:prstGeom>
+          <a:noFill/>
+          <a:ln/>
+        </p:spPr>
+        <p:txBody>
+          <a:bodyPr wrap="square" rtlCol="0" anchor="ctr"/>
+          <a:lstStyle/>
+          <a:p>
+            <a:pPr marL="0" indent="0" algn="r">
+              <a:buNone/>
+            </a:pPr>
+            <a:r>
+              <a:rPr lang="en-US" sz="1000" dirty="0">
+                <a:solidFill>
+                  <a:srgbClr val="6B7280"/>
                 </a:solidFill>
                 <a:latin typeface="Calibri" pitchFamily="34" charset="0"/>
                 <a:ea typeface="Calibri" pitchFamily="34" charset="-122"/>
                 <a:cs typeface="Calibri" pitchFamily="34" charset="-120"/>
               </a:rPr>
-              <a:t>SOMMAIRE</a:t>
-            </a:r>
-            <a:endParaRPr lang="en-US" sz="1200" dirty="0"/>
-          </a:p>
-        </p:txBody>
-      </p:sp>
-      <p:sp>
-        <p:nvSpPr>
-          <p:cNvPr id="3" name="Text 1"/>
-          <p:cNvSpPr/>
-          <p:nvPr/>
-        </p:nvSpPr>
-        <p:spPr>
-          <a:xfrm>
-            <a:off x="548640" y="658368"/>
-            <a:ext cx="11064240" cy="822960"/>
-          </a:xfrm>
-          <a:prstGeom prst="rect">
-            <a:avLst/>
-          </a:prstGeom>
-          <a:noFill/>
-          <a:ln/>
-        </p:spPr>
-        <p:txBody>
-          <a:bodyPr wrap="square" rtlCol="0" anchor="ctr"/>
-          <a:lstStyle/>
-          <a:p>
-            <a:pPr algn="l" indent="0" marL="0">
-              <a:buNone/>
-            </a:pPr>
-            <a:r>
-              <a:rPr lang="en-US" sz="3000" b="1" dirty="0">
-                <a:solidFill>
-                  <a:srgbClr val="0B3D56"/>
-                </a:solidFill>
-                <a:latin typeface="Cambria" pitchFamily="34" charset="0"/>
-                <a:ea typeface="Cambria" pitchFamily="34" charset="-122"/>
-                <a:cs typeface="Cambria" pitchFamily="34" charset="-120"/>
-              </a:rPr>
-              <a:t>Plan de la présentation</a:t>
-            </a:r>
-            <a:endParaRPr lang="en-US" sz="3000" dirty="0"/>
-          </a:p>
-        </p:txBody>
-      </p:sp>
-      <p:sp>
-        <p:nvSpPr>
-          <p:cNvPr id="4" name="Text 2"/>
-          <p:cNvSpPr/>
-          <p:nvPr/>
-        </p:nvSpPr>
-        <p:spPr>
-          <a:xfrm>
-            <a:off x="11503152" y="6473952"/>
-            <a:ext cx="457200" cy="274320"/>
-          </a:xfrm>
-          <a:prstGeom prst="rect">
-            <a:avLst/>
-          </a:prstGeom>
-          <a:noFill/>
-          <a:ln/>
-        </p:spPr>
-        <p:txBody>
-          <a:bodyPr wrap="square" rtlCol="0" anchor="ctr"/>
-          <a:lstStyle/>
-          <a:p>
-            <a:pPr algn="r" indent="0" marL="0">
-              <a:buNone/>
-            </a:pPr>
-            <a:r>
-              <a:rPr lang="en-US" sz="1000" dirty="0">
-                <a:solidFill>
-                  <a:srgbClr val="6B7280"/>
-                </a:solidFill>
-                <a:latin typeface="Calibri" pitchFamily="34" charset="0"/>
-                <a:ea typeface="Calibri" pitchFamily="34" charset="-122"/>
-                <a:cs typeface="Calibri" pitchFamily="34" charset="-120"/>
-              </a:rPr>
               <a:t>2</a:t>
             </a:r>
             <a:endParaRPr lang="en-US" sz="1000" dirty="0"/>
@@ -13672,8 +13626,8 @@
         </p:nvSpPr>
         <p:spPr>
           <a:xfrm>
-            <a:off x="640080" y="1737360"/>
-            <a:ext cx="5212080" cy="4297680"/>
+            <a:off x="640080" y="1481328"/>
+            <a:ext cx="5395410" cy="4718304"/>
           </a:xfrm>
           <a:prstGeom prst="roundRect">
             <a:avLst>
@@ -13685,7 +13639,7 @@
           </a:solidFill>
           <a:ln/>
           <a:effectLst>
-            <a:outerShdw sx="100000" sy="100000" kx="0" ky="0" algn="bl" rotWithShape="0" blurRad="76200" dist="25400" dir="5400000">
+            <a:outerShdw blurRad="76200" dist="25400" dir="5400000" algn="bl" rotWithShape="0">
               <a:srgbClr val="1A1A1A">
                 <a:alpha val="18000"/>
               </a:srgbClr>
@@ -13701,12 +13655,12 @@
         </p:nvSpPr>
         <p:spPr>
           <a:xfrm>
-            <a:off x="960120" y="2057400"/>
+            <a:off x="960120" y="1709928"/>
             <a:ext cx="502920" cy="502920"/>
           </a:xfrm>
           <a:prstGeom prst="roundRect">
             <a:avLst>
-              <a:gd name="adj" fmla="val 90909"/>
+              <a:gd name="adj" fmla="val 50000"/>
             </a:avLst>
           </a:prstGeom>
           <a:solidFill>
@@ -13723,8 +13677,8 @@
         </p:nvSpPr>
         <p:spPr>
           <a:xfrm>
-            <a:off x="960120" y="2057400"/>
-            <a:ext cx="502920" cy="502920"/>
+            <a:off x="960120" y="1353671"/>
+            <a:ext cx="502920" cy="1206650"/>
           </a:xfrm>
           <a:prstGeom prst="rect">
             <a:avLst/>
@@ -13736,7 +13690,7 @@
           <a:bodyPr wrap="square" rtlCol="0" anchor="ctr"/>
           <a:lstStyle/>
           <a:p>
-            <a:pPr algn="ctr" indent="0" marL="0">
+            <a:pPr marL="0" indent="0" algn="ctr">
               <a:buNone/>
             </a:pPr>
             <a:r>
@@ -13762,8 +13716,8 @@
         </p:nvSpPr>
         <p:spPr>
           <a:xfrm>
-            <a:off x="1600200" y="2029968"/>
-            <a:ext cx="3840480" cy="548640"/>
+            <a:off x="1600200" y="1682494"/>
+            <a:ext cx="3840480" cy="576073"/>
           </a:xfrm>
           <a:prstGeom prst="rect">
             <a:avLst/>
@@ -13775,7 +13729,7 @@
           <a:bodyPr wrap="square" rtlCol="0" anchor="ctr"/>
           <a:lstStyle/>
           <a:p>
-            <a:pPr indent="0" marL="0">
+            <a:pPr marL="0" indent="0">
               <a:buNone/>
             </a:pPr>
             <a:r>
@@ -13801,8 +13755,8 @@
         </p:nvSpPr>
         <p:spPr>
           <a:xfrm>
-            <a:off x="1005840" y="2788920"/>
-            <a:ext cx="4480560" cy="3017520"/>
+            <a:off x="1005840" y="2328134"/>
+            <a:ext cx="4480560" cy="3478306"/>
           </a:xfrm>
           <a:prstGeom prst="rect">
             <a:avLst/>
@@ -13826,7 +13780,6 @@
                 <a:solidFill>
                   <a:srgbClr val="1E2530"/>
                 </a:solidFill>
-                <a:latin typeface="Calibri" pitchFamily="34" charset="0"/>
                 <a:ea typeface="Calibri" pitchFamily="34" charset="-122"/>
                 <a:cs typeface="Calibri" pitchFamily="34" charset="-120"/>
               </a:rPr>
@@ -13847,7 +13800,6 @@
                 <a:solidFill>
                   <a:srgbClr val="1E2530"/>
                 </a:solidFill>
-                <a:latin typeface="Calibri" pitchFamily="34" charset="0"/>
                 <a:ea typeface="Calibri" pitchFamily="34" charset="-122"/>
                 <a:cs typeface="Calibri" pitchFamily="34" charset="-120"/>
               </a:rPr>
@@ -13868,11 +13820,60 @@
                 <a:solidFill>
                   <a:srgbClr val="1E2530"/>
                 </a:solidFill>
-                <a:latin typeface="Calibri" pitchFamily="34" charset="0"/>
                 <a:ea typeface="Calibri" pitchFamily="34" charset="-122"/>
                 <a:cs typeface="Calibri" pitchFamily="34" charset="-120"/>
               </a:rPr>
-              <a:t>Résumé des travaux proposés</a:t>
+              <a:t>Les travaux </a:t>
+            </a:r>
+            <a:r>
+              <a:rPr lang="en-US" sz="1450" dirty="0" err="1">
+                <a:solidFill>
+                  <a:srgbClr val="1E2530"/>
+                </a:solidFill>
+                <a:ea typeface="Calibri" pitchFamily="34" charset="-122"/>
+                <a:cs typeface="Calibri" pitchFamily="34" charset="-120"/>
+              </a:rPr>
+              <a:t>effectués</a:t>
+            </a:r>
+            <a:r>
+              <a:rPr lang="en-US" sz="1450" dirty="0">
+                <a:solidFill>
+                  <a:srgbClr val="1E2530"/>
+                </a:solidFill>
+                <a:ea typeface="Calibri" pitchFamily="34" charset="-122"/>
+                <a:cs typeface="Calibri" pitchFamily="34" charset="-120"/>
+              </a:rPr>
+              <a:t> </a:t>
+            </a:r>
+            <a:r>
+              <a:rPr lang="en-US" sz="1450" dirty="0" err="1">
+                <a:solidFill>
+                  <a:srgbClr val="1E2530"/>
+                </a:solidFill>
+                <a:ea typeface="Calibri" pitchFamily="34" charset="-122"/>
+                <a:cs typeface="Calibri" pitchFamily="34" charset="-120"/>
+              </a:rPr>
+              <a:t>en</a:t>
+            </a:r>
+            <a:r>
+              <a:rPr lang="en-US" sz="1450" dirty="0">
+                <a:solidFill>
+                  <a:srgbClr val="1E2530"/>
+                </a:solidFill>
+                <a:ea typeface="Calibri" pitchFamily="34" charset="-122"/>
+                <a:cs typeface="Calibri" pitchFamily="34" charset="-120"/>
+              </a:rPr>
+              <a:t> </a:t>
+            </a:r>
+            <a:r>
+              <a:rPr lang="en-US" sz="1450" dirty="0" err="1">
+                <a:solidFill>
+                  <a:srgbClr val="1E2530"/>
+                </a:solidFill>
+                <a:ea typeface="Calibri" pitchFamily="34" charset="-122"/>
+                <a:cs typeface="Calibri" pitchFamily="34" charset="-120"/>
+              </a:rPr>
+              <a:t>entreprise</a:t>
             </a:r>
             <a:endParaRPr lang="en-US" sz="1450" dirty="0"/>
           </a:p>
@@ -13889,7 +13890,6 @@
                 <a:solidFill>
                   <a:srgbClr val="1E2530"/>
                 </a:solidFill>
-                <a:latin typeface="Calibri" pitchFamily="34" charset="0"/>
                 <a:ea typeface="Calibri" pitchFamily="34" charset="-122"/>
                 <a:cs typeface="Calibri" pitchFamily="34" charset="-120"/>
               </a:rPr>
@@ -13910,7 +13910,6 @@
                 <a:solidFill>
                   <a:srgbClr val="1E2530"/>
                 </a:solidFill>
-                <a:latin typeface="Calibri" pitchFamily="34" charset="0"/>
                 <a:ea typeface="Calibri" pitchFamily="34" charset="-122"/>
                 <a:cs typeface="Calibri" pitchFamily="34" charset="-120"/>
               </a:rPr>
@@ -13928,8 +13927,8 @@
         </p:nvSpPr>
         <p:spPr>
           <a:xfrm>
-            <a:off x="6355080" y="1737360"/>
-            <a:ext cx="5212080" cy="4297680"/>
+            <a:off x="6339839" y="1481328"/>
+            <a:ext cx="5502537" cy="4718304"/>
           </a:xfrm>
           <a:prstGeom prst="roundRect">
             <a:avLst>
@@ -13941,7 +13940,7 @@
           </a:solidFill>
           <a:ln/>
           <a:effectLst>
-            <a:outerShdw sx="100000" sy="100000" kx="0" ky="0" algn="bl" rotWithShape="0" blurRad="76200" dist="25400" dir="5400000">
+            <a:outerShdw blurRad="76200" dist="25400" dir="5400000" algn="bl" rotWithShape="0">
               <a:srgbClr val="1A1A1A">
                 <a:alpha val="18000"/>
               </a:srgbClr>
@@ -13957,12 +13956,12 @@
         </p:nvSpPr>
         <p:spPr>
           <a:xfrm>
-            <a:off x="6675120" y="2057400"/>
-            <a:ext cx="502920" cy="502920"/>
+            <a:off x="6760958" y="1649058"/>
+            <a:ext cx="502919" cy="502920"/>
           </a:xfrm>
           <a:prstGeom prst="roundRect">
             <a:avLst>
-              <a:gd name="adj" fmla="val 90909"/>
+              <a:gd name="adj" fmla="val 50000"/>
             </a:avLst>
           </a:prstGeom>
           <a:solidFill>
@@ -13970,33 +13969,12 @@
           </a:solidFill>
           <a:ln/>
         </p:spPr>
-      </p:sp>
-      <p:sp>
-        <p:nvSpPr>
-          <p:cNvPr id="12" name="Text 10"/>
-          <p:cNvSpPr/>
-          <p:nvPr/>
-        </p:nvSpPr>
-        <p:spPr>
-          <a:xfrm>
-            <a:off x="6675120" y="2057400"/>
-            <a:ext cx="502920" cy="502920"/>
-          </a:xfrm>
-          <a:prstGeom prst="rect">
-            <a:avLst/>
-          </a:prstGeom>
-          <a:noFill/>
-          <a:ln/>
-        </p:spPr>
-        <p:txBody>
-          <a:bodyPr wrap="square" rtlCol="0" anchor="ctr"/>
-          <a:lstStyle/>
-          <a:p>
-            <a:pPr algn="ctr" indent="0" marL="0">
-              <a:buNone/>
-            </a:pPr>
-            <a:r>
-              <a:rPr lang="en-US" sz="2000" b="1" dirty="0">
+        <p:txBody>
+          <a:bodyPr/>
+          <a:lstStyle/>
+          <a:p>
+            <a:r>
+              <a:rPr lang="en-US" b="1" dirty="0">
                 <a:solidFill>
                   <a:srgbClr val="FFFFFF"/>
                 </a:solidFill>
@@ -14004,8 +13982,39 @@
                 <a:ea typeface="Calibri" pitchFamily="34" charset="-122"/>
                 <a:cs typeface="Calibri" pitchFamily="34" charset="-120"/>
               </a:rPr>
-              <a:t>2</a:t>
-            </a:r>
+              <a:t> 2 </a:t>
+            </a:r>
+            <a:endParaRPr lang="en-US" dirty="0"/>
+          </a:p>
+          <a:p>
+            <a:endParaRPr lang="fr-FR" dirty="0"/>
+          </a:p>
+        </p:txBody>
+      </p:sp>
+      <p:sp>
+        <p:nvSpPr>
+          <p:cNvPr id="12" name="Text 10"/>
+          <p:cNvSpPr/>
+          <p:nvPr/>
+        </p:nvSpPr>
+        <p:spPr>
+          <a:xfrm>
+            <a:off x="6675120" y="1900518"/>
+            <a:ext cx="502920" cy="659802"/>
+          </a:xfrm>
+          <a:prstGeom prst="rect">
+            <a:avLst/>
+          </a:prstGeom>
+          <a:noFill/>
+          <a:ln/>
+        </p:spPr>
+        <p:txBody>
+          <a:bodyPr wrap="square" rtlCol="0" anchor="ctr"/>
+          <a:lstStyle/>
+          <a:p>
+            <a:pPr marL="0" indent="0" algn="ctr">
+              <a:buNone/>
+            </a:pPr>
             <a:endParaRPr lang="en-US" sz="2000" dirty="0"/>
           </a:p>
         </p:txBody>
@@ -14018,8 +14027,8 @@
         </p:nvSpPr>
         <p:spPr>
           <a:xfrm>
-            <a:off x="7315200" y="2029968"/>
-            <a:ext cx="3931920" cy="548640"/>
+            <a:off x="7315200" y="1668781"/>
+            <a:ext cx="3818965" cy="589787"/>
           </a:xfrm>
           <a:prstGeom prst="rect">
             <a:avLst/>
@@ -14031,7 +14040,7 @@
           <a:bodyPr wrap="square" rtlCol="0" anchor="ctr"/>
           <a:lstStyle/>
           <a:p>
-            <a:pPr indent="0" marL="0">
+            <a:pPr marL="0" indent="0">
               <a:buNone/>
             </a:pPr>
             <a:r>
@@ -14057,8 +14066,8 @@
         </p:nvSpPr>
         <p:spPr>
           <a:xfrm>
-            <a:off x="6720840" y="2788920"/>
-            <a:ext cx="4480560" cy="3017520"/>
+            <a:off x="6720840" y="2328134"/>
+            <a:ext cx="4526280" cy="3478307"/>
           </a:xfrm>
           <a:prstGeom prst="rect">
             <a:avLst/>
@@ -14078,17 +14087,9 @@
               <a:buChar char="▪"/>
             </a:pPr>
             <a:r>
-              <a:rPr lang="en-US" sz="1450" dirty="0">
-                <a:solidFill>
-                  <a:srgbClr val="1E2530"/>
-                </a:solidFill>
-                <a:latin typeface="Calibri" pitchFamily="34" charset="0"/>
-                <a:ea typeface="Calibri" pitchFamily="34" charset="-122"/>
-                <a:cs typeface="Calibri" pitchFamily="34" charset="-120"/>
-              </a:rPr>
-              <a:t>Problématique &amp; état de l'art</a:t>
-            </a:r>
-            <a:endParaRPr lang="en-US" sz="1450" dirty="0"/>
+              <a:rPr lang="fr-FR" sz="1350" dirty="0"/>
+              <a:t>Problématique &amp; contexte</a:t>
+            </a:r>
           </a:p>
           <a:p>
             <a:pPr marL="228600" indent="-228600">
@@ -14099,17 +14100,10 @@
               <a:buChar char="▪"/>
             </a:pPr>
             <a:r>
-              <a:rPr lang="en-US" sz="1450" dirty="0">
-                <a:solidFill>
-                  <a:srgbClr val="1E2530"/>
-                </a:solidFill>
-                <a:latin typeface="Calibri" pitchFamily="34" charset="0"/>
-                <a:ea typeface="Calibri" pitchFamily="34" charset="-122"/>
-                <a:cs typeface="Calibri" pitchFamily="34" charset="-120"/>
-              </a:rPr>
-              <a:t>Chapitre 2 — HEAT2VALUE : la solution</a:t>
-            </a:r>
-            <a:endParaRPr lang="en-US" sz="1450" dirty="0"/>
+              <a:rPr lang="fr-FR" sz="1350" dirty="0"/>
+              <a:t>État de l'art &amp; limites des solutions existantes</a:t>
+            </a:r>
+            <a:endParaRPr lang="en-US" sz="1350" dirty="0"/>
           </a:p>
           <a:p>
             <a:pPr marL="228600" indent="-228600">
@@ -14120,17 +14114,9 @@
               <a:buChar char="▪"/>
             </a:pPr>
             <a:r>
-              <a:rPr lang="en-US" sz="1450" dirty="0">
-                <a:solidFill>
-                  <a:srgbClr val="1E2530"/>
-                </a:solidFill>
-                <a:latin typeface="Calibri" pitchFamily="34" charset="0"/>
-                <a:ea typeface="Calibri" pitchFamily="34" charset="-122"/>
-                <a:cs typeface="Calibri" pitchFamily="34" charset="-120"/>
-              </a:rPr>
-              <a:t>Le KPI HRR et le score environnemental</a:t>
-            </a:r>
-            <a:endParaRPr lang="en-US" sz="1450" dirty="0"/>
+              <a:rPr lang="fr-FR" sz="1350" dirty="0"/>
+              <a:t>HEAT2VALUE : le changement de paradigme</a:t>
+            </a:r>
           </a:p>
           <a:p>
             <a:pPr marL="228600" indent="-228600">
@@ -14141,17 +14127,9 @@
               <a:buChar char="▪"/>
             </a:pPr>
             <a:r>
-              <a:rPr lang="en-US" sz="1450" dirty="0">
-                <a:solidFill>
-                  <a:srgbClr val="1E2530"/>
-                </a:solidFill>
-                <a:latin typeface="Calibri" pitchFamily="34" charset="0"/>
-                <a:ea typeface="Calibri" pitchFamily="34" charset="-122"/>
-                <a:cs typeface="Calibri" pitchFamily="34" charset="-120"/>
-              </a:rPr>
-              <a:t>Chapitre 3 — Implémentation et résultats</a:t>
-            </a:r>
-            <a:endParaRPr lang="en-US" sz="1450" dirty="0"/>
+              <a:rPr lang="fr-FR" sz="1350" dirty="0"/>
+              <a:t>Le nouveau KPI : le HRR</a:t>
+            </a:r>
           </a:p>
           <a:p>
             <a:pPr marL="228600" indent="-228600">
@@ -14162,16 +14140,84 @@
               <a:buChar char="▪"/>
             </a:pPr>
             <a:r>
-              <a:rPr lang="en-US" sz="1450" dirty="0">
-                <a:solidFill>
-                  <a:srgbClr val="1E2530"/>
-                </a:solidFill>
-                <a:latin typeface="Calibri" pitchFamily="34" charset="0"/>
-                <a:ea typeface="Calibri" pitchFamily="34" charset="-122"/>
-                <a:cs typeface="Calibri" pitchFamily="34" charset="-120"/>
-              </a:rPr>
-              <a:t>Limites, améliorations et conclusion</a:t>
-            </a:r>
+              <a:rPr lang="fr-FR" sz="1350" dirty="0"/>
+              <a:t>Le nouveau score environnemental</a:t>
+            </a:r>
+          </a:p>
+          <a:p>
+            <a:pPr marL="228600" indent="-228600">
+              <a:spcAft>
+                <a:spcPts val="1400"/>
+              </a:spcAft>
+              <a:buSzPct val="100000"/>
+              <a:buChar char="▪"/>
+            </a:pPr>
+            <a:r>
+              <a:rPr lang="fr-FR" sz="1350" dirty="0"/>
+              <a:t>Architecture &amp; fonctionnement de l'algorithme</a:t>
+            </a:r>
+          </a:p>
+          <a:p>
+            <a:pPr marL="228600" indent="-228600">
+              <a:spcAft>
+                <a:spcPts val="1400"/>
+              </a:spcAft>
+              <a:buSzPct val="100000"/>
+              <a:buChar char="▪"/>
+            </a:pPr>
+            <a:r>
+              <a:rPr lang="fr-FR" sz="1350" dirty="0"/>
+              <a:t>Implémentation en Python</a:t>
+            </a:r>
+          </a:p>
+          <a:p>
+            <a:pPr marL="228600" indent="-228600">
+              <a:spcAft>
+                <a:spcPts val="1400"/>
+              </a:spcAft>
+              <a:buSzPct val="100000"/>
+              <a:buChar char="▪"/>
+            </a:pPr>
+            <a:r>
+              <a:rPr lang="fr-FR" sz="1400" dirty="0"/>
+              <a:t>Résultats &amp; comparaison</a:t>
+            </a:r>
+          </a:p>
+          <a:p>
+            <a:pPr marL="228600" indent="-228600">
+              <a:spcAft>
+                <a:spcPts val="1400"/>
+              </a:spcAft>
+              <a:buSzPct val="100000"/>
+              <a:buChar char="▪"/>
+            </a:pPr>
+            <a:r>
+              <a:rPr lang="fr-FR" sz="1400" dirty="0"/>
+              <a:t>Métriques &amp; indicateurs de réalisation</a:t>
+            </a:r>
+          </a:p>
+          <a:p>
+            <a:pPr marL="228600" indent="-228600">
+              <a:spcAft>
+                <a:spcPts val="1400"/>
+              </a:spcAft>
+              <a:buSzPct val="100000"/>
+              <a:buChar char="▪"/>
+            </a:pPr>
+            <a:r>
+              <a:rPr lang="fr-FR" sz="1400" dirty="0"/>
+              <a:t>Limites &amp; perspectives d'amélioration</a:t>
+            </a:r>
+            <a:endParaRPr lang="fr-FR" sz="1350" dirty="0"/>
+          </a:p>
+          <a:p>
+            <a:pPr marL="228600" indent="-228600">
+              <a:spcAft>
+                <a:spcPts val="1400"/>
+              </a:spcAft>
+              <a:buSzPct val="100000"/>
+              <a:buChar char="▪"/>
+            </a:pPr>
             <a:endParaRPr lang="en-US" sz="1450" dirty="0"/>
           </a:p>
         </p:txBody>
@@ -14192,6 +14238,7 @@
         <a:solidFill>
           <a:srgbClr val="FFFFFF"/>
         </a:solidFill>
+        <a:effectLst/>
       </p:bgPr>
     </p:bg>
     <p:spTree>
@@ -14229,11 +14276,11 @@
           <a:bodyPr wrap="square" rtlCol="0" anchor="ctr"/>
           <a:lstStyle/>
           <a:p>
-            <a:pPr indent="0" marL="0">
+            <a:pPr marL="0" indent="0">
               <a:buNone/>
             </a:pPr>
             <a:r>
-              <a:rPr lang="en-US" sz="1200" b="1" spc="200" kern="0" dirty="0">
+              <a:rPr lang="en-US" sz="1200" b="1" kern="0" spc="200" dirty="0">
                 <a:solidFill>
                   <a:srgbClr val="E67E22"/>
                 </a:solidFill>
@@ -14268,7 +14315,7 @@
           <a:bodyPr wrap="square" rtlCol="0" anchor="ctr"/>
           <a:lstStyle/>
           <a:p>
-            <a:pPr algn="l" indent="0" marL="0">
+            <a:pPr marL="0" indent="0" algn="l">
               <a:buNone/>
             </a:pPr>
             <a:r>
@@ -14307,7 +14354,7 @@
           <a:bodyPr wrap="square" rtlCol="0" anchor="ctr"/>
           <a:lstStyle/>
           <a:p>
-            <a:pPr algn="r" indent="0" marL="0">
+            <a:pPr marL="0" indent="0" algn="r">
               <a:buNone/>
             </a:pPr>
             <a:r>
@@ -14346,7 +14393,7 @@
           </a:solidFill>
           <a:ln/>
           <a:effectLst>
-            <a:outerShdw sx="100000" sy="100000" kx="0" ky="0" algn="bl" rotWithShape="0" blurRad="76200" dist="25400" dir="5400000">
+            <a:outerShdw blurRad="76200" dist="25400" dir="5400000" algn="bl" rotWithShape="0">
               <a:srgbClr val="1A1A1A">
                 <a:alpha val="18000"/>
               </a:srgbClr>
@@ -14375,7 +14422,7 @@
           <a:bodyPr wrap="square" rtlCol="0" anchor="ctr"/>
           <a:lstStyle/>
           <a:p>
-            <a:pPr indent="0" marL="0">
+            <a:pPr marL="0" indent="0">
               <a:buNone/>
             </a:pPr>
             <a:r>
@@ -14520,7 +14567,7 @@
           </a:solidFill>
           <a:ln/>
           <a:effectLst>
-            <a:outerShdw sx="100000" sy="100000" kx="0" ky="0" algn="bl" rotWithShape="0" blurRad="76200" dist="25400" dir="5400000">
+            <a:outerShdw blurRad="76200" dist="25400" dir="5400000" algn="bl" rotWithShape="0">
               <a:srgbClr val="1A1A1A">
                 <a:alpha val="18000"/>
               </a:srgbClr>
@@ -14571,7 +14618,7 @@
           <a:bodyPr wrap="square" rtlCol="0" anchor="ctr"/>
           <a:lstStyle/>
           <a:p>
-            <a:pPr algn="ctr" indent="0" marL="0">
+            <a:pPr marL="0" indent="0" algn="ctr">
               <a:buNone/>
             </a:pPr>
             <a:r>
@@ -14610,7 +14657,7 @@
           <a:bodyPr wrap="square" rtlCol="0" anchor="ctr"/>
           <a:lstStyle/>
           <a:p>
-            <a:pPr indent="0" marL="0">
+            <a:pPr marL="0" indent="0">
               <a:buNone/>
             </a:pPr>
             <a:r>
@@ -14649,7 +14696,7 @@
           </a:solidFill>
           <a:ln/>
           <a:effectLst>
-            <a:outerShdw sx="100000" sy="100000" kx="0" ky="0" algn="bl" rotWithShape="0" blurRad="76200" dist="25400" dir="5400000">
+            <a:outerShdw blurRad="76200" dist="25400" dir="5400000" algn="bl" rotWithShape="0">
               <a:srgbClr val="1A1A1A">
                 <a:alpha val="18000"/>
               </a:srgbClr>
@@ -14700,7 +14747,7 @@
           <a:bodyPr wrap="square" rtlCol="0" anchor="ctr"/>
           <a:lstStyle/>
           <a:p>
-            <a:pPr algn="ctr" indent="0" marL="0">
+            <a:pPr marL="0" indent="0" algn="ctr">
               <a:buNone/>
             </a:pPr>
             <a:r>
@@ -14739,7 +14786,7 @@
           <a:bodyPr wrap="square" rtlCol="0" anchor="ctr"/>
           <a:lstStyle/>
           <a:p>
-            <a:pPr indent="0" marL="0">
+            <a:pPr marL="0" indent="0">
               <a:buNone/>
             </a:pPr>
             <a:r>
@@ -14778,7 +14825,7 @@
           </a:solidFill>
           <a:ln/>
           <a:effectLst>
-            <a:outerShdw sx="100000" sy="100000" kx="0" ky="0" algn="bl" rotWithShape="0" blurRad="76200" dist="25400" dir="5400000">
+            <a:outerShdw blurRad="76200" dist="25400" dir="5400000" algn="bl" rotWithShape="0">
               <a:srgbClr val="1A1A1A">
                 <a:alpha val="18000"/>
               </a:srgbClr>
@@ -14829,7 +14876,7 @@
           <a:bodyPr wrap="square" rtlCol="0" anchor="ctr"/>
           <a:lstStyle/>
           <a:p>
-            <a:pPr algn="ctr" indent="0" marL="0">
+            <a:pPr marL="0" indent="0" algn="ctr">
               <a:buNone/>
             </a:pPr>
             <a:r>
@@ -14868,7 +14915,7 @@
           <a:bodyPr wrap="square" rtlCol="0" anchor="ctr"/>
           <a:lstStyle/>
           <a:p>
-            <a:pPr indent="0" marL="0">
+            <a:pPr marL="0" indent="0">
               <a:buNone/>
             </a:pPr>
             <a:r>
@@ -14902,6 +14949,7 @@
         <a:solidFill>
           <a:srgbClr val="FFFFFF"/>
         </a:solidFill>
+        <a:effectLst/>
       </p:bgPr>
     </p:bg>
     <p:spTree>
@@ -14939,11 +14987,11 @@
           <a:bodyPr wrap="square" rtlCol="0" anchor="ctr"/>
           <a:lstStyle/>
           <a:p>
-            <a:pPr indent="0" marL="0">
+            <a:pPr marL="0" indent="0">
               <a:buNone/>
             </a:pPr>
             <a:r>
-              <a:rPr lang="en-US" sz="1200" b="1" spc="200" kern="0" dirty="0">
+              <a:rPr lang="en-US" sz="1200" b="1" kern="0" spc="200" dirty="0">
                 <a:solidFill>
                   <a:srgbClr val="E67E22"/>
                 </a:solidFill>
@@ -14978,7 +15026,7 @@
           <a:bodyPr wrap="square" rtlCol="0" anchor="ctr"/>
           <a:lstStyle/>
           <a:p>
-            <a:pPr algn="l" indent="0" marL="0">
+            <a:pPr marL="0" indent="0" algn="l">
               <a:buNone/>
             </a:pPr>
             <a:r>
@@ -15017,7 +15065,7 @@
           <a:bodyPr wrap="square" rtlCol="0" anchor="ctr"/>
           <a:lstStyle/>
           <a:p>
-            <a:pPr algn="r" indent="0" marL="0">
+            <a:pPr marL="0" indent="0" algn="r">
               <a:buNone/>
             </a:pPr>
             <a:r>
@@ -15056,7 +15104,7 @@
           <a:bodyPr wrap="square" rtlCol="0" anchor="ctr"/>
           <a:lstStyle/>
           <a:p>
-            <a:pPr indent="0" marL="0">
+            <a:pPr marL="0" indent="0">
               <a:buNone/>
             </a:pPr>
             <a:r>
@@ -15074,6 +15122,59 @@
           </a:p>
         </p:txBody>
       </p:sp>
+      <p:sp>
+        <p:nvSpPr>
+          <p:cNvPr id="6" name="Shape 4"/>
+          <p:cNvSpPr/>
+          <p:nvPr/>
+        </p:nvSpPr>
+        <p:spPr>
+          <a:xfrm>
+            <a:off x="2907792" y="1866297"/>
+            <a:ext cx="6345936" cy="4679886"/>
+          </a:xfrm>
+          <a:prstGeom prst="roundRect">
+            <a:avLst>
+              <a:gd name="adj" fmla="val 1563"/>
+            </a:avLst>
+          </a:prstGeom>
+          <a:solidFill>
+            <a:srgbClr val="FFFFFF"/>
+          </a:solidFill>
+          <a:ln/>
+          <a:effectLst>
+            <a:outerShdw blurRad="76200" dist="25400" dir="5400000" algn="bl" rotWithShape="0">
+              <a:srgbClr val="1A1A1A">
+                <a:alpha val="18000"/>
+              </a:srgbClr>
+            </a:outerShdw>
+          </a:effectLst>
+        </p:spPr>
+      </p:sp>
+      <p:pic>
+        <p:nvPicPr>
+          <p:cNvPr id="7" name="Image 0" descr="assets/architecture_modules.png"/>
+          <p:cNvPicPr>
+            <a:picLocks noChangeAspect="1"/>
+          </p:cNvPicPr>
+          <p:nvPr/>
+        </p:nvPicPr>
+        <p:blipFill>
+          <a:blip r:embed="rId3"/>
+          <a:stretch>
+            <a:fillRect/>
+          </a:stretch>
+        </p:blipFill>
+        <p:spPr>
+          <a:xfrm>
+            <a:off x="3017520" y="1976025"/>
+            <a:ext cx="6126480" cy="4460430"/>
+          </a:xfrm>
+          <a:prstGeom prst="rect">
+            <a:avLst/>
+          </a:prstGeom>
+        </p:spPr>
+      </p:pic>
     </p:spTree>
   </p:cSld>
   <p:clrMapOvr>
@@ -15090,6 +15191,7 @@
         <a:solidFill>
           <a:srgbClr val="FFFFFF"/>
         </a:solidFill>
+        <a:effectLst/>
       </p:bgPr>
     </p:bg>
     <p:spTree>
@@ -15127,11 +15229,11 @@
           <a:bodyPr wrap="square" rtlCol="0" anchor="ctr"/>
           <a:lstStyle/>
           <a:p>
-            <a:pPr indent="0" marL="0">
+            <a:pPr marL="0" indent="0">
               <a:buNone/>
             </a:pPr>
             <a:r>
-              <a:rPr lang="en-US" sz="1200" b="1" spc="200" kern="0" dirty="0">
+              <a:rPr lang="en-US" sz="1200" b="1" kern="0" spc="200" dirty="0">
                 <a:solidFill>
                   <a:srgbClr val="E67E22"/>
                 </a:solidFill>
@@ -15166,7 +15268,7 @@
           <a:bodyPr wrap="square" rtlCol="0" anchor="ctr"/>
           <a:lstStyle/>
           <a:p>
-            <a:pPr algn="l" indent="0" marL="0">
+            <a:pPr marL="0" indent="0" algn="l">
               <a:buNone/>
             </a:pPr>
             <a:r>
@@ -15205,7 +15307,7 @@
           <a:bodyPr wrap="square" rtlCol="0" anchor="ctr"/>
           <a:lstStyle/>
           <a:p>
-            <a:pPr algn="r" indent="0" marL="0">
+            <a:pPr marL="0" indent="0" algn="r">
               <a:buNone/>
             </a:pPr>
             <a:r>
@@ -15244,7 +15346,7 @@
           </a:solidFill>
           <a:ln/>
           <a:effectLst>
-            <a:outerShdw sx="100000" sy="100000" kx="0" ky="0" algn="bl" rotWithShape="0" blurRad="76200" dist="25400" dir="5400000">
+            <a:outerShdw blurRad="76200" dist="25400" dir="5400000" algn="bl" rotWithShape="0">
               <a:srgbClr val="1A1A1A">
                 <a:alpha val="18000"/>
               </a:srgbClr>
@@ -15273,7 +15375,7 @@
           <a:bodyPr wrap="square" rtlCol="0" anchor="ctr"/>
           <a:lstStyle/>
           <a:p>
-            <a:pPr indent="0" marL="0">
+            <a:pPr marL="0" indent="0">
               <a:buNone/>
             </a:pPr>
             <a:r>
@@ -15397,7 +15499,7 @@
           </a:solidFill>
           <a:ln/>
           <a:effectLst>
-            <a:outerShdw sx="100000" sy="100000" kx="0" ky="0" algn="bl" rotWithShape="0" blurRad="76200" dist="25400" dir="5400000">
+            <a:outerShdw blurRad="76200" dist="25400" dir="5400000" algn="bl" rotWithShape="0">
               <a:srgbClr val="1A1A1A">
                 <a:alpha val="18000"/>
               </a:srgbClr>
@@ -15426,7 +15528,7 @@
           <a:bodyPr wrap="square" rtlCol="0" anchor="ctr"/>
           <a:lstStyle/>
           <a:p>
-            <a:pPr indent="0" marL="0">
+            <a:pPr marL="0" indent="0">
               <a:buNone/>
             </a:pPr>
             <a:r>
@@ -15465,7 +15567,7 @@
           <a:bodyPr wrap="square" rtlCol="0" anchor="t"/>
           <a:lstStyle/>
           <a:p>
-            <a:pPr indent="0" marL="0">
+            <a:pPr marL="0" indent="0">
               <a:lnSpc>
                 <a:spcPts val="1400"/>
               </a:lnSpc>
@@ -15507,7 +15609,7 @@
           </a:solidFill>
           <a:ln/>
           <a:effectLst>
-            <a:outerShdw sx="100000" sy="100000" kx="0" ky="0" algn="bl" rotWithShape="0" blurRad="76200" dist="25400" dir="5400000">
+            <a:outerShdw blurRad="76200" dist="25400" dir="5400000" algn="bl" rotWithShape="0">
               <a:srgbClr val="1A1A1A">
                 <a:alpha val="18000"/>
               </a:srgbClr>
@@ -15536,7 +15638,7 @@
           <a:bodyPr wrap="square" rtlCol="0" anchor="ctr"/>
           <a:lstStyle/>
           <a:p>
-            <a:pPr indent="0" marL="0">
+            <a:pPr marL="0" indent="0">
               <a:buNone/>
             </a:pPr>
             <a:r>
@@ -15575,7 +15677,7 @@
           <a:bodyPr wrap="square" rtlCol="0" anchor="t"/>
           <a:lstStyle/>
           <a:p>
-            <a:pPr indent="0" marL="0">
+            <a:pPr marL="0" indent="0">
               <a:lnSpc>
                 <a:spcPts val="1400"/>
               </a:lnSpc>
@@ -15617,7 +15719,7 @@
           </a:solidFill>
           <a:ln/>
           <a:effectLst>
-            <a:outerShdw sx="100000" sy="100000" kx="0" ky="0" algn="bl" rotWithShape="0" blurRad="76200" dist="25400" dir="5400000">
+            <a:outerShdw blurRad="76200" dist="25400" dir="5400000" algn="bl" rotWithShape="0">
               <a:srgbClr val="1A1A1A">
                 <a:alpha val="18000"/>
               </a:srgbClr>
@@ -15646,7 +15748,7 @@
           <a:bodyPr wrap="square" rtlCol="0" anchor="ctr"/>
           <a:lstStyle/>
           <a:p>
-            <a:pPr indent="0" marL="0">
+            <a:pPr marL="0" indent="0">
               <a:buNone/>
             </a:pPr>
             <a:r>
@@ -15685,7 +15787,7 @@
           <a:bodyPr wrap="square" rtlCol="0" anchor="t"/>
           <a:lstStyle/>
           <a:p>
-            <a:pPr indent="0" marL="0">
+            <a:pPr marL="0" indent="0">
               <a:lnSpc>
                 <a:spcPts val="1400"/>
               </a:lnSpc>
@@ -15722,6 +15824,7 @@
         <a:solidFill>
           <a:srgbClr val="FFFFFF"/>
         </a:solidFill>
+        <a:effectLst/>
       </p:bgPr>
     </p:bg>
     <p:spTree>
@@ -15759,11 +15862,11 @@
           <a:bodyPr wrap="square" rtlCol="0" anchor="ctr"/>
           <a:lstStyle/>
           <a:p>
-            <a:pPr indent="0" marL="0">
+            <a:pPr marL="0" indent="0">
               <a:buNone/>
             </a:pPr>
             <a:r>
-              <a:rPr lang="en-US" sz="1200" b="1" spc="200" kern="0" dirty="0">
+              <a:rPr lang="en-US" sz="1200" b="1" kern="0" spc="200" dirty="0">
                 <a:solidFill>
                   <a:srgbClr val="E67E22"/>
                 </a:solidFill>
@@ -15798,7 +15901,7 @@
           <a:bodyPr wrap="square" rtlCol="0" anchor="ctr"/>
           <a:lstStyle/>
           <a:p>
-            <a:pPr algn="l" indent="0" marL="0">
+            <a:pPr marL="0" indent="0" algn="l">
               <a:buNone/>
             </a:pPr>
             <a:r>
@@ -15837,7 +15940,7 @@
           <a:bodyPr wrap="square" rtlCol="0" anchor="ctr"/>
           <a:lstStyle/>
           <a:p>
-            <a:pPr algn="r" indent="0" marL="0">
+            <a:pPr marL="0" indent="0" algn="r">
               <a:buNone/>
             </a:pPr>
             <a:r>
@@ -15982,7 +16085,7 @@
           <a:bodyPr wrap="square" rtlCol="0" anchor="ctr"/>
           <a:lstStyle/>
           <a:p>
-            <a:pPr indent="0" marL="0">
+            <a:pPr marL="0" indent="0">
               <a:buNone/>
             </a:pPr>
             <a:r>
@@ -16000,6 +16103,59 @@
           </a:p>
         </p:txBody>
       </p:sp>
+      <p:sp>
+        <p:nvSpPr>
+          <p:cNvPr id="7" name="Shape 5"/>
+          <p:cNvSpPr/>
+          <p:nvPr/>
+        </p:nvSpPr>
+        <p:spPr>
+          <a:xfrm>
+            <a:off x="1016127" y="4050792"/>
+            <a:ext cx="10129266" cy="2551176"/>
+          </a:xfrm>
+          <a:prstGeom prst="roundRect">
+            <a:avLst>
+              <a:gd name="adj" fmla="val 2867"/>
+            </a:avLst>
+          </a:prstGeom>
+          <a:solidFill>
+            <a:srgbClr val="FFFFFF"/>
+          </a:solidFill>
+          <a:ln/>
+          <a:effectLst>
+            <a:outerShdw blurRad="76200" dist="25400" dir="5400000" algn="bl" rotWithShape="0">
+              <a:srgbClr val="1A1A1A">
+                <a:alpha val="18000"/>
+              </a:srgbClr>
+            </a:outerShdw>
+          </a:effectLst>
+        </p:spPr>
+      </p:sp>
+      <p:pic>
+        <p:nvPicPr>
+          <p:cNvPr id="8" name="Image 0" descr="assets/sim_table.png"/>
+          <p:cNvPicPr>
+            <a:picLocks noChangeAspect="1"/>
+          </p:cNvPicPr>
+          <p:nvPr/>
+        </p:nvPicPr>
+        <p:blipFill>
+          <a:blip r:embed="rId3"/>
+          <a:stretch>
+            <a:fillRect/>
+          </a:stretch>
+        </p:blipFill>
+        <p:spPr>
+          <a:xfrm>
+            <a:off x="1125855" y="4160520"/>
+            <a:ext cx="9909810" cy="2331720"/>
+          </a:xfrm>
+          <a:prstGeom prst="rect">
+            <a:avLst/>
+          </a:prstGeom>
+        </p:spPr>
+      </p:pic>
     </p:spTree>
   </p:cSld>
   <p:clrMapOvr>
@@ -16016,6 +16172,7 @@
         <a:solidFill>
           <a:srgbClr val="FFFFFF"/>
         </a:solidFill>
+        <a:effectLst/>
       </p:bgPr>
     </p:bg>
     <p:spTree>
@@ -16053,11 +16210,11 @@
           <a:bodyPr wrap="square" rtlCol="0" anchor="ctr"/>
           <a:lstStyle/>
           <a:p>
-            <a:pPr indent="0" marL="0">
+            <a:pPr marL="0" indent="0">
               <a:buNone/>
             </a:pPr>
             <a:r>
-              <a:rPr lang="en-US" sz="1200" b="1" spc="200" kern="0" dirty="0">
+              <a:rPr lang="en-US" sz="1200" b="1" kern="0" spc="200" dirty="0">
                 <a:solidFill>
                   <a:srgbClr val="E67E22"/>
                 </a:solidFill>
@@ -16092,7 +16249,7 @@
           <a:bodyPr wrap="square" rtlCol="0" anchor="ctr"/>
           <a:lstStyle/>
           <a:p>
-            <a:pPr algn="l" indent="0" marL="0">
+            <a:pPr marL="0" indent="0" algn="l">
               <a:buNone/>
             </a:pPr>
             <a:r>
@@ -16131,7 +16288,7 @@
           <a:bodyPr wrap="square" rtlCol="0" anchor="ctr"/>
           <a:lstStyle/>
           <a:p>
-            <a:pPr algn="r" indent="0" marL="0">
+            <a:pPr marL="0" indent="0" algn="r">
               <a:buNone/>
             </a:pPr>
             <a:r>
@@ -16255,7 +16412,7 @@
           <a:bodyPr wrap="square" rtlCol="0" anchor="ctr"/>
           <a:lstStyle/>
           <a:p>
-            <a:pPr indent="0" marL="0">
+            <a:pPr marL="0" indent="0">
               <a:buNone/>
             </a:pPr>
             <a:r>
@@ -16273,6 +16430,59 @@
           </a:p>
         </p:txBody>
       </p:sp>
+      <p:sp>
+        <p:nvSpPr>
+          <p:cNvPr id="7" name="Shape 5"/>
+          <p:cNvSpPr/>
+          <p:nvPr/>
+        </p:nvSpPr>
+        <p:spPr>
+          <a:xfrm>
+            <a:off x="2964759" y="3913632"/>
+            <a:ext cx="6232003" cy="2871216"/>
+          </a:xfrm>
+          <a:prstGeom prst="roundRect">
+            <a:avLst>
+              <a:gd name="adj" fmla="val 2548"/>
+            </a:avLst>
+          </a:prstGeom>
+          <a:solidFill>
+            <a:srgbClr val="FFFFFF"/>
+          </a:solidFill>
+          <a:ln/>
+          <a:effectLst>
+            <a:outerShdw blurRad="76200" dist="25400" dir="5400000" algn="bl" rotWithShape="0">
+              <a:srgbClr val="1A1A1A">
+                <a:alpha val="18000"/>
+              </a:srgbClr>
+            </a:outerShdw>
+          </a:effectLst>
+        </p:spPr>
+      </p:sp>
+      <p:pic>
+        <p:nvPicPr>
+          <p:cNvPr id="8" name="Image 0" descr="assets/decision_table.png"/>
+          <p:cNvPicPr>
+            <a:picLocks noChangeAspect="1"/>
+          </p:cNvPicPr>
+          <p:nvPr/>
+        </p:nvPicPr>
+        <p:blipFill>
+          <a:blip r:embed="rId3"/>
+          <a:stretch>
+            <a:fillRect/>
+          </a:stretch>
+        </p:blipFill>
+        <p:spPr>
+          <a:xfrm>
+            <a:off x="3074487" y="4023360"/>
+            <a:ext cx="6012547" cy="2651760"/>
+          </a:xfrm>
+          <a:prstGeom prst="rect">
+            <a:avLst/>
+          </a:prstGeom>
+        </p:spPr>
+      </p:pic>
     </p:spTree>
   </p:cSld>
   <p:clrMapOvr>
@@ -16289,6 +16499,7 @@
         <a:solidFill>
           <a:srgbClr val="FFFFFF"/>
         </a:solidFill>
+        <a:effectLst/>
       </p:bgPr>
     </p:bg>
     <p:spTree>
@@ -16326,11 +16537,11 @@
           <a:bodyPr wrap="square" rtlCol="0" anchor="ctr"/>
           <a:lstStyle/>
           <a:p>
-            <a:pPr indent="0" marL="0">
+            <a:pPr marL="0" indent="0">
               <a:buNone/>
             </a:pPr>
             <a:r>
-              <a:rPr lang="en-US" sz="1200" b="1" spc="200" kern="0" dirty="0">
+              <a:rPr lang="en-US" sz="1200" b="1" kern="0" spc="200" dirty="0">
                 <a:solidFill>
                   <a:srgbClr val="E67E22"/>
                 </a:solidFill>
@@ -16365,7 +16576,7 @@
           <a:bodyPr wrap="square" rtlCol="0" anchor="ctr"/>
           <a:lstStyle/>
           <a:p>
-            <a:pPr algn="l" indent="0" marL="0">
+            <a:pPr marL="0" indent="0" algn="l">
               <a:buNone/>
             </a:pPr>
             <a:r>
@@ -16404,7 +16615,7 @@
           <a:bodyPr wrap="square" rtlCol="0" anchor="ctr"/>
           <a:lstStyle/>
           <a:p>
-            <a:pPr algn="r" indent="0" marL="0">
+            <a:pPr marL="0" indent="0" algn="r">
               <a:buNone/>
             </a:pPr>
             <a:r>
@@ -16443,7 +16654,7 @@
           <a:bodyPr wrap="square" rtlCol="0" anchor="t"/>
           <a:lstStyle/>
           <a:p>
-            <a:pPr indent="0" marL="0">
+            <a:pPr marL="0" indent="0">
               <a:buNone/>
             </a:pPr>
             <a:endParaRPr lang="en-US" dirty="0"/>
@@ -16471,7 +16682,7 @@
           <a:bodyPr wrap="square" rtlCol="0" anchor="t"/>
           <a:lstStyle/>
           <a:p>
-            <a:pPr indent="0" marL="0">
+            <a:pPr marL="0" indent="0">
               <a:lnSpc>
                 <a:spcPts val="1700"/>
               </a:lnSpc>
@@ -16485,12 +16696,6 @@
               </a:rPr>
               <a:t>PUE</a:t>
             </a:r>
-            <a:pPr indent="0" marL="0">
-              <a:lnSpc>
-                <a:spcPts val="1700"/>
-              </a:lnSpc>
-              <a:buNone/>
-            </a:pPr>
             <a:r>
               <a:rPr lang="en-US" sz="1250" dirty="0">
                 <a:solidFill>
@@ -16500,12 +16705,6 @@
               <a:t> : puissance IT + refroidissement, qui dépend de la décision (5% réutilisation, 10% stockage, 30% rejet)
 </a:t>
             </a:r>
-            <a:pPr indent="0" marL="0">
-              <a:lnSpc>
-                <a:spcPts val="1700"/>
-              </a:lnSpc>
-              <a:buNone/>
-            </a:pPr>
             <a:r>
               <a:rPr lang="en-US" sz="1350" b="1" dirty="0">
                 <a:solidFill>
@@ -16514,12 +16713,6 @@
               </a:rPr>
               <a:t>CUE</a:t>
             </a:r>
-            <a:pPr indent="0" marL="0">
-              <a:lnSpc>
-                <a:spcPts val="1700"/>
-              </a:lnSpc>
-              <a:buNone/>
-            </a:pPr>
             <a:r>
               <a:rPr lang="en-US" sz="1250" dirty="0">
                 <a:solidFill>
@@ -16529,12 +16722,6 @@
               <a:t> : émissions totales moins émissions évitées par la valorisation (chaudière à gaz, 200 gCO₂/kWh), plancher à 0
 </a:t>
             </a:r>
-            <a:pPr indent="0" marL="0">
-              <a:lnSpc>
-                <a:spcPts val="1700"/>
-              </a:lnSpc>
-              <a:buNone/>
-            </a:pPr>
             <a:r>
               <a:rPr lang="en-US" sz="1350" b="1" dirty="0">
                 <a:solidFill>
@@ -16543,12 +16730,6 @@
               </a:rPr>
               <a:t>WUE</a:t>
             </a:r>
-            <a:pPr indent="0" marL="0">
-              <a:lnSpc>
-                <a:spcPts val="1700"/>
-              </a:lnSpc>
-              <a:buNone/>
-            </a:pPr>
             <a:r>
               <a:rPr lang="en-US" sz="1250" dirty="0">
                 <a:solidFill>
@@ -16582,7 +16763,7 @@
           <a:bodyPr wrap="square" rtlCol="0" anchor="ctr"/>
           <a:lstStyle/>
           <a:p>
-            <a:pPr indent="0" marL="0">
+            <a:pPr marL="0" indent="0">
               <a:buNone/>
             </a:pPr>
             <a:r>
@@ -16600,6 +16781,59 @@
           </a:p>
         </p:txBody>
       </p:sp>
+      <p:sp>
+        <p:nvSpPr>
+          <p:cNvPr id="8" name="Shape 6"/>
+          <p:cNvSpPr/>
+          <p:nvPr/>
+        </p:nvSpPr>
+        <p:spPr>
+          <a:xfrm>
+            <a:off x="6062472" y="2039619"/>
+            <a:ext cx="5614416" cy="2577594"/>
+          </a:xfrm>
+          <a:prstGeom prst="roundRect">
+            <a:avLst>
+              <a:gd name="adj" fmla="val 2838"/>
+            </a:avLst>
+          </a:prstGeom>
+          <a:solidFill>
+            <a:srgbClr val="FFFFFF"/>
+          </a:solidFill>
+          <a:ln/>
+          <a:effectLst>
+            <a:outerShdw blurRad="76200" dist="25400" dir="5400000" algn="bl" rotWithShape="0">
+              <a:srgbClr val="1A1A1A">
+                <a:alpha val="18000"/>
+              </a:srgbClr>
+            </a:outerShdw>
+          </a:effectLst>
+        </p:spPr>
+      </p:sp>
+      <p:pic>
+        <p:nvPicPr>
+          <p:cNvPr id="9" name="Image 0" descr="assets/kpi_table.png"/>
+          <p:cNvPicPr>
+            <a:picLocks noChangeAspect="1"/>
+          </p:cNvPicPr>
+          <p:nvPr/>
+        </p:nvPicPr>
+        <p:blipFill>
+          <a:blip r:embed="rId3"/>
+          <a:stretch>
+            <a:fillRect/>
+          </a:stretch>
+        </p:blipFill>
+        <p:spPr>
+          <a:xfrm>
+            <a:off x="6172200" y="2149347"/>
+            <a:ext cx="5394960" cy="2358138"/>
+          </a:xfrm>
+          <a:prstGeom prst="rect">
+            <a:avLst/>
+          </a:prstGeom>
+        </p:spPr>
+      </p:pic>
     </p:spTree>
   </p:cSld>
   <p:clrMapOvr>
@@ -16616,6 +16850,7 @@
         <a:solidFill>
           <a:srgbClr val="FFFFFF"/>
         </a:solidFill>
+        <a:effectLst/>
       </p:bgPr>
     </p:bg>
     <p:spTree>
@@ -16653,11 +16888,11 @@
           <a:bodyPr wrap="square" rtlCol="0" anchor="ctr"/>
           <a:lstStyle/>
           <a:p>
-            <a:pPr indent="0" marL="0">
+            <a:pPr marL="0" indent="0">
               <a:buNone/>
             </a:pPr>
             <a:r>
-              <a:rPr lang="en-US" sz="1200" b="1" spc="200" kern="0" dirty="0">
+              <a:rPr lang="en-US" sz="1200" b="1" kern="0" spc="200" dirty="0">
                 <a:solidFill>
                   <a:srgbClr val="E67E22"/>
                 </a:solidFill>
@@ -16692,7 +16927,7 @@
           <a:bodyPr wrap="square" rtlCol="0" anchor="ctr"/>
           <a:lstStyle/>
           <a:p>
-            <a:pPr algn="l" indent="0" marL="0">
+            <a:pPr marL="0" indent="0" algn="l">
               <a:buNone/>
             </a:pPr>
             <a:r>
@@ -16731,7 +16966,7 @@
           <a:bodyPr wrap="square" rtlCol="0" anchor="ctr"/>
           <a:lstStyle/>
           <a:p>
-            <a:pPr algn="r" indent="0" marL="0">
+            <a:pPr marL="0" indent="0" algn="r">
               <a:buNone/>
             </a:pPr>
             <a:r>
@@ -16757,20 +16992,20 @@
         </p:nvSpPr>
         <p:spPr>
           <a:xfrm>
-            <a:off x="640080" y="5349240"/>
-            <a:ext cx="2606040" cy="1051560"/>
+            <a:off x="1514779" y="1719072"/>
+            <a:ext cx="9131962" cy="3419856"/>
           </a:xfrm>
           <a:prstGeom prst="roundRect">
             <a:avLst>
-              <a:gd name="adj" fmla="val 6957"/>
+              <a:gd name="adj" fmla="val 2139"/>
             </a:avLst>
           </a:prstGeom>
           <a:solidFill>
-            <a:srgbClr val="F4F7F8"/>
+            <a:srgbClr val="FFFFFF"/>
           </a:solidFill>
           <a:ln/>
           <a:effectLst>
-            <a:outerShdw sx="100000" sy="100000" kx="0" ky="0" algn="bl" rotWithShape="0" blurRad="76200" dist="25400" dir="5400000">
+            <a:outerShdw blurRad="76200" dist="25400" dir="5400000" algn="bl" rotWithShape="0">
               <a:srgbClr val="1A1A1A">
                 <a:alpha val="18000"/>
               </a:srgbClr>
@@ -16778,93 +17013,39 @@
           </a:effectLst>
         </p:spPr>
       </p:sp>
-      <p:sp>
-        <p:nvSpPr>
-          <p:cNvPr id="6" name="Text 4"/>
-          <p:cNvSpPr/>
-          <p:nvPr/>
-        </p:nvSpPr>
-        <p:spPr>
-          <a:xfrm>
-            <a:off x="640080" y="5422392"/>
-            <a:ext cx="2606040" cy="502920"/>
-          </a:xfrm>
-          <a:prstGeom prst="rect">
-            <a:avLst/>
-          </a:prstGeom>
-          <a:noFill/>
-          <a:ln/>
-        </p:spPr>
-        <p:txBody>
-          <a:bodyPr wrap="square" rtlCol="0" anchor="ctr"/>
-          <a:lstStyle/>
-          <a:p>
-            <a:pPr algn="ctr" indent="0" marL="0">
-              <a:buNone/>
-            </a:pPr>
-            <a:r>
-              <a:rPr lang="en-US" sz="2200" b="1" dirty="0">
-                <a:solidFill>
-                  <a:srgbClr val="1B7A8C"/>
-                </a:solidFill>
-                <a:latin typeface="Cambria" pitchFamily="34" charset="0"/>
-                <a:ea typeface="Cambria" pitchFamily="34" charset="-122"/>
-                <a:cs typeface="Cambria" pitchFamily="34" charset="-120"/>
-              </a:rPr>
-              <a:t>-25%</a:t>
-            </a:r>
-            <a:endParaRPr lang="en-US" sz="2200" dirty="0"/>
-          </a:p>
-        </p:txBody>
-      </p:sp>
-      <p:sp>
-        <p:nvSpPr>
-          <p:cNvPr id="7" name="Text 5"/>
-          <p:cNvSpPr/>
-          <p:nvPr/>
-        </p:nvSpPr>
-        <p:spPr>
-          <a:xfrm>
-            <a:off x="640080" y="5943600"/>
-            <a:ext cx="2606040" cy="384048"/>
-          </a:xfrm>
-          <a:prstGeom prst="rect">
-            <a:avLst/>
-          </a:prstGeom>
-          <a:noFill/>
-          <a:ln/>
-        </p:spPr>
-        <p:txBody>
-          <a:bodyPr wrap="square" rtlCol="0" anchor="ctr"/>
-          <a:lstStyle/>
-          <a:p>
-            <a:pPr algn="ctr" indent="0" marL="0">
-              <a:buNone/>
-            </a:pPr>
-            <a:r>
-              <a:rPr lang="en-US" sz="1000" dirty="0">
-                <a:solidFill>
-                  <a:srgbClr val="6B7280"/>
-                </a:solidFill>
-                <a:latin typeface="Calibri" pitchFamily="34" charset="0"/>
-                <a:ea typeface="Calibri" pitchFamily="34" charset="-122"/>
-                <a:cs typeface="Calibri" pitchFamily="34" charset="-120"/>
-              </a:rPr>
-              <a:t>PUE : 1.30 → 1.05</a:t>
-            </a:r>
-            <a:endParaRPr lang="en-US" sz="1000" dirty="0"/>
-          </a:p>
-        </p:txBody>
-      </p:sp>
-      <p:sp>
-        <p:nvSpPr>
-          <p:cNvPr id="8" name="Shape 6"/>
-          <p:cNvSpPr/>
-          <p:nvPr/>
-        </p:nvSpPr>
-        <p:spPr>
-          <a:xfrm>
-            <a:off x="3364992" y="5349240"/>
+      <p:pic>
+        <p:nvPicPr>
+          <p:cNvPr id="6" name="Image 0" descr="assets/comparaison_table.png"/>
+          <p:cNvPicPr>
+            <a:picLocks noChangeAspect="1"/>
+          </p:cNvPicPr>
+          <p:nvPr/>
+        </p:nvPicPr>
+        <p:blipFill>
+          <a:blip r:embed="rId3"/>
+          <a:stretch>
+            <a:fillRect/>
+          </a:stretch>
+        </p:blipFill>
+        <p:spPr>
+          <a:xfrm>
+            <a:off x="1624507" y="1828800"/>
+            <a:ext cx="8912506" cy="3200400"/>
+          </a:xfrm>
+          <a:prstGeom prst="rect">
+            <a:avLst/>
+          </a:prstGeom>
+        </p:spPr>
+      </p:pic>
+      <p:sp>
+        <p:nvSpPr>
+          <p:cNvPr id="7" name="Shape 4"/>
+          <p:cNvSpPr/>
+          <p:nvPr/>
+        </p:nvSpPr>
+        <p:spPr>
+          <a:xfrm>
+            <a:off x="640080" y="5349240"/>
             <a:ext cx="2606040" cy="1051560"/>
           </a:xfrm>
           <a:prstGeom prst="roundRect">
@@ -16877,7 +17058,7 @@
           </a:solidFill>
           <a:ln/>
           <a:effectLst>
-            <a:outerShdw sx="100000" sy="100000" kx="0" ky="0" algn="bl" rotWithShape="0" blurRad="76200" dist="25400" dir="5400000">
+            <a:outerShdw blurRad="76200" dist="25400" dir="5400000" algn="bl" rotWithShape="0">
               <a:srgbClr val="1A1A1A">
                 <a:alpha val="18000"/>
               </a:srgbClr>
@@ -16887,13 +17068,13 @@
       </p:sp>
       <p:sp>
         <p:nvSpPr>
-          <p:cNvPr id="9" name="Text 7"/>
-          <p:cNvSpPr/>
-          <p:nvPr/>
-        </p:nvSpPr>
-        <p:spPr>
-          <a:xfrm>
-            <a:off x="3364992" y="5422392"/>
+          <p:cNvPr id="8" name="Text 5"/>
+          <p:cNvSpPr/>
+          <p:nvPr/>
+        </p:nvSpPr>
+        <p:spPr>
+          <a:xfrm>
+            <a:off x="640080" y="5422392"/>
             <a:ext cx="2606040" cy="502920"/>
           </a:xfrm>
           <a:prstGeom prst="rect">
@@ -16906,19 +17087,19 @@
           <a:bodyPr wrap="square" rtlCol="0" anchor="ctr"/>
           <a:lstStyle/>
           <a:p>
-            <a:pPr algn="ctr" indent="0" marL="0">
+            <a:pPr marL="0" indent="0" algn="ctr">
               <a:buNone/>
             </a:pPr>
             <a:r>
               <a:rPr lang="en-US" sz="2200" b="1" dirty="0">
                 <a:solidFill>
-                  <a:srgbClr val="E67E22"/>
+                  <a:srgbClr val="1B7A8C"/>
                 </a:solidFill>
                 <a:latin typeface="Cambria" pitchFamily="34" charset="0"/>
                 <a:ea typeface="Cambria" pitchFamily="34" charset="-122"/>
                 <a:cs typeface="Cambria" pitchFamily="34" charset="-120"/>
               </a:rPr>
-              <a:t>-80%</a:t>
+              <a:t>-25%</a:t>
             </a:r>
             <a:endParaRPr lang="en-US" sz="2200" dirty="0"/>
           </a:p>
@@ -16926,13 +17107,13 @@
       </p:sp>
       <p:sp>
         <p:nvSpPr>
-          <p:cNvPr id="10" name="Text 8"/>
-          <p:cNvSpPr/>
-          <p:nvPr/>
-        </p:nvSpPr>
-        <p:spPr>
-          <a:xfrm>
-            <a:off x="3364992" y="5943600"/>
+          <p:cNvPr id="9" name="Text 6"/>
+          <p:cNvSpPr/>
+          <p:nvPr/>
+        </p:nvSpPr>
+        <p:spPr>
+          <a:xfrm>
+            <a:off x="640080" y="5943600"/>
             <a:ext cx="2606040" cy="384048"/>
           </a:xfrm>
           <a:prstGeom prst="rect">
@@ -16945,7 +17126,7 @@
           <a:bodyPr wrap="square" rtlCol="0" anchor="ctr"/>
           <a:lstStyle/>
           <a:p>
-            <a:pPr algn="ctr" indent="0" marL="0">
+            <a:pPr marL="0" indent="0" algn="ctr">
               <a:buNone/>
             </a:pPr>
             <a:r>
@@ -16957,7 +17138,7 @@
                 <a:ea typeface="Calibri" pitchFamily="34" charset="-122"/>
                 <a:cs typeface="Calibri" pitchFamily="34" charset="-120"/>
               </a:rPr>
-              <a:t>CUE : 221.36 → 43.86</a:t>
+              <a:t>PUE : 1.30 → 1.05</a:t>
             </a:r>
             <a:endParaRPr lang="en-US" sz="1000" dirty="0"/>
           </a:p>
@@ -16965,13 +17146,13 @@
       </p:sp>
       <p:sp>
         <p:nvSpPr>
-          <p:cNvPr id="11" name="Shape 9"/>
-          <p:cNvSpPr/>
-          <p:nvPr/>
-        </p:nvSpPr>
-        <p:spPr>
-          <a:xfrm>
-            <a:off x="6089904" y="5349240"/>
+          <p:cNvPr id="10" name="Shape 7"/>
+          <p:cNvSpPr/>
+          <p:nvPr/>
+        </p:nvSpPr>
+        <p:spPr>
+          <a:xfrm>
+            <a:off x="3364992" y="5349240"/>
             <a:ext cx="2606040" cy="1051560"/>
           </a:xfrm>
           <a:prstGeom prst="roundRect">
@@ -16984,7 +17165,7 @@
           </a:solidFill>
           <a:ln/>
           <a:effectLst>
-            <a:outerShdw sx="100000" sy="100000" kx="0" ky="0" algn="bl" rotWithShape="0" blurRad="76200" dist="25400" dir="5400000">
+            <a:outerShdw blurRad="76200" dist="25400" dir="5400000" algn="bl" rotWithShape="0">
               <a:srgbClr val="1A1A1A">
                 <a:alpha val="18000"/>
               </a:srgbClr>
@@ -16994,13 +17175,13 @@
       </p:sp>
       <p:sp>
         <p:nvSpPr>
-          <p:cNvPr id="12" name="Text 10"/>
-          <p:cNvSpPr/>
-          <p:nvPr/>
-        </p:nvSpPr>
-        <p:spPr>
-          <a:xfrm>
-            <a:off x="6089904" y="5422392"/>
+          <p:cNvPr id="11" name="Text 8"/>
+          <p:cNvSpPr/>
+          <p:nvPr/>
+        </p:nvSpPr>
+        <p:spPr>
+          <a:xfrm>
+            <a:off x="3364992" y="5422392"/>
             <a:ext cx="2606040" cy="502920"/>
           </a:xfrm>
           <a:prstGeom prst="rect">
@@ -17013,19 +17194,19 @@
           <a:bodyPr wrap="square" rtlCol="0" anchor="ctr"/>
           <a:lstStyle/>
           <a:p>
-            <a:pPr algn="ctr" indent="0" marL="0">
+            <a:pPr marL="0" indent="0" algn="ctr">
               <a:buNone/>
             </a:pPr>
             <a:r>
               <a:rPr lang="en-US" sz="2200" b="1" dirty="0">
                 <a:solidFill>
-                  <a:srgbClr val="2E8B57"/>
+                  <a:srgbClr val="E67E22"/>
                 </a:solidFill>
                 <a:latin typeface="Cambria" pitchFamily="34" charset="0"/>
                 <a:ea typeface="Cambria" pitchFamily="34" charset="-122"/>
                 <a:cs typeface="Cambria" pitchFamily="34" charset="-120"/>
               </a:rPr>
-              <a:t>-75%</a:t>
+              <a:t>-80%</a:t>
             </a:r>
             <a:endParaRPr lang="en-US" sz="2200" dirty="0"/>
           </a:p>
@@ -17033,13 +17214,13 @@
       </p:sp>
       <p:sp>
         <p:nvSpPr>
-          <p:cNvPr id="13" name="Text 11"/>
-          <p:cNvSpPr/>
-          <p:nvPr/>
-        </p:nvSpPr>
-        <p:spPr>
-          <a:xfrm>
-            <a:off x="6089904" y="5943600"/>
+          <p:cNvPr id="12" name="Text 9"/>
+          <p:cNvSpPr/>
+          <p:nvPr/>
+        </p:nvSpPr>
+        <p:spPr>
+          <a:xfrm>
+            <a:off x="3364992" y="5943600"/>
             <a:ext cx="2606040" cy="384048"/>
           </a:xfrm>
           <a:prstGeom prst="rect">
@@ -17052,7 +17233,7 @@
           <a:bodyPr wrap="square" rtlCol="0" anchor="ctr"/>
           <a:lstStyle/>
           <a:p>
-            <a:pPr algn="ctr" indent="0" marL="0">
+            <a:pPr marL="0" indent="0" algn="ctr">
               <a:buNone/>
             </a:pPr>
             <a:r>
@@ -17064,7 +17245,7 @@
                 <a:ea typeface="Calibri" pitchFamily="34" charset="-122"/>
                 <a:cs typeface="Calibri" pitchFamily="34" charset="-120"/>
               </a:rPr>
-              <a:t>WUE : 2.0 → 0.5 L/kWh</a:t>
+              <a:t>CUE : 221.36 → 43.86</a:t>
             </a:r>
             <a:endParaRPr lang="en-US" sz="1000" dirty="0"/>
           </a:p>
@@ -17072,13 +17253,13 @@
       </p:sp>
       <p:sp>
         <p:nvSpPr>
-          <p:cNvPr id="14" name="Shape 12"/>
-          <p:cNvSpPr/>
-          <p:nvPr/>
-        </p:nvSpPr>
-        <p:spPr>
-          <a:xfrm>
-            <a:off x="8814816" y="5349240"/>
+          <p:cNvPr id="13" name="Shape 10"/>
+          <p:cNvSpPr/>
+          <p:nvPr/>
+        </p:nvSpPr>
+        <p:spPr>
+          <a:xfrm>
+            <a:off x="6089904" y="5349240"/>
             <a:ext cx="2606040" cy="1051560"/>
           </a:xfrm>
           <a:prstGeom prst="roundRect">
@@ -17091,7 +17272,7 @@
           </a:solidFill>
           <a:ln/>
           <a:effectLst>
-            <a:outerShdw sx="100000" sy="100000" kx="0" ky="0" algn="bl" rotWithShape="0" blurRad="76200" dist="25400" dir="5400000">
+            <a:outerShdw blurRad="76200" dist="25400" dir="5400000" algn="bl" rotWithShape="0">
               <a:srgbClr val="1A1A1A">
                 <a:alpha val="18000"/>
               </a:srgbClr>
@@ -17101,13 +17282,13 @@
       </p:sp>
       <p:sp>
         <p:nvSpPr>
-          <p:cNvPr id="15" name="Text 13"/>
-          <p:cNvSpPr/>
-          <p:nvPr/>
-        </p:nvSpPr>
-        <p:spPr>
-          <a:xfrm>
-            <a:off x="8814816" y="5422392"/>
+          <p:cNvPr id="14" name="Text 11"/>
+          <p:cNvSpPr/>
+          <p:nvPr/>
+        </p:nvSpPr>
+        <p:spPr>
+          <a:xfrm>
+            <a:off x="6089904" y="5422392"/>
             <a:ext cx="2606040" cy="502920"/>
           </a:xfrm>
           <a:prstGeom prst="rect">
@@ -17120,18 +17301,125 @@
           <a:bodyPr wrap="square" rtlCol="0" anchor="ctr"/>
           <a:lstStyle/>
           <a:p>
-            <a:pPr algn="ctr" indent="0" marL="0">
+            <a:pPr marL="0" indent="0" algn="ctr">
               <a:buNone/>
             </a:pPr>
             <a:r>
               <a:rPr lang="en-US" sz="2200" b="1" dirty="0">
                 <a:solidFill>
-                  <a:srgbClr val="0B3D56"/>
+                  <a:srgbClr val="2E8B57"/>
                 </a:solidFill>
                 <a:latin typeface="Cambria" pitchFamily="34" charset="0"/>
                 <a:ea typeface="Cambria" pitchFamily="34" charset="-122"/>
                 <a:cs typeface="Cambria" pitchFamily="34" charset="-120"/>
               </a:rPr>
+              <a:t>-75%</a:t>
+            </a:r>
+            <a:endParaRPr lang="en-US" sz="2200" dirty="0"/>
+          </a:p>
+        </p:txBody>
+      </p:sp>
+      <p:sp>
+        <p:nvSpPr>
+          <p:cNvPr id="15" name="Text 12"/>
+          <p:cNvSpPr/>
+          <p:nvPr/>
+        </p:nvSpPr>
+        <p:spPr>
+          <a:xfrm>
+            <a:off x="6089904" y="5943600"/>
+            <a:ext cx="2606040" cy="384048"/>
+          </a:xfrm>
+          <a:prstGeom prst="rect">
+            <a:avLst/>
+          </a:prstGeom>
+          <a:noFill/>
+          <a:ln/>
+        </p:spPr>
+        <p:txBody>
+          <a:bodyPr wrap="square" rtlCol="0" anchor="ctr"/>
+          <a:lstStyle/>
+          <a:p>
+            <a:pPr marL="0" indent="0" algn="ctr">
+              <a:buNone/>
+            </a:pPr>
+            <a:r>
+              <a:rPr lang="en-US" sz="1000" dirty="0">
+                <a:solidFill>
+                  <a:srgbClr val="6B7280"/>
+                </a:solidFill>
+                <a:latin typeface="Calibri" pitchFamily="34" charset="0"/>
+                <a:ea typeface="Calibri" pitchFamily="34" charset="-122"/>
+                <a:cs typeface="Calibri" pitchFamily="34" charset="-120"/>
+              </a:rPr>
+              <a:t>WUE : 2.0 → 0.5 L/kWh</a:t>
+            </a:r>
+            <a:endParaRPr lang="en-US" sz="1000" dirty="0"/>
+          </a:p>
+        </p:txBody>
+      </p:sp>
+      <p:sp>
+        <p:nvSpPr>
+          <p:cNvPr id="16" name="Shape 13"/>
+          <p:cNvSpPr/>
+          <p:nvPr/>
+        </p:nvSpPr>
+        <p:spPr>
+          <a:xfrm>
+            <a:off x="8814816" y="5349240"/>
+            <a:ext cx="2606040" cy="1051560"/>
+          </a:xfrm>
+          <a:prstGeom prst="roundRect">
+            <a:avLst>
+              <a:gd name="adj" fmla="val 6957"/>
+            </a:avLst>
+          </a:prstGeom>
+          <a:solidFill>
+            <a:srgbClr val="F4F7F8"/>
+          </a:solidFill>
+          <a:ln/>
+          <a:effectLst>
+            <a:outerShdw blurRad="76200" dist="25400" dir="5400000" algn="bl" rotWithShape="0">
+              <a:srgbClr val="1A1A1A">
+                <a:alpha val="18000"/>
+              </a:srgbClr>
+            </a:outerShdw>
+          </a:effectLst>
+        </p:spPr>
+      </p:sp>
+      <p:sp>
+        <p:nvSpPr>
+          <p:cNvPr id="17" name="Text 14"/>
+          <p:cNvSpPr/>
+          <p:nvPr/>
+        </p:nvSpPr>
+        <p:spPr>
+          <a:xfrm>
+            <a:off x="8814816" y="5422392"/>
+            <a:ext cx="2606040" cy="502920"/>
+          </a:xfrm>
+          <a:prstGeom prst="rect">
+            <a:avLst/>
+          </a:prstGeom>
+          <a:noFill/>
+          <a:ln/>
+        </p:spPr>
+        <p:txBody>
+          <a:bodyPr wrap="square" rtlCol="0" anchor="ctr"/>
+          <a:lstStyle/>
+          <a:p>
+            <a:pPr marL="0" indent="0" algn="ctr">
+              <a:buNone/>
+            </a:pPr>
+            <a:r>
+              <a:rPr lang="en-US" sz="2200" b="1" dirty="0">
+                <a:solidFill>
+                  <a:srgbClr val="0B3D56"/>
+                </a:solidFill>
+                <a:latin typeface="Cambria" pitchFamily="34" charset="0"/>
+                <a:ea typeface="Cambria" pitchFamily="34" charset="-122"/>
+                <a:cs typeface="Cambria" pitchFamily="34" charset="-120"/>
+              </a:rPr>
               <a:t>0.80</a:t>
             </a:r>
             <a:endParaRPr lang="en-US" sz="2200" dirty="0"/>
@@ -17140,7 +17428,7 @@
       </p:sp>
       <p:sp>
         <p:nvSpPr>
-          <p:cNvPr id="16" name="Text 14"/>
+          <p:cNvPr id="18" name="Text 15"/>
           <p:cNvSpPr/>
           <p:nvPr/>
         </p:nvSpPr>
@@ -17159,7 +17447,7 @@
           <a:bodyPr wrap="square" rtlCol="0" anchor="ctr"/>
           <a:lstStyle/>
           <a:p>
-            <a:pPr algn="ctr" indent="0" marL="0">
+            <a:pPr marL="0" indent="0" algn="ctr">
               <a:buNone/>
             </a:pPr>
             <a:r>
@@ -17193,6 +17481,7 @@
         <a:solidFill>
           <a:srgbClr val="FFFFFF"/>
         </a:solidFill>
+        <a:effectLst/>
       </p:bgPr>
     </p:bg>
     <p:spTree>
@@ -17230,11 +17519,11 @@
           <a:bodyPr wrap="square" rtlCol="0" anchor="ctr"/>
           <a:lstStyle/>
           <a:p>
-            <a:pPr indent="0" marL="0">
+            <a:pPr marL="0" indent="0">
               <a:buNone/>
             </a:pPr>
             <a:r>
-              <a:rPr lang="en-US" sz="1200" b="1" spc="200" kern="0" dirty="0">
+              <a:rPr lang="en-US" sz="1200" b="1" kern="0" spc="200" dirty="0">
                 <a:solidFill>
                   <a:srgbClr val="E67E22"/>
                 </a:solidFill>
@@ -17269,7 +17558,7 @@
           <a:bodyPr wrap="square" rtlCol="0" anchor="ctr"/>
           <a:lstStyle/>
           <a:p>
-            <a:pPr algn="l" indent="0" marL="0">
+            <a:pPr marL="0" indent="0" algn="l">
               <a:buNone/>
             </a:pPr>
             <a:r>
@@ -17308,7 +17597,7 @@
           <a:bodyPr wrap="square" rtlCol="0" anchor="ctr"/>
           <a:lstStyle/>
           <a:p>
-            <a:pPr algn="r" indent="0" marL="0">
+            <a:pPr marL="0" indent="0" algn="r">
               <a:buNone/>
             </a:pPr>
             <a:r>
@@ -17328,7 +17617,60 @@
       </p:sp>
       <p:sp>
         <p:nvSpPr>
-          <p:cNvPr id="5" name="Text 3"/>
+          <p:cNvPr id="5" name="Shape 3"/>
+          <p:cNvSpPr/>
+          <p:nvPr/>
+        </p:nvSpPr>
+        <p:spPr>
+          <a:xfrm>
+            <a:off x="3685032" y="1505100"/>
+            <a:ext cx="4791456" cy="4670759"/>
+          </a:xfrm>
+          <a:prstGeom prst="roundRect">
+            <a:avLst>
+              <a:gd name="adj" fmla="val 1566"/>
+            </a:avLst>
+          </a:prstGeom>
+          <a:solidFill>
+            <a:srgbClr val="FFFFFF"/>
+          </a:solidFill>
+          <a:ln/>
+          <a:effectLst>
+            <a:outerShdw blurRad="76200" dist="25400" dir="5400000" algn="bl" rotWithShape="0">
+              <a:srgbClr val="1A1A1A">
+                <a:alpha val="18000"/>
+              </a:srgbClr>
+            </a:outerShdw>
+          </a:effectLst>
+        </p:spPr>
+      </p:sp>
+      <p:pic>
+        <p:nvPicPr>
+          <p:cNvPr id="6" name="Image 0" descr="assets/comparaison_graph.png"/>
+          <p:cNvPicPr>
+            <a:picLocks noChangeAspect="1"/>
+          </p:cNvPicPr>
+          <p:nvPr/>
+        </p:nvPicPr>
+        <p:blipFill>
+          <a:blip r:embed="rId3"/>
+          <a:stretch>
+            <a:fillRect/>
+          </a:stretch>
+        </p:blipFill>
+        <p:spPr>
+          <a:xfrm>
+            <a:off x="3794760" y="1614828"/>
+            <a:ext cx="4572000" cy="4451303"/>
+          </a:xfrm>
+          <a:prstGeom prst="rect">
+            <a:avLst/>
+          </a:prstGeom>
+        </p:spPr>
+      </p:pic>
+      <p:sp>
+        <p:nvSpPr>
+          <p:cNvPr id="7" name="Text 4"/>
           <p:cNvSpPr/>
           <p:nvPr/>
         </p:nvSpPr>
@@ -17347,7 +17689,7 @@
           <a:bodyPr wrap="square" rtlCol="0" anchor="t"/>
           <a:lstStyle/>
           <a:p>
-            <a:pPr algn="l" indent="0" marL="0">
+            <a:pPr marL="0" indent="0" algn="l">
               <a:lnSpc>
                 <a:spcPts val="1400"/>
               </a:lnSpc>
@@ -17361,19 +17703,61 @@
               </a:rPr>
               <a:t>PUE</a:t>
             </a:r>
-            <a:pPr algn="l" indent="0" marL="0">
+            <a:r>
+              <a:rPr lang="en-US" sz="1100" dirty="0">
+                <a:solidFill>
+                  <a:srgbClr val="1E2530"/>
+                </a:solidFill>
+              </a:rPr>
+              <a:t> — ligne rouge constante à 1.30 (gaspillage permanent) ; ligne verte à 1.05 (réutilisation continue)
+</a:t>
+            </a:r>
+            <a:endParaRPr lang="en-US" sz="1250" dirty="0"/>
+          </a:p>
+        </p:txBody>
+      </p:sp>
+      <p:sp>
+        <p:nvSpPr>
+          <p:cNvPr id="8" name="Text 5"/>
+          <p:cNvSpPr/>
+          <p:nvPr/>
+        </p:nvSpPr>
+        <p:spPr>
+          <a:xfrm>
+            <a:off x="8595360" y="1965960"/>
+            <a:ext cx="3200400" cy="1371600"/>
+          </a:xfrm>
+          <a:prstGeom prst="rect">
+            <a:avLst/>
+          </a:prstGeom>
+          <a:noFill/>
+          <a:ln/>
+        </p:spPr>
+        <p:txBody>
+          <a:bodyPr wrap="square" rtlCol="0" anchor="t"/>
+          <a:lstStyle/>
+          <a:p>
+            <a:pPr marL="0" indent="0" algn="l">
               <a:lnSpc>
                 <a:spcPts val="1400"/>
               </a:lnSpc>
               <a:buNone/>
             </a:pPr>
             <a:r>
+              <a:rPr lang="en-US" sz="1250" b="1" dirty="0">
+                <a:solidFill>
+                  <a:srgbClr val="E67E22"/>
+                </a:solidFill>
+              </a:rPr>
+              <a:t>CUE</a:t>
+            </a:r>
+            <a:r>
               <a:rPr lang="en-US" sz="1100" dirty="0">
                 <a:solidFill>
                   <a:srgbClr val="1E2530"/>
                 </a:solidFill>
               </a:rPr>
-              <a:t> — ligne rouge constante à 1.30 (gaspillage permanent) ; ligne verte à 1.05 (réutilisation continue)
+              <a:t> — les deux courbes augmentent le soir, mais la verte reste nettement sous la rouge grâce aux émissions évitées
 </a:t>
             </a:r>
             <a:endParaRPr lang="en-US" sz="1250" dirty="0"/>
@@ -17382,14 +17766,14 @@
       </p:sp>
       <p:sp>
         <p:nvSpPr>
-          <p:cNvPr id="6" name="Text 4"/>
-          <p:cNvSpPr/>
-          <p:nvPr/>
-        </p:nvSpPr>
-        <p:spPr>
-          <a:xfrm>
-            <a:off x="8595360" y="1965960"/>
-            <a:ext cx="3200400" cy="1371600"/>
+          <p:cNvPr id="9" name="Text 6"/>
+          <p:cNvSpPr/>
+          <p:nvPr/>
+        </p:nvSpPr>
+        <p:spPr>
+          <a:xfrm>
+            <a:off x="411480" y="4937760"/>
+            <a:ext cx="3200400" cy="1097280"/>
           </a:xfrm>
           <a:prstGeom prst="rect">
             <a:avLst/>
@@ -17401,7 +17785,7 @@
           <a:bodyPr wrap="square" rtlCol="0" anchor="t"/>
           <a:lstStyle/>
           <a:p>
-            <a:pPr algn="l" indent="0" marL="0">
+            <a:pPr marL="0" indent="0" algn="l">
               <a:lnSpc>
                 <a:spcPts val="1400"/>
               </a:lnSpc>
@@ -17410,71 +17794,11 @@
             <a:r>
               <a:rPr lang="en-US" sz="1250" b="1" dirty="0">
                 <a:solidFill>
-                  <a:srgbClr val="E67E22"/>
-                </a:solidFill>
-              </a:rPr>
-              <a:t>CUE</a:t>
-            </a:r>
-            <a:pPr algn="l" indent="0" marL="0">
-              <a:lnSpc>
-                <a:spcPts val="1400"/>
-              </a:lnSpc>
-              <a:buNone/>
-            </a:pPr>
-            <a:r>
-              <a:rPr lang="en-US" sz="1100" dirty="0">
-                <a:solidFill>
-                  <a:srgbClr val="1E2530"/>
-                </a:solidFill>
-              </a:rPr>
-              <a:t> — les deux courbes augmentent le soir, mais la verte reste nettement sous la rouge grâce aux émissions évitées
-</a:t>
-            </a:r>
-            <a:endParaRPr lang="en-US" sz="1250" dirty="0"/>
-          </a:p>
-        </p:txBody>
-      </p:sp>
-      <p:sp>
-        <p:nvSpPr>
-          <p:cNvPr id="7" name="Text 5"/>
-          <p:cNvSpPr/>
-          <p:nvPr/>
-        </p:nvSpPr>
-        <p:spPr>
-          <a:xfrm>
-            <a:off x="411480" y="4937760"/>
-            <a:ext cx="3200400" cy="1097280"/>
-          </a:xfrm>
-          <a:prstGeom prst="rect">
-            <a:avLst/>
-          </a:prstGeom>
-          <a:noFill/>
-          <a:ln/>
-        </p:spPr>
-        <p:txBody>
-          <a:bodyPr wrap="square" rtlCol="0" anchor="t"/>
-          <a:lstStyle/>
-          <a:p>
-            <a:pPr algn="l" indent="0" marL="0">
-              <a:lnSpc>
-                <a:spcPts val="1400"/>
-              </a:lnSpc>
-              <a:buNone/>
-            </a:pPr>
-            <a:r>
-              <a:rPr lang="en-US" sz="1250" b="1" dirty="0">
-                <a:solidFill>
                   <a:srgbClr val="2E8B57"/>
                 </a:solidFill>
               </a:rPr>
               <a:t>WUE</a:t>
             </a:r>
-            <a:pPr algn="l" indent="0" marL="0">
-              <a:lnSpc>
-                <a:spcPts val="1400"/>
-              </a:lnSpc>
-              <a:buNone/>
-            </a:pPr>
             <a:r>
               <a:rPr lang="en-US" sz="1100" dirty="0">
                 <a:solidFill>
@@ -17503,6 +17827,7 @@
         <a:solidFill>
           <a:srgbClr val="FFFFFF"/>
         </a:solidFill>
+        <a:effectLst/>
       </p:bgPr>
     </p:bg>
     <p:spTree>
@@ -17540,11 +17865,11 @@
           <a:bodyPr wrap="square" rtlCol="0" anchor="ctr"/>
           <a:lstStyle/>
           <a:p>
-            <a:pPr indent="0" marL="0">
+            <a:pPr marL="0" indent="0">
               <a:buNone/>
             </a:pPr>
             <a:r>
-              <a:rPr lang="en-US" sz="1200" b="1" spc="200" kern="0" dirty="0">
+              <a:rPr lang="en-US" sz="1200" b="1" kern="0" spc="200" dirty="0">
                 <a:solidFill>
                   <a:srgbClr val="E67E22"/>
                 </a:solidFill>
@@ -17579,7 +17904,7 @@
           <a:bodyPr wrap="square" rtlCol="0" anchor="ctr"/>
           <a:lstStyle/>
           <a:p>
-            <a:pPr algn="l" indent="0" marL="0">
+            <a:pPr marL="0" indent="0" algn="l">
               <a:buNone/>
             </a:pPr>
             <a:r>
@@ -17618,7 +17943,7 @@
           <a:bodyPr wrap="square" rtlCol="0" anchor="ctr"/>
           <a:lstStyle/>
           <a:p>
-            <a:pPr algn="r" indent="0" marL="0">
+            <a:pPr marL="0" indent="0" algn="r">
               <a:buNone/>
             </a:pPr>
             <a:r>
@@ -17652,21 +17977,69 @@
         </p:nvGraphicFramePr>
         <p:xfrm>
           <a:off x="457200" y="1783080"/>
-          <a:ext cx="11292840" cy="914400"/>
+          <a:ext cx="11292840" cy="2743200"/>
         </p:xfrm>
         <a:graphic>
           <a:graphicData uri="http://schemas.openxmlformats.org/drawingml/2006/table">
             <a:tbl>
               <a:tblPr/>
               <a:tblGrid>
-                <a:gridCol w="2331720"/>
-                <a:gridCol w="1371600"/>
-                <a:gridCol w="1554480"/>
-                <a:gridCol w="1554480"/>
-                <a:gridCol w="1051560"/>
-                <a:gridCol w="1051560"/>
-                <a:gridCol w="1051560"/>
-                <a:gridCol w="1325880"/>
+                <a:gridCol w="2331720">
+                  <a:extLst>
+                    <a:ext uri="{9D8B030D-6E8A-4147-A177-3AD203B41FA5}">
+                      <a16:colId xmlns:a16="http://schemas.microsoft.com/office/drawing/2014/main" val="20000"/>
+                    </a:ext>
+                  </a:extLst>
+                </a:gridCol>
+                <a:gridCol w="1371600">
+                  <a:extLst>
+                    <a:ext uri="{9D8B030D-6E8A-4147-A177-3AD203B41FA5}">
+                      <a16:colId xmlns:a16="http://schemas.microsoft.com/office/drawing/2014/main" val="20001"/>
+                    </a:ext>
+                  </a:extLst>
+                </a:gridCol>
+                <a:gridCol w="1554480">
+                  <a:extLst>
+                    <a:ext uri="{9D8B030D-6E8A-4147-A177-3AD203B41FA5}">
+                      <a16:colId xmlns:a16="http://schemas.microsoft.com/office/drawing/2014/main" val="20002"/>
+                    </a:ext>
+                  </a:extLst>
+                </a:gridCol>
+                <a:gridCol w="1554480">
+                  <a:extLst>
+                    <a:ext uri="{9D8B030D-6E8A-4147-A177-3AD203B41FA5}">
+                      <a16:colId xmlns:a16="http://schemas.microsoft.com/office/drawing/2014/main" val="20003"/>
+                    </a:ext>
+                  </a:extLst>
+                </a:gridCol>
+                <a:gridCol w="1051560">
+                  <a:extLst>
+                    <a:ext uri="{9D8B030D-6E8A-4147-A177-3AD203B41FA5}">
+                      <a16:colId xmlns:a16="http://schemas.microsoft.com/office/drawing/2014/main" val="20004"/>
+                    </a:ext>
+                  </a:extLst>
+                </a:gridCol>
+                <a:gridCol w="1051560">
+                  <a:extLst>
+                    <a:ext uri="{9D8B030D-6E8A-4147-A177-3AD203B41FA5}">
+                      <a16:colId xmlns:a16="http://schemas.microsoft.com/office/drawing/2014/main" val="20005"/>
+                    </a:ext>
+                  </a:extLst>
+                </a:gridCol>
+                <a:gridCol w="1051560">
+                  <a:extLst>
+                    <a:ext uri="{9D8B030D-6E8A-4147-A177-3AD203B41FA5}">
+                      <a16:colId xmlns:a16="http://schemas.microsoft.com/office/drawing/2014/main" val="20006"/>
+                    </a:ext>
+                  </a:extLst>
+                </a:gridCol>
+                <a:gridCol w="1325880">
+                  <a:extLst>
+                    <a:ext uri="{9D8B030D-6E8A-4147-A177-3AD203B41FA5}">
+                      <a16:colId xmlns:a16="http://schemas.microsoft.com/office/drawing/2014/main" val="20007"/>
+                    </a:ext>
+                  </a:extLst>
+                </a:gridCol>
               </a:tblGrid>
               <a:tr h="685800">
                 <a:tc>
@@ -17674,7 +18047,7 @@
                     <a:bodyPr/>
                     <a:lstStyle/>
                     <a:p>
-                      <a:pPr algn="ctr" indent="0" marL="0">
+                      <a:pPr marL="0" indent="0" algn="ctr">
                         <a:buNone/>
                       </a:pPr>
                       <a:r>
@@ -17695,7 +18068,7 @@
                       </a:endParaRPr>
                     </a:p>
                   </a:txBody>
-                  <a:tcPr marL="91440" marR="91440" marT="45720" marB="45720" anchor="ctr">
+                  <a:tcPr anchor="ctr">
                     <a:lnL w="9525" cap="flat" cmpd="sng" algn="ctr">
                       <a:solidFill>
                         <a:srgbClr val="DDE3E6"/>
@@ -17742,7 +18115,7 @@
                     <a:bodyPr/>
                     <a:lstStyle/>
                     <a:p>
-                      <a:pPr algn="ctr" indent="0" marL="0">
+                      <a:pPr marL="0" indent="0" algn="ctr">
                         <a:buNone/>
                       </a:pPr>
                       <a:r>
@@ -17763,7 +18136,7 @@
                       </a:endParaRPr>
                     </a:p>
                   </a:txBody>
-                  <a:tcPr marL="91440" marR="91440" marT="45720" marB="45720" anchor="ctr">
+                  <a:tcPr anchor="ctr">
                     <a:lnL w="9525" cap="flat" cmpd="sng" algn="ctr">
                       <a:solidFill>
                         <a:srgbClr val="DDE3E6"/>
@@ -17810,7 +18183,7 @@
                     <a:bodyPr/>
                     <a:lstStyle/>
                     <a:p>
-                      <a:pPr algn="ctr" indent="0" marL="0">
+                      <a:pPr marL="0" indent="0" algn="ctr">
                         <a:buNone/>
                       </a:pPr>
                       <a:r>
@@ -17831,7 +18204,7 @@
                       </a:endParaRPr>
                     </a:p>
                   </a:txBody>
-                  <a:tcPr marL="91440" marR="91440" marT="45720" marB="45720" anchor="ctr">
+                  <a:tcPr anchor="ctr">
                     <a:lnL w="9525" cap="flat" cmpd="sng" algn="ctr">
                       <a:solidFill>
                         <a:srgbClr val="DDE3E6"/>
@@ -17878,7 +18251,7 @@
                     <a:bodyPr/>
                     <a:lstStyle/>
                     <a:p>
-                      <a:pPr algn="ctr" indent="0" marL="0">
+                      <a:pPr marL="0" indent="0" algn="ctr">
                         <a:buNone/>
                       </a:pPr>
                       <a:r>
@@ -17899,7 +18272,7 @@
                       </a:endParaRPr>
                     </a:p>
                   </a:txBody>
-                  <a:tcPr marL="91440" marR="91440" marT="45720" marB="45720" anchor="ctr">
+                  <a:tcPr anchor="ctr">
                     <a:lnL w="9525" cap="flat" cmpd="sng" algn="ctr">
                       <a:solidFill>
                         <a:srgbClr val="DDE3E6"/>
@@ -17946,7 +18319,7 @@
                     <a:bodyPr/>
                     <a:lstStyle/>
                     <a:p>
-                      <a:pPr algn="ctr" indent="0" marL="0">
+                      <a:pPr marL="0" indent="0" algn="ctr">
                         <a:buNone/>
                       </a:pPr>
                       <a:r>
@@ -17967,7 +18340,7 @@
                       </a:endParaRPr>
                     </a:p>
                   </a:txBody>
-                  <a:tcPr marL="91440" marR="91440" marT="45720" marB="45720" anchor="ctr">
+                  <a:tcPr anchor="ctr">
                     <a:lnL w="9525" cap="flat" cmpd="sng" algn="ctr">
                       <a:solidFill>
                         <a:srgbClr val="DDE3E6"/>
@@ -18014,7 +18387,7 @@
                     <a:bodyPr/>
                     <a:lstStyle/>
                     <a:p>
-                      <a:pPr algn="ctr" indent="0" marL="0">
+                      <a:pPr marL="0" indent="0" algn="ctr">
                         <a:buNone/>
                       </a:pPr>
                       <a:r>
@@ -18035,7 +18408,7 @@
                       </a:endParaRPr>
                     </a:p>
                   </a:txBody>
-                  <a:tcPr marL="91440" marR="91440" marT="45720" marB="45720" anchor="ctr">
+                  <a:tcPr anchor="ctr">
                     <a:lnL w="9525" cap="flat" cmpd="sng" algn="ctr">
                       <a:solidFill>
                         <a:srgbClr val="DDE3E6"/>
@@ -18082,7 +18455,7 @@
                     <a:bodyPr/>
                     <a:lstStyle/>
                     <a:p>
-                      <a:pPr algn="ctr" indent="0" marL="0">
+                      <a:pPr marL="0" indent="0" algn="ctr">
                         <a:buNone/>
                       </a:pPr>
                       <a:r>
@@ -18103,7 +18476,7 @@
                       </a:endParaRPr>
                     </a:p>
                   </a:txBody>
-                  <a:tcPr marL="91440" marR="91440" marT="45720" marB="45720" anchor="ctr">
+                  <a:tcPr anchor="ctr">
                     <a:lnL w="9525" cap="flat" cmpd="sng" algn="ctr">
                       <a:solidFill>
                         <a:srgbClr val="DDE3E6"/>
@@ -18150,7 +18523,7 @@
                     <a:bodyPr/>
                     <a:lstStyle/>
                     <a:p>
-                      <a:pPr algn="ctr" indent="0" marL="0">
+                      <a:pPr marL="0" indent="0" algn="ctr">
                         <a:buNone/>
                       </a:pPr>
                       <a:r>
@@ -18171,7 +18544,7 @@
                       </a:endParaRPr>
                     </a:p>
                   </a:txBody>
-                  <a:tcPr marL="91440" marR="91440" marT="45720" marB="45720" anchor="ctr">
+                  <a:tcPr anchor="ctr">
                     <a:lnL w="9525" cap="flat" cmpd="sng" algn="ctr">
                       <a:solidFill>
                         <a:srgbClr val="DDE3E6"/>
@@ -18213,6 +18586,11 @@
                     </a:solidFill>
                   </a:tcPr>
                 </a:tc>
+                <a:extLst>
+                  <a:ext uri="{0D108BD9-81ED-4DB2-BD59-A6C34878D82A}">
+                    <a16:rowId xmlns:a16="http://schemas.microsoft.com/office/drawing/2014/main" val="10000"/>
+                  </a:ext>
+                </a:extLst>
               </a:tr>
               <a:tr h="685800">
                 <a:tc>
@@ -18220,7 +18598,7 @@
                     <a:bodyPr/>
                     <a:lstStyle/>
                     <a:p>
-                      <a:pPr algn="l" indent="0" marL="0">
+                      <a:pPr marL="0" indent="0" algn="l">
                         <a:buNone/>
                       </a:pPr>
                       <a:r>
@@ -18241,7 +18619,7 @@
                       </a:endParaRPr>
                     </a:p>
                   </a:txBody>
-                  <a:tcPr marL="91440" marR="91440" marT="45720" marB="45720" anchor="ctr">
+                  <a:tcPr anchor="ctr">
                     <a:lnL w="9525" cap="flat" cmpd="sng" algn="ctr">
                       <a:solidFill>
                         <a:srgbClr val="DDE3E6"/>
@@ -18288,7 +18666,7 @@
                     <a:bodyPr/>
                     <a:lstStyle/>
                     <a:p>
-                      <a:pPr algn="ctr" indent="0" marL="0">
+                      <a:pPr marL="0" indent="0" algn="ctr">
                         <a:buNone/>
                       </a:pPr>
                       <a:r>
@@ -18309,7 +18687,7 @@
                       </a:endParaRPr>
                     </a:p>
                   </a:txBody>
-                  <a:tcPr marL="91440" marR="91440" marT="45720" marB="45720" anchor="ctr">
+                  <a:tcPr anchor="ctr">
                     <a:lnL w="9525" cap="flat" cmpd="sng" algn="ctr">
                       <a:solidFill>
                         <a:srgbClr val="DDE3E6"/>
@@ -18356,7 +18734,7 @@
                     <a:bodyPr/>
                     <a:lstStyle/>
                     <a:p>
-                      <a:pPr algn="ctr" indent="0" marL="0">
+                      <a:pPr marL="0" indent="0" algn="ctr">
                         <a:buNone/>
                       </a:pPr>
                       <a:r>
@@ -18377,7 +18755,7 @@
                       </a:endParaRPr>
                     </a:p>
                   </a:txBody>
-                  <a:tcPr marL="91440" marR="91440" marT="45720" marB="45720" anchor="ctr">
+                  <a:tcPr anchor="ctr">
                     <a:lnL w="9525" cap="flat" cmpd="sng" algn="ctr">
                       <a:solidFill>
                         <a:srgbClr val="DDE3E6"/>
@@ -18424,7 +18802,7 @@
                     <a:bodyPr/>
                     <a:lstStyle/>
                     <a:p>
-                      <a:pPr algn="ctr" indent="0" marL="0">
+                      <a:pPr marL="0" indent="0" algn="ctr">
                         <a:buNone/>
                       </a:pPr>
                       <a:r>
@@ -18445,7 +18823,7 @@
                       </a:endParaRPr>
                     </a:p>
                   </a:txBody>
-                  <a:tcPr marL="91440" marR="91440" marT="45720" marB="45720" anchor="ctr">
+                  <a:tcPr anchor="ctr">
                     <a:lnL w="9525" cap="flat" cmpd="sng" algn="ctr">
                       <a:solidFill>
                         <a:srgbClr val="DDE3E6"/>
@@ -18492,7 +18870,7 @@
                     <a:bodyPr/>
                     <a:lstStyle/>
                     <a:p>
-                      <a:pPr algn="ctr" indent="0" marL="0">
+                      <a:pPr marL="0" indent="0" algn="ctr">
                         <a:buNone/>
                       </a:pPr>
                       <a:r>
@@ -18513,7 +18891,7 @@
                       </a:endParaRPr>
                     </a:p>
                   </a:txBody>
-                  <a:tcPr marL="91440" marR="91440" marT="45720" marB="45720" anchor="ctr">
+                  <a:tcPr anchor="ctr">
                     <a:lnL w="9525" cap="flat" cmpd="sng" algn="ctr">
                       <a:solidFill>
                         <a:srgbClr val="DDE3E6"/>
@@ -18560,7 +18938,7 @@
                     <a:bodyPr/>
                     <a:lstStyle/>
                     <a:p>
-                      <a:pPr algn="ctr" indent="0" marL="0">
+                      <a:pPr marL="0" indent="0" algn="ctr">
                         <a:buNone/>
                       </a:pPr>
                       <a:r>
@@ -18581,7 +18959,7 @@
                       </a:endParaRPr>
                     </a:p>
                   </a:txBody>
-                  <a:tcPr marL="91440" marR="91440" marT="45720" marB="45720" anchor="ctr">
+                  <a:tcPr anchor="ctr">
                     <a:lnL w="9525" cap="flat" cmpd="sng" algn="ctr">
                       <a:solidFill>
                         <a:srgbClr val="DDE3E6"/>
@@ -18628,7 +19006,7 @@
                     <a:bodyPr/>
                     <a:lstStyle/>
                     <a:p>
-                      <a:pPr algn="ctr" indent="0" marL="0">
+                      <a:pPr marL="0" indent="0" algn="ctr">
                         <a:buNone/>
                       </a:pPr>
                       <a:r>
@@ -18649,7 +19027,7 @@
                       </a:endParaRPr>
                     </a:p>
                   </a:txBody>
-                  <a:tcPr marL="91440" marR="91440" marT="45720" marB="45720" anchor="ctr">
+                  <a:tcPr anchor="ctr">
                     <a:lnL w="9525" cap="flat" cmpd="sng" algn="ctr">
                       <a:solidFill>
                         <a:srgbClr val="DDE3E6"/>
@@ -18696,7 +19074,7 @@
                     <a:bodyPr/>
                     <a:lstStyle/>
                     <a:p>
-                      <a:pPr algn="ctr" indent="0" marL="0">
+                      <a:pPr marL="0" indent="0" algn="ctr">
                         <a:buNone/>
                       </a:pPr>
                       <a:r>
@@ -18717,7 +19095,7 @@
                       </a:endParaRPr>
                     </a:p>
                   </a:txBody>
-                  <a:tcPr marL="91440" marR="91440" marT="45720" marB="45720" anchor="ctr">
+                  <a:tcPr anchor="ctr">
                     <a:lnL w="9525" cap="flat" cmpd="sng" algn="ctr">
                       <a:solidFill>
                         <a:srgbClr val="DDE3E6"/>
@@ -18759,6 +19137,11 @@
                     </a:solidFill>
                   </a:tcPr>
                 </a:tc>
+                <a:extLst>
+                  <a:ext uri="{0D108BD9-81ED-4DB2-BD59-A6C34878D82A}">
+                    <a16:rowId xmlns:a16="http://schemas.microsoft.com/office/drawing/2014/main" val="10001"/>
+                  </a:ext>
+                </a:extLst>
               </a:tr>
               <a:tr h="685800">
                 <a:tc>
@@ -18766,7 +19149,7 @@
                     <a:bodyPr/>
                     <a:lstStyle/>
                     <a:p>
-                      <a:pPr algn="l" indent="0" marL="0">
+                      <a:pPr marL="0" indent="0" algn="l">
                         <a:buNone/>
                       </a:pPr>
                       <a:r>
@@ -18787,7 +19170,7 @@
                       </a:endParaRPr>
                     </a:p>
                   </a:txBody>
-                  <a:tcPr marL="91440" marR="91440" marT="45720" marB="45720" anchor="ctr">
+                  <a:tcPr anchor="ctr">
                     <a:lnL w="9525" cap="flat" cmpd="sng" algn="ctr">
                       <a:solidFill>
                         <a:srgbClr val="DDE3E6"/>
@@ -18834,7 +19217,7 @@
                     <a:bodyPr/>
                     <a:lstStyle/>
                     <a:p>
-                      <a:pPr algn="ctr" indent="0" marL="0">
+                      <a:pPr marL="0" indent="0" algn="ctr">
                         <a:buNone/>
                       </a:pPr>
                       <a:r>
@@ -18855,7 +19238,7 @@
                       </a:endParaRPr>
                     </a:p>
                   </a:txBody>
-                  <a:tcPr marL="91440" marR="91440" marT="45720" marB="45720" anchor="ctr">
+                  <a:tcPr anchor="ctr">
                     <a:lnL w="9525" cap="flat" cmpd="sng" algn="ctr">
                       <a:solidFill>
                         <a:srgbClr val="DDE3E6"/>
@@ -18902,7 +19285,7 @@
                     <a:bodyPr/>
                     <a:lstStyle/>
                     <a:p>
-                      <a:pPr algn="ctr" indent="0" marL="0">
+                      <a:pPr marL="0" indent="0" algn="ctr">
                         <a:buNone/>
                       </a:pPr>
                       <a:r>
@@ -18923,7 +19306,7 @@
                       </a:endParaRPr>
                     </a:p>
                   </a:txBody>
-                  <a:tcPr marL="91440" marR="91440" marT="45720" marB="45720" anchor="ctr">
+                  <a:tcPr anchor="ctr">
                     <a:lnL w="9525" cap="flat" cmpd="sng" algn="ctr">
                       <a:solidFill>
                         <a:srgbClr val="DDE3E6"/>
@@ -18970,7 +19353,7 @@
                     <a:bodyPr/>
                     <a:lstStyle/>
                     <a:p>
-                      <a:pPr algn="ctr" indent="0" marL="0">
+                      <a:pPr marL="0" indent="0" algn="ctr">
                         <a:buNone/>
                       </a:pPr>
                       <a:r>
@@ -18991,7 +19374,7 @@
                       </a:endParaRPr>
                     </a:p>
                   </a:txBody>
-                  <a:tcPr marL="91440" marR="91440" marT="45720" marB="45720" anchor="ctr">
+                  <a:tcPr anchor="ctr">
                     <a:lnL w="9525" cap="flat" cmpd="sng" algn="ctr">
                       <a:solidFill>
                         <a:srgbClr val="DDE3E6"/>
@@ -19038,7 +19421,7 @@
                     <a:bodyPr/>
                     <a:lstStyle/>
                     <a:p>
-                      <a:pPr algn="ctr" indent="0" marL="0">
+                      <a:pPr marL="0" indent="0" algn="ctr">
                         <a:buNone/>
                       </a:pPr>
                       <a:r>
@@ -19059,7 +19442,7 @@
                       </a:endParaRPr>
                     </a:p>
                   </a:txBody>
-                  <a:tcPr marL="91440" marR="91440" marT="45720" marB="45720" anchor="ctr">
+                  <a:tcPr anchor="ctr">
                     <a:lnL w="9525" cap="flat" cmpd="sng" algn="ctr">
                       <a:solidFill>
                         <a:srgbClr val="DDE3E6"/>
@@ -19106,7 +19489,7 @@
                     <a:bodyPr/>
                     <a:lstStyle/>
                     <a:p>
-                      <a:pPr algn="ctr" indent="0" marL="0">
+                      <a:pPr marL="0" indent="0" algn="ctr">
                         <a:buNone/>
                       </a:pPr>
                       <a:r>
@@ -19127,7 +19510,7 @@
                       </a:endParaRPr>
                     </a:p>
                   </a:txBody>
-                  <a:tcPr marL="91440" marR="91440" marT="45720" marB="45720" anchor="ctr">
+                  <a:tcPr anchor="ctr">
                     <a:lnL w="9525" cap="flat" cmpd="sng" algn="ctr">
                       <a:solidFill>
                         <a:srgbClr val="DDE3E6"/>
@@ -19174,7 +19557,7 @@
                     <a:bodyPr/>
                     <a:lstStyle/>
                     <a:p>
-                      <a:pPr algn="ctr" indent="0" marL="0">
+                      <a:pPr marL="0" indent="0" algn="ctr">
                         <a:buNone/>
                       </a:pPr>
                       <a:r>
@@ -19195,7 +19578,7 @@
                       </a:endParaRPr>
                     </a:p>
                   </a:txBody>
-                  <a:tcPr marL="91440" marR="91440" marT="45720" marB="45720" anchor="ctr">
+                  <a:tcPr anchor="ctr">
                     <a:lnL w="9525" cap="flat" cmpd="sng" algn="ctr">
                       <a:solidFill>
                         <a:srgbClr val="DDE3E6"/>
@@ -19242,7 +19625,7 @@
                     <a:bodyPr/>
                     <a:lstStyle/>
                     <a:p>
-                      <a:pPr algn="ctr" indent="0" marL="0">
+                      <a:pPr marL="0" indent="0" algn="ctr">
                         <a:buNone/>
                       </a:pPr>
                       <a:r>
@@ -19263,7 +19646,7 @@
                       </a:endParaRPr>
                     </a:p>
                   </a:txBody>
-                  <a:tcPr marL="91440" marR="91440" marT="45720" marB="45720" anchor="ctr">
+                  <a:tcPr anchor="ctr">
                     <a:lnL w="9525" cap="flat" cmpd="sng" algn="ctr">
                       <a:solidFill>
                         <a:srgbClr val="DDE3E6"/>
@@ -19305,6 +19688,11 @@
                     </a:solidFill>
                   </a:tcPr>
                 </a:tc>
+                <a:extLst>
+                  <a:ext uri="{0D108BD9-81ED-4DB2-BD59-A6C34878D82A}">
+                    <a16:rowId xmlns:a16="http://schemas.microsoft.com/office/drawing/2014/main" val="10002"/>
+                  </a:ext>
+                </a:extLst>
               </a:tr>
               <a:tr h="685800">
                 <a:tc>
@@ -19312,7 +19700,7 @@
                     <a:bodyPr/>
                     <a:lstStyle/>
                     <a:p>
-                      <a:pPr algn="l" indent="0" marL="0">
+                      <a:pPr marL="0" indent="0" algn="l">
                         <a:buNone/>
                       </a:pPr>
                       <a:r>
@@ -19333,7 +19721,7 @@
                       </a:endParaRPr>
                     </a:p>
                   </a:txBody>
-                  <a:tcPr marL="91440" marR="91440" marT="45720" marB="45720" anchor="ctr">
+                  <a:tcPr anchor="ctr">
                     <a:lnL w="9525" cap="flat" cmpd="sng" algn="ctr">
                       <a:solidFill>
                         <a:srgbClr val="DDE3E6"/>
@@ -19380,7 +19768,7 @@
                     <a:bodyPr/>
                     <a:lstStyle/>
                     <a:p>
-                      <a:pPr algn="ctr" indent="0" marL="0">
+                      <a:pPr marL="0" indent="0" algn="ctr">
                         <a:buNone/>
                       </a:pPr>
                       <a:r>
@@ -19401,7 +19789,7 @@
                       </a:endParaRPr>
                     </a:p>
                   </a:txBody>
-                  <a:tcPr marL="91440" marR="91440" marT="45720" marB="45720" anchor="ctr">
+                  <a:tcPr anchor="ctr">
                     <a:lnL w="9525" cap="flat" cmpd="sng" algn="ctr">
                       <a:solidFill>
                         <a:srgbClr val="DDE3E6"/>
@@ -19448,7 +19836,7 @@
                     <a:bodyPr/>
                     <a:lstStyle/>
                     <a:p>
-                      <a:pPr algn="ctr" indent="0" marL="0">
+                      <a:pPr marL="0" indent="0" algn="ctr">
                         <a:buNone/>
                       </a:pPr>
                       <a:r>
@@ -19469,7 +19857,7 @@
                       </a:endParaRPr>
                     </a:p>
                   </a:txBody>
-                  <a:tcPr marL="91440" marR="91440" marT="45720" marB="45720" anchor="ctr">
+                  <a:tcPr anchor="ctr">
                     <a:lnL w="9525" cap="flat" cmpd="sng" algn="ctr">
                       <a:solidFill>
                         <a:srgbClr val="DDE3E6"/>
@@ -19516,7 +19904,7 @@
                     <a:bodyPr/>
                     <a:lstStyle/>
                     <a:p>
-                      <a:pPr algn="ctr" indent="0" marL="0">
+                      <a:pPr marL="0" indent="0" algn="ctr">
                         <a:buNone/>
                       </a:pPr>
                       <a:r>
@@ -19537,7 +19925,7 @@
                       </a:endParaRPr>
                     </a:p>
                   </a:txBody>
-                  <a:tcPr marL="91440" marR="91440" marT="45720" marB="45720" anchor="ctr">
+                  <a:tcPr anchor="ctr">
                     <a:lnL w="9525" cap="flat" cmpd="sng" algn="ctr">
                       <a:solidFill>
                         <a:srgbClr val="DDE3E6"/>
@@ -19584,7 +19972,7 @@
                     <a:bodyPr/>
                     <a:lstStyle/>
                     <a:p>
-                      <a:pPr algn="ctr" indent="0" marL="0">
+                      <a:pPr marL="0" indent="0" algn="ctr">
                         <a:buNone/>
                       </a:pPr>
                       <a:r>
@@ -19605,7 +19993,7 @@
                       </a:endParaRPr>
                     </a:p>
                   </a:txBody>
-                  <a:tcPr marL="91440" marR="91440" marT="45720" marB="45720" anchor="ctr">
+                  <a:tcPr anchor="ctr">
                     <a:lnL w="9525" cap="flat" cmpd="sng" algn="ctr">
                       <a:solidFill>
                         <a:srgbClr val="DDE3E6"/>
@@ -19652,7 +20040,7 @@
                     <a:bodyPr/>
                     <a:lstStyle/>
                     <a:p>
-                      <a:pPr algn="ctr" indent="0" marL="0">
+                      <a:pPr marL="0" indent="0" algn="ctr">
                         <a:buNone/>
                       </a:pPr>
                       <a:r>
@@ -19673,7 +20061,7 @@
                       </a:endParaRPr>
                     </a:p>
                   </a:txBody>
-                  <a:tcPr marL="91440" marR="91440" marT="45720" marB="45720" anchor="ctr">
+                  <a:tcPr anchor="ctr">
                     <a:lnL w="9525" cap="flat" cmpd="sng" algn="ctr">
                       <a:solidFill>
                         <a:srgbClr val="DDE3E6"/>
@@ -19720,7 +20108,7 @@
                     <a:bodyPr/>
                     <a:lstStyle/>
                     <a:p>
-                      <a:pPr algn="ctr" indent="0" marL="0">
+                      <a:pPr marL="0" indent="0" algn="ctr">
                         <a:buNone/>
                       </a:pPr>
                       <a:r>
@@ -19741,7 +20129,7 @@
                       </a:endParaRPr>
                     </a:p>
                   </a:txBody>
-                  <a:tcPr marL="91440" marR="91440" marT="45720" marB="45720" anchor="ctr">
+                  <a:tcPr anchor="ctr">
                     <a:lnL w="9525" cap="flat" cmpd="sng" algn="ctr">
                       <a:solidFill>
                         <a:srgbClr val="DDE3E6"/>
@@ -19788,7 +20176,7 @@
                     <a:bodyPr/>
                     <a:lstStyle/>
                     <a:p>
-                      <a:pPr algn="ctr" indent="0" marL="0">
+                      <a:pPr marL="0" indent="0" algn="ctr">
                         <a:buNone/>
                       </a:pPr>
                       <a:r>
@@ -19809,7 +20197,7 @@
                       </a:endParaRPr>
                     </a:p>
                   </a:txBody>
-                  <a:tcPr marL="91440" marR="91440" marT="45720" marB="45720" anchor="ctr">
+                  <a:tcPr anchor="ctr">
                     <a:lnL w="9525" cap="flat" cmpd="sng" algn="ctr">
                       <a:solidFill>
                         <a:srgbClr val="DDE3E6"/>
@@ -19851,6 +20239,11 @@
                     </a:solidFill>
                   </a:tcPr>
                 </a:tc>
+                <a:extLst>
+                  <a:ext uri="{0D108BD9-81ED-4DB2-BD59-A6C34878D82A}">
+                    <a16:rowId xmlns:a16="http://schemas.microsoft.com/office/drawing/2014/main" val="10003"/>
+                  </a:ext>
+                </a:extLst>
               </a:tr>
             </a:tbl>
           </a:graphicData>
@@ -19877,7 +20270,7 @@
           <a:bodyPr wrap="square" rtlCol="0" anchor="t"/>
           <a:lstStyle/>
           <a:p>
-            <a:pPr indent="0" marL="0">
+            <a:pPr marL="0" indent="0">
               <a:buNone/>
             </a:pPr>
             <a:r>
@@ -19916,7 +20309,7 @@
           </a:solidFill>
           <a:ln/>
           <a:effectLst>
-            <a:outerShdw sx="100000" sy="100000" kx="0" ky="0" algn="bl" rotWithShape="0" blurRad="76200" dist="25400" dir="5400000">
+            <a:outerShdw blurRad="76200" dist="25400" dir="5400000" algn="bl" rotWithShape="0">
               <a:srgbClr val="1A1A1A">
                 <a:alpha val="18000"/>
               </a:srgbClr>
@@ -19945,7 +20338,7 @@
           <a:bodyPr wrap="square" rtlCol="0" anchor="ctr"/>
           <a:lstStyle/>
           <a:p>
-            <a:pPr indent="0" marL="0">
+            <a:pPr marL="0" indent="0">
               <a:buNone/>
             </a:pPr>
             <a:r>
@@ -19984,7 +20377,7 @@
           <a:bodyPr wrap="square" rtlCol="0" anchor="ctr"/>
           <a:lstStyle/>
           <a:p>
-            <a:pPr indent="0" marL="0">
+            <a:pPr marL="0" indent="0">
               <a:buNone/>
             </a:pPr>
             <a:r>
@@ -20018,6 +20411,7 @@
         <a:solidFill>
           <a:srgbClr val="FFFFFF"/>
         </a:solidFill>
+        <a:effectLst/>
       </p:bgPr>
     </p:bg>
     <p:spTree>
@@ -20055,11 +20449,11 @@
           <a:bodyPr wrap="square" rtlCol="0" anchor="ctr"/>
           <a:lstStyle/>
           <a:p>
-            <a:pPr indent="0" marL="0">
+            <a:pPr marL="0" indent="0">
               <a:buNone/>
             </a:pPr>
             <a:r>
-              <a:rPr lang="en-US" sz="1200" b="1" spc="200" kern="0" dirty="0">
+              <a:rPr lang="en-US" sz="1200" b="1" kern="0" spc="200" dirty="0">
                 <a:solidFill>
                   <a:srgbClr val="E67E22"/>
                 </a:solidFill>
@@ -20094,7 +20488,7 @@
           <a:bodyPr wrap="square" rtlCol="0" anchor="ctr"/>
           <a:lstStyle/>
           <a:p>
-            <a:pPr algn="l" indent="0" marL="0">
+            <a:pPr marL="0" indent="0" algn="l">
               <a:buNone/>
             </a:pPr>
             <a:r>
@@ -20133,7 +20527,7 @@
           <a:bodyPr wrap="square" rtlCol="0" anchor="ctr"/>
           <a:lstStyle/>
           <a:p>
-            <a:pPr algn="r" indent="0" marL="0">
+            <a:pPr marL="0" indent="0" algn="r">
               <a:buNone/>
             </a:pPr>
             <a:r>
@@ -20159,20 +20553,20 @@
         </p:nvSpPr>
         <p:spPr>
           <a:xfrm>
-            <a:off x="7452360" y="1691640"/>
-            <a:ext cx="4297680" cy="1325880"/>
+            <a:off x="726817" y="1581912"/>
+            <a:ext cx="6501647" cy="3145536"/>
           </a:xfrm>
           <a:prstGeom prst="roundRect">
             <a:avLst>
-              <a:gd name="adj" fmla="val 5517"/>
+              <a:gd name="adj" fmla="val 2326"/>
             </a:avLst>
           </a:prstGeom>
           <a:solidFill>
-            <a:srgbClr val="F4F7F8"/>
+            <a:srgbClr val="FFFFFF"/>
           </a:solidFill>
           <a:ln/>
           <a:effectLst>
-            <a:outerShdw sx="100000" sy="100000" kx="0" ky="0" algn="bl" rotWithShape="0" blurRad="76200" dist="25400" dir="5400000">
+            <a:outerShdw blurRad="76200" dist="25400" dir="5400000" algn="bl" rotWithShape="0">
               <a:srgbClr val="1A1A1A">
                 <a:alpha val="18000"/>
               </a:srgbClr>
@@ -20180,118 +20574,39 @@
           </a:effectLst>
         </p:spPr>
       </p:sp>
-      <p:sp>
-        <p:nvSpPr>
-          <p:cNvPr id="6" name="Shape 4"/>
-          <p:cNvSpPr/>
-          <p:nvPr/>
-        </p:nvSpPr>
-        <p:spPr>
-          <a:xfrm>
-            <a:off x="7680960" y="1874520"/>
-            <a:ext cx="292608" cy="292608"/>
-          </a:xfrm>
-          <a:prstGeom prst="roundRect">
-            <a:avLst>
-              <a:gd name="adj" fmla="val 93750"/>
-            </a:avLst>
-          </a:prstGeom>
-          <a:solidFill>
-            <a:srgbClr val="2E8B57"/>
-          </a:solidFill>
-          <a:ln/>
-        </p:spPr>
-      </p:sp>
-      <p:sp>
-        <p:nvSpPr>
-          <p:cNvPr id="7" name="Text 5"/>
-          <p:cNvSpPr/>
-          <p:nvPr/>
-        </p:nvSpPr>
-        <p:spPr>
-          <a:xfrm>
-            <a:off x="8092440" y="1828800"/>
-            <a:ext cx="3566160" cy="384048"/>
-          </a:xfrm>
-          <a:prstGeom prst="rect">
-            <a:avLst/>
-          </a:prstGeom>
-          <a:noFill/>
-          <a:ln/>
-        </p:spPr>
-        <p:txBody>
-          <a:bodyPr wrap="square" rtlCol="0" anchor="ctr"/>
-          <a:lstStyle/>
-          <a:p>
-            <a:pPr indent="0" marL="0">
-              <a:buNone/>
-            </a:pPr>
-            <a:r>
-              <a:rPr lang="en-US" sz="1350" b="1" dirty="0">
-                <a:solidFill>
-                  <a:srgbClr val="0B3D56"/>
-                </a:solidFill>
-                <a:latin typeface="Cambria" pitchFamily="34" charset="0"/>
-                <a:ea typeface="Cambria" pitchFamily="34" charset="-122"/>
-                <a:cs typeface="Cambria" pitchFamily="34" charset="-120"/>
-              </a:rPr>
-              <a:t>Saison froide</a:t>
-            </a:r>
-            <a:endParaRPr lang="en-US" sz="1350" dirty="0"/>
-          </a:p>
-        </p:txBody>
-      </p:sp>
-      <p:sp>
-        <p:nvSpPr>
-          <p:cNvPr id="8" name="Text 6"/>
-          <p:cNvSpPr/>
-          <p:nvPr/>
-        </p:nvSpPr>
-        <p:spPr>
-          <a:xfrm>
-            <a:off x="7680960" y="2258568"/>
-            <a:ext cx="3931920" cy="713232"/>
-          </a:xfrm>
-          <a:prstGeom prst="rect">
-            <a:avLst/>
-          </a:prstGeom>
-          <a:noFill/>
-          <a:ln/>
-        </p:spPr>
-        <p:txBody>
-          <a:bodyPr wrap="square" rtlCol="0" anchor="t"/>
-          <a:lstStyle/>
-          <a:p>
-            <a:pPr indent="0" marL="0">
-              <a:lnSpc>
-                <a:spcPts val="1300"/>
-              </a:lnSpc>
-              <a:buNone/>
-            </a:pPr>
-            <a:r>
-              <a:rPr lang="en-US" sz="1100" dirty="0">
-                <a:solidFill>
-                  <a:srgbClr val="1E2530"/>
-                </a:solidFill>
-                <a:latin typeface="Calibri" pitchFamily="34" charset="0"/>
-                <a:ea typeface="Calibri" pitchFamily="34" charset="-122"/>
-                <a:cs typeface="Calibri" pitchFamily="34" charset="-120"/>
-              </a:rPr>
-              <a:t>7 scénarios / 12 → HRR = 80%, PUE = 1.05, WUE = 0.50 : valorisation systématique</a:t>
-            </a:r>
-            <a:endParaRPr lang="en-US" sz="1100" dirty="0"/>
-          </a:p>
-        </p:txBody>
-      </p:sp>
-      <p:sp>
-        <p:nvSpPr>
-          <p:cNvPr id="9" name="Shape 7"/>
-          <p:cNvSpPr/>
-          <p:nvPr/>
-        </p:nvSpPr>
-        <p:spPr>
-          <a:xfrm>
-            <a:off x="7452360" y="3200400"/>
+      <p:pic>
+        <p:nvPicPr>
+          <p:cNvPr id="6" name="Image 0" descr="assets/scenarios12_table.png"/>
+          <p:cNvPicPr>
+            <a:picLocks noChangeAspect="1"/>
+          </p:cNvPicPr>
+          <p:nvPr/>
+        </p:nvPicPr>
+        <p:blipFill>
+          <a:blip r:embed="rId3"/>
+          <a:stretch>
+            <a:fillRect/>
+          </a:stretch>
+        </p:blipFill>
+        <p:spPr>
+          <a:xfrm>
+            <a:off x="836545" y="1691640"/>
+            <a:ext cx="6282191" cy="2926080"/>
+          </a:xfrm>
+          <a:prstGeom prst="rect">
+            <a:avLst/>
+          </a:prstGeom>
+        </p:spPr>
+      </p:pic>
+      <p:sp>
+        <p:nvSpPr>
+          <p:cNvPr id="7" name="Shape 4"/>
+          <p:cNvSpPr/>
+          <p:nvPr/>
+        </p:nvSpPr>
+        <p:spPr>
+          <a:xfrm>
+            <a:off x="7452360" y="1691640"/>
             <a:ext cx="4297680" cy="1325880"/>
           </a:xfrm>
           <a:prstGeom prst="roundRect">
@@ -20304,7 +20619,7 @@
           </a:solidFill>
           <a:ln/>
           <a:effectLst>
-            <a:outerShdw sx="100000" sy="100000" kx="0" ky="0" algn="bl" rotWithShape="0" blurRad="76200" dist="25400" dir="5400000">
+            <a:outerShdw blurRad="76200" dist="25400" dir="5400000" algn="bl" rotWithShape="0">
               <a:srgbClr val="1A1A1A">
                 <a:alpha val="18000"/>
               </a:srgbClr>
@@ -20314,13 +20629,13 @@
       </p:sp>
       <p:sp>
         <p:nvSpPr>
-          <p:cNvPr id="10" name="Shape 8"/>
-          <p:cNvSpPr/>
-          <p:nvPr/>
-        </p:nvSpPr>
-        <p:spPr>
-          <a:xfrm>
-            <a:off x="7680960" y="3383280"/>
+          <p:cNvPr id="8" name="Shape 5"/>
+          <p:cNvSpPr/>
+          <p:nvPr/>
+        </p:nvSpPr>
+        <p:spPr>
+          <a:xfrm>
+            <a:off x="7680960" y="1874520"/>
             <a:ext cx="292608" cy="292608"/>
           </a:xfrm>
           <a:prstGeom prst="roundRect">
@@ -20329,20 +20644,20 @@
             </a:avLst>
           </a:prstGeom>
           <a:solidFill>
-            <a:srgbClr val="E67E22"/>
+            <a:srgbClr val="2E8B57"/>
           </a:solidFill>
           <a:ln/>
         </p:spPr>
       </p:sp>
       <p:sp>
         <p:nvSpPr>
-          <p:cNvPr id="11" name="Text 9"/>
-          <p:cNvSpPr/>
-          <p:nvPr/>
-        </p:nvSpPr>
-        <p:spPr>
-          <a:xfrm>
-            <a:off x="8092440" y="3337560"/>
+          <p:cNvPr id="9" name="Text 6"/>
+          <p:cNvSpPr/>
+          <p:nvPr/>
+        </p:nvSpPr>
+        <p:spPr>
+          <a:xfrm>
+            <a:off x="8092440" y="1828800"/>
             <a:ext cx="3566160" cy="384048"/>
           </a:xfrm>
           <a:prstGeom prst="rect">
@@ -20355,7 +20670,7 @@
           <a:bodyPr wrap="square" rtlCol="0" anchor="ctr"/>
           <a:lstStyle/>
           <a:p>
-            <a:pPr indent="0" marL="0">
+            <a:pPr marL="0" indent="0">
               <a:buNone/>
             </a:pPr>
             <a:r>
@@ -20367,7 +20682,7 @@
                 <a:ea typeface="Cambria" pitchFamily="34" charset="-122"/>
                 <a:cs typeface="Cambria" pitchFamily="34" charset="-120"/>
               </a:rPr>
-              <a:t>Transition automne</a:t>
+              <a:t>Saison froide</a:t>
             </a:r>
             <a:endParaRPr lang="en-US" sz="1350" dirty="0"/>
           </a:p>
@@ -20375,13 +20690,13 @@
       </p:sp>
       <p:sp>
         <p:nvSpPr>
-          <p:cNvPr id="12" name="Text 10"/>
-          <p:cNvSpPr/>
-          <p:nvPr/>
-        </p:nvSpPr>
-        <p:spPr>
-          <a:xfrm>
-            <a:off x="7680960" y="3767328"/>
+          <p:cNvPr id="10" name="Text 7"/>
+          <p:cNvSpPr/>
+          <p:nvPr/>
+        </p:nvSpPr>
+        <p:spPr>
+          <a:xfrm>
+            <a:off x="7680960" y="2258568"/>
             <a:ext cx="3931920" cy="713232"/>
           </a:xfrm>
           <a:prstGeom prst="rect">
@@ -20394,7 +20709,7 @@
           <a:bodyPr wrap="square" rtlCol="0" anchor="t"/>
           <a:lstStyle/>
           <a:p>
-            <a:pPr indent="0" marL="0">
+            <a:pPr marL="0" indent="0">
               <a:lnSpc>
                 <a:spcPts val="1300"/>
               </a:lnSpc>
@@ -20409,7 +20724,7 @@
                 <a:ea typeface="Calibri" pitchFamily="34" charset="-122"/>
                 <a:cs typeface="Calibri" pitchFamily="34" charset="-120"/>
               </a:rPr>
-              <a:t>Le plus riche : les 3 options actives dans la même journée. HRR = 37%, PUE = 1.152</a:t>
+              <a:t>7 scénarios / 12 → HRR = 80%, PUE = 1.05, WUE = 0.50 : valorisation systématique</a:t>
             </a:r>
             <a:endParaRPr lang="en-US" sz="1100" dirty="0"/>
           </a:p>
@@ -20417,13 +20732,13 @@
       </p:sp>
       <p:sp>
         <p:nvSpPr>
-          <p:cNvPr id="13" name="Shape 11"/>
-          <p:cNvSpPr/>
-          <p:nvPr/>
-        </p:nvSpPr>
-        <p:spPr>
-          <a:xfrm>
-            <a:off x="7452360" y="4709160"/>
+          <p:cNvPr id="11" name="Shape 8"/>
+          <p:cNvSpPr/>
+          <p:nvPr/>
+        </p:nvSpPr>
+        <p:spPr>
+          <a:xfrm>
+            <a:off x="7452360" y="3200400"/>
             <a:ext cx="4297680" cy="1325880"/>
           </a:xfrm>
           <a:prstGeom prst="roundRect">
@@ -20436,7 +20751,7 @@
           </a:solidFill>
           <a:ln/>
           <a:effectLst>
-            <a:outerShdw sx="100000" sy="100000" kx="0" ky="0" algn="bl" rotWithShape="0" blurRad="76200" dist="25400" dir="5400000">
+            <a:outerShdw blurRad="76200" dist="25400" dir="5400000" algn="bl" rotWithShape="0">
               <a:srgbClr val="1A1A1A">
                 <a:alpha val="18000"/>
               </a:srgbClr>
@@ -20446,13 +20761,13 @@
       </p:sp>
       <p:sp>
         <p:nvSpPr>
-          <p:cNvPr id="14" name="Shape 12"/>
-          <p:cNvSpPr/>
-          <p:nvPr/>
-        </p:nvSpPr>
-        <p:spPr>
-          <a:xfrm>
-            <a:off x="7680960" y="4892040"/>
+          <p:cNvPr id="12" name="Shape 9"/>
+          <p:cNvSpPr/>
+          <p:nvPr/>
+        </p:nvSpPr>
+        <p:spPr>
+          <a:xfrm>
+            <a:off x="7680960" y="3383280"/>
             <a:ext cx="292608" cy="292608"/>
           </a:xfrm>
           <a:prstGeom prst="roundRect">
@@ -20461,20 +20776,20 @@
             </a:avLst>
           </a:prstGeom>
           <a:solidFill>
-            <a:srgbClr val="C0392B"/>
+            <a:srgbClr val="E67E22"/>
           </a:solidFill>
           <a:ln/>
         </p:spPr>
       </p:sp>
       <p:sp>
         <p:nvSpPr>
-          <p:cNvPr id="15" name="Text 13"/>
-          <p:cNvSpPr/>
-          <p:nvPr/>
-        </p:nvSpPr>
-        <p:spPr>
-          <a:xfrm>
-            <a:off x="8092440" y="4846320"/>
+          <p:cNvPr id="13" name="Text 10"/>
+          <p:cNvSpPr/>
+          <p:nvPr/>
+        </p:nvSpPr>
+        <p:spPr>
+          <a:xfrm>
+            <a:off x="8092440" y="3337560"/>
             <a:ext cx="3566160" cy="384048"/>
           </a:xfrm>
           <a:prstGeom prst="rect">
@@ -20487,7 +20802,7 @@
           <a:bodyPr wrap="square" rtlCol="0" anchor="ctr"/>
           <a:lstStyle/>
           <a:p>
-            <a:pPr indent="0" marL="0">
+            <a:pPr marL="0" indent="0">
               <a:buNone/>
             </a:pPr>
             <a:r>
@@ -20499,6 +20814,138 @@
                 <a:ea typeface="Cambria" pitchFamily="34" charset="-122"/>
                 <a:cs typeface="Cambria" pitchFamily="34" charset="-120"/>
               </a:rPr>
+              <a:t>Transition automne</a:t>
+            </a:r>
+            <a:endParaRPr lang="en-US" sz="1350" dirty="0"/>
+          </a:p>
+        </p:txBody>
+      </p:sp>
+      <p:sp>
+        <p:nvSpPr>
+          <p:cNvPr id="14" name="Text 11"/>
+          <p:cNvSpPr/>
+          <p:nvPr/>
+        </p:nvSpPr>
+        <p:spPr>
+          <a:xfrm>
+            <a:off x="7680960" y="3767328"/>
+            <a:ext cx="3931920" cy="713232"/>
+          </a:xfrm>
+          <a:prstGeom prst="rect">
+            <a:avLst/>
+          </a:prstGeom>
+          <a:noFill/>
+          <a:ln/>
+        </p:spPr>
+        <p:txBody>
+          <a:bodyPr wrap="square" rtlCol="0" anchor="t"/>
+          <a:lstStyle/>
+          <a:p>
+            <a:pPr marL="0" indent="0">
+              <a:lnSpc>
+                <a:spcPts val="1300"/>
+              </a:lnSpc>
+              <a:buNone/>
+            </a:pPr>
+            <a:r>
+              <a:rPr lang="en-US" sz="1100" dirty="0">
+                <a:solidFill>
+                  <a:srgbClr val="1E2530"/>
+                </a:solidFill>
+                <a:latin typeface="Calibri" pitchFamily="34" charset="0"/>
+                <a:ea typeface="Calibri" pitchFamily="34" charset="-122"/>
+                <a:cs typeface="Calibri" pitchFamily="34" charset="-120"/>
+              </a:rPr>
+              <a:t>Le plus riche : les 3 options actives dans la même journée. HRR = 37%, PUE = 1.152</a:t>
+            </a:r>
+            <a:endParaRPr lang="en-US" sz="1100" dirty="0"/>
+          </a:p>
+        </p:txBody>
+      </p:sp>
+      <p:sp>
+        <p:nvSpPr>
+          <p:cNvPr id="15" name="Shape 12"/>
+          <p:cNvSpPr/>
+          <p:nvPr/>
+        </p:nvSpPr>
+        <p:spPr>
+          <a:xfrm>
+            <a:off x="7452360" y="4709160"/>
+            <a:ext cx="4297680" cy="1325880"/>
+          </a:xfrm>
+          <a:prstGeom prst="roundRect">
+            <a:avLst>
+              <a:gd name="adj" fmla="val 5517"/>
+            </a:avLst>
+          </a:prstGeom>
+          <a:solidFill>
+            <a:srgbClr val="F4F7F8"/>
+          </a:solidFill>
+          <a:ln/>
+          <a:effectLst>
+            <a:outerShdw blurRad="76200" dist="25400" dir="5400000" algn="bl" rotWithShape="0">
+              <a:srgbClr val="1A1A1A">
+                <a:alpha val="18000"/>
+              </a:srgbClr>
+            </a:outerShdw>
+          </a:effectLst>
+        </p:spPr>
+      </p:sp>
+      <p:sp>
+        <p:nvSpPr>
+          <p:cNvPr id="16" name="Shape 13"/>
+          <p:cNvSpPr/>
+          <p:nvPr/>
+        </p:nvSpPr>
+        <p:spPr>
+          <a:xfrm>
+            <a:off x="7680960" y="4892040"/>
+            <a:ext cx="292608" cy="292608"/>
+          </a:xfrm>
+          <a:prstGeom prst="roundRect">
+            <a:avLst>
+              <a:gd name="adj" fmla="val 93750"/>
+            </a:avLst>
+          </a:prstGeom>
+          <a:solidFill>
+            <a:srgbClr val="C0392B"/>
+          </a:solidFill>
+          <a:ln/>
+        </p:spPr>
+      </p:sp>
+      <p:sp>
+        <p:nvSpPr>
+          <p:cNvPr id="17" name="Text 14"/>
+          <p:cNvSpPr/>
+          <p:nvPr/>
+        </p:nvSpPr>
+        <p:spPr>
+          <a:xfrm>
+            <a:off x="8092440" y="4846320"/>
+            <a:ext cx="3566160" cy="384048"/>
+          </a:xfrm>
+          <a:prstGeom prst="rect">
+            <a:avLst/>
+          </a:prstGeom>
+          <a:noFill/>
+          <a:ln/>
+        </p:spPr>
+        <p:txBody>
+          <a:bodyPr wrap="square" rtlCol="0" anchor="ctr"/>
+          <a:lstStyle/>
+          <a:p>
+            <a:pPr marL="0" indent="0">
+              <a:buNone/>
+            </a:pPr>
+            <a:r>
+              <a:rPr lang="en-US" sz="1350" b="1" dirty="0">
+                <a:solidFill>
+                  <a:srgbClr val="0B3D56"/>
+                </a:solidFill>
+                <a:latin typeface="Cambria" pitchFamily="34" charset="0"/>
+                <a:ea typeface="Cambria" pitchFamily="34" charset="-122"/>
+                <a:cs typeface="Cambria" pitchFamily="34" charset="-120"/>
+              </a:rPr>
               <a:t>Limite saisonnière</a:t>
             </a:r>
             <a:endParaRPr lang="en-US" sz="1350" dirty="0"/>
@@ -20507,7 +20954,7 @@
       </p:sp>
       <p:sp>
         <p:nvSpPr>
-          <p:cNvPr id="16" name="Text 14"/>
+          <p:cNvPr id="18" name="Text 15"/>
           <p:cNvSpPr/>
           <p:nvPr/>
         </p:nvSpPr>
@@ -20526,7 +20973,7 @@
           <a:bodyPr wrap="square" rtlCol="0" anchor="t"/>
           <a:lstStyle/>
           <a:p>
-            <a:pPr indent="0" marL="0">
+            <a:pPr marL="0" indent="0">
               <a:lnSpc>
                 <a:spcPts val="1300"/>
               </a:lnSpc>
@@ -20563,6 +21010,7 @@
         <a:solidFill>
           <a:srgbClr val="0B3D56"/>
         </a:solidFill>
+        <a:effectLst/>
       </p:bgPr>
     </p:bg>
     <p:spTree>
@@ -20627,7 +21075,7 @@
         </p:nvSpPr>
         <p:spPr>
           <a:xfrm>
-            <a:off x="822960" y="2331720"/>
+            <a:off x="1247832" y="1691640"/>
             <a:ext cx="7315200" cy="457200"/>
           </a:xfrm>
           <a:prstGeom prst="rect">
@@ -20640,11 +21088,11 @@
           <a:bodyPr wrap="square" rtlCol="0" anchor="ctr"/>
           <a:lstStyle/>
           <a:p>
-            <a:pPr indent="0" marL="0">
+            <a:pPr marL="0" indent="0">
               <a:buNone/>
             </a:pPr>
             <a:r>
-              <a:rPr lang="en-US" sz="1500" b="1" spc="300" kern="0" dirty="0">
+              <a:rPr lang="en-US" sz="2000" b="1" kern="0" spc="300" dirty="0">
                 <a:solidFill>
                   <a:srgbClr val="E67E22"/>
                 </a:solidFill>
@@ -20654,7 +21102,7 @@
               </a:rPr>
               <a:t>PARTIE 1</a:t>
             </a:r>
-            <a:endParaRPr lang="en-US" sz="1500" dirty="0"/>
+            <a:endParaRPr lang="en-US" sz="2000" dirty="0"/>
           </a:p>
         </p:txBody>
       </p:sp>
@@ -20666,7 +21114,7 @@
         </p:nvSpPr>
         <p:spPr>
           <a:xfrm>
-            <a:off x="822960" y="2788920"/>
+            <a:off x="1423323" y="3131820"/>
             <a:ext cx="9875520" cy="1463040"/>
           </a:xfrm>
           <a:prstGeom prst="rect">
@@ -20679,7 +21127,7 @@
           <a:bodyPr wrap="square" rtlCol="0" anchor="ctr"/>
           <a:lstStyle/>
           <a:p>
-            <a:pPr indent="0" marL="0">
+            <a:pPr marL="0" indent="0">
               <a:buNone/>
             </a:pPr>
             <a:r>
@@ -20705,7 +21153,7 @@
         </p:nvSpPr>
         <p:spPr>
           <a:xfrm>
-            <a:off x="822960" y="4160520"/>
+            <a:off x="819266" y="2994660"/>
             <a:ext cx="8961120" cy="731520"/>
           </a:xfrm>
           <a:prstGeom prst="rect">
@@ -20718,20 +21166,9 @@
           <a:bodyPr wrap="square" rtlCol="0" anchor="ctr"/>
           <a:lstStyle/>
           <a:p>
-            <a:pPr indent="0" marL="0">
+            <a:pPr marL="0" indent="0">
               <a:buNone/>
             </a:pPr>
-            <a:r>
-              <a:rPr lang="en-US" sz="1600" dirty="0">
-                <a:solidFill>
-                  <a:srgbClr val="CADCFC"/>
-                </a:solidFill>
-                <a:latin typeface="Calibri" pitchFamily="34" charset="0"/>
-                <a:ea typeface="Calibri" pitchFamily="34" charset="-122"/>
-                <a:cs typeface="Calibri" pitchFamily="34" charset="-120"/>
-              </a:rPr>
-              <a:t>ISOAR — Alternance au sein du pôle développement informatique</a:t>
-            </a:r>
             <a:endParaRPr lang="en-US" sz="1600" dirty="0"/>
           </a:p>
         </p:txBody>
@@ -20757,7 +21194,7 @@
           <a:bodyPr wrap="square" rtlCol="0" anchor="ctr"/>
           <a:lstStyle/>
           <a:p>
-            <a:pPr algn="r" indent="0" marL="0">
+            <a:pPr marL="0" indent="0" algn="r">
               <a:buNone/>
             </a:pPr>
             <a:r>
@@ -20791,6 +21228,7 @@
         <a:solidFill>
           <a:srgbClr val="FFFFFF"/>
         </a:solidFill>
+        <a:effectLst/>
       </p:bgPr>
     </p:bg>
     <p:spTree>
@@ -20828,11 +21266,11 @@
           <a:bodyPr wrap="square" rtlCol="0" anchor="ctr"/>
           <a:lstStyle/>
           <a:p>
-            <a:pPr indent="0" marL="0">
+            <a:pPr marL="0" indent="0">
               <a:buNone/>
             </a:pPr>
             <a:r>
-              <a:rPr lang="en-US" sz="1200" b="1" spc="200" kern="0" dirty="0">
+              <a:rPr lang="en-US" sz="1200" b="1" kern="0" spc="200" dirty="0">
                 <a:solidFill>
                   <a:srgbClr val="E67E22"/>
                 </a:solidFill>
@@ -20867,7 +21305,7 @@
           <a:bodyPr wrap="square" rtlCol="0" anchor="ctr"/>
           <a:lstStyle/>
           <a:p>
-            <a:pPr algn="l" indent="0" marL="0">
+            <a:pPr marL="0" indent="0" algn="l">
               <a:buNone/>
             </a:pPr>
             <a:r>
@@ -20906,7 +21344,7 @@
           <a:bodyPr wrap="square" rtlCol="0" anchor="ctr"/>
           <a:lstStyle/>
           <a:p>
-            <a:pPr algn="r" indent="0" marL="0">
+            <a:pPr marL="0" indent="0" algn="r">
               <a:buNone/>
             </a:pPr>
             <a:r>
@@ -20945,7 +21383,7 @@
           </a:solidFill>
           <a:ln/>
           <a:effectLst>
-            <a:outerShdw sx="100000" sy="100000" kx="0" ky="0" algn="bl" rotWithShape="0" blurRad="76200" dist="25400" dir="5400000">
+            <a:outerShdw blurRad="76200" dist="25400" dir="5400000" algn="bl" rotWithShape="0">
               <a:srgbClr val="1A1A1A">
                 <a:alpha val="18000"/>
               </a:srgbClr>
@@ -20996,7 +21434,7 @@
           <a:bodyPr wrap="square" rtlCol="0" anchor="ctr"/>
           <a:lstStyle/>
           <a:p>
-            <a:pPr algn="ctr" indent="0" marL="0">
+            <a:pPr marL="0" indent="0" algn="ctr">
               <a:buNone/>
             </a:pPr>
             <a:r>
@@ -21035,7 +21473,7 @@
           <a:bodyPr wrap="square" rtlCol="0" anchor="ctr"/>
           <a:lstStyle/>
           <a:p>
-            <a:pPr indent="0" marL="0">
+            <a:pPr marL="0" indent="0">
               <a:buNone/>
             </a:pPr>
             <a:r>
@@ -21074,7 +21512,7 @@
           <a:bodyPr wrap="square" rtlCol="0" anchor="ctr"/>
           <a:lstStyle/>
           <a:p>
-            <a:pPr indent="0" marL="0">
+            <a:pPr marL="0" indent="0">
               <a:buNone/>
             </a:pPr>
             <a:r>
@@ -21113,7 +21551,7 @@
           </a:solidFill>
           <a:ln/>
           <a:effectLst>
-            <a:outerShdw sx="100000" sy="100000" kx="0" ky="0" algn="bl" rotWithShape="0" blurRad="76200" dist="25400" dir="5400000">
+            <a:outerShdw blurRad="76200" dist="25400" dir="5400000" algn="bl" rotWithShape="0">
               <a:srgbClr val="1A1A1A">
                 <a:alpha val="18000"/>
               </a:srgbClr>
@@ -21164,7 +21602,7 @@
           <a:bodyPr wrap="square" rtlCol="0" anchor="ctr"/>
           <a:lstStyle/>
           <a:p>
-            <a:pPr algn="ctr" indent="0" marL="0">
+            <a:pPr marL="0" indent="0" algn="ctr">
               <a:buNone/>
             </a:pPr>
             <a:r>
@@ -21203,7 +21641,7 @@
           <a:bodyPr wrap="square" rtlCol="0" anchor="ctr"/>
           <a:lstStyle/>
           <a:p>
-            <a:pPr indent="0" marL="0">
+            <a:pPr marL="0" indent="0">
               <a:buNone/>
             </a:pPr>
             <a:r>
@@ -21242,7 +21680,7 @@
           <a:bodyPr wrap="square" rtlCol="0" anchor="ctr"/>
           <a:lstStyle/>
           <a:p>
-            <a:pPr indent="0" marL="0">
+            <a:pPr marL="0" indent="0">
               <a:buNone/>
             </a:pPr>
             <a:r>
@@ -21281,7 +21719,7 @@
           </a:solidFill>
           <a:ln/>
           <a:effectLst>
-            <a:outerShdw sx="100000" sy="100000" kx="0" ky="0" algn="bl" rotWithShape="0" blurRad="76200" dist="25400" dir="5400000">
+            <a:outerShdw blurRad="76200" dist="25400" dir="5400000" algn="bl" rotWithShape="0">
               <a:srgbClr val="1A1A1A">
                 <a:alpha val="18000"/>
               </a:srgbClr>
@@ -21332,7 +21770,7 @@
           <a:bodyPr wrap="square" rtlCol="0" anchor="ctr"/>
           <a:lstStyle/>
           <a:p>
-            <a:pPr algn="ctr" indent="0" marL="0">
+            <a:pPr marL="0" indent="0" algn="ctr">
               <a:buNone/>
             </a:pPr>
             <a:r>
@@ -21371,7 +21809,7 @@
           <a:bodyPr wrap="square" rtlCol="0" anchor="ctr"/>
           <a:lstStyle/>
           <a:p>
-            <a:pPr indent="0" marL="0">
+            <a:pPr marL="0" indent="0">
               <a:buNone/>
             </a:pPr>
             <a:r>
@@ -21410,7 +21848,7 @@
           <a:bodyPr wrap="square" rtlCol="0" anchor="ctr"/>
           <a:lstStyle/>
           <a:p>
-            <a:pPr indent="0" marL="0">
+            <a:pPr marL="0" indent="0">
               <a:buNone/>
             </a:pPr>
             <a:r>
@@ -21449,7 +21887,7 @@
           </a:solidFill>
           <a:ln/>
           <a:effectLst>
-            <a:outerShdw sx="100000" sy="100000" kx="0" ky="0" algn="bl" rotWithShape="0" blurRad="76200" dist="25400" dir="5400000">
+            <a:outerShdw blurRad="76200" dist="25400" dir="5400000" algn="bl" rotWithShape="0">
               <a:srgbClr val="1A1A1A">
                 <a:alpha val="18000"/>
               </a:srgbClr>
@@ -21500,7 +21938,7 @@
           <a:bodyPr wrap="square" rtlCol="0" anchor="ctr"/>
           <a:lstStyle/>
           <a:p>
-            <a:pPr algn="ctr" indent="0" marL="0">
+            <a:pPr marL="0" indent="0" algn="ctr">
               <a:buNone/>
             </a:pPr>
             <a:r>
@@ -21539,7 +21977,7 @@
           <a:bodyPr wrap="square" rtlCol="0" anchor="ctr"/>
           <a:lstStyle/>
           <a:p>
-            <a:pPr indent="0" marL="0">
+            <a:pPr marL="0" indent="0">
               <a:buNone/>
             </a:pPr>
             <a:r>
@@ -21578,7 +22016,7 @@
           <a:bodyPr wrap="square" rtlCol="0" anchor="ctr"/>
           <a:lstStyle/>
           <a:p>
-            <a:pPr indent="0" marL="0">
+            <a:pPr marL="0" indent="0">
               <a:buNone/>
             </a:pPr>
             <a:r>
@@ -21617,7 +22055,7 @@
           <a:bodyPr wrap="square" rtlCol="0" anchor="ctr"/>
           <a:lstStyle/>
           <a:p>
-            <a:pPr algn="ctr" indent="0" marL="0">
+            <a:pPr marL="0" indent="0" algn="ctr">
               <a:buNone/>
             </a:pPr>
             <a:r>
@@ -21651,6 +22089,7 @@
         <a:solidFill>
           <a:srgbClr val="FFFFFF"/>
         </a:solidFill>
+        <a:effectLst/>
       </p:bgPr>
     </p:bg>
     <p:spTree>
@@ -21688,11 +22127,11 @@
           <a:bodyPr wrap="square" rtlCol="0" anchor="ctr"/>
           <a:lstStyle/>
           <a:p>
-            <a:pPr indent="0" marL="0">
+            <a:pPr marL="0" indent="0">
               <a:buNone/>
             </a:pPr>
             <a:r>
-              <a:rPr lang="en-US" sz="1200" b="1" spc="200" kern="0" dirty="0">
+              <a:rPr lang="en-US" sz="1200" b="1" kern="0" spc="200" dirty="0">
                 <a:solidFill>
                   <a:srgbClr val="E67E22"/>
                 </a:solidFill>
@@ -21727,7 +22166,7 @@
           <a:bodyPr wrap="square" rtlCol="0" anchor="ctr"/>
           <a:lstStyle/>
           <a:p>
-            <a:pPr algn="l" indent="0" marL="0">
+            <a:pPr marL="0" indent="0" algn="l">
               <a:buNone/>
             </a:pPr>
             <a:r>
@@ -21766,7 +22205,7 @@
           <a:bodyPr wrap="square" rtlCol="0" anchor="ctr"/>
           <a:lstStyle/>
           <a:p>
-            <a:pPr algn="r" indent="0" marL="0">
+            <a:pPr marL="0" indent="0" algn="r">
               <a:buNone/>
             </a:pPr>
             <a:r>
@@ -21805,7 +22244,7 @@
           </a:solidFill>
           <a:ln/>
           <a:effectLst>
-            <a:outerShdw sx="100000" sy="100000" kx="0" ky="0" algn="bl" rotWithShape="0" blurRad="76200" dist="25400" dir="5400000">
+            <a:outerShdw blurRad="76200" dist="25400" dir="5400000" algn="bl" rotWithShape="0">
               <a:srgbClr val="1A1A1A">
                 <a:alpha val="18000"/>
               </a:srgbClr>
@@ -21834,7 +22273,7 @@
           <a:bodyPr wrap="square" rtlCol="0" anchor="ctr"/>
           <a:lstStyle/>
           <a:p>
-            <a:pPr indent="0" marL="0">
+            <a:pPr marL="0" indent="0">
               <a:buNone/>
             </a:pPr>
             <a:r>
@@ -21979,7 +22418,7 @@
           </a:solidFill>
           <a:ln/>
           <a:effectLst>
-            <a:outerShdw sx="100000" sy="100000" kx="0" ky="0" algn="bl" rotWithShape="0" blurRad="76200" dist="25400" dir="5400000">
+            <a:outerShdw blurRad="76200" dist="25400" dir="5400000" algn="bl" rotWithShape="0">
               <a:srgbClr val="1A1A1A">
                 <a:alpha val="18000"/>
               </a:srgbClr>
@@ -22008,7 +22447,7 @@
           <a:bodyPr wrap="square" rtlCol="0" anchor="ctr"/>
           <a:lstStyle/>
           <a:p>
-            <a:pPr indent="0" marL="0">
+            <a:pPr marL="0" indent="0">
               <a:buNone/>
             </a:pPr>
             <a:r>
@@ -22127,6 +22566,7 @@
         <a:solidFill>
           <a:srgbClr val="FFFFFF"/>
         </a:solidFill>
+        <a:effectLst/>
       </p:bgPr>
     </p:bg>
     <p:spTree>
@@ -22164,11 +22604,11 @@
           <a:bodyPr wrap="square" rtlCol="0" anchor="ctr"/>
           <a:lstStyle/>
           <a:p>
-            <a:pPr indent="0" marL="0">
+            <a:pPr marL="0" indent="0">
               <a:buNone/>
             </a:pPr>
             <a:r>
-              <a:rPr lang="en-US" sz="1200" b="1" spc="200" kern="0" dirty="0">
+              <a:rPr lang="en-US" sz="1200" b="1" kern="0" spc="200" dirty="0">
                 <a:solidFill>
                   <a:srgbClr val="E67E22"/>
                 </a:solidFill>
@@ -22203,7 +22643,7 @@
           <a:bodyPr wrap="square" rtlCol="0" anchor="ctr"/>
           <a:lstStyle/>
           <a:p>
-            <a:pPr algn="l" indent="0" marL="0">
+            <a:pPr marL="0" indent="0" algn="l">
               <a:buNone/>
             </a:pPr>
             <a:r>
@@ -22242,7 +22682,7 @@
           <a:bodyPr wrap="square" rtlCol="0" anchor="ctr"/>
           <a:lstStyle/>
           <a:p>
-            <a:pPr algn="r" indent="0" marL="0">
+            <a:pPr marL="0" indent="0" algn="r">
               <a:buNone/>
             </a:pPr>
             <a:r>
@@ -22281,7 +22721,7 @@
           </a:solidFill>
           <a:ln/>
           <a:effectLst>
-            <a:outerShdw sx="100000" sy="100000" kx="0" ky="0" algn="bl" rotWithShape="0" blurRad="76200" dist="25400" dir="5400000">
+            <a:outerShdw blurRad="76200" dist="25400" dir="5400000" algn="bl" rotWithShape="0">
               <a:srgbClr val="1A1A1A">
                 <a:alpha val="18000"/>
               </a:srgbClr>
@@ -22332,7 +22772,7 @@
           <a:bodyPr wrap="square" rtlCol="0" anchor="ctr"/>
           <a:lstStyle/>
           <a:p>
-            <a:pPr algn="ctr" indent="0" marL="0">
+            <a:pPr marL="0" indent="0" algn="ctr">
               <a:buNone/>
             </a:pPr>
             <a:r>
@@ -22371,7 +22811,7 @@
           <a:bodyPr wrap="square" rtlCol="0" anchor="t"/>
           <a:lstStyle/>
           <a:p>
-            <a:pPr indent="0" marL="0">
+            <a:pPr marL="0" indent="0">
               <a:buNone/>
             </a:pPr>
             <a:r>
@@ -22410,7 +22850,7 @@
           <a:bodyPr wrap="square" rtlCol="0" anchor="t"/>
           <a:lstStyle/>
           <a:p>
-            <a:pPr indent="0" marL="0">
+            <a:pPr marL="0" indent="0">
               <a:lnSpc>
                 <a:spcPts val="1300"/>
               </a:lnSpc>
@@ -22452,7 +22892,7 @@
           </a:solidFill>
           <a:ln/>
           <a:effectLst>
-            <a:outerShdw sx="100000" sy="100000" kx="0" ky="0" algn="bl" rotWithShape="0" blurRad="76200" dist="25400" dir="5400000">
+            <a:outerShdw blurRad="76200" dist="25400" dir="5400000" algn="bl" rotWithShape="0">
               <a:srgbClr val="1A1A1A">
                 <a:alpha val="18000"/>
               </a:srgbClr>
@@ -22503,7 +22943,7 @@
           <a:bodyPr wrap="square" rtlCol="0" anchor="ctr"/>
           <a:lstStyle/>
           <a:p>
-            <a:pPr algn="ctr" indent="0" marL="0">
+            <a:pPr marL="0" indent="0" algn="ctr">
               <a:buNone/>
             </a:pPr>
             <a:r>
@@ -22542,7 +22982,7 @@
           <a:bodyPr wrap="square" rtlCol="0" anchor="t"/>
           <a:lstStyle/>
           <a:p>
-            <a:pPr indent="0" marL="0">
+            <a:pPr marL="0" indent="0">
               <a:buNone/>
             </a:pPr>
             <a:r>
@@ -22581,7 +23021,7 @@
           <a:bodyPr wrap="square" rtlCol="0" anchor="t"/>
           <a:lstStyle/>
           <a:p>
-            <a:pPr indent="0" marL="0">
+            <a:pPr marL="0" indent="0">
               <a:lnSpc>
                 <a:spcPts val="1300"/>
               </a:lnSpc>
@@ -22623,7 +23063,7 @@
           </a:solidFill>
           <a:ln/>
           <a:effectLst>
-            <a:outerShdw sx="100000" sy="100000" kx="0" ky="0" algn="bl" rotWithShape="0" blurRad="76200" dist="25400" dir="5400000">
+            <a:outerShdw blurRad="76200" dist="25400" dir="5400000" algn="bl" rotWithShape="0">
               <a:srgbClr val="1A1A1A">
                 <a:alpha val="18000"/>
               </a:srgbClr>
@@ -22674,7 +23114,7 @@
           <a:bodyPr wrap="square" rtlCol="0" anchor="ctr"/>
           <a:lstStyle/>
           <a:p>
-            <a:pPr algn="ctr" indent="0" marL="0">
+            <a:pPr marL="0" indent="0" algn="ctr">
               <a:buNone/>
             </a:pPr>
             <a:r>
@@ -22713,7 +23153,7 @@
           <a:bodyPr wrap="square" rtlCol="0" anchor="t"/>
           <a:lstStyle/>
           <a:p>
-            <a:pPr indent="0" marL="0">
+            <a:pPr marL="0" indent="0">
               <a:buNone/>
             </a:pPr>
             <a:r>
@@ -22752,7 +23192,7 @@
           <a:bodyPr wrap="square" rtlCol="0" anchor="t"/>
           <a:lstStyle/>
           <a:p>
-            <a:pPr indent="0" marL="0">
+            <a:pPr marL="0" indent="0">
               <a:lnSpc>
                 <a:spcPts val="1300"/>
               </a:lnSpc>
@@ -22794,7 +23234,7 @@
           </a:solidFill>
           <a:ln/>
           <a:effectLst>
-            <a:outerShdw sx="100000" sy="100000" kx="0" ky="0" algn="bl" rotWithShape="0" blurRad="76200" dist="25400" dir="5400000">
+            <a:outerShdw blurRad="76200" dist="25400" dir="5400000" algn="bl" rotWithShape="0">
               <a:srgbClr val="1A1A1A">
                 <a:alpha val="18000"/>
               </a:srgbClr>
@@ -22845,7 +23285,7 @@
           <a:bodyPr wrap="square" rtlCol="0" anchor="ctr"/>
           <a:lstStyle/>
           <a:p>
-            <a:pPr algn="ctr" indent="0" marL="0">
+            <a:pPr marL="0" indent="0" algn="ctr">
               <a:buNone/>
             </a:pPr>
             <a:r>
@@ -22884,7 +23324,7 @@
           <a:bodyPr wrap="square" rtlCol="0" anchor="t"/>
           <a:lstStyle/>
           <a:p>
-            <a:pPr indent="0" marL="0">
+            <a:pPr marL="0" indent="0">
               <a:buNone/>
             </a:pPr>
             <a:r>
@@ -22923,7 +23363,7 @@
           <a:bodyPr wrap="square" rtlCol="0" anchor="t"/>
           <a:lstStyle/>
           <a:p>
-            <a:pPr indent="0" marL="0">
+            <a:pPr marL="0" indent="0">
               <a:lnSpc>
                 <a:spcPts val="1300"/>
               </a:lnSpc>
@@ -22965,7 +23405,7 @@
           </a:solidFill>
           <a:ln/>
           <a:effectLst>
-            <a:outerShdw sx="100000" sy="100000" kx="0" ky="0" algn="bl" rotWithShape="0" blurRad="76200" dist="25400" dir="5400000">
+            <a:outerShdw blurRad="76200" dist="25400" dir="5400000" algn="bl" rotWithShape="0">
               <a:srgbClr val="1A1A1A">
                 <a:alpha val="18000"/>
               </a:srgbClr>
@@ -23016,7 +23456,7 @@
           <a:bodyPr wrap="square" rtlCol="0" anchor="ctr"/>
           <a:lstStyle/>
           <a:p>
-            <a:pPr algn="ctr" indent="0" marL="0">
+            <a:pPr marL="0" indent="0" algn="ctr">
               <a:buNone/>
             </a:pPr>
             <a:r>
@@ -23055,7 +23495,7 @@
           <a:bodyPr wrap="square" rtlCol="0" anchor="t"/>
           <a:lstStyle/>
           <a:p>
-            <a:pPr indent="0" marL="0">
+            <a:pPr marL="0" indent="0">
               <a:buNone/>
             </a:pPr>
             <a:r>
@@ -23094,7 +23534,7 @@
           <a:bodyPr wrap="square" rtlCol="0" anchor="t"/>
           <a:lstStyle/>
           <a:p>
-            <a:pPr indent="0" marL="0">
+            <a:pPr marL="0" indent="0">
               <a:lnSpc>
                 <a:spcPts val="1300"/>
               </a:lnSpc>
@@ -23131,6 +23571,7 @@
         <a:solidFill>
           <a:srgbClr val="0B3D56"/>
         </a:solidFill>
+        <a:effectLst/>
       </p:bgPr>
     </p:bg>
     <p:spTree>
@@ -23188,11 +23629,11 @@
           <a:bodyPr wrap="square" rtlCol="0" anchor="ctr"/>
           <a:lstStyle/>
           <a:p>
-            <a:pPr indent="0" marL="0">
+            <a:pPr marL="0" indent="0">
               <a:buNone/>
             </a:pPr>
             <a:r>
-              <a:rPr lang="en-US" sz="1200" b="1" spc="200" kern="0" dirty="0">
+              <a:rPr lang="en-US" sz="1200" b="1" kern="0" spc="200" dirty="0">
                 <a:solidFill>
                   <a:srgbClr val="E67E22"/>
                 </a:solidFill>
@@ -23227,7 +23668,7 @@
           <a:bodyPr wrap="square" rtlCol="0" anchor="ctr"/>
           <a:lstStyle/>
           <a:p>
-            <a:pPr indent="0" marL="0">
+            <a:pPr marL="0" indent="0">
               <a:buNone/>
             </a:pPr>
             <a:r>
@@ -23394,7 +23835,7 @@
           <a:bodyPr wrap="square" rtlCol="0" anchor="ctr"/>
           <a:lstStyle/>
           <a:p>
-            <a:pPr algn="ctr" indent="0" marL="0">
+            <a:pPr marL="0" indent="0" algn="ctr">
               <a:buNone/>
             </a:pPr>
             <a:r>
@@ -23433,7 +23874,7 @@
           <a:bodyPr wrap="square" rtlCol="0" anchor="ctr"/>
           <a:lstStyle/>
           <a:p>
-            <a:pPr algn="ctr" indent="0" marL="0">
+            <a:pPr marL="0" indent="0" algn="ctr">
               <a:buNone/>
             </a:pPr>
             <a:r>
@@ -23495,7 +23936,7 @@
           <a:bodyPr wrap="square" rtlCol="0" anchor="ctr"/>
           <a:lstStyle/>
           <a:p>
-            <a:pPr algn="ctr" indent="0" marL="0">
+            <a:pPr marL="0" indent="0" algn="ctr">
               <a:lnSpc>
                 <a:spcPts val="2600"/>
               </a:lnSpc>
@@ -23515,7 +23956,7 @@
             <a:endParaRPr lang="en-US" sz="1400" dirty="0"/>
           </a:p>
           <a:p>
-            <a:pPr algn="ctr" indent="0" marL="0">
+            <a:pPr marL="0" indent="0" algn="ctr">
               <a:lnSpc>
                 <a:spcPts val="2600"/>
               </a:lnSpc>
@@ -23535,7 +23976,7 @@
             <a:endParaRPr lang="en-US" sz="1400" dirty="0"/>
           </a:p>
           <a:p>
-            <a:pPr algn="ctr" indent="0" marL="0">
+            <a:pPr marL="0" indent="0" algn="ctr">
               <a:lnSpc>
                 <a:spcPts val="2600"/>
               </a:lnSpc>
@@ -23577,7 +24018,7 @@
           <a:bodyPr wrap="square" rtlCol="0" anchor="ctr"/>
           <a:lstStyle/>
           <a:p>
-            <a:pPr algn="l" indent="0" marL="0">
+            <a:pPr marL="0" indent="0" algn="l">
               <a:buNone/>
             </a:pPr>
             <a:r>
@@ -23611,6 +24052,7 @@
         <a:solidFill>
           <a:srgbClr val="0B3D56"/>
         </a:solidFill>
+        <a:effectLst/>
       </p:bgPr>
     </p:bg>
     <p:spTree>
@@ -23688,7 +24130,7 @@
           <a:bodyPr wrap="square" rtlCol="0" anchor="ctr"/>
           <a:lstStyle/>
           <a:p>
-            <a:pPr algn="ctr" indent="0" marL="0">
+            <a:pPr marL="0" indent="0" algn="ctr">
               <a:buNone/>
             </a:pPr>
             <a:r>
@@ -23727,7 +24169,7 @@
           <a:bodyPr wrap="square" rtlCol="0" anchor="ctr"/>
           <a:lstStyle/>
           <a:p>
-            <a:pPr algn="ctr" indent="0" marL="0">
+            <a:pPr marL="0" indent="0" algn="ctr">
               <a:buNone/>
             </a:pPr>
             <a:r>
@@ -23766,7 +24208,7 @@
           <a:bodyPr wrap="square" rtlCol="0" anchor="ctr"/>
           <a:lstStyle/>
           <a:p>
-            <a:pPr algn="ctr" indent="0" marL="0">
+            <a:pPr marL="0" indent="0" algn="ctr">
               <a:buNone/>
             </a:pPr>
             <a:r>
@@ -23800,6 +24242,7 @@
         <a:solidFill>
           <a:srgbClr val="FFFFFF"/>
         </a:solidFill>
+        <a:effectLst/>
       </p:bgPr>
     </p:bg>
     <p:spTree>
@@ -23837,11 +24280,11 @@
           <a:bodyPr wrap="square" rtlCol="0" anchor="ctr"/>
           <a:lstStyle/>
           <a:p>
-            <a:pPr indent="0" marL="0">
+            <a:pPr marL="0" indent="0">
               <a:buNone/>
             </a:pPr>
             <a:r>
-              <a:rPr lang="en-US" sz="1200" b="1" spc="200" kern="0" dirty="0">
+              <a:rPr lang="en-US" sz="1200" b="1" kern="0" spc="200" dirty="0">
                 <a:solidFill>
                   <a:srgbClr val="E67E22"/>
                 </a:solidFill>
@@ -23876,7 +24319,7 @@
           <a:bodyPr wrap="square" rtlCol="0" anchor="ctr"/>
           <a:lstStyle/>
           <a:p>
-            <a:pPr algn="l" indent="0" marL="0">
+            <a:pPr marL="0" indent="0" algn="l">
               <a:buNone/>
             </a:pPr>
             <a:r>
@@ -23915,7 +24358,7 @@
           <a:bodyPr wrap="square" rtlCol="0" anchor="ctr"/>
           <a:lstStyle/>
           <a:p>
-            <a:pPr algn="r" indent="0" marL="0">
+            <a:pPr marL="0" indent="0" algn="r">
               <a:buNone/>
             </a:pPr>
             <a:r>
@@ -23954,7 +24397,7 @@
           </a:solidFill>
           <a:ln/>
           <a:effectLst>
-            <a:outerShdw sx="100000" sy="100000" kx="0" ky="0" algn="bl" rotWithShape="0" blurRad="76200" dist="25400" dir="5400000">
+            <a:outerShdw blurRad="76200" dist="25400" dir="5400000" algn="bl" rotWithShape="0">
               <a:srgbClr val="1A1A1A">
                 <a:alpha val="18000"/>
               </a:srgbClr>
@@ -23970,8 +24413,8 @@
         </p:nvSpPr>
         <p:spPr>
           <a:xfrm>
-            <a:off x="914400" y="2743200"/>
-            <a:ext cx="5212080" cy="822960"/>
+            <a:off x="914400" y="2061882"/>
+            <a:ext cx="5212080" cy="837304"/>
           </a:xfrm>
           <a:prstGeom prst="rect">
             <a:avLst/>
@@ -23983,7 +24426,7 @@
           <a:bodyPr wrap="square" rtlCol="0" anchor="ctr"/>
           <a:lstStyle/>
           <a:p>
-            <a:pPr indent="0" marL="0">
+            <a:pPr marL="0" indent="0">
               <a:lnSpc>
                 <a:spcPts val="2000"/>
               </a:lnSpc>
@@ -24000,12 +24443,6 @@
               </a:rPr>
               <a:t>Fondée en 1992</a:t>
             </a:r>
-            <a:pPr indent="0" marL="0">
-              <a:lnSpc>
-                <a:spcPts val="2000"/>
-              </a:lnSpc>
-              <a:buNone/>
-            </a:pPr>
             <a:r>
               <a:rPr lang="en-US" sz="1350" dirty="0">
                 <a:solidFill>
@@ -24018,12 +24455,6 @@
               <a:t> · Rungis (94)
 </a:t>
             </a:r>
-            <a:pPr indent="0" marL="0">
-              <a:lnSpc>
-                <a:spcPts val="2000"/>
-              </a:lnSpc>
-              <a:buNone/>
-            </a:pPr>
             <a:r>
               <a:rPr lang="en-US" sz="1350" b="1" dirty="0">
                 <a:solidFill>
@@ -24035,12 +24466,6 @@
               </a:rPr>
               <a:t>Secteur : </a:t>
             </a:r>
-            <a:pPr indent="0" marL="0">
-              <a:lnSpc>
-                <a:spcPts val="2000"/>
-              </a:lnSpc>
-              <a:buNone/>
-            </a:pPr>
             <a:r>
               <a:rPr lang="en-US" sz="1350" dirty="0">
                 <a:solidFill>
@@ -24064,8 +24489,8 @@
         </p:nvSpPr>
         <p:spPr>
           <a:xfrm>
-            <a:off x="914400" y="3611880"/>
-            <a:ext cx="5212080" cy="2286000"/>
+            <a:off x="914400" y="2899186"/>
+            <a:ext cx="5212080" cy="1919702"/>
           </a:xfrm>
           <a:prstGeom prst="rect">
             <a:avLst/>
@@ -24149,7 +24574,7 @@
         </p:nvSpPr>
         <p:spPr>
           <a:xfrm>
-            <a:off x="6720840" y="1691640"/>
+            <a:off x="6705600" y="1691640"/>
             <a:ext cx="4937760" cy="4343400"/>
           </a:xfrm>
           <a:prstGeom prst="roundRect">
@@ -24162,7 +24587,7 @@
           </a:solidFill>
           <a:ln/>
           <a:effectLst>
-            <a:outerShdw sx="100000" sy="100000" kx="0" ky="0" algn="bl" rotWithShape="0" blurRad="76200" dist="25400" dir="5400000">
+            <a:outerShdw blurRad="76200" dist="25400" dir="5400000" algn="bl" rotWithShape="0">
               <a:srgbClr val="1A1A1A">
                 <a:alpha val="18000"/>
               </a:srgbClr>
@@ -24191,7 +24616,7 @@
           <a:bodyPr wrap="square" rtlCol="0" anchor="ctr"/>
           <a:lstStyle/>
           <a:p>
-            <a:pPr indent="0" marL="0">
+            <a:pPr marL="0" indent="0">
               <a:buNone/>
             </a:pPr>
             <a:r>
@@ -24206,6 +24631,516 @@
               <a:t>Quelques clients</a:t>
             </a:r>
             <a:endParaRPr lang="en-US" sz="1500" dirty="0"/>
+          </a:p>
+        </p:txBody>
+      </p:sp>
+      <p:sp>
+        <p:nvSpPr>
+          <p:cNvPr id="10" name="Shape 8"/>
+          <p:cNvSpPr/>
+          <p:nvPr/>
+        </p:nvSpPr>
+        <p:spPr>
+          <a:xfrm>
+            <a:off x="6995160" y="2331720"/>
+            <a:ext cx="2041264" cy="1159405"/>
+          </a:xfrm>
+          <a:prstGeom prst="roundRect">
+            <a:avLst>
+              <a:gd name="adj" fmla="val 5161"/>
+            </a:avLst>
+          </a:prstGeom>
+          <a:solidFill>
+            <a:srgbClr val="F4F7F8"/>
+          </a:solidFill>
+          <a:ln/>
+        </p:spPr>
+      </p:sp>
+      <p:pic>
+        <p:nvPicPr>
+          <p:cNvPr id="11" name="Image 0" descr="assets/client_gascogne.png"/>
+          <p:cNvPicPr>
+            <a:picLocks noChangeAspect="1"/>
+          </p:cNvPicPr>
+          <p:nvPr/>
+        </p:nvPicPr>
+        <p:blipFill>
+          <a:blip r:embed="rId3"/>
+          <a:stretch>
+            <a:fillRect/>
+          </a:stretch>
+        </p:blipFill>
+        <p:spPr>
+          <a:xfrm>
+            <a:off x="7531100" y="2441448"/>
+            <a:ext cx="1259840" cy="566928"/>
+          </a:xfrm>
+          <a:prstGeom prst="rect">
+            <a:avLst/>
+          </a:prstGeom>
+        </p:spPr>
+      </p:pic>
+      <p:sp>
+        <p:nvSpPr>
+          <p:cNvPr id="12" name="Text 9"/>
+          <p:cNvSpPr/>
+          <p:nvPr/>
+        </p:nvSpPr>
+        <p:spPr>
+          <a:xfrm>
+            <a:off x="7104888" y="3063240"/>
+            <a:ext cx="2112264" cy="640080"/>
+          </a:xfrm>
+          <a:prstGeom prst="rect">
+            <a:avLst/>
+          </a:prstGeom>
+          <a:noFill/>
+          <a:ln/>
+        </p:spPr>
+        <p:txBody>
+          <a:bodyPr wrap="square" rtlCol="0" anchor="t"/>
+          <a:lstStyle/>
+          <a:p>
+            <a:pPr marL="0" indent="0">
+              <a:buNone/>
+            </a:pPr>
+            <a:r>
+              <a:rPr lang="en-US" sz="1000" dirty="0">
+                <a:solidFill>
+                  <a:srgbClr val="6B7280"/>
+                </a:solidFill>
+                <a:latin typeface="Calibri" pitchFamily="34" charset="0"/>
+                <a:ea typeface="Calibri" pitchFamily="34" charset="-122"/>
+                <a:cs typeface="Calibri" pitchFamily="34" charset="-120"/>
+              </a:rPr>
+              <a:t>Bois — ~3000 employés, cotée en bourse</a:t>
+            </a:r>
+            <a:endParaRPr lang="en-US" sz="1000" dirty="0"/>
+          </a:p>
+        </p:txBody>
+      </p:sp>
+      <p:sp>
+        <p:nvSpPr>
+          <p:cNvPr id="13" name="Shape 10"/>
+          <p:cNvSpPr/>
+          <p:nvPr/>
+        </p:nvSpPr>
+        <p:spPr>
+          <a:xfrm>
+            <a:off x="9343016" y="2331720"/>
+            <a:ext cx="2041264" cy="1159405"/>
+          </a:xfrm>
+          <a:prstGeom prst="roundRect">
+            <a:avLst>
+              <a:gd name="adj" fmla="val 5161"/>
+            </a:avLst>
+          </a:prstGeom>
+          <a:solidFill>
+            <a:srgbClr val="F4F7F8"/>
+          </a:solidFill>
+          <a:ln/>
+        </p:spPr>
+      </p:sp>
+      <p:pic>
+        <p:nvPicPr>
+          <p:cNvPr id="14" name="Image 1" descr="assets/client_polytechs.png"/>
+          <p:cNvPicPr>
+            <a:picLocks noChangeAspect="1"/>
+          </p:cNvPicPr>
+          <p:nvPr/>
+        </p:nvPicPr>
+        <p:blipFill>
+          <a:blip r:embed="rId4"/>
+          <a:stretch>
+            <a:fillRect/>
+          </a:stretch>
+        </p:blipFill>
+        <p:spPr>
+          <a:xfrm>
+            <a:off x="10045700" y="2441448"/>
+            <a:ext cx="1259840" cy="566928"/>
+          </a:xfrm>
+          <a:prstGeom prst="rect">
+            <a:avLst/>
+          </a:prstGeom>
+        </p:spPr>
+      </p:pic>
+      <p:sp>
+        <p:nvSpPr>
+          <p:cNvPr id="15" name="Text 11"/>
+          <p:cNvSpPr/>
+          <p:nvPr/>
+        </p:nvSpPr>
+        <p:spPr>
+          <a:xfrm>
+            <a:off x="9619488" y="3063240"/>
+            <a:ext cx="2112264" cy="365760"/>
+          </a:xfrm>
+          <a:prstGeom prst="rect">
+            <a:avLst/>
+          </a:prstGeom>
+          <a:noFill/>
+          <a:ln/>
+        </p:spPr>
+        <p:txBody>
+          <a:bodyPr wrap="square" rtlCol="0" anchor="t"/>
+          <a:lstStyle/>
+          <a:p>
+            <a:pPr marL="0" indent="0">
+              <a:buNone/>
+            </a:pPr>
+            <a:r>
+              <a:rPr lang="en-US" sz="1050" dirty="0">
+                <a:solidFill>
+                  <a:srgbClr val="6B7280"/>
+                </a:solidFill>
+                <a:latin typeface="Calibri" pitchFamily="34" charset="0"/>
+                <a:ea typeface="Calibri" pitchFamily="34" charset="-122"/>
+                <a:cs typeface="Calibri" pitchFamily="34" charset="-120"/>
+              </a:rPr>
+              <a:t>Fabrication de polymères</a:t>
+            </a:r>
+            <a:endParaRPr lang="en-US" sz="1050" dirty="0"/>
+          </a:p>
+        </p:txBody>
+      </p:sp>
+      <p:sp>
+        <p:nvSpPr>
+          <p:cNvPr id="16" name="Shape 12"/>
+          <p:cNvSpPr/>
+          <p:nvPr/>
+        </p:nvSpPr>
+        <p:spPr>
+          <a:xfrm>
+            <a:off x="6995160" y="3600853"/>
+            <a:ext cx="2041264" cy="1218035"/>
+          </a:xfrm>
+          <a:prstGeom prst="roundRect">
+            <a:avLst>
+              <a:gd name="adj" fmla="val 5161"/>
+            </a:avLst>
+          </a:prstGeom>
+          <a:solidFill>
+            <a:srgbClr val="F4F7F8"/>
+          </a:solidFill>
+          <a:ln/>
+        </p:spPr>
+      </p:sp>
+      <p:pic>
+        <p:nvPicPr>
+          <p:cNvPr id="17" name="Image 2" descr="assets/client_flexelec.jpeg"/>
+          <p:cNvPicPr>
+            <a:picLocks noChangeAspect="1"/>
+          </p:cNvPicPr>
+          <p:nvPr/>
+        </p:nvPicPr>
+        <p:blipFill>
+          <a:blip r:embed="rId5"/>
+          <a:stretch>
+            <a:fillRect/>
+          </a:stretch>
+        </p:blipFill>
+        <p:spPr>
+          <a:xfrm>
+            <a:off x="7513320" y="3734698"/>
+            <a:ext cx="1259840" cy="566928"/>
+          </a:xfrm>
+          <a:prstGeom prst="rect">
+            <a:avLst/>
+          </a:prstGeom>
+        </p:spPr>
+      </p:pic>
+      <p:sp>
+        <p:nvSpPr>
+          <p:cNvPr id="18" name="Text 13"/>
+          <p:cNvSpPr/>
+          <p:nvPr/>
+        </p:nvSpPr>
+        <p:spPr>
+          <a:xfrm>
+            <a:off x="7104888" y="4333005"/>
+            <a:ext cx="2112264" cy="440164"/>
+          </a:xfrm>
+          <a:prstGeom prst="rect">
+            <a:avLst/>
+          </a:prstGeom>
+          <a:noFill/>
+          <a:ln/>
+        </p:spPr>
+        <p:txBody>
+          <a:bodyPr wrap="square" rtlCol="0" anchor="t"/>
+          <a:lstStyle/>
+          <a:p>
+            <a:pPr marL="0" indent="0">
+              <a:buNone/>
+            </a:pPr>
+            <a:r>
+              <a:rPr lang="en-US" sz="1050" dirty="0">
+                <a:solidFill>
+                  <a:srgbClr val="6B7280"/>
+                </a:solidFill>
+                <a:latin typeface="Calibri" pitchFamily="34" charset="0"/>
+                <a:ea typeface="Calibri" pitchFamily="34" charset="-122"/>
+                <a:cs typeface="Calibri" pitchFamily="34" charset="-120"/>
+              </a:rPr>
+              <a:t>Mise hors gel &amp; maintien en température</a:t>
+            </a:r>
+            <a:endParaRPr lang="en-US" sz="1050" dirty="0"/>
+          </a:p>
+        </p:txBody>
+      </p:sp>
+      <p:sp>
+        <p:nvSpPr>
+          <p:cNvPr id="19" name="Shape 14"/>
+          <p:cNvSpPr/>
+          <p:nvPr/>
+        </p:nvSpPr>
+        <p:spPr>
+          <a:xfrm>
+            <a:off x="9343016" y="3566161"/>
+            <a:ext cx="2041264" cy="1234440"/>
+          </a:xfrm>
+          <a:prstGeom prst="roundRect">
+            <a:avLst>
+              <a:gd name="adj" fmla="val 5161"/>
+            </a:avLst>
+          </a:prstGeom>
+          <a:solidFill>
+            <a:srgbClr val="F4F7F8"/>
+          </a:solidFill>
+          <a:ln/>
+        </p:spPr>
+      </p:sp>
+      <p:pic>
+        <p:nvPicPr>
+          <p:cNvPr id="20" name="Image 3" descr="assets/client_agema.png"/>
+          <p:cNvPicPr>
+            <a:picLocks noChangeAspect="1"/>
+          </p:cNvPicPr>
+          <p:nvPr/>
+        </p:nvPicPr>
+        <p:blipFill>
+          <a:blip r:embed="rId6"/>
+          <a:stretch>
+            <a:fillRect/>
+          </a:stretch>
+        </p:blipFill>
+        <p:spPr>
+          <a:xfrm>
+            <a:off x="9906896" y="3661905"/>
+            <a:ext cx="1259840" cy="566928"/>
+          </a:xfrm>
+          <a:prstGeom prst="rect">
+            <a:avLst/>
+          </a:prstGeom>
+        </p:spPr>
+      </p:pic>
+      <p:sp>
+        <p:nvSpPr>
+          <p:cNvPr id="21" name="Text 15"/>
+          <p:cNvSpPr/>
+          <p:nvPr/>
+        </p:nvSpPr>
+        <p:spPr>
+          <a:xfrm>
+            <a:off x="9619488" y="4343400"/>
+            <a:ext cx="2112264" cy="274320"/>
+          </a:xfrm>
+          <a:prstGeom prst="rect">
+            <a:avLst/>
+          </a:prstGeom>
+          <a:noFill/>
+          <a:ln/>
+        </p:spPr>
+        <p:txBody>
+          <a:bodyPr wrap="square" rtlCol="0" anchor="t"/>
+          <a:lstStyle/>
+          <a:p>
+            <a:pPr marL="0" indent="0">
+              <a:buNone/>
+            </a:pPr>
+            <a:r>
+              <a:rPr lang="en-US" sz="1050" dirty="0">
+                <a:solidFill>
+                  <a:srgbClr val="6B7280"/>
+                </a:solidFill>
+                <a:latin typeface="Calibri" pitchFamily="34" charset="0"/>
+                <a:ea typeface="Calibri" pitchFamily="34" charset="-122"/>
+                <a:cs typeface="Calibri" pitchFamily="34" charset="-120"/>
+              </a:rPr>
+              <a:t>Secteur du bâtiment</a:t>
+            </a:r>
+            <a:endParaRPr lang="en-US" sz="1050" dirty="0"/>
+          </a:p>
+        </p:txBody>
+      </p:sp>
+      <p:sp>
+        <p:nvSpPr>
+          <p:cNvPr id="22" name="Shape 16"/>
+          <p:cNvSpPr/>
+          <p:nvPr/>
+        </p:nvSpPr>
+        <p:spPr>
+          <a:xfrm>
+            <a:off x="6995160" y="4928616"/>
+            <a:ext cx="2041264" cy="1032913"/>
+          </a:xfrm>
+          <a:prstGeom prst="roundRect">
+            <a:avLst>
+              <a:gd name="adj" fmla="val 5161"/>
+            </a:avLst>
+          </a:prstGeom>
+          <a:solidFill>
+            <a:srgbClr val="F4F7F8"/>
+          </a:solidFill>
+          <a:ln/>
+        </p:spPr>
+      </p:sp>
+      <p:pic>
+        <p:nvPicPr>
+          <p:cNvPr id="23" name="Image 4" descr="assets/client_imc.jpeg"/>
+          <p:cNvPicPr>
+            <a:picLocks noChangeAspect="1"/>
+          </p:cNvPicPr>
+          <p:nvPr/>
+        </p:nvPicPr>
+        <p:blipFill>
+          <a:blip r:embed="rId7"/>
+          <a:stretch>
+            <a:fillRect/>
+          </a:stretch>
+        </p:blipFill>
+        <p:spPr>
+          <a:xfrm>
+            <a:off x="7531100" y="4983481"/>
+            <a:ext cx="1259840" cy="560653"/>
+          </a:xfrm>
+          <a:prstGeom prst="rect">
+            <a:avLst/>
+          </a:prstGeom>
+        </p:spPr>
+      </p:pic>
+      <p:sp>
+        <p:nvSpPr>
+          <p:cNvPr id="24" name="Text 17"/>
+          <p:cNvSpPr/>
+          <p:nvPr/>
+        </p:nvSpPr>
+        <p:spPr>
+          <a:xfrm>
+            <a:off x="7104888" y="5565827"/>
+            <a:ext cx="2112264" cy="560653"/>
+          </a:xfrm>
+          <a:prstGeom prst="rect">
+            <a:avLst/>
+          </a:prstGeom>
+          <a:noFill/>
+          <a:ln/>
+        </p:spPr>
+        <p:txBody>
+          <a:bodyPr wrap="square" rtlCol="0" anchor="t"/>
+          <a:lstStyle/>
+          <a:p>
+            <a:pPr marL="0" indent="0">
+              <a:buNone/>
+            </a:pPr>
+            <a:r>
+              <a:rPr lang="en-US" sz="950" dirty="0">
+                <a:solidFill>
+                  <a:srgbClr val="6B7280"/>
+                </a:solidFill>
+                <a:latin typeface="Calibri" pitchFamily="34" charset="0"/>
+                <a:ea typeface="Calibri" pitchFamily="34" charset="-122"/>
+                <a:cs typeface="Calibri" pitchFamily="34" charset="-120"/>
+              </a:rPr>
+              <a:t>Leader du consommable médical (Algérie)</a:t>
+            </a:r>
+            <a:endParaRPr lang="en-US" sz="950" dirty="0"/>
+          </a:p>
+        </p:txBody>
+      </p:sp>
+      <p:sp>
+        <p:nvSpPr>
+          <p:cNvPr id="25" name="Shape 18"/>
+          <p:cNvSpPr/>
+          <p:nvPr/>
+        </p:nvSpPr>
+        <p:spPr>
+          <a:xfrm>
+            <a:off x="9343016" y="4915168"/>
+            <a:ext cx="2041264" cy="1032913"/>
+          </a:xfrm>
+          <a:prstGeom prst="roundRect">
+            <a:avLst>
+              <a:gd name="adj" fmla="val 5161"/>
+            </a:avLst>
+          </a:prstGeom>
+          <a:solidFill>
+            <a:srgbClr val="F4F7F8"/>
+          </a:solidFill>
+          <a:ln/>
+        </p:spPr>
+      </p:sp>
+      <p:pic>
+        <p:nvPicPr>
+          <p:cNvPr id="26" name="Image 5" descr="assets/client_sobio.png"/>
+          <p:cNvPicPr>
+            <a:picLocks noChangeAspect="1"/>
+          </p:cNvPicPr>
+          <p:nvPr/>
+        </p:nvPicPr>
+        <p:blipFill>
+          <a:blip r:embed="rId8"/>
+          <a:stretch>
+            <a:fillRect/>
+          </a:stretch>
+        </p:blipFill>
+        <p:spPr>
+          <a:xfrm>
+            <a:off x="10045700" y="4996392"/>
+            <a:ext cx="1259840" cy="566928"/>
+          </a:xfrm>
+          <a:prstGeom prst="rect">
+            <a:avLst/>
+          </a:prstGeom>
+        </p:spPr>
+      </p:pic>
+      <p:sp>
+        <p:nvSpPr>
+          <p:cNvPr id="27" name="Text 19"/>
+          <p:cNvSpPr/>
+          <p:nvPr/>
+        </p:nvSpPr>
+        <p:spPr>
+          <a:xfrm>
+            <a:off x="9619488" y="5623560"/>
+            <a:ext cx="2112264" cy="274320"/>
+          </a:xfrm>
+          <a:prstGeom prst="rect">
+            <a:avLst/>
+          </a:prstGeom>
+          <a:noFill/>
+          <a:ln/>
+        </p:spPr>
+        <p:txBody>
+          <a:bodyPr wrap="square" rtlCol="0" anchor="t"/>
+          <a:lstStyle/>
+          <a:p>
+            <a:pPr marL="0" indent="0">
+              <a:buNone/>
+            </a:pPr>
+            <a:r>
+              <a:rPr lang="en-US" sz="950" dirty="0">
+                <a:solidFill>
+                  <a:srgbClr val="6B7280"/>
+                </a:solidFill>
+                <a:latin typeface="Calibri" pitchFamily="34" charset="0"/>
+                <a:ea typeface="Calibri" pitchFamily="34" charset="-122"/>
+                <a:cs typeface="Calibri" pitchFamily="34" charset="-120"/>
+              </a:rPr>
+              <a:t>Produits certifiés BIO</a:t>
+            </a:r>
+            <a:endParaRPr lang="en-US" sz="950" dirty="0"/>
           </a:p>
         </p:txBody>
       </p:sp>
@@ -24225,6 +25160,7 @@
         <a:solidFill>
           <a:srgbClr val="FFFFFF"/>
         </a:solidFill>
+        <a:effectLst/>
       </p:bgPr>
     </p:bg>
     <p:spTree>
@@ -24262,11 +25198,11 @@
           <a:bodyPr wrap="square" rtlCol="0" anchor="ctr"/>
           <a:lstStyle/>
           <a:p>
-            <a:pPr indent="0" marL="0">
+            <a:pPr marL="0" indent="0">
               <a:buNone/>
             </a:pPr>
             <a:r>
-              <a:rPr lang="en-US" sz="1200" b="1" spc="200" kern="0" dirty="0">
+              <a:rPr lang="en-US" sz="1200" b="1" kern="0" spc="200" dirty="0">
                 <a:solidFill>
                   <a:srgbClr val="E67E22"/>
                 </a:solidFill>
@@ -24301,7 +25237,7 @@
           <a:bodyPr wrap="square" rtlCol="0" anchor="ctr"/>
           <a:lstStyle/>
           <a:p>
-            <a:pPr algn="l" indent="0" marL="0">
+            <a:pPr marL="0" indent="0" algn="l">
               <a:buNone/>
             </a:pPr>
             <a:r>
@@ -24340,7 +25276,7 @@
           <a:bodyPr wrap="square" rtlCol="0" anchor="ctr"/>
           <a:lstStyle/>
           <a:p>
-            <a:pPr algn="r" indent="0" marL="0">
+            <a:pPr marL="0" indent="0" algn="r">
               <a:buNone/>
             </a:pPr>
             <a:r>
@@ -24379,7 +25315,7 @@
           </a:solidFill>
           <a:ln/>
           <a:effectLst>
-            <a:outerShdw sx="100000" sy="100000" kx="0" ky="0" algn="bl" rotWithShape="0" blurRad="76200" dist="25400" dir="5400000">
+            <a:outerShdw blurRad="76200" dist="25400" dir="5400000" algn="bl" rotWithShape="0">
               <a:srgbClr val="1A1A1A">
                 <a:alpha val="18000"/>
               </a:srgbClr>
@@ -24428,7 +25364,7 @@
           <a:bodyPr wrap="square" rtlCol="0" anchor="ctr"/>
           <a:lstStyle/>
           <a:p>
-            <a:pPr algn="ctr" indent="0" marL="0">
+            <a:pPr marL="0" indent="0" algn="ctr">
               <a:buNone/>
             </a:pPr>
             <a:r>
@@ -24467,7 +25403,7 @@
           <a:bodyPr wrap="square" rtlCol="0" anchor="ctr"/>
           <a:lstStyle/>
           <a:p>
-            <a:pPr indent="0" marL="0">
+            <a:pPr marL="0" indent="0">
               <a:buNone/>
             </a:pPr>
             <a:r>
@@ -24506,7 +25442,7 @@
           <a:bodyPr wrap="square" rtlCol="0" anchor="ctr"/>
           <a:lstStyle/>
           <a:p>
-            <a:pPr indent="0" marL="0">
+            <a:pPr marL="0" indent="0">
               <a:buNone/>
             </a:pPr>
             <a:r>
@@ -24672,7 +25608,7 @@
           </a:solidFill>
           <a:ln/>
           <a:effectLst>
-            <a:outerShdw sx="100000" sy="100000" kx="0" ky="0" algn="bl" rotWithShape="0" blurRad="76200" dist="25400" dir="5400000">
+            <a:outerShdw blurRad="76200" dist="25400" dir="5400000" algn="bl" rotWithShape="0">
               <a:srgbClr val="1A1A1A">
                 <a:alpha val="18000"/>
               </a:srgbClr>
@@ -24701,7 +25637,7 @@
           <a:bodyPr wrap="square" rtlCol="0" anchor="ctr"/>
           <a:lstStyle/>
           <a:p>
-            <a:pPr indent="0" marL="0">
+            <a:pPr marL="0" indent="0">
               <a:buNone/>
             </a:pPr>
             <a:r>
@@ -24719,6 +25655,30 @@
           </a:p>
         </p:txBody>
       </p:sp>
+      <p:pic>
+        <p:nvPicPr>
+          <p:cNvPr id="13" name="Image 0" descr="assets/orgchart.jpeg"/>
+          <p:cNvPicPr>
+            <a:picLocks noChangeAspect="1"/>
+          </p:cNvPicPr>
+          <p:nvPr/>
+        </p:nvPicPr>
+        <p:blipFill>
+          <a:blip r:embed="rId3"/>
+          <a:stretch>
+            <a:fillRect/>
+          </a:stretch>
+        </p:blipFill>
+        <p:spPr>
+          <a:xfrm>
+            <a:off x="6080760" y="2720226"/>
+            <a:ext cx="5394960" cy="2834867"/>
+          </a:xfrm>
+          <a:prstGeom prst="rect">
+            <a:avLst/>
+          </a:prstGeom>
+        </p:spPr>
+      </p:pic>
     </p:spTree>
   </p:cSld>
   <p:clrMapOvr>
@@ -24735,6 +25695,7 @@
         <a:solidFill>
           <a:srgbClr val="FFFFFF"/>
         </a:solidFill>
+        <a:effectLst/>
       </p:bgPr>
     </p:bg>
     <p:spTree>
@@ -24772,11 +25733,11 @@
           <a:bodyPr wrap="square" rtlCol="0" anchor="ctr"/>
           <a:lstStyle/>
           <a:p>
-            <a:pPr indent="0" marL="0">
+            <a:pPr marL="0" indent="0">
               <a:buNone/>
             </a:pPr>
             <a:r>
-              <a:rPr lang="en-US" sz="1200" b="1" spc="200" kern="0" dirty="0">
+              <a:rPr lang="en-US" sz="1200" b="1" kern="0" spc="200" dirty="0">
                 <a:solidFill>
                   <a:srgbClr val="E67E22"/>
                 </a:solidFill>
@@ -24811,7 +25772,7 @@
           <a:bodyPr wrap="square" rtlCol="0" anchor="ctr"/>
           <a:lstStyle/>
           <a:p>
-            <a:pPr algn="l" indent="0" marL="0">
+            <a:pPr marL="0" indent="0" algn="l">
               <a:buNone/>
             </a:pPr>
             <a:r>
@@ -24850,7 +25811,7 @@
           <a:bodyPr wrap="square" rtlCol="0" anchor="ctr"/>
           <a:lstStyle/>
           <a:p>
-            <a:pPr algn="r" indent="0" marL="0">
+            <a:pPr marL="0" indent="0" algn="r">
               <a:buNone/>
             </a:pPr>
             <a:r>
@@ -24889,7 +25850,7 @@
           </a:solidFill>
           <a:ln/>
           <a:effectLst>
-            <a:outerShdw sx="100000" sy="100000" kx="0" ky="0" algn="bl" rotWithShape="0" blurRad="76200" dist="25400" dir="5400000">
+            <a:outerShdw blurRad="76200" dist="25400" dir="5400000" algn="bl" rotWithShape="0">
               <a:srgbClr val="1A1A1A">
                 <a:alpha val="18000"/>
               </a:srgbClr>
@@ -24940,7 +25901,7 @@
           <a:bodyPr wrap="square" rtlCol="0" anchor="ctr"/>
           <a:lstStyle/>
           <a:p>
-            <a:pPr algn="ctr" indent="0" marL="0">
+            <a:pPr marL="0" indent="0" algn="ctr">
               <a:buNone/>
             </a:pPr>
             <a:r>
@@ -24979,7 +25940,7 @@
           <a:bodyPr wrap="square" rtlCol="0" anchor="ctr"/>
           <a:lstStyle/>
           <a:p>
-            <a:pPr indent="0" marL="0">
+            <a:pPr marL="0" indent="0">
               <a:buNone/>
             </a:pPr>
             <a:r>
@@ -25018,7 +25979,7 @@
           <a:bodyPr wrap="square" rtlCol="0" anchor="t"/>
           <a:lstStyle/>
           <a:p>
-            <a:pPr indent="0" marL="0">
+            <a:pPr marL="0" indent="0">
               <a:lnSpc>
                 <a:spcPts val="1500"/>
               </a:lnSpc>
@@ -25060,7 +26021,7 @@
           </a:solidFill>
           <a:ln/>
           <a:effectLst>
-            <a:outerShdw sx="100000" sy="100000" kx="0" ky="0" algn="bl" rotWithShape="0" blurRad="76200" dist="25400" dir="5400000">
+            <a:outerShdw blurRad="76200" dist="25400" dir="5400000" algn="bl" rotWithShape="0">
               <a:srgbClr val="1A1A1A">
                 <a:alpha val="18000"/>
               </a:srgbClr>
@@ -25111,7 +26072,7 @@
           <a:bodyPr wrap="square" rtlCol="0" anchor="ctr"/>
           <a:lstStyle/>
           <a:p>
-            <a:pPr algn="ctr" indent="0" marL="0">
+            <a:pPr marL="0" indent="0" algn="ctr">
               <a:buNone/>
             </a:pPr>
             <a:r>
@@ -25150,7 +26111,7 @@
           <a:bodyPr wrap="square" rtlCol="0" anchor="ctr"/>
           <a:lstStyle/>
           <a:p>
-            <a:pPr indent="0" marL="0">
+            <a:pPr marL="0" indent="0">
               <a:buNone/>
             </a:pPr>
             <a:r>
@@ -25189,7 +26150,7 @@
           <a:bodyPr wrap="square" rtlCol="0" anchor="t"/>
           <a:lstStyle/>
           <a:p>
-            <a:pPr indent="0" marL="0">
+            <a:pPr marL="0" indent="0">
               <a:lnSpc>
                 <a:spcPts val="1500"/>
               </a:lnSpc>
@@ -25231,7 +26192,7 @@
           </a:solidFill>
           <a:ln/>
           <a:effectLst>
-            <a:outerShdw sx="100000" sy="100000" kx="0" ky="0" algn="bl" rotWithShape="0" blurRad="76200" dist="25400" dir="5400000">
+            <a:outerShdw blurRad="76200" dist="25400" dir="5400000" algn="bl" rotWithShape="0">
               <a:srgbClr val="1A1A1A">
                 <a:alpha val="18000"/>
               </a:srgbClr>
@@ -25282,7 +26243,7 @@
           <a:bodyPr wrap="square" rtlCol="0" anchor="ctr"/>
           <a:lstStyle/>
           <a:p>
-            <a:pPr algn="ctr" indent="0" marL="0">
+            <a:pPr marL="0" indent="0" algn="ctr">
               <a:buNone/>
             </a:pPr>
             <a:r>
@@ -25321,7 +26282,7 @@
           <a:bodyPr wrap="square" rtlCol="0" anchor="ctr"/>
           <a:lstStyle/>
           <a:p>
-            <a:pPr indent="0" marL="0">
+            <a:pPr marL="0" indent="0">
               <a:buNone/>
             </a:pPr>
             <a:r>
@@ -25360,7 +26321,7 @@
           <a:bodyPr wrap="square" rtlCol="0" anchor="t"/>
           <a:lstStyle/>
           <a:p>
-            <a:pPr indent="0" marL="0">
+            <a:pPr marL="0" indent="0">
               <a:lnSpc>
                 <a:spcPts val="1500"/>
               </a:lnSpc>
@@ -25402,7 +26363,7 @@
           </a:solidFill>
           <a:ln/>
           <a:effectLst>
-            <a:outerShdw sx="100000" sy="100000" kx="0" ky="0" algn="bl" rotWithShape="0" blurRad="76200" dist="25400" dir="5400000">
+            <a:outerShdw blurRad="76200" dist="25400" dir="5400000" algn="bl" rotWithShape="0">
               <a:srgbClr val="1A1A1A">
                 <a:alpha val="18000"/>
               </a:srgbClr>
@@ -25453,7 +26414,7 @@
           <a:bodyPr wrap="square" rtlCol="0" anchor="ctr"/>
           <a:lstStyle/>
           <a:p>
-            <a:pPr algn="ctr" indent="0" marL="0">
+            <a:pPr marL="0" indent="0" algn="ctr">
               <a:buNone/>
             </a:pPr>
             <a:r>
@@ -25492,7 +26453,7 @@
           <a:bodyPr wrap="square" rtlCol="0" anchor="ctr"/>
           <a:lstStyle/>
           <a:p>
-            <a:pPr indent="0" marL="0">
+            <a:pPr marL="0" indent="0">
               <a:buNone/>
             </a:pPr>
             <a:r>
@@ -25531,7 +26492,7 @@
           <a:bodyPr wrap="square" rtlCol="0" anchor="t"/>
           <a:lstStyle/>
           <a:p>
-            <a:pPr indent="0" marL="0">
+            <a:pPr marL="0" indent="0">
               <a:lnSpc>
                 <a:spcPts val="1500"/>
               </a:lnSpc>
@@ -25568,6 +26529,7 @@
         <a:solidFill>
           <a:srgbClr val="FFFFFF"/>
         </a:solidFill>
+        <a:effectLst/>
       </p:bgPr>
     </p:bg>
     <p:spTree>
@@ -25605,11 +26567,11 @@
           <a:bodyPr wrap="square" rtlCol="0" anchor="ctr"/>
           <a:lstStyle/>
           <a:p>
-            <a:pPr indent="0" marL="0">
+            <a:pPr marL="0" indent="0">
               <a:buNone/>
             </a:pPr>
             <a:r>
-              <a:rPr lang="en-US" sz="1200" b="1" spc="200" kern="0" dirty="0">
+              <a:rPr lang="en-US" sz="1200" b="1" kern="0" spc="200" dirty="0">
                 <a:solidFill>
                   <a:srgbClr val="E67E22"/>
                 </a:solidFill>
@@ -25644,7 +26606,7 @@
           <a:bodyPr wrap="square" rtlCol="0" anchor="ctr"/>
           <a:lstStyle/>
           <a:p>
-            <a:pPr algn="l" indent="0" marL="0">
+            <a:pPr marL="0" indent="0" algn="l">
               <a:buNone/>
             </a:pPr>
             <a:r>
@@ -25683,7 +26645,7 @@
           <a:bodyPr wrap="square" rtlCol="0" anchor="ctr"/>
           <a:lstStyle/>
           <a:p>
-            <a:pPr algn="r" indent="0" marL="0">
+            <a:pPr marL="0" indent="0" algn="r">
               <a:buNone/>
             </a:pPr>
             <a:r>
@@ -25722,7 +26684,7 @@
           </a:solidFill>
           <a:ln/>
           <a:effectLst>
-            <a:outerShdw sx="100000" sy="100000" kx="0" ky="0" algn="bl" rotWithShape="0" blurRad="76200" dist="25400" dir="5400000">
+            <a:outerShdw blurRad="76200" dist="25400" dir="5400000" algn="bl" rotWithShape="0">
               <a:srgbClr val="1A1A1A">
                 <a:alpha val="18000"/>
               </a:srgbClr>
@@ -25751,7 +26713,7 @@
           <a:bodyPr wrap="square" rtlCol="0" anchor="ctr"/>
           <a:lstStyle/>
           <a:p>
-            <a:pPr indent="0" marL="0">
+            <a:pPr marL="0" indent="0">
               <a:buNone/>
             </a:pPr>
             <a:r>
@@ -25790,7 +26752,7 @@
           <a:bodyPr wrap="square" rtlCol="0" anchor="t"/>
           <a:lstStyle/>
           <a:p>
-            <a:pPr indent="0" marL="0">
+            <a:pPr marL="0" indent="0">
               <a:buNone/>
             </a:pPr>
             <a:endParaRPr lang="en-US" dirty="0"/>
@@ -25818,7 +26780,7 @@
           <a:bodyPr wrap="square" rtlCol="0" anchor="t"/>
           <a:lstStyle/>
           <a:p>
-            <a:pPr indent="0" marL="0">
+            <a:pPr marL="0" indent="0">
               <a:lnSpc>
                 <a:spcPts val="1700"/>
               </a:lnSpc>
@@ -25832,12 +26794,6 @@
               </a:rPr>
               <a:t>SQUALP Web</a:t>
             </a:r>
-            <a:pPr indent="0" marL="0">
-              <a:lnSpc>
-                <a:spcPts val="1700"/>
-              </a:lnSpc>
-              <a:buNone/>
-            </a:pPr>
             <a:r>
               <a:rPr lang="en-US" sz="1250" dirty="0">
                 <a:solidFill>
@@ -25847,12 +26803,6 @@
               <a:t>  — transfert de stocks, inventaires, classement des stocks, ordres de service ; interfaces réactives, filtres dynamiques, scanner code-barres, fenêtres modales.
 </a:t>
             </a:r>
-            <a:pPr indent="0" marL="0">
-              <a:lnSpc>
-                <a:spcPts val="1700"/>
-              </a:lnSpc>
-              <a:buNone/>
-            </a:pPr>
             <a:r>
               <a:rPr lang="en-US" sz="1350" b="1" dirty="0">
                 <a:solidFill>
@@ -25861,12 +26811,6 @@
               </a:rPr>
               <a:t>Projet IXAO</a:t>
             </a:r>
-            <a:pPr indent="0" marL="0">
-              <a:lnSpc>
-                <a:spcPts val="1700"/>
-              </a:lnSpc>
-              <a:buNone/>
-            </a:pPr>
             <a:r>
               <a:rPr lang="en-US" sz="1250" dirty="0">
                 <a:solidFill>
@@ -25876,12 +26820,6 @@
               <a:t>  — gestion des demandes internes et clients : évolutions front-end, ajustements back-end/BDD, nouvelles fonctionnalités.
 </a:t>
             </a:r>
-            <a:pPr indent="0" marL="0">
-              <a:lnSpc>
-                <a:spcPts val="1700"/>
-              </a:lnSpc>
-              <a:buNone/>
-            </a:pPr>
             <a:r>
               <a:rPr lang="en-US" sz="1350" b="1" dirty="0">
                 <a:solidFill>
@@ -25890,12 +26828,6 @@
               </a:rPr>
               <a:t>API REST — client Gascogne Bois</a:t>
             </a:r>
-            <a:pPr indent="0" marL="0">
-              <a:lnSpc>
-                <a:spcPts val="1700"/>
-              </a:lnSpc>
-              <a:buNone/>
-            </a:pPr>
             <a:r>
               <a:rPr lang="en-US" sz="1250" dirty="0">
                 <a:solidFill>
@@ -25929,7 +26861,7 @@
           </a:solidFill>
           <a:ln/>
           <a:effectLst>
-            <a:outerShdw sx="100000" sy="100000" kx="0" ky="0" algn="bl" rotWithShape="0" blurRad="76200" dist="25400" dir="5400000">
+            <a:outerShdw blurRad="76200" dist="25400" dir="5400000" algn="bl" rotWithShape="0">
               <a:srgbClr val="1A1A1A">
                 <a:alpha val="18000"/>
               </a:srgbClr>
@@ -25958,7 +26890,7 @@
           <a:bodyPr wrap="square" rtlCol="0" anchor="ctr"/>
           <a:lstStyle/>
           <a:p>
-            <a:pPr indent="0" marL="0">
+            <a:pPr marL="0" indent="0">
               <a:buNone/>
             </a:pPr>
             <a:r>
@@ -25997,7 +26929,7 @@
           <a:bodyPr wrap="square" rtlCol="0" anchor="t"/>
           <a:lstStyle/>
           <a:p>
-            <a:pPr indent="0" marL="0">
+            <a:pPr marL="0" indent="0">
               <a:lnSpc>
                 <a:spcPts val="1600"/>
               </a:lnSpc>
@@ -26145,7 +27077,7 @@
           <a:bodyPr wrap="square" rtlCol="0" anchor="t"/>
           <a:lstStyle/>
           <a:p>
-            <a:pPr indent="0" marL="0">
+            <a:pPr marL="0" indent="0">
               <a:buNone/>
             </a:pPr>
             <a:r>
@@ -26179,6 +27111,7 @@
         <a:solidFill>
           <a:srgbClr val="FFFFFF"/>
         </a:solidFill>
+        <a:effectLst/>
       </p:bgPr>
     </p:bg>
     <p:spTree>
@@ -26216,11 +27149,11 @@
           <a:bodyPr wrap="square" rtlCol="0" anchor="ctr"/>
           <a:lstStyle/>
           <a:p>
-            <a:pPr indent="0" marL="0">
+            <a:pPr marL="0" indent="0">
               <a:buNone/>
             </a:pPr>
             <a:r>
-              <a:rPr lang="en-US" sz="1200" b="1" spc="200" kern="0" dirty="0">
+              <a:rPr lang="en-US" sz="1200" b="1" kern="0" spc="200" dirty="0">
                 <a:solidFill>
                   <a:srgbClr val="E67E22"/>
                 </a:solidFill>
@@ -26255,7 +27188,7 @@
           <a:bodyPr wrap="square" rtlCol="0" anchor="ctr"/>
           <a:lstStyle/>
           <a:p>
-            <a:pPr algn="l" indent="0" marL="0">
+            <a:pPr marL="0" indent="0" algn="l">
               <a:buNone/>
             </a:pPr>
             <a:r>
@@ -26294,7 +27227,7 @@
           <a:bodyPr wrap="square" rtlCol="0" anchor="ctr"/>
           <a:lstStyle/>
           <a:p>
-            <a:pPr algn="r" indent="0" marL="0">
+            <a:pPr marL="0" indent="0" algn="r">
               <a:buNone/>
             </a:pPr>
             <a:r>
@@ -26333,7 +27266,7 @@
           </a:solidFill>
           <a:ln/>
           <a:effectLst>
-            <a:outerShdw sx="100000" sy="100000" kx="0" ky="0" algn="bl" rotWithShape="0" blurRad="76200" dist="25400" dir="5400000">
+            <a:outerShdw blurRad="76200" dist="25400" dir="5400000" algn="bl" rotWithShape="0">
               <a:srgbClr val="1A1A1A">
                 <a:alpha val="18000"/>
               </a:srgbClr>
@@ -26384,7 +27317,7 @@
           <a:bodyPr wrap="square" rtlCol="0" anchor="ctr"/>
           <a:lstStyle/>
           <a:p>
-            <a:pPr indent="0" marL="0">
+            <a:pPr marL="0" indent="0">
               <a:buNone/>
             </a:pPr>
             <a:r>
@@ -26529,7 +27462,7 @@
           </a:solidFill>
           <a:ln/>
           <a:effectLst>
-            <a:outerShdw sx="100000" sy="100000" kx="0" ky="0" algn="bl" rotWithShape="0" blurRad="76200" dist="25400" dir="5400000">
+            <a:outerShdw blurRad="76200" dist="25400" dir="5400000" algn="bl" rotWithShape="0">
               <a:srgbClr val="1A1A1A">
                 <a:alpha val="18000"/>
               </a:srgbClr>
@@ -26580,7 +27513,7 @@
           <a:bodyPr wrap="square" rtlCol="0" anchor="ctr"/>
           <a:lstStyle/>
           <a:p>
-            <a:pPr indent="0" marL="0">
+            <a:pPr marL="0" indent="0">
               <a:buNone/>
             </a:pPr>
             <a:r>
@@ -26662,7 +27595,7 @@
           </a:solidFill>
           <a:ln/>
           <a:effectLst>
-            <a:outerShdw sx="100000" sy="100000" kx="0" ky="0" algn="bl" rotWithShape="0" blurRad="76200" dist="25400" dir="5400000">
+            <a:outerShdw blurRad="76200" dist="25400" dir="5400000" algn="bl" rotWithShape="0">
               <a:srgbClr val="1A1A1A">
                 <a:alpha val="18000"/>
               </a:srgbClr>
@@ -26713,7 +27646,7 @@
           <a:bodyPr wrap="square" rtlCol="0" anchor="ctr"/>
           <a:lstStyle/>
           <a:p>
-            <a:pPr indent="0" marL="0">
+            <a:pPr marL="0" indent="0">
               <a:buNone/>
             </a:pPr>
             <a:r>
@@ -26900,7 +27833,7 @@
           </a:solidFill>
           <a:ln/>
           <a:effectLst>
-            <a:outerShdw sx="100000" sy="100000" kx="0" ky="0" algn="bl" rotWithShape="0" blurRad="76200" dist="25400" dir="5400000">
+            <a:outerShdw blurRad="76200" dist="25400" dir="5400000" algn="bl" rotWithShape="0">
               <a:srgbClr val="1A1A1A">
                 <a:alpha val="18000"/>
               </a:srgbClr>
@@ -26951,7 +27884,7 @@
           <a:bodyPr wrap="square" rtlCol="0" anchor="ctr"/>
           <a:lstStyle/>
           <a:p>
-            <a:pPr indent="0" marL="0">
+            <a:pPr marL="0" indent="0">
               <a:buNone/>
             </a:pPr>
             <a:r>
@@ -27075,7 +28008,7 @@
           </a:solidFill>
           <a:ln/>
           <a:effectLst>
-            <a:outerShdw sx="100000" sy="100000" kx="0" ky="0" algn="bl" rotWithShape="0" blurRad="76200" dist="25400" dir="5400000">
+            <a:outerShdw blurRad="76200" dist="25400" dir="5400000" algn="bl" rotWithShape="0">
               <a:srgbClr val="1A1A1A">
                 <a:alpha val="18000"/>
               </a:srgbClr>
@@ -27104,7 +28037,7 @@
           <a:bodyPr wrap="square" rtlCol="0" anchor="ctr"/>
           <a:lstStyle/>
           <a:p>
-            <a:pPr indent="0" marL="0">
+            <a:pPr marL="0" indent="0">
               <a:buNone/>
             </a:pPr>
             <a:r>
@@ -27138,6 +28071,7 @@
         <a:solidFill>
           <a:srgbClr val="0B3D56"/>
         </a:solidFill>
+        <a:effectLst/>
       </p:bgPr>
     </p:bg>
     <p:spTree>
@@ -27215,11 +28149,11 @@
           <a:bodyPr wrap="square" rtlCol="0" anchor="ctr"/>
           <a:lstStyle/>
           <a:p>
-            <a:pPr indent="0" marL="0">
+            <a:pPr marL="0" indent="0">
               <a:buNone/>
             </a:pPr>
             <a:r>
-              <a:rPr lang="en-US" sz="1500" b="1" spc="300" kern="0" dirty="0">
+              <a:rPr lang="en-US" sz="1500" b="1" kern="0" spc="300" dirty="0">
                 <a:solidFill>
                   <a:srgbClr val="E67E22"/>
                 </a:solidFill>
@@ -27254,7 +28188,7 @@
           <a:bodyPr wrap="square" rtlCol="0" anchor="ctr"/>
           <a:lstStyle/>
           <a:p>
-            <a:pPr indent="0" marL="0">
+            <a:pPr marL="0" indent="0">
               <a:buNone/>
             </a:pPr>
             <a:r>
@@ -27293,7 +28227,7 @@
           <a:bodyPr wrap="square" rtlCol="0" anchor="ctr"/>
           <a:lstStyle/>
           <a:p>
-            <a:pPr indent="0" marL="0">
+            <a:pPr marL="0" indent="0">
               <a:buNone/>
             </a:pPr>
             <a:r>
@@ -27332,7 +28266,7 @@
           <a:bodyPr wrap="square" rtlCol="0" anchor="ctr"/>
           <a:lstStyle/>
           <a:p>
-            <a:pPr algn="r" indent="0" marL="0">
+            <a:pPr marL="0" indent="0" algn="r">
               <a:buNone/>
             </a:pPr>
             <a:r>
@@ -27651,4 +28585,299 @@
     </a:ext>
   </a:extLst>
 </a:theme>
+</file>
+
+<file path=ppt/theme/theme2.xml><?xml version="1.0" encoding="utf-8"?>
+<a:theme xmlns:a="http://schemas.openxmlformats.org/drawingml/2006/main" name="Thème Office">
+  <a:themeElements>
+    <a:clrScheme name="Office">
+      <a:dk1>
+        <a:sysClr val="windowText" lastClr="000000"/>
+      </a:dk1>
+      <a:lt1>
+        <a:sysClr val="window" lastClr="FFFFFF"/>
+      </a:lt1>
+      <a:dk2>
+        <a:srgbClr val="44546A"/>
+      </a:dk2>
+      <a:lt2>
+        <a:srgbClr val="E7E6E6"/>
+      </a:lt2>
+      <a:accent1>
+        <a:srgbClr val="4472C4"/>
+      </a:accent1>
+      <a:accent2>
+        <a:srgbClr val="ED7D31"/>
+      </a:accent2>
+      <a:accent3>
+        <a:srgbClr val="A5A5A5"/>
+      </a:accent3>
+      <a:accent4>
+        <a:srgbClr val="FFC000"/>
+      </a:accent4>
+      <a:accent5>
+        <a:srgbClr val="5B9BD5"/>
+      </a:accent5>
+      <a:accent6>
+        <a:srgbClr val="70AD47"/>
+      </a:accent6>
+      <a:hlink>
+        <a:srgbClr val="0563C1"/>
+      </a:hlink>
+      <a:folHlink>
+        <a:srgbClr val="954F72"/>
+      </a:folHlink>
+    </a:clrScheme>
+    <a:fontScheme name="Office">
+      <a:majorFont>
+        <a:latin typeface="Calibri Light" panose="020F0302020204030204"/>
+        <a:ea typeface=""/>
+        <a:cs typeface=""/>
+        <a:font script="Jpan" typeface="游ゴシック Light"/>
+        <a:font script="Hang" typeface="맑은 고딕"/>
+        <a:font script="Hans" typeface="等线 Light"/>
+        <a:font script="Hant" typeface="新細明體"/>
+        <a:font script="Arab" typeface="Times New Roman"/>
+        <a:font script="Hebr" typeface="Times New Roman"/>
+        <a:font script="Thai" typeface="Angsana New"/>
+        <a:font script="Ethi" typeface="Nyala"/>
+        <a:font script="Beng" typeface="Vrinda"/>
+        <a:font script="Gujr" typeface="Shruti"/>
+        <a:font script="Khmr" typeface="MoolBoran"/>
+        <a:font script="Knda" typeface="Tunga"/>
+        <a:font script="Guru" typeface="Raavi"/>
+        <a:font script="Cans" typeface="Euphemia"/>
+        <a:font script="Cher" typeface="Plantagenet Cherokee"/>
+        <a:font script="Yiii" typeface="Microsoft Yi Baiti"/>
+        <a:font script="Tibt" typeface="Microsoft Himalaya"/>
+        <a:font script="Thaa" typeface="MV Boli"/>
+        <a:font script="Deva" typeface="Mangal"/>
+        <a:font script="Telu" typeface="Gautami"/>
+        <a:font script="Taml" typeface="Latha"/>
+        <a:font script="Syrc" typeface="Estrangelo Edessa"/>
+        <a:font script="Orya" typeface="Kalinga"/>
+        <a:font script="Mlym" typeface="Kartika"/>
+        <a:font script="Laoo" typeface="DokChampa"/>
+        <a:font script="Sinh" typeface="Iskoola Pota"/>
+        <a:font script="Mong" typeface="Mongolian Baiti"/>
+        <a:font script="Viet" typeface="Times New Roman"/>
+        <a:font script="Uigh" typeface="Microsoft Uighur"/>
+        <a:font script="Geor" typeface="Sylfaen"/>
+        <a:font script="Armn" typeface="Arial"/>
+        <a:font script="Bugi" typeface="Leelawadee UI"/>
+        <a:font script="Bopo" typeface="Microsoft JhengHei"/>
+        <a:font script="Java" typeface="Javanese Text"/>
+        <a:font script="Lisu" typeface="Segoe UI"/>
+        <a:font script="Mymr" typeface="Myanmar Text"/>
+        <a:font script="Nkoo" typeface="Ebrima"/>
+        <a:font script="Olck" typeface="Nirmala UI"/>
+        <a:font script="Osma" typeface="Ebrima"/>
+        <a:font script="Phag" typeface="Phagspa"/>
+        <a:font script="Syrn" typeface="Estrangelo Edessa"/>
+        <a:font script="Syrj" typeface="Estrangelo Edessa"/>
+        <a:font script="Syre" typeface="Estrangelo Edessa"/>
+        <a:font script="Sora" typeface="Nirmala UI"/>
+        <a:font script="Tale" typeface="Microsoft Tai Le"/>
+        <a:font script="Talu" typeface="Microsoft New Tai Lue"/>
+        <a:font script="Tfng" typeface="Ebrima"/>
+      </a:majorFont>
+      <a:minorFont>
+        <a:latin typeface="Calibri" panose="020F0502020204030204"/>
+        <a:ea typeface=""/>
+        <a:cs typeface=""/>
+        <a:font script="Jpan" typeface="游ゴシック"/>
+        <a:font script="Hang" typeface="맑은 고딕"/>
+        <a:font script="Hans" typeface="等线"/>
+        <a:font script="Hant" typeface="新細明體"/>
+        <a:font script="Arab" typeface="Arial"/>
+        <a:font script="Hebr" typeface="Arial"/>
+        <a:font script="Thai" typeface="Cordia New"/>
+        <a:font script="Ethi" typeface="Nyala"/>
+        <a:font script="Beng" typeface="Vrinda"/>
+        <a:font script="Gujr" typeface="Shruti"/>
+        <a:font script="Khmr" typeface="DaunPenh"/>
+        <a:font script="Knda" typeface="Tunga"/>
+        <a:font script="Guru" typeface="Raavi"/>
+        <a:font script="Cans" typeface="Euphemia"/>
+        <a:font script="Cher" typeface="Plantagenet Cherokee"/>
+        <a:font script="Yiii" typeface="Microsoft Yi Baiti"/>
+        <a:font script="Tibt" typeface="Microsoft Himalaya"/>
+        <a:font script="Thaa" typeface="MV Boli"/>
+        <a:font script="Deva" typeface="Mangal"/>
+        <a:font script="Telu" typeface="Gautami"/>
+        <a:font script="Taml" typeface="Latha"/>
+        <a:font script="Syrc" typeface="Estrangelo Edessa"/>
+        <a:font script="Orya" typeface="Kalinga"/>
+        <a:font script="Mlym" typeface="Kartika"/>
+        <a:font script="Laoo" typeface="DokChampa"/>
+        <a:font script="Sinh" typeface="Iskoola Pota"/>
+        <a:font script="Mong" typeface="Mongolian Baiti"/>
+        <a:font script="Viet" typeface="Arial"/>
+        <a:font script="Uigh" typeface="Microsoft Uighur"/>
+        <a:font script="Geor" typeface="Sylfaen"/>
+        <a:font script="Armn" typeface="Arial"/>
+        <a:font script="Bugi" typeface="Leelawadee UI"/>
+        <a:font script="Bopo" typeface="Microsoft JhengHei"/>
+        <a:font script="Java" typeface="Javanese Text"/>
+        <a:font script="Lisu" typeface="Segoe UI"/>
+        <a:font script="Mymr" typeface="Myanmar Text"/>
+        <a:font script="Nkoo" typeface="Ebrima"/>
+        <a:font script="Olck" typeface="Nirmala UI"/>
+        <a:font script="Osma" typeface="Ebrima"/>
+        <a:font script="Phag" typeface="Phagspa"/>
+        <a:font script="Syrn" typeface="Estrangelo Edessa"/>
+        <a:font script="Syrj" typeface="Estrangelo Edessa"/>
+        <a:font script="Syre" typeface="Estrangelo Edessa"/>
+        <a:font script="Sora" typeface="Nirmala UI"/>
+        <a:font script="Tale" typeface="Microsoft Tai Le"/>
+        <a:font script="Talu" typeface="Microsoft New Tai Lue"/>
+        <a:font script="Tfng" typeface="Ebrima"/>
+      </a:minorFont>
+    </a:fontScheme>
+    <a:fmtScheme name="Office">
+      <a:fillStyleLst>
+        <a:solidFill>
+          <a:schemeClr val="phClr"/>
+        </a:solidFill>
+        <a:gradFill rotWithShape="1">
+          <a:gsLst>
+            <a:gs pos="0">
+              <a:schemeClr val="phClr">
+                <a:lumMod val="110000"/>
+                <a:satMod val="105000"/>
+                <a:tint val="67000"/>
+              </a:schemeClr>
+            </a:gs>
+            <a:gs pos="50000">
+              <a:schemeClr val="phClr">
+                <a:lumMod val="105000"/>
+                <a:satMod val="103000"/>
+                <a:tint val="73000"/>
+              </a:schemeClr>
+            </a:gs>
+            <a:gs pos="100000">
+              <a:schemeClr val="phClr">
+                <a:lumMod val="105000"/>
+                <a:satMod val="109000"/>
+                <a:tint val="81000"/>
+              </a:schemeClr>
+            </a:gs>
+          </a:gsLst>
+          <a:lin ang="5400000" scaled="0"/>
+        </a:gradFill>
+        <a:gradFill rotWithShape="1">
+          <a:gsLst>
+            <a:gs pos="0">
+              <a:schemeClr val="phClr">
+                <a:satMod val="103000"/>
+                <a:lumMod val="102000"/>
+                <a:tint val="94000"/>
+              </a:schemeClr>
+            </a:gs>
+            <a:gs pos="50000">
+              <a:schemeClr val="phClr">
+                <a:satMod val="110000"/>
+                <a:lumMod val="100000"/>
+                <a:shade val="100000"/>
+              </a:schemeClr>
+            </a:gs>
+            <a:gs pos="100000">
+              <a:schemeClr val="phClr">
+                <a:lumMod val="99000"/>
+                <a:satMod val="120000"/>
+                <a:shade val="78000"/>
+              </a:schemeClr>
+            </a:gs>
+          </a:gsLst>
+          <a:lin ang="5400000" scaled="0"/>
+        </a:gradFill>
+      </a:fillStyleLst>
+      <a:lnStyleLst>
+        <a:ln w="6350" cap="flat" cmpd="sng" algn="ctr">
+          <a:solidFill>
+            <a:schemeClr val="phClr"/>
+          </a:solidFill>
+          <a:prstDash val="solid"/>
+          <a:miter lim="800000"/>
+        </a:ln>
+        <a:ln w="12700" cap="flat" cmpd="sng" algn="ctr">
+          <a:solidFill>
+            <a:schemeClr val="phClr"/>
+          </a:solidFill>
+          <a:prstDash val="solid"/>
+          <a:miter lim="800000"/>
+        </a:ln>
+        <a:ln w="19050" cap="flat" cmpd="sng" algn="ctr">
+          <a:solidFill>
+            <a:schemeClr val="phClr"/>
+          </a:solidFill>
+          <a:prstDash val="solid"/>
+          <a:miter lim="800000"/>
+        </a:ln>
+      </a:lnStyleLst>
+      <a:effectStyleLst>
+        <a:effectStyle>
+          <a:effectLst/>
+        </a:effectStyle>
+        <a:effectStyle>
+          <a:effectLst/>
+        </a:effectStyle>
+        <a:effectStyle>
+          <a:effectLst>
+            <a:outerShdw blurRad="57150" dist="19050" dir="5400000" algn="ctr" rotWithShape="0">
+              <a:srgbClr val="000000">
+                <a:alpha val="63000"/>
+              </a:srgbClr>
+            </a:outerShdw>
+          </a:effectLst>
+        </a:effectStyle>
+      </a:effectStyleLst>
+      <a:bgFillStyleLst>
+        <a:solidFill>
+          <a:schemeClr val="phClr"/>
+        </a:solidFill>
+        <a:solidFill>
+          <a:schemeClr val="phClr">
+            <a:tint val="95000"/>
+            <a:satMod val="170000"/>
+          </a:schemeClr>
+        </a:solidFill>
+        <a:gradFill rotWithShape="1">
+          <a:gsLst>
+            <a:gs pos="0">
+              <a:schemeClr val="phClr">
+                <a:tint val="93000"/>
+                <a:satMod val="150000"/>
+                <a:shade val="98000"/>
+                <a:lumMod val="102000"/>
+              </a:schemeClr>
+            </a:gs>
+            <a:gs pos="50000">
+              <a:schemeClr val="phClr">
+                <a:tint val="98000"/>
+                <a:satMod val="130000"/>
+                <a:shade val="90000"/>
+                <a:lumMod val="103000"/>
+              </a:schemeClr>
+            </a:gs>
+            <a:gs pos="100000">
+              <a:schemeClr val="phClr">
+                <a:shade val="63000"/>
+                <a:satMod val="120000"/>
+              </a:schemeClr>
+            </a:gs>
+          </a:gsLst>
+          <a:lin ang="5400000" scaled="0"/>
+        </a:gradFill>
+      </a:bgFillStyleLst>
+    </a:fmtScheme>
+  </a:themeElements>
+  <a:objectDefaults/>
+  <a:extraClrSchemeLst/>
+  <a:extLst>
+    <a:ext uri="{05A4C25C-085E-4340-85A3-A5531E510DB2}">
+      <thm15:themeFamily xmlns:thm15="http://schemas.microsoft.com/office/thememl/2012/main" name="Office Theme" id="{62F939B6-93AF-4DB8-9C6B-D6C7DFDC589F}" vid="{4A3C46E8-61CC-4603-A589-7422A47A8E4A}"/>
+    </a:ext>
+  </a:extLst>
+</a:theme>
 </file>
--- a/soutenance/output.pptx
+++ b/soutenance/output.pptx
@@ -5,7 +5,7 @@
     <p:sldMasterId id="2147483648" r:id="rId1"/>
   </p:sldMasterIdLst>
   <p:notesMasterIdLst>
-    <p:notesMasterId r:id="rId36"/>
+    <p:notesMasterId r:id="rId35"/>
   </p:notesMasterIdLst>
   <p:sldIdLst>
     <p:sldId id="256" r:id="rId2"/>
@@ -15,33 +15,32 @@
     <p:sldId id="260" r:id="rId6"/>
     <p:sldId id="261" r:id="rId7"/>
     <p:sldId id="262" r:id="rId8"/>
-    <p:sldId id="263" r:id="rId9"/>
-    <p:sldId id="264" r:id="rId10"/>
-    <p:sldId id="265" r:id="rId11"/>
-    <p:sldId id="266" r:id="rId12"/>
-    <p:sldId id="267" r:id="rId13"/>
-    <p:sldId id="268" r:id="rId14"/>
-    <p:sldId id="269" r:id="rId15"/>
-    <p:sldId id="270" r:id="rId16"/>
-    <p:sldId id="271" r:id="rId17"/>
-    <p:sldId id="272" r:id="rId18"/>
-    <p:sldId id="273" r:id="rId19"/>
-    <p:sldId id="274" r:id="rId20"/>
-    <p:sldId id="275" r:id="rId21"/>
-    <p:sldId id="276" r:id="rId22"/>
-    <p:sldId id="277" r:id="rId23"/>
-    <p:sldId id="278" r:id="rId24"/>
-    <p:sldId id="279" r:id="rId25"/>
-    <p:sldId id="280" r:id="rId26"/>
-    <p:sldId id="281" r:id="rId27"/>
-    <p:sldId id="282" r:id="rId28"/>
-    <p:sldId id="283" r:id="rId29"/>
-    <p:sldId id="284" r:id="rId30"/>
-    <p:sldId id="285" r:id="rId31"/>
-    <p:sldId id="286" r:id="rId32"/>
-    <p:sldId id="287" r:id="rId33"/>
-    <p:sldId id="288" r:id="rId34"/>
-    <p:sldId id="289" r:id="rId35"/>
+    <p:sldId id="264" r:id="rId9"/>
+    <p:sldId id="265" r:id="rId10"/>
+    <p:sldId id="266" r:id="rId11"/>
+    <p:sldId id="267" r:id="rId12"/>
+    <p:sldId id="268" r:id="rId13"/>
+    <p:sldId id="269" r:id="rId14"/>
+    <p:sldId id="270" r:id="rId15"/>
+    <p:sldId id="271" r:id="rId16"/>
+    <p:sldId id="272" r:id="rId17"/>
+    <p:sldId id="273" r:id="rId18"/>
+    <p:sldId id="274" r:id="rId19"/>
+    <p:sldId id="275" r:id="rId20"/>
+    <p:sldId id="276" r:id="rId21"/>
+    <p:sldId id="277" r:id="rId22"/>
+    <p:sldId id="278" r:id="rId23"/>
+    <p:sldId id="279" r:id="rId24"/>
+    <p:sldId id="280" r:id="rId25"/>
+    <p:sldId id="281" r:id="rId26"/>
+    <p:sldId id="282" r:id="rId27"/>
+    <p:sldId id="283" r:id="rId28"/>
+    <p:sldId id="284" r:id="rId29"/>
+    <p:sldId id="285" r:id="rId30"/>
+    <p:sldId id="286" r:id="rId31"/>
+    <p:sldId id="287" r:id="rId32"/>
+    <p:sldId id="288" r:id="rId33"/>
+    <p:sldId id="289" r:id="rId34"/>
   </p:sldIdLst>
   <p:sldSz cx="12192000" cy="6858000"/>
   <p:notesSz cx="6858000" cy="12192000"/>
@@ -2520,90 +2519,6 @@
             <a:fld id="{F7021451-1387-4CA6-816F-3879F97B5CBC}" type="slidenum">
               <a:rPr lang="en-US"/>
               <a:t>33</a:t>
-            </a:fld>
-            <a:endParaRPr lang="en-US"/>
-          </a:p>
-        </p:txBody>
-      </p:sp>
-    </p:spTree>
-    <p:extLst>
-      <p:ext uri="{BB962C8B-B14F-4D97-AF65-F5344CB8AC3E}">
-        <p14:creationId xmlns:p14="http://schemas.microsoft.com/office/powerpoint/2010/main" val="1024086991"/>
-      </p:ext>
-    </p:extLst>
-  </p:cSld>
-  <p:clrMapOvr>
-    <a:masterClrMapping/>
-  </p:clrMapOvr>
-</p:notes>
-</file>
-
-<file path=ppt/notesSlides/notesSlide34.xml><?xml version="1.0" encoding="utf-8"?>
-<p:notes xmlns:a="http://schemas.openxmlformats.org/drawingml/2006/main" xmlns:r="http://schemas.openxmlformats.org/officeDocument/2006/relationships" xmlns:p="http://schemas.openxmlformats.org/presentationml/2006/main">
-  <p:cSld>
-    <p:spTree>
-      <p:nvGrpSpPr>
-        <p:cNvPr id="1" name=""/>
-        <p:cNvGrpSpPr/>
-        <p:nvPr/>
-      </p:nvGrpSpPr>
-      <p:grpSpPr>
-        <a:xfrm>
-          <a:off x="0" y="0"/>
-          <a:ext cx="0" cy="0"/>
-          <a:chOff x="0" y="0"/>
-          <a:chExt cx="0" cy="0"/>
-        </a:xfrm>
-      </p:grpSpPr>
-      <p:sp>
-        <p:nvSpPr>
-          <p:cNvPr id="2" name="Slide Image Placeholder 1"/>
-          <p:cNvSpPr>
-            <a:spLocks noGrp="1" noRot="1" noChangeAspect="1"/>
-          </p:cNvSpPr>
-          <p:nvPr>
-            <p:ph type="sldImg"/>
-          </p:nvPr>
-        </p:nvSpPr>
-        <p:spPr/>
-      </p:sp>
-      <p:sp>
-        <p:nvSpPr>
-          <p:cNvPr id="3" name="Notes Placeholder 2"/>
-          <p:cNvSpPr>
-            <a:spLocks noGrp="1"/>
-          </p:cNvSpPr>
-          <p:nvPr>
-            <p:ph type="body" idx="1"/>
-          </p:nvPr>
-        </p:nvSpPr>
-        <p:spPr/>
-        <p:txBody>
-          <a:bodyPr/>
-          <a:lstStyle/>
-          <a:p>
-            <a:endParaRPr lang="en-US" dirty="0"/>
-          </a:p>
-        </p:txBody>
-      </p:sp>
-      <p:sp>
-        <p:nvSpPr>
-          <p:cNvPr id="4" name="Slide Number Placeholder 3"/>
-          <p:cNvSpPr>
-            <a:spLocks noGrp="1"/>
-          </p:cNvSpPr>
-          <p:nvPr>
-            <p:ph type="sldNum" sz="quarter" idx="10"/>
-          </p:nvPr>
-        </p:nvSpPr>
-        <p:spPr/>
-        <p:txBody>
-          <a:bodyPr/>
-          <a:lstStyle/>
-          <a:p>
-            <a:fld id="{F7021451-1387-4CA6-816F-3879F97B5CBC}" type="slidenum">
-              <a:rPr lang="en-US"/>
-              <a:t>34</a:t>
             </a:fld>
             <a:endParaRPr lang="en-US"/>
           </a:p>
@@ -3914,630 +3829,6 @@
 
 <file path=ppt/slides/slide10.xml><?xml version="1.0" encoding="utf-8"?>
 <p:sld xmlns:a="http://schemas.openxmlformats.org/drawingml/2006/main" xmlns:r="http://schemas.openxmlformats.org/officeDocument/2006/relationships" xmlns:p="http://schemas.openxmlformats.org/presentationml/2006/main">
-  <p:cSld name="Slide 10">
-    <p:bg>
-      <p:bgPr>
-        <a:solidFill>
-          <a:srgbClr val="FFFFFF"/>
-        </a:solidFill>
-        <a:effectLst/>
-      </p:bgPr>
-    </p:bg>
-    <p:spTree>
-      <p:nvGrpSpPr>
-        <p:cNvPr id="1" name=""/>
-        <p:cNvGrpSpPr/>
-        <p:nvPr/>
-      </p:nvGrpSpPr>
-      <p:grpSpPr>
-        <a:xfrm>
-          <a:off x="0" y="0"/>
-          <a:ext cx="0" cy="0"/>
-          <a:chOff x="0" y="0"/>
-          <a:chExt cx="0" cy="0"/>
-        </a:xfrm>
-      </p:grpSpPr>
-      <p:sp>
-        <p:nvSpPr>
-          <p:cNvPr id="2" name="Text 0"/>
-          <p:cNvSpPr/>
-          <p:nvPr/>
-        </p:nvSpPr>
-        <p:spPr>
-          <a:xfrm>
-            <a:off x="548640" y="384048"/>
-            <a:ext cx="7315200" cy="320040"/>
-          </a:xfrm>
-          <a:prstGeom prst="rect">
-            <a:avLst/>
-          </a:prstGeom>
-          <a:noFill/>
-          <a:ln/>
-        </p:spPr>
-        <p:txBody>
-          <a:bodyPr wrap="square" rtlCol="0" anchor="ctr"/>
-          <a:lstStyle/>
-          <a:p>
-            <a:pPr marL="0" indent="0">
-              <a:buNone/>
-            </a:pPr>
-            <a:r>
-              <a:rPr lang="en-US" sz="1200" b="1" kern="0" spc="200" dirty="0">
-                <a:solidFill>
-                  <a:srgbClr val="E67E22"/>
-                </a:solidFill>
-                <a:latin typeface="Calibri" pitchFamily="34" charset="0"/>
-                <a:ea typeface="Calibri" pitchFamily="34" charset="-122"/>
-                <a:cs typeface="Calibri" pitchFamily="34" charset="-120"/>
-              </a:rPr>
-              <a:t>PARTIE 2 · CONTEXTE</a:t>
-            </a:r>
-            <a:endParaRPr lang="en-US" sz="1200" dirty="0"/>
-          </a:p>
-        </p:txBody>
-      </p:sp>
-      <p:sp>
-        <p:nvSpPr>
-          <p:cNvPr id="3" name="Text 1"/>
-          <p:cNvSpPr/>
-          <p:nvPr/>
-        </p:nvSpPr>
-        <p:spPr>
-          <a:xfrm>
-            <a:off x="548640" y="658368"/>
-            <a:ext cx="11064240" cy="822960"/>
-          </a:xfrm>
-          <a:prstGeom prst="rect">
-            <a:avLst/>
-          </a:prstGeom>
-          <a:noFill/>
-          <a:ln/>
-        </p:spPr>
-        <p:txBody>
-          <a:bodyPr wrap="square" rtlCol="0" anchor="ctr"/>
-          <a:lstStyle/>
-          <a:p>
-            <a:pPr marL="0" indent="0" algn="l">
-              <a:buNone/>
-            </a:pPr>
-            <a:r>
-              <a:rPr lang="en-US" sz="3000" b="1" dirty="0">
-                <a:solidFill>
-                  <a:srgbClr val="0B3D56"/>
-                </a:solidFill>
-                <a:latin typeface="Cambria" pitchFamily="34" charset="0"/>
-                <a:ea typeface="Cambria" pitchFamily="34" charset="-122"/>
-                <a:cs typeface="Cambria" pitchFamily="34" charset="-120"/>
-              </a:rPr>
-              <a:t>Introduction &amp; problématique</a:t>
-            </a:r>
-            <a:endParaRPr lang="en-US" sz="3000" dirty="0"/>
-          </a:p>
-        </p:txBody>
-      </p:sp>
-      <p:sp>
-        <p:nvSpPr>
-          <p:cNvPr id="4" name="Text 2"/>
-          <p:cNvSpPr/>
-          <p:nvPr/>
-        </p:nvSpPr>
-        <p:spPr>
-          <a:xfrm>
-            <a:off x="11503152" y="6473952"/>
-            <a:ext cx="457200" cy="274320"/>
-          </a:xfrm>
-          <a:prstGeom prst="rect">
-            <a:avLst/>
-          </a:prstGeom>
-          <a:noFill/>
-          <a:ln/>
-        </p:spPr>
-        <p:txBody>
-          <a:bodyPr wrap="square" rtlCol="0" anchor="ctr"/>
-          <a:lstStyle/>
-          <a:p>
-            <a:pPr marL="0" indent="0" algn="r">
-              <a:buNone/>
-            </a:pPr>
-            <a:r>
-              <a:rPr lang="en-US" sz="1000" dirty="0">
-                <a:solidFill>
-                  <a:srgbClr val="6B7280"/>
-                </a:solidFill>
-                <a:latin typeface="Calibri" pitchFamily="34" charset="0"/>
-                <a:ea typeface="Calibri" pitchFamily="34" charset="-122"/>
-                <a:cs typeface="Calibri" pitchFamily="34" charset="-120"/>
-              </a:rPr>
-              <a:t>10</a:t>
-            </a:r>
-            <a:endParaRPr lang="en-US" sz="1000" dirty="0"/>
-          </a:p>
-        </p:txBody>
-      </p:sp>
-      <p:sp>
-        <p:nvSpPr>
-          <p:cNvPr id="5" name="Text 3"/>
-          <p:cNvSpPr/>
-          <p:nvPr/>
-        </p:nvSpPr>
-        <p:spPr>
-          <a:xfrm>
-            <a:off x="548640" y="1783080"/>
-            <a:ext cx="6492240" cy="2743200"/>
-          </a:xfrm>
-          <a:prstGeom prst="rect">
-            <a:avLst/>
-          </a:prstGeom>
-          <a:noFill/>
-          <a:ln/>
-        </p:spPr>
-        <p:txBody>
-          <a:bodyPr wrap="square" rtlCol="0" anchor="t"/>
-          <a:lstStyle/>
-          <a:p>
-            <a:pPr marL="228600" indent="-228600">
-              <a:spcAft>
-                <a:spcPts val="1600"/>
-              </a:spcAft>
-              <a:buSzPct val="100000"/>
-              <a:buChar char="▪"/>
-            </a:pPr>
-            <a:r>
-              <a:rPr lang="en-US" sz="1550" dirty="0">
-                <a:solidFill>
-                  <a:srgbClr val="1E2530"/>
-                </a:solidFill>
-                <a:latin typeface="Calibri" pitchFamily="34" charset="0"/>
-                <a:ea typeface="Calibri" pitchFamily="34" charset="-122"/>
-                <a:cs typeface="Calibri" pitchFamily="34" charset="-120"/>
-              </a:rPr>
-              <a:t>Les Data Centers, piliers du numérique, consomment des quantités massives d'électricité et rejettent beaucoup de CO₂</a:t>
-            </a:r>
-            <a:endParaRPr lang="en-US" sz="1550" dirty="0"/>
-          </a:p>
-          <a:p>
-            <a:pPr marL="228600" indent="-228600">
-              <a:spcAft>
-                <a:spcPts val="1600"/>
-              </a:spcAft>
-              <a:buSzPct val="100000"/>
-              <a:buChar char="▪"/>
-            </a:pPr>
-            <a:r>
-              <a:rPr lang="en-US" sz="1550" dirty="0">
-                <a:solidFill>
-                  <a:srgbClr val="1E2530"/>
-                </a:solidFill>
-                <a:latin typeface="Calibri" pitchFamily="34" charset="0"/>
-                <a:ea typeface="Calibri" pitchFamily="34" charset="-122"/>
-                <a:cs typeface="Calibri" pitchFamily="34" charset="-120"/>
-              </a:rPr>
-              <a:t>L'essor de l'intelligence artificielle amplifie cette consommation encore plus rapidement</a:t>
-            </a:r>
-            <a:endParaRPr lang="en-US" sz="1550" dirty="0"/>
-          </a:p>
-          <a:p>
-            <a:pPr marL="228600" indent="-228600">
-              <a:spcAft>
-                <a:spcPts val="1600"/>
-              </a:spcAft>
-              <a:buSzPct val="100000"/>
-              <a:buChar char="▪"/>
-            </a:pPr>
-            <a:r>
-              <a:rPr lang="en-US" sz="1550" dirty="0">
-                <a:solidFill>
-                  <a:srgbClr val="1E2530"/>
-                </a:solidFill>
-                <a:latin typeface="Calibri" pitchFamily="34" charset="0"/>
-                <a:ea typeface="Calibri" pitchFamily="34" charset="-122"/>
-                <a:cs typeface="Calibri" pitchFamily="34" charset="-120"/>
-              </a:rPr>
-              <a:t>Les infrastructures doivent rester performantes tout en réduisant leur impact environnemental</a:t>
-            </a:r>
-            <a:endParaRPr lang="en-US" sz="1550" dirty="0"/>
-          </a:p>
-        </p:txBody>
-      </p:sp>
-      <p:sp>
-        <p:nvSpPr>
-          <p:cNvPr id="6" name="Shape 4"/>
-          <p:cNvSpPr/>
-          <p:nvPr/>
-        </p:nvSpPr>
-        <p:spPr>
-          <a:xfrm>
-            <a:off x="548640" y="4617720"/>
-            <a:ext cx="6492240" cy="1417320"/>
-          </a:xfrm>
-          <a:prstGeom prst="roundRect">
-            <a:avLst>
-              <a:gd name="adj" fmla="val 5161"/>
-            </a:avLst>
-          </a:prstGeom>
-          <a:solidFill>
-            <a:srgbClr val="0B3D56"/>
-          </a:solidFill>
-          <a:ln/>
-          <a:effectLst>
-            <a:outerShdw blurRad="76200" dist="25400" dir="5400000" algn="bl" rotWithShape="0">
-              <a:srgbClr val="1A1A1A">
-                <a:alpha val="18000"/>
-              </a:srgbClr>
-            </a:outerShdw>
-          </a:effectLst>
-        </p:spPr>
-      </p:sp>
-      <p:sp>
-        <p:nvSpPr>
-          <p:cNvPr id="7" name="Text 5"/>
-          <p:cNvSpPr/>
-          <p:nvPr/>
-        </p:nvSpPr>
-        <p:spPr>
-          <a:xfrm>
-            <a:off x="868680" y="4617720"/>
-            <a:ext cx="5943600" cy="1417320"/>
-          </a:xfrm>
-          <a:prstGeom prst="rect">
-            <a:avLst/>
-          </a:prstGeom>
-          <a:noFill/>
-          <a:ln/>
-        </p:spPr>
-        <p:txBody>
-          <a:bodyPr wrap="square" rtlCol="0" anchor="ctr"/>
-          <a:lstStyle/>
-          <a:p>
-            <a:pPr marL="0" indent="0">
-              <a:buNone/>
-            </a:pPr>
-            <a:r>
-              <a:rPr lang="en-US" sz="1600" b="1" i="1" dirty="0">
-                <a:solidFill>
-                  <a:srgbClr val="FFFFFF"/>
-                </a:solidFill>
-                <a:latin typeface="Cambria" pitchFamily="34" charset="0"/>
-                <a:ea typeface="Cambria" pitchFamily="34" charset="-122"/>
-                <a:cs typeface="Cambria" pitchFamily="34" charset="-120"/>
-              </a:rPr>
-              <a:t>Comment optimiser la performance énergétique des Data Centers Cloud afin de réduire durablement leur empreinte carbone ?</a:t>
-            </a:r>
-            <a:endParaRPr lang="en-US" sz="1600" dirty="0"/>
-          </a:p>
-        </p:txBody>
-      </p:sp>
-      <p:sp>
-        <p:nvSpPr>
-          <p:cNvPr id="8" name="Shape 6"/>
-          <p:cNvSpPr/>
-          <p:nvPr/>
-        </p:nvSpPr>
-        <p:spPr>
-          <a:xfrm>
-            <a:off x="7360920" y="1783080"/>
-            <a:ext cx="4297680" cy="1280160"/>
-          </a:xfrm>
-          <a:prstGeom prst="roundRect">
-            <a:avLst>
-              <a:gd name="adj" fmla="val 5714"/>
-            </a:avLst>
-          </a:prstGeom>
-          <a:solidFill>
-            <a:srgbClr val="F4F7F8"/>
-          </a:solidFill>
-          <a:ln/>
-          <a:effectLst>
-            <a:outerShdw blurRad="76200" dist="25400" dir="5400000" algn="bl" rotWithShape="0">
-              <a:srgbClr val="1A1A1A">
-                <a:alpha val="18000"/>
-              </a:srgbClr>
-            </a:outerShdw>
-          </a:effectLst>
-        </p:spPr>
-      </p:sp>
-      <p:sp>
-        <p:nvSpPr>
-          <p:cNvPr id="9" name="Text 7"/>
-          <p:cNvSpPr/>
-          <p:nvPr/>
-        </p:nvSpPr>
-        <p:spPr>
-          <a:xfrm>
-            <a:off x="7589520" y="1920240"/>
-            <a:ext cx="1463040" cy="1005840"/>
-          </a:xfrm>
-          <a:prstGeom prst="rect">
-            <a:avLst/>
-          </a:prstGeom>
-          <a:noFill/>
-          <a:ln/>
-        </p:spPr>
-        <p:txBody>
-          <a:bodyPr wrap="square" rtlCol="0" anchor="ctr"/>
-          <a:lstStyle/>
-          <a:p>
-            <a:pPr marL="0" indent="0">
-              <a:buNone/>
-            </a:pPr>
-            <a:r>
-              <a:rPr lang="en-US" sz="2600" b="1" dirty="0">
-                <a:solidFill>
-                  <a:srgbClr val="1B7A8C"/>
-                </a:solidFill>
-                <a:latin typeface="Cambria" pitchFamily="34" charset="0"/>
-                <a:ea typeface="Cambria" pitchFamily="34" charset="-122"/>
-                <a:cs typeface="Cambria" pitchFamily="34" charset="-120"/>
-              </a:rPr>
-              <a:t>PUE</a:t>
-            </a:r>
-            <a:endParaRPr lang="en-US" sz="2600" dirty="0"/>
-          </a:p>
-        </p:txBody>
-      </p:sp>
-      <p:sp>
-        <p:nvSpPr>
-          <p:cNvPr id="10" name="Text 8"/>
-          <p:cNvSpPr/>
-          <p:nvPr/>
-        </p:nvSpPr>
-        <p:spPr>
-          <a:xfrm>
-            <a:off x="9052560" y="1783080"/>
-            <a:ext cx="2514600" cy="1280160"/>
-          </a:xfrm>
-          <a:prstGeom prst="rect">
-            <a:avLst/>
-          </a:prstGeom>
-          <a:noFill/>
-          <a:ln/>
-        </p:spPr>
-        <p:txBody>
-          <a:bodyPr wrap="square" rtlCol="0" anchor="ctr"/>
-          <a:lstStyle/>
-          <a:p>
-            <a:pPr marL="0" indent="0">
-              <a:buNone/>
-            </a:pPr>
-            <a:r>
-              <a:rPr lang="en-US" sz="1300" dirty="0">
-                <a:solidFill>
-                  <a:srgbClr val="1E2530"/>
-                </a:solidFill>
-                <a:latin typeface="Calibri" pitchFamily="34" charset="0"/>
-                <a:ea typeface="Calibri" pitchFamily="34" charset="-122"/>
-                <a:cs typeface="Calibri" pitchFamily="34" charset="-120"/>
-              </a:rPr>
-              <a:t>Efficacité électrique</a:t>
-            </a:r>
-            <a:endParaRPr lang="en-US" sz="1300" dirty="0"/>
-          </a:p>
-        </p:txBody>
-      </p:sp>
-      <p:sp>
-        <p:nvSpPr>
-          <p:cNvPr id="11" name="Shape 9"/>
-          <p:cNvSpPr/>
-          <p:nvPr/>
-        </p:nvSpPr>
-        <p:spPr>
-          <a:xfrm>
-            <a:off x="7360920" y="3264408"/>
-            <a:ext cx="4297680" cy="1280160"/>
-          </a:xfrm>
-          <a:prstGeom prst="roundRect">
-            <a:avLst>
-              <a:gd name="adj" fmla="val 5714"/>
-            </a:avLst>
-          </a:prstGeom>
-          <a:solidFill>
-            <a:srgbClr val="F4F7F8"/>
-          </a:solidFill>
-          <a:ln/>
-          <a:effectLst>
-            <a:outerShdw blurRad="76200" dist="25400" dir="5400000" algn="bl" rotWithShape="0">
-              <a:srgbClr val="1A1A1A">
-                <a:alpha val="18000"/>
-              </a:srgbClr>
-            </a:outerShdw>
-          </a:effectLst>
-        </p:spPr>
-      </p:sp>
-      <p:sp>
-        <p:nvSpPr>
-          <p:cNvPr id="12" name="Text 10"/>
-          <p:cNvSpPr/>
-          <p:nvPr/>
-        </p:nvSpPr>
-        <p:spPr>
-          <a:xfrm>
-            <a:off x="7589520" y="3401568"/>
-            <a:ext cx="1463040" cy="1005840"/>
-          </a:xfrm>
-          <a:prstGeom prst="rect">
-            <a:avLst/>
-          </a:prstGeom>
-          <a:noFill/>
-          <a:ln/>
-        </p:spPr>
-        <p:txBody>
-          <a:bodyPr wrap="square" rtlCol="0" anchor="ctr"/>
-          <a:lstStyle/>
-          <a:p>
-            <a:pPr marL="0" indent="0">
-              <a:buNone/>
-            </a:pPr>
-            <a:r>
-              <a:rPr lang="en-US" sz="2600" b="1" dirty="0">
-                <a:solidFill>
-                  <a:srgbClr val="E67E22"/>
-                </a:solidFill>
-                <a:latin typeface="Cambria" pitchFamily="34" charset="0"/>
-                <a:ea typeface="Cambria" pitchFamily="34" charset="-122"/>
-                <a:cs typeface="Cambria" pitchFamily="34" charset="-120"/>
-              </a:rPr>
-              <a:t>CUE</a:t>
-            </a:r>
-            <a:endParaRPr lang="en-US" sz="2600" dirty="0"/>
-          </a:p>
-        </p:txBody>
-      </p:sp>
-      <p:sp>
-        <p:nvSpPr>
-          <p:cNvPr id="13" name="Text 11"/>
-          <p:cNvSpPr/>
-          <p:nvPr/>
-        </p:nvSpPr>
-        <p:spPr>
-          <a:xfrm>
-            <a:off x="9052560" y="3264408"/>
-            <a:ext cx="2514600" cy="1280160"/>
-          </a:xfrm>
-          <a:prstGeom prst="rect">
-            <a:avLst/>
-          </a:prstGeom>
-          <a:noFill/>
-          <a:ln/>
-        </p:spPr>
-        <p:txBody>
-          <a:bodyPr wrap="square" rtlCol="0" anchor="ctr"/>
-          <a:lstStyle/>
-          <a:p>
-            <a:pPr marL="0" indent="0">
-              <a:buNone/>
-            </a:pPr>
-            <a:r>
-              <a:rPr lang="en-US" sz="1300" dirty="0">
-                <a:solidFill>
-                  <a:srgbClr val="1E2530"/>
-                </a:solidFill>
-                <a:latin typeface="Calibri" pitchFamily="34" charset="0"/>
-                <a:ea typeface="Calibri" pitchFamily="34" charset="-122"/>
-                <a:cs typeface="Calibri" pitchFamily="34" charset="-120"/>
-              </a:rPr>
-              <a:t>Émissions de carbone</a:t>
-            </a:r>
-            <a:endParaRPr lang="en-US" sz="1300" dirty="0"/>
-          </a:p>
-        </p:txBody>
-      </p:sp>
-      <p:sp>
-        <p:nvSpPr>
-          <p:cNvPr id="14" name="Shape 12"/>
-          <p:cNvSpPr/>
-          <p:nvPr/>
-        </p:nvSpPr>
-        <p:spPr>
-          <a:xfrm>
-            <a:off x="7360920" y="4745736"/>
-            <a:ext cx="4297680" cy="1280160"/>
-          </a:xfrm>
-          <a:prstGeom prst="roundRect">
-            <a:avLst>
-              <a:gd name="adj" fmla="val 5714"/>
-            </a:avLst>
-          </a:prstGeom>
-          <a:solidFill>
-            <a:srgbClr val="F4F7F8"/>
-          </a:solidFill>
-          <a:ln/>
-          <a:effectLst>
-            <a:outerShdw blurRad="76200" dist="25400" dir="5400000" algn="bl" rotWithShape="0">
-              <a:srgbClr val="1A1A1A">
-                <a:alpha val="18000"/>
-              </a:srgbClr>
-            </a:outerShdw>
-          </a:effectLst>
-        </p:spPr>
-      </p:sp>
-      <p:sp>
-        <p:nvSpPr>
-          <p:cNvPr id="15" name="Text 13"/>
-          <p:cNvSpPr/>
-          <p:nvPr/>
-        </p:nvSpPr>
-        <p:spPr>
-          <a:xfrm>
-            <a:off x="7589520" y="4882896"/>
-            <a:ext cx="1463040" cy="1005840"/>
-          </a:xfrm>
-          <a:prstGeom prst="rect">
-            <a:avLst/>
-          </a:prstGeom>
-          <a:noFill/>
-          <a:ln/>
-        </p:spPr>
-        <p:txBody>
-          <a:bodyPr wrap="square" rtlCol="0" anchor="ctr"/>
-          <a:lstStyle/>
-          <a:p>
-            <a:pPr marL="0" indent="0">
-              <a:buNone/>
-            </a:pPr>
-            <a:r>
-              <a:rPr lang="en-US" sz="2600" b="1" dirty="0">
-                <a:solidFill>
-                  <a:srgbClr val="2E8B57"/>
-                </a:solidFill>
-                <a:latin typeface="Cambria" pitchFamily="34" charset="0"/>
-                <a:ea typeface="Cambria" pitchFamily="34" charset="-122"/>
-                <a:cs typeface="Cambria" pitchFamily="34" charset="-120"/>
-              </a:rPr>
-              <a:t>WUE</a:t>
-            </a:r>
-            <a:endParaRPr lang="en-US" sz="2600" dirty="0"/>
-          </a:p>
-        </p:txBody>
-      </p:sp>
-      <p:sp>
-        <p:nvSpPr>
-          <p:cNvPr id="16" name="Text 14"/>
-          <p:cNvSpPr/>
-          <p:nvPr/>
-        </p:nvSpPr>
-        <p:spPr>
-          <a:xfrm>
-            <a:off x="9052560" y="4745736"/>
-            <a:ext cx="2514600" cy="1280160"/>
-          </a:xfrm>
-          <a:prstGeom prst="rect">
-            <a:avLst/>
-          </a:prstGeom>
-          <a:noFill/>
-          <a:ln/>
-        </p:spPr>
-        <p:txBody>
-          <a:bodyPr wrap="square" rtlCol="0" anchor="ctr"/>
-          <a:lstStyle/>
-          <a:p>
-            <a:pPr marL="0" indent="0">
-              <a:buNone/>
-            </a:pPr>
-            <a:r>
-              <a:rPr lang="en-US" sz="1300" dirty="0">
-                <a:solidFill>
-                  <a:srgbClr val="1E2530"/>
-                </a:solidFill>
-                <a:latin typeface="Calibri" pitchFamily="34" charset="0"/>
-                <a:ea typeface="Calibri" pitchFamily="34" charset="-122"/>
-                <a:cs typeface="Calibri" pitchFamily="34" charset="-120"/>
-              </a:rPr>
-              <a:t>Consommation d'eau</a:t>
-            </a:r>
-            <a:endParaRPr lang="en-US" sz="1300" dirty="0"/>
-          </a:p>
-        </p:txBody>
-      </p:sp>
-    </p:spTree>
-  </p:cSld>
-  <p:clrMapOvr>
-    <a:masterClrMapping/>
-  </p:clrMapOvr>
-</p:sld>
-</file>
-
-<file path=ppt/slides/slide11.xml><?xml version="1.0" encoding="utf-8"?>
-<p:sld xmlns:a="http://schemas.openxmlformats.org/drawingml/2006/main" xmlns:r="http://schemas.openxmlformats.org/officeDocument/2006/relationships" xmlns:p="http://schemas.openxmlformats.org/presentationml/2006/main">
   <p:cSld name="Slide 11">
     <p:bg>
       <p:bgPr>
@@ -4585,17 +3876,6 @@
             <a:pPr marL="0" indent="0">
               <a:buNone/>
             </a:pPr>
-            <a:r>
-              <a:rPr lang="en-US" sz="1200" b="1" kern="0" spc="200" dirty="0">
-                <a:solidFill>
-                  <a:srgbClr val="E67E22"/>
-                </a:solidFill>
-                <a:latin typeface="Calibri" pitchFamily="34" charset="0"/>
-                <a:ea typeface="Calibri" pitchFamily="34" charset="-122"/>
-                <a:cs typeface="Calibri" pitchFamily="34" charset="-120"/>
-              </a:rPr>
-              <a:t>PARTIE 2 · CHAPITRE 1 — ÉTAT DE L'ART</a:t>
-            </a:r>
             <a:endParaRPr lang="en-US" sz="1200" dirty="0"/>
           </a:p>
         </p:txBody>
@@ -6244,7 +5524,7 @@
 </p:sld>
 </file>
 
-<file path=ppt/slides/slide12.xml><?xml version="1.0" encoding="utf-8"?>
+<file path=ppt/slides/slide11.xml><?xml version="1.0" encoding="utf-8"?>
 <p:sld xmlns:a="http://schemas.openxmlformats.org/drawingml/2006/main" xmlns:r="http://schemas.openxmlformats.org/officeDocument/2006/relationships" xmlns:p="http://schemas.openxmlformats.org/presentationml/2006/main">
   <p:cSld name="Slide 12">
     <p:bg>
@@ -6783,7 +6063,7 @@
 </p:sld>
 </file>
 
-<file path=ppt/slides/slide13.xml><?xml version="1.0" encoding="utf-8"?>
+<file path=ppt/slides/slide12.xml><?xml version="1.0" encoding="utf-8"?>
 <p:sld xmlns:a="http://schemas.openxmlformats.org/drawingml/2006/main" xmlns:r="http://schemas.openxmlformats.org/officeDocument/2006/relationships" xmlns:p="http://schemas.openxmlformats.org/presentationml/2006/main">
   <p:cSld name="Slide 13">
     <p:bg>
@@ -9117,7 +8397,7 @@
 </p:sld>
 </file>
 
-<file path=ppt/slides/slide14.xml><?xml version="1.0" encoding="utf-8"?>
+<file path=ppt/slides/slide13.xml><?xml version="1.0" encoding="utf-8"?>
 <p:sld xmlns:a="http://schemas.openxmlformats.org/drawingml/2006/main" xmlns:r="http://schemas.openxmlformats.org/officeDocument/2006/relationships" xmlns:p="http://schemas.openxmlformats.org/presentationml/2006/main">
   <p:cSld name="Slide 14">
     <p:bg>
@@ -9809,7 +9089,7 @@
 </p:sld>
 </file>
 
-<file path=ppt/slides/slide15.xml><?xml version="1.0" encoding="utf-8"?>
+<file path=ppt/slides/slide14.xml><?xml version="1.0" encoding="utf-8"?>
 <p:sld xmlns:a="http://schemas.openxmlformats.org/drawingml/2006/main" xmlns:r="http://schemas.openxmlformats.org/officeDocument/2006/relationships" xmlns:p="http://schemas.openxmlformats.org/presentationml/2006/main">
   <p:cSld name="Slide 15">
     <p:bg>
@@ -10396,7 +9676,7 @@
 </p:sld>
 </file>
 
-<file path=ppt/slides/slide16.xml><?xml version="1.0" encoding="utf-8"?>
+<file path=ppt/slides/slide15.xml><?xml version="1.0" encoding="utf-8"?>
 <p:sld xmlns:a="http://schemas.openxmlformats.org/drawingml/2006/main" xmlns:r="http://schemas.openxmlformats.org/officeDocument/2006/relationships" xmlns:p="http://schemas.openxmlformats.org/presentationml/2006/main">
   <p:cSld name="Slide 16">
     <p:bg>
@@ -11083,7 +10363,7 @@
 </p:sld>
 </file>
 
-<file path=ppt/slides/slide17.xml><?xml version="1.0" encoding="utf-8"?>
+<file path=ppt/slides/slide16.xml><?xml version="1.0" encoding="utf-8"?>
 <p:sld xmlns:a="http://schemas.openxmlformats.org/drawingml/2006/main" xmlns:r="http://schemas.openxmlformats.org/officeDocument/2006/relationships" xmlns:p="http://schemas.openxmlformats.org/presentationml/2006/main">
   <p:cSld name="Slide 17">
     <p:bg>
@@ -12512,7 +11792,7 @@
 </p:sld>
 </file>
 
-<file path=ppt/slides/slide18.xml><?xml version="1.0" encoding="utf-8"?>
+<file path=ppt/slides/slide17.xml><?xml version="1.0" encoding="utf-8"?>
 <p:sld xmlns:a="http://schemas.openxmlformats.org/drawingml/2006/main" xmlns:r="http://schemas.openxmlformats.org/officeDocument/2006/relationships" xmlns:p="http://schemas.openxmlformats.org/presentationml/2006/main">
   <p:cSld name="Slide 18">
     <p:bg>
@@ -12839,7 +12119,7 @@
 </p:sld>
 </file>
 
-<file path=ppt/slides/slide19.xml><?xml version="1.0" encoding="utf-8"?>
+<file path=ppt/slides/slide18.xml><?xml version="1.0" encoding="utf-8"?>
 <p:sld xmlns:a="http://schemas.openxmlformats.org/drawingml/2006/main" xmlns:r="http://schemas.openxmlformats.org/officeDocument/2006/relationships" xmlns:p="http://schemas.openxmlformats.org/presentationml/2006/main">
   <p:cSld name="Slide 19">
     <p:bg>
@@ -13476,6 +12756,717 @@
               <a:t>Température oscille autour de 18°C → les 3 options interviennent dans la même journée. Illustre au mieux la flexibilité et l'adaptabilité de l'algorithme.</a:t>
             </a:r>
             <a:endParaRPr lang="en-US" sz="1250" dirty="0"/>
+          </a:p>
+        </p:txBody>
+      </p:sp>
+    </p:spTree>
+  </p:cSld>
+  <p:clrMapOvr>
+    <a:masterClrMapping/>
+  </p:clrMapOvr>
+</p:sld>
+</file>
+
+<file path=ppt/slides/slide19.xml><?xml version="1.0" encoding="utf-8"?>
+<p:sld xmlns:a="http://schemas.openxmlformats.org/drawingml/2006/main" xmlns:r="http://schemas.openxmlformats.org/officeDocument/2006/relationships" xmlns:p="http://schemas.openxmlformats.org/presentationml/2006/main">
+  <p:cSld name="Slide 20">
+    <p:bg>
+      <p:bgPr>
+        <a:solidFill>
+          <a:srgbClr val="FFFFFF"/>
+        </a:solidFill>
+        <a:effectLst/>
+      </p:bgPr>
+    </p:bg>
+    <p:spTree>
+      <p:nvGrpSpPr>
+        <p:cNvPr id="1" name=""/>
+        <p:cNvGrpSpPr/>
+        <p:nvPr/>
+      </p:nvGrpSpPr>
+      <p:grpSpPr>
+        <a:xfrm>
+          <a:off x="0" y="0"/>
+          <a:ext cx="0" cy="0"/>
+          <a:chOff x="0" y="0"/>
+          <a:chExt cx="0" cy="0"/>
+        </a:xfrm>
+      </p:grpSpPr>
+      <p:sp>
+        <p:nvSpPr>
+          <p:cNvPr id="2" name="Text 0"/>
+          <p:cNvSpPr/>
+          <p:nvPr/>
+        </p:nvSpPr>
+        <p:spPr>
+          <a:xfrm>
+            <a:off x="548640" y="384048"/>
+            <a:ext cx="7315200" cy="320040"/>
+          </a:xfrm>
+          <a:prstGeom prst="rect">
+            <a:avLst/>
+          </a:prstGeom>
+          <a:noFill/>
+          <a:ln/>
+        </p:spPr>
+        <p:txBody>
+          <a:bodyPr wrap="square" rtlCol="0" anchor="ctr"/>
+          <a:lstStyle/>
+          <a:p>
+            <a:pPr marL="0" indent="0">
+              <a:buNone/>
+            </a:pPr>
+            <a:r>
+              <a:rPr lang="en-US" sz="1200" b="1" kern="0" spc="200" dirty="0">
+                <a:solidFill>
+                  <a:srgbClr val="E67E22"/>
+                </a:solidFill>
+                <a:latin typeface="Calibri" pitchFamily="34" charset="0"/>
+                <a:ea typeface="Calibri" pitchFamily="34" charset="-122"/>
+                <a:cs typeface="Calibri" pitchFamily="34" charset="-120"/>
+              </a:rPr>
+              <a:t>PARTIE 2 · CHAPITRE 2 — FAISABILITÉ</a:t>
+            </a:r>
+            <a:endParaRPr lang="en-US" sz="1200" dirty="0"/>
+          </a:p>
+        </p:txBody>
+      </p:sp>
+      <p:sp>
+        <p:nvSpPr>
+          <p:cNvPr id="3" name="Text 1"/>
+          <p:cNvSpPr/>
+          <p:nvPr/>
+        </p:nvSpPr>
+        <p:spPr>
+          <a:xfrm>
+            <a:off x="548640" y="658368"/>
+            <a:ext cx="11064240" cy="822960"/>
+          </a:xfrm>
+          <a:prstGeom prst="rect">
+            <a:avLst/>
+          </a:prstGeom>
+          <a:noFill/>
+          <a:ln/>
+        </p:spPr>
+        <p:txBody>
+          <a:bodyPr wrap="square" rtlCol="0" anchor="ctr"/>
+          <a:lstStyle/>
+          <a:p>
+            <a:pPr marL="0" indent="0" algn="l">
+              <a:buNone/>
+            </a:pPr>
+            <a:r>
+              <a:rPr lang="en-US" sz="3000" b="1" dirty="0">
+                <a:solidFill>
+                  <a:srgbClr val="0B3D56"/>
+                </a:solidFill>
+                <a:latin typeface="Cambria" pitchFamily="34" charset="0"/>
+                <a:ea typeface="Cambria" pitchFamily="34" charset="-122"/>
+                <a:cs typeface="Cambria" pitchFamily="34" charset="-120"/>
+              </a:rPr>
+              <a:t>Choix techniques : Python et ses bibliothèques</a:t>
+            </a:r>
+            <a:endParaRPr lang="en-US" sz="3000" dirty="0"/>
+          </a:p>
+        </p:txBody>
+      </p:sp>
+      <p:sp>
+        <p:nvSpPr>
+          <p:cNvPr id="4" name="Text 2"/>
+          <p:cNvSpPr/>
+          <p:nvPr/>
+        </p:nvSpPr>
+        <p:spPr>
+          <a:xfrm>
+            <a:off x="11503152" y="6473952"/>
+            <a:ext cx="457200" cy="274320"/>
+          </a:xfrm>
+          <a:prstGeom prst="rect">
+            <a:avLst/>
+          </a:prstGeom>
+          <a:noFill/>
+          <a:ln/>
+        </p:spPr>
+        <p:txBody>
+          <a:bodyPr wrap="square" rtlCol="0" anchor="ctr"/>
+          <a:lstStyle/>
+          <a:p>
+            <a:pPr marL="0" indent="0" algn="r">
+              <a:buNone/>
+            </a:pPr>
+            <a:r>
+              <a:rPr lang="en-US" sz="1000" dirty="0">
+                <a:solidFill>
+                  <a:srgbClr val="6B7280"/>
+                </a:solidFill>
+                <a:latin typeface="Calibri" pitchFamily="34" charset="0"/>
+                <a:ea typeface="Calibri" pitchFamily="34" charset="-122"/>
+                <a:cs typeface="Calibri" pitchFamily="34" charset="-120"/>
+              </a:rPr>
+              <a:t>20</a:t>
+            </a:r>
+            <a:endParaRPr lang="en-US" sz="1000" dirty="0"/>
+          </a:p>
+        </p:txBody>
+      </p:sp>
+      <p:sp>
+        <p:nvSpPr>
+          <p:cNvPr id="5" name="Shape 3"/>
+          <p:cNvSpPr/>
+          <p:nvPr/>
+        </p:nvSpPr>
+        <p:spPr>
+          <a:xfrm>
+            <a:off x="548640" y="1737360"/>
+            <a:ext cx="5212080" cy="4297680"/>
+          </a:xfrm>
+          <a:prstGeom prst="roundRect">
+            <a:avLst>
+              <a:gd name="adj" fmla="val 1702"/>
+            </a:avLst>
+          </a:prstGeom>
+          <a:solidFill>
+            <a:srgbClr val="F4F7F8"/>
+          </a:solidFill>
+          <a:ln/>
+          <a:effectLst>
+            <a:outerShdw blurRad="76200" dist="25400" dir="5400000" algn="bl" rotWithShape="0">
+              <a:srgbClr val="1A1A1A">
+                <a:alpha val="18000"/>
+              </a:srgbClr>
+            </a:outerShdw>
+          </a:effectLst>
+        </p:spPr>
+      </p:sp>
+      <p:sp>
+        <p:nvSpPr>
+          <p:cNvPr id="6" name="Text 4"/>
+          <p:cNvSpPr/>
+          <p:nvPr/>
+        </p:nvSpPr>
+        <p:spPr>
+          <a:xfrm>
+            <a:off x="868680" y="1920240"/>
+            <a:ext cx="4572000" cy="411480"/>
+          </a:xfrm>
+          <a:prstGeom prst="rect">
+            <a:avLst/>
+          </a:prstGeom>
+          <a:noFill/>
+          <a:ln/>
+        </p:spPr>
+        <p:txBody>
+          <a:bodyPr wrap="square" rtlCol="0" anchor="ctr"/>
+          <a:lstStyle/>
+          <a:p>
+            <a:pPr marL="0" indent="0">
+              <a:buNone/>
+            </a:pPr>
+            <a:r>
+              <a:rPr lang="en-US" sz="1600" b="1" dirty="0">
+                <a:solidFill>
+                  <a:srgbClr val="0B3D56"/>
+                </a:solidFill>
+                <a:latin typeface="Cambria" pitchFamily="34" charset="0"/>
+                <a:ea typeface="Cambria" pitchFamily="34" charset="-122"/>
+                <a:cs typeface="Cambria" pitchFamily="34" charset="-120"/>
+              </a:rPr>
+              <a:t>Pourquoi Python ?</a:t>
+            </a:r>
+            <a:endParaRPr lang="en-US" sz="1600" dirty="0"/>
+          </a:p>
+        </p:txBody>
+      </p:sp>
+      <p:sp>
+        <p:nvSpPr>
+          <p:cNvPr id="7" name="Text 5"/>
+          <p:cNvSpPr/>
+          <p:nvPr/>
+        </p:nvSpPr>
+        <p:spPr>
+          <a:xfrm>
+            <a:off x="868680" y="2423160"/>
+            <a:ext cx="4572000" cy="3474720"/>
+          </a:xfrm>
+          <a:prstGeom prst="rect">
+            <a:avLst/>
+          </a:prstGeom>
+          <a:noFill/>
+          <a:ln/>
+        </p:spPr>
+        <p:txBody>
+          <a:bodyPr wrap="square" rtlCol="0" anchor="t"/>
+          <a:lstStyle/>
+          <a:p>
+            <a:pPr marL="228600" indent="-228600">
+              <a:spcAft>
+                <a:spcPts val="1300"/>
+              </a:spcAft>
+              <a:buSzPct val="100000"/>
+              <a:buChar char="▪"/>
+            </a:pPr>
+            <a:r>
+              <a:rPr lang="en-US" sz="1250" dirty="0">
+                <a:solidFill>
+                  <a:srgbClr val="1E2530"/>
+                </a:solidFill>
+                <a:latin typeface="Calibri" pitchFamily="34" charset="0"/>
+                <a:ea typeface="Calibri" pitchFamily="34" charset="-122"/>
+                <a:cs typeface="Calibri" pitchFamily="34" charset="-120"/>
+              </a:rPr>
+              <a:t>Langage de référence de la communauté scientifique en optimisation des infrastructures numériques</a:t>
+            </a:r>
+            <a:endParaRPr lang="en-US" sz="1250" dirty="0"/>
+          </a:p>
+          <a:p>
+            <a:pPr marL="228600" indent="-228600">
+              <a:spcAft>
+                <a:spcPts val="1300"/>
+              </a:spcAft>
+              <a:buSzPct val="100000"/>
+              <a:buChar char="▪"/>
+            </a:pPr>
+            <a:r>
+              <a:rPr lang="en-US" sz="1250" dirty="0">
+                <a:solidFill>
+                  <a:srgbClr val="1E2530"/>
+                </a:solidFill>
+                <a:latin typeface="Calibri" pitchFamily="34" charset="0"/>
+                <a:ea typeface="Calibri" pitchFamily="34" charset="-122"/>
+                <a:cs typeface="Calibri" pitchFamily="34" charset="-120"/>
+              </a:rPr>
+              <a:t>Cohérence avec les pratiques de recherche (SHIELD, Carbon-Aware, Deep RL)</a:t>
+            </a:r>
+            <a:endParaRPr lang="en-US" sz="1250" dirty="0"/>
+          </a:p>
+          <a:p>
+            <a:pPr marL="228600" indent="-228600">
+              <a:spcAft>
+                <a:spcPts val="1300"/>
+              </a:spcAft>
+              <a:buSzPct val="100000"/>
+              <a:buChar char="▪"/>
+            </a:pPr>
+            <a:r>
+              <a:rPr lang="en-US" sz="1250" dirty="0">
+                <a:solidFill>
+                  <a:srgbClr val="1E2530"/>
+                </a:solidFill>
+                <a:latin typeface="Calibri" pitchFamily="34" charset="0"/>
+                <a:ea typeface="Calibri" pitchFamily="34" charset="-122"/>
+                <a:cs typeface="Calibri" pitchFamily="34" charset="-120"/>
+              </a:rPr>
+              <a:t>Écosystème riche de bibliothèques scientifiques</a:t>
+            </a:r>
+            <a:endParaRPr lang="en-US" sz="1250" dirty="0"/>
+          </a:p>
+          <a:p>
+            <a:pPr marL="228600" indent="-228600">
+              <a:spcAft>
+                <a:spcPts val="1300"/>
+              </a:spcAft>
+              <a:buSzPct val="100000"/>
+              <a:buChar char="▪"/>
+            </a:pPr>
+            <a:r>
+              <a:rPr lang="en-US" sz="1250" dirty="0">
+                <a:solidFill>
+                  <a:srgbClr val="1E2530"/>
+                </a:solidFill>
+                <a:latin typeface="Calibri" pitchFamily="34" charset="0"/>
+                <a:ea typeface="Calibri" pitchFamily="34" charset="-122"/>
+                <a:cs typeface="Calibri" pitchFamily="34" charset="-120"/>
+              </a:rPr>
+              <a:t>Accessible, lisible et facilement maintenable — essentiel pour un déploiement industriel</a:t>
+            </a:r>
+            <a:endParaRPr lang="en-US" sz="1250" dirty="0"/>
+          </a:p>
+        </p:txBody>
+      </p:sp>
+      <p:sp>
+        <p:nvSpPr>
+          <p:cNvPr id="8" name="Shape 6"/>
+          <p:cNvSpPr/>
+          <p:nvPr/>
+        </p:nvSpPr>
+        <p:spPr>
+          <a:xfrm>
+            <a:off x="6035040" y="1737360"/>
+            <a:ext cx="5623560" cy="1280160"/>
+          </a:xfrm>
+          <a:prstGeom prst="roundRect">
+            <a:avLst>
+              <a:gd name="adj" fmla="val 5714"/>
+            </a:avLst>
+          </a:prstGeom>
+          <a:solidFill>
+            <a:srgbClr val="FFFFFF"/>
+          </a:solidFill>
+          <a:ln/>
+          <a:effectLst>
+            <a:outerShdw blurRad="76200" dist="25400" dir="5400000" algn="bl" rotWithShape="0">
+              <a:srgbClr val="1A1A1A">
+                <a:alpha val="18000"/>
+              </a:srgbClr>
+            </a:outerShdw>
+          </a:effectLst>
+        </p:spPr>
+      </p:sp>
+      <p:sp>
+        <p:nvSpPr>
+          <p:cNvPr id="9" name="Shape 7"/>
+          <p:cNvSpPr/>
+          <p:nvPr/>
+        </p:nvSpPr>
+        <p:spPr>
+          <a:xfrm>
+            <a:off x="6263640" y="1993392"/>
+            <a:ext cx="1371600" cy="768096"/>
+          </a:xfrm>
+          <a:prstGeom prst="roundRect">
+            <a:avLst>
+              <a:gd name="adj" fmla="val 7143"/>
+            </a:avLst>
+          </a:prstGeom>
+          <a:solidFill>
+            <a:srgbClr val="1B7A8C"/>
+          </a:solidFill>
+          <a:ln/>
+        </p:spPr>
+      </p:sp>
+      <p:sp>
+        <p:nvSpPr>
+          <p:cNvPr id="10" name="Text 8"/>
+          <p:cNvSpPr/>
+          <p:nvPr/>
+        </p:nvSpPr>
+        <p:spPr>
+          <a:xfrm>
+            <a:off x="6263640" y="1993392"/>
+            <a:ext cx="1371600" cy="768096"/>
+          </a:xfrm>
+          <a:prstGeom prst="rect">
+            <a:avLst/>
+          </a:prstGeom>
+          <a:noFill/>
+          <a:ln/>
+        </p:spPr>
+        <p:txBody>
+          <a:bodyPr wrap="square" rtlCol="0" anchor="ctr"/>
+          <a:lstStyle/>
+          <a:p>
+            <a:pPr marL="0" indent="0" algn="ctr">
+              <a:buNone/>
+            </a:pPr>
+            <a:r>
+              <a:rPr lang="en-US" sz="1300" b="1" dirty="0">
+                <a:solidFill>
+                  <a:srgbClr val="FFFFFF"/>
+                </a:solidFill>
+                <a:latin typeface="Calibri" pitchFamily="34" charset="0"/>
+                <a:ea typeface="Calibri" pitchFamily="34" charset="-122"/>
+                <a:cs typeface="Calibri" pitchFamily="34" charset="-120"/>
+              </a:rPr>
+              <a:t>NumPy</a:t>
+            </a:r>
+            <a:endParaRPr lang="en-US" sz="1300" dirty="0"/>
+          </a:p>
+        </p:txBody>
+      </p:sp>
+      <p:sp>
+        <p:nvSpPr>
+          <p:cNvPr id="11" name="Text 9"/>
+          <p:cNvSpPr/>
+          <p:nvPr/>
+        </p:nvSpPr>
+        <p:spPr>
+          <a:xfrm>
+            <a:off x="7818120" y="1737360"/>
+            <a:ext cx="3657600" cy="1280160"/>
+          </a:xfrm>
+          <a:prstGeom prst="rect">
+            <a:avLst/>
+          </a:prstGeom>
+          <a:noFill/>
+          <a:ln/>
+        </p:spPr>
+        <p:txBody>
+          <a:bodyPr wrap="square" rtlCol="0" anchor="ctr"/>
+          <a:lstStyle/>
+          <a:p>
+            <a:pPr marL="0" indent="0">
+              <a:buNone/>
+            </a:pPr>
+            <a:r>
+              <a:rPr lang="en-US" sz="1150" dirty="0">
+                <a:solidFill>
+                  <a:srgbClr val="1E2530"/>
+                </a:solidFill>
+                <a:latin typeface="Calibri" pitchFamily="34" charset="0"/>
+                <a:ea typeface="Calibri" pitchFamily="34" charset="-122"/>
+                <a:cs typeface="Calibri" pitchFamily="34" charset="-120"/>
+              </a:rPr>
+              <a:t>Calculs mathématiques : formules du HRR, du Score H2V et des indicateurs classiques</a:t>
+            </a:r>
+            <a:endParaRPr lang="en-US" sz="1150" dirty="0"/>
+          </a:p>
+        </p:txBody>
+      </p:sp>
+      <p:sp>
+        <p:nvSpPr>
+          <p:cNvPr id="12" name="Shape 10"/>
+          <p:cNvSpPr/>
+          <p:nvPr/>
+        </p:nvSpPr>
+        <p:spPr>
+          <a:xfrm>
+            <a:off x="6035040" y="3200400"/>
+            <a:ext cx="5623560" cy="1280160"/>
+          </a:xfrm>
+          <a:prstGeom prst="roundRect">
+            <a:avLst>
+              <a:gd name="adj" fmla="val 5714"/>
+            </a:avLst>
+          </a:prstGeom>
+          <a:solidFill>
+            <a:srgbClr val="FFFFFF"/>
+          </a:solidFill>
+          <a:ln/>
+          <a:effectLst>
+            <a:outerShdw blurRad="76200" dist="25400" dir="5400000" algn="bl" rotWithShape="0">
+              <a:srgbClr val="1A1A1A">
+                <a:alpha val="18000"/>
+              </a:srgbClr>
+            </a:outerShdw>
+          </a:effectLst>
+        </p:spPr>
+      </p:sp>
+      <p:sp>
+        <p:nvSpPr>
+          <p:cNvPr id="13" name="Shape 11"/>
+          <p:cNvSpPr/>
+          <p:nvPr/>
+        </p:nvSpPr>
+        <p:spPr>
+          <a:xfrm>
+            <a:off x="6263640" y="3456432"/>
+            <a:ext cx="1371600" cy="768096"/>
+          </a:xfrm>
+          <a:prstGeom prst="roundRect">
+            <a:avLst>
+              <a:gd name="adj" fmla="val 7143"/>
+            </a:avLst>
+          </a:prstGeom>
+          <a:solidFill>
+            <a:srgbClr val="1B7A8C"/>
+          </a:solidFill>
+          <a:ln/>
+        </p:spPr>
+      </p:sp>
+      <p:sp>
+        <p:nvSpPr>
+          <p:cNvPr id="14" name="Text 12"/>
+          <p:cNvSpPr/>
+          <p:nvPr/>
+        </p:nvSpPr>
+        <p:spPr>
+          <a:xfrm>
+            <a:off x="6263640" y="3456432"/>
+            <a:ext cx="1371600" cy="768096"/>
+          </a:xfrm>
+          <a:prstGeom prst="rect">
+            <a:avLst/>
+          </a:prstGeom>
+          <a:noFill/>
+          <a:ln/>
+        </p:spPr>
+        <p:txBody>
+          <a:bodyPr wrap="square" rtlCol="0" anchor="ctr"/>
+          <a:lstStyle/>
+          <a:p>
+            <a:pPr marL="0" indent="0" algn="ctr">
+              <a:buNone/>
+            </a:pPr>
+            <a:r>
+              <a:rPr lang="en-US" sz="1300" b="1" dirty="0">
+                <a:solidFill>
+                  <a:srgbClr val="FFFFFF"/>
+                </a:solidFill>
+                <a:latin typeface="Calibri" pitchFamily="34" charset="0"/>
+                <a:ea typeface="Calibri" pitchFamily="34" charset="-122"/>
+                <a:cs typeface="Calibri" pitchFamily="34" charset="-120"/>
+              </a:rPr>
+              <a:t>Pandas</a:t>
+            </a:r>
+            <a:endParaRPr lang="en-US" sz="1300" dirty="0"/>
+          </a:p>
+        </p:txBody>
+      </p:sp>
+      <p:sp>
+        <p:nvSpPr>
+          <p:cNvPr id="15" name="Text 13"/>
+          <p:cNvSpPr/>
+          <p:nvPr/>
+        </p:nvSpPr>
+        <p:spPr>
+          <a:xfrm>
+            <a:off x="7818120" y="3200400"/>
+            <a:ext cx="3657600" cy="1280160"/>
+          </a:xfrm>
+          <a:prstGeom prst="rect">
+            <a:avLst/>
+          </a:prstGeom>
+          <a:noFill/>
+          <a:ln/>
+        </p:spPr>
+        <p:txBody>
+          <a:bodyPr wrap="square" rtlCol="0" anchor="ctr"/>
+          <a:lstStyle/>
+          <a:p>
+            <a:pPr marL="0" indent="0">
+              <a:buNone/>
+            </a:pPr>
+            <a:r>
+              <a:rPr lang="en-US" sz="1150" dirty="0">
+                <a:solidFill>
+                  <a:srgbClr val="1E2530"/>
+                </a:solidFill>
+                <a:latin typeface="Calibri" pitchFamily="34" charset="0"/>
+                <a:ea typeface="Calibri" pitchFamily="34" charset="-122"/>
+                <a:cs typeface="Calibri" pitchFamily="34" charset="-120"/>
+              </a:rPr>
+              <a:t>Gestion des données temporelles : mesures toutes les 15 minutes sur 24 heures</a:t>
+            </a:r>
+            <a:endParaRPr lang="en-US" sz="1150" dirty="0"/>
+          </a:p>
+        </p:txBody>
+      </p:sp>
+      <p:sp>
+        <p:nvSpPr>
+          <p:cNvPr id="16" name="Shape 14"/>
+          <p:cNvSpPr/>
+          <p:nvPr/>
+        </p:nvSpPr>
+        <p:spPr>
+          <a:xfrm>
+            <a:off x="6035040" y="4663440"/>
+            <a:ext cx="5623560" cy="1280160"/>
+          </a:xfrm>
+          <a:prstGeom prst="roundRect">
+            <a:avLst>
+              <a:gd name="adj" fmla="val 5714"/>
+            </a:avLst>
+          </a:prstGeom>
+          <a:solidFill>
+            <a:srgbClr val="FFFFFF"/>
+          </a:solidFill>
+          <a:ln/>
+          <a:effectLst>
+            <a:outerShdw blurRad="76200" dist="25400" dir="5400000" algn="bl" rotWithShape="0">
+              <a:srgbClr val="1A1A1A">
+                <a:alpha val="18000"/>
+              </a:srgbClr>
+            </a:outerShdw>
+          </a:effectLst>
+        </p:spPr>
+      </p:sp>
+      <p:sp>
+        <p:nvSpPr>
+          <p:cNvPr id="17" name="Shape 15"/>
+          <p:cNvSpPr/>
+          <p:nvPr/>
+        </p:nvSpPr>
+        <p:spPr>
+          <a:xfrm>
+            <a:off x="6263640" y="4919472"/>
+            <a:ext cx="1371600" cy="768096"/>
+          </a:xfrm>
+          <a:prstGeom prst="roundRect">
+            <a:avLst>
+              <a:gd name="adj" fmla="val 7143"/>
+            </a:avLst>
+          </a:prstGeom>
+          <a:solidFill>
+            <a:srgbClr val="1B7A8C"/>
+          </a:solidFill>
+          <a:ln/>
+        </p:spPr>
+      </p:sp>
+      <p:sp>
+        <p:nvSpPr>
+          <p:cNvPr id="18" name="Text 16"/>
+          <p:cNvSpPr/>
+          <p:nvPr/>
+        </p:nvSpPr>
+        <p:spPr>
+          <a:xfrm>
+            <a:off x="6263640" y="4919472"/>
+            <a:ext cx="1371600" cy="768096"/>
+          </a:xfrm>
+          <a:prstGeom prst="rect">
+            <a:avLst/>
+          </a:prstGeom>
+          <a:noFill/>
+          <a:ln/>
+        </p:spPr>
+        <p:txBody>
+          <a:bodyPr wrap="square" rtlCol="0" anchor="ctr"/>
+          <a:lstStyle/>
+          <a:p>
+            <a:pPr marL="0" indent="0" algn="ctr">
+              <a:buNone/>
+            </a:pPr>
+            <a:r>
+              <a:rPr lang="en-US" sz="1300" b="1" dirty="0">
+                <a:solidFill>
+                  <a:srgbClr val="FFFFFF"/>
+                </a:solidFill>
+                <a:latin typeface="Calibri" pitchFamily="34" charset="0"/>
+                <a:ea typeface="Calibri" pitchFamily="34" charset="-122"/>
+                <a:cs typeface="Calibri" pitchFamily="34" charset="-120"/>
+              </a:rPr>
+              <a:t>Matplotlib</a:t>
+            </a:r>
+            <a:endParaRPr lang="en-US" sz="1300" dirty="0"/>
+          </a:p>
+        </p:txBody>
+      </p:sp>
+      <p:sp>
+        <p:nvSpPr>
+          <p:cNvPr id="19" name="Text 17"/>
+          <p:cNvSpPr/>
+          <p:nvPr/>
+        </p:nvSpPr>
+        <p:spPr>
+          <a:xfrm>
+            <a:off x="7818120" y="4663440"/>
+            <a:ext cx="3657600" cy="1280160"/>
+          </a:xfrm>
+          <a:prstGeom prst="rect">
+            <a:avLst/>
+          </a:prstGeom>
+          <a:noFill/>
+          <a:ln/>
+        </p:spPr>
+        <p:txBody>
+          <a:bodyPr wrap="square" rtlCol="0" anchor="ctr"/>
+          <a:lstStyle/>
+          <a:p>
+            <a:pPr marL="0" indent="0">
+              <a:buNone/>
+            </a:pPr>
+            <a:r>
+              <a:rPr lang="en-US" sz="1150" dirty="0">
+                <a:solidFill>
+                  <a:srgbClr val="1E2530"/>
+                </a:solidFill>
+                <a:latin typeface="Calibri" pitchFamily="34" charset="0"/>
+                <a:ea typeface="Calibri" pitchFamily="34" charset="-122"/>
+                <a:cs typeface="Calibri" pitchFamily="34" charset="-120"/>
+              </a:rPr>
+              <a:t>Visualisation des résultats : graphiques de comparaison avant/après HEAT2VALUE</a:t>
+            </a:r>
+            <a:endParaRPr lang="en-US" sz="1150" dirty="0"/>
           </a:p>
         </p:txBody>
       </p:sp>
@@ -14232,717 +14223,6 @@
 
 <file path=ppt/slides/slide20.xml><?xml version="1.0" encoding="utf-8"?>
 <p:sld xmlns:a="http://schemas.openxmlformats.org/drawingml/2006/main" xmlns:r="http://schemas.openxmlformats.org/officeDocument/2006/relationships" xmlns:p="http://schemas.openxmlformats.org/presentationml/2006/main">
-  <p:cSld name="Slide 20">
-    <p:bg>
-      <p:bgPr>
-        <a:solidFill>
-          <a:srgbClr val="FFFFFF"/>
-        </a:solidFill>
-        <a:effectLst/>
-      </p:bgPr>
-    </p:bg>
-    <p:spTree>
-      <p:nvGrpSpPr>
-        <p:cNvPr id="1" name=""/>
-        <p:cNvGrpSpPr/>
-        <p:nvPr/>
-      </p:nvGrpSpPr>
-      <p:grpSpPr>
-        <a:xfrm>
-          <a:off x="0" y="0"/>
-          <a:ext cx="0" cy="0"/>
-          <a:chOff x="0" y="0"/>
-          <a:chExt cx="0" cy="0"/>
-        </a:xfrm>
-      </p:grpSpPr>
-      <p:sp>
-        <p:nvSpPr>
-          <p:cNvPr id="2" name="Text 0"/>
-          <p:cNvSpPr/>
-          <p:nvPr/>
-        </p:nvSpPr>
-        <p:spPr>
-          <a:xfrm>
-            <a:off x="548640" y="384048"/>
-            <a:ext cx="7315200" cy="320040"/>
-          </a:xfrm>
-          <a:prstGeom prst="rect">
-            <a:avLst/>
-          </a:prstGeom>
-          <a:noFill/>
-          <a:ln/>
-        </p:spPr>
-        <p:txBody>
-          <a:bodyPr wrap="square" rtlCol="0" anchor="ctr"/>
-          <a:lstStyle/>
-          <a:p>
-            <a:pPr marL="0" indent="0">
-              <a:buNone/>
-            </a:pPr>
-            <a:r>
-              <a:rPr lang="en-US" sz="1200" b="1" kern="0" spc="200" dirty="0">
-                <a:solidFill>
-                  <a:srgbClr val="E67E22"/>
-                </a:solidFill>
-                <a:latin typeface="Calibri" pitchFamily="34" charset="0"/>
-                <a:ea typeface="Calibri" pitchFamily="34" charset="-122"/>
-                <a:cs typeface="Calibri" pitchFamily="34" charset="-120"/>
-              </a:rPr>
-              <a:t>PARTIE 2 · CHAPITRE 2 — FAISABILITÉ</a:t>
-            </a:r>
-            <a:endParaRPr lang="en-US" sz="1200" dirty="0"/>
-          </a:p>
-        </p:txBody>
-      </p:sp>
-      <p:sp>
-        <p:nvSpPr>
-          <p:cNvPr id="3" name="Text 1"/>
-          <p:cNvSpPr/>
-          <p:nvPr/>
-        </p:nvSpPr>
-        <p:spPr>
-          <a:xfrm>
-            <a:off x="548640" y="658368"/>
-            <a:ext cx="11064240" cy="822960"/>
-          </a:xfrm>
-          <a:prstGeom prst="rect">
-            <a:avLst/>
-          </a:prstGeom>
-          <a:noFill/>
-          <a:ln/>
-        </p:spPr>
-        <p:txBody>
-          <a:bodyPr wrap="square" rtlCol="0" anchor="ctr"/>
-          <a:lstStyle/>
-          <a:p>
-            <a:pPr marL="0" indent="0" algn="l">
-              <a:buNone/>
-            </a:pPr>
-            <a:r>
-              <a:rPr lang="en-US" sz="3000" b="1" dirty="0">
-                <a:solidFill>
-                  <a:srgbClr val="0B3D56"/>
-                </a:solidFill>
-                <a:latin typeface="Cambria" pitchFamily="34" charset="0"/>
-                <a:ea typeface="Cambria" pitchFamily="34" charset="-122"/>
-                <a:cs typeface="Cambria" pitchFamily="34" charset="-120"/>
-              </a:rPr>
-              <a:t>Choix techniques : Python et ses bibliothèques</a:t>
-            </a:r>
-            <a:endParaRPr lang="en-US" sz="3000" dirty="0"/>
-          </a:p>
-        </p:txBody>
-      </p:sp>
-      <p:sp>
-        <p:nvSpPr>
-          <p:cNvPr id="4" name="Text 2"/>
-          <p:cNvSpPr/>
-          <p:nvPr/>
-        </p:nvSpPr>
-        <p:spPr>
-          <a:xfrm>
-            <a:off x="11503152" y="6473952"/>
-            <a:ext cx="457200" cy="274320"/>
-          </a:xfrm>
-          <a:prstGeom prst="rect">
-            <a:avLst/>
-          </a:prstGeom>
-          <a:noFill/>
-          <a:ln/>
-        </p:spPr>
-        <p:txBody>
-          <a:bodyPr wrap="square" rtlCol="0" anchor="ctr"/>
-          <a:lstStyle/>
-          <a:p>
-            <a:pPr marL="0" indent="0" algn="r">
-              <a:buNone/>
-            </a:pPr>
-            <a:r>
-              <a:rPr lang="en-US" sz="1000" dirty="0">
-                <a:solidFill>
-                  <a:srgbClr val="6B7280"/>
-                </a:solidFill>
-                <a:latin typeface="Calibri" pitchFamily="34" charset="0"/>
-                <a:ea typeface="Calibri" pitchFamily="34" charset="-122"/>
-                <a:cs typeface="Calibri" pitchFamily="34" charset="-120"/>
-              </a:rPr>
-              <a:t>20</a:t>
-            </a:r>
-            <a:endParaRPr lang="en-US" sz="1000" dirty="0"/>
-          </a:p>
-        </p:txBody>
-      </p:sp>
-      <p:sp>
-        <p:nvSpPr>
-          <p:cNvPr id="5" name="Shape 3"/>
-          <p:cNvSpPr/>
-          <p:nvPr/>
-        </p:nvSpPr>
-        <p:spPr>
-          <a:xfrm>
-            <a:off x="548640" y="1737360"/>
-            <a:ext cx="5212080" cy="4297680"/>
-          </a:xfrm>
-          <a:prstGeom prst="roundRect">
-            <a:avLst>
-              <a:gd name="adj" fmla="val 1702"/>
-            </a:avLst>
-          </a:prstGeom>
-          <a:solidFill>
-            <a:srgbClr val="F4F7F8"/>
-          </a:solidFill>
-          <a:ln/>
-          <a:effectLst>
-            <a:outerShdw blurRad="76200" dist="25400" dir="5400000" algn="bl" rotWithShape="0">
-              <a:srgbClr val="1A1A1A">
-                <a:alpha val="18000"/>
-              </a:srgbClr>
-            </a:outerShdw>
-          </a:effectLst>
-        </p:spPr>
-      </p:sp>
-      <p:sp>
-        <p:nvSpPr>
-          <p:cNvPr id="6" name="Text 4"/>
-          <p:cNvSpPr/>
-          <p:nvPr/>
-        </p:nvSpPr>
-        <p:spPr>
-          <a:xfrm>
-            <a:off x="868680" y="1920240"/>
-            <a:ext cx="4572000" cy="411480"/>
-          </a:xfrm>
-          <a:prstGeom prst="rect">
-            <a:avLst/>
-          </a:prstGeom>
-          <a:noFill/>
-          <a:ln/>
-        </p:spPr>
-        <p:txBody>
-          <a:bodyPr wrap="square" rtlCol="0" anchor="ctr"/>
-          <a:lstStyle/>
-          <a:p>
-            <a:pPr marL="0" indent="0">
-              <a:buNone/>
-            </a:pPr>
-            <a:r>
-              <a:rPr lang="en-US" sz="1600" b="1" dirty="0">
-                <a:solidFill>
-                  <a:srgbClr val="0B3D56"/>
-                </a:solidFill>
-                <a:latin typeface="Cambria" pitchFamily="34" charset="0"/>
-                <a:ea typeface="Cambria" pitchFamily="34" charset="-122"/>
-                <a:cs typeface="Cambria" pitchFamily="34" charset="-120"/>
-              </a:rPr>
-              <a:t>Pourquoi Python ?</a:t>
-            </a:r>
-            <a:endParaRPr lang="en-US" sz="1600" dirty="0"/>
-          </a:p>
-        </p:txBody>
-      </p:sp>
-      <p:sp>
-        <p:nvSpPr>
-          <p:cNvPr id="7" name="Text 5"/>
-          <p:cNvSpPr/>
-          <p:nvPr/>
-        </p:nvSpPr>
-        <p:spPr>
-          <a:xfrm>
-            <a:off x="868680" y="2423160"/>
-            <a:ext cx="4572000" cy="3474720"/>
-          </a:xfrm>
-          <a:prstGeom prst="rect">
-            <a:avLst/>
-          </a:prstGeom>
-          <a:noFill/>
-          <a:ln/>
-        </p:spPr>
-        <p:txBody>
-          <a:bodyPr wrap="square" rtlCol="0" anchor="t"/>
-          <a:lstStyle/>
-          <a:p>
-            <a:pPr marL="228600" indent="-228600">
-              <a:spcAft>
-                <a:spcPts val="1300"/>
-              </a:spcAft>
-              <a:buSzPct val="100000"/>
-              <a:buChar char="▪"/>
-            </a:pPr>
-            <a:r>
-              <a:rPr lang="en-US" sz="1250" dirty="0">
-                <a:solidFill>
-                  <a:srgbClr val="1E2530"/>
-                </a:solidFill>
-                <a:latin typeface="Calibri" pitchFamily="34" charset="0"/>
-                <a:ea typeface="Calibri" pitchFamily="34" charset="-122"/>
-                <a:cs typeface="Calibri" pitchFamily="34" charset="-120"/>
-              </a:rPr>
-              <a:t>Langage de référence de la communauté scientifique en optimisation des infrastructures numériques</a:t>
-            </a:r>
-            <a:endParaRPr lang="en-US" sz="1250" dirty="0"/>
-          </a:p>
-          <a:p>
-            <a:pPr marL="228600" indent="-228600">
-              <a:spcAft>
-                <a:spcPts val="1300"/>
-              </a:spcAft>
-              <a:buSzPct val="100000"/>
-              <a:buChar char="▪"/>
-            </a:pPr>
-            <a:r>
-              <a:rPr lang="en-US" sz="1250" dirty="0">
-                <a:solidFill>
-                  <a:srgbClr val="1E2530"/>
-                </a:solidFill>
-                <a:latin typeface="Calibri" pitchFamily="34" charset="0"/>
-                <a:ea typeface="Calibri" pitchFamily="34" charset="-122"/>
-                <a:cs typeface="Calibri" pitchFamily="34" charset="-120"/>
-              </a:rPr>
-              <a:t>Cohérence avec les pratiques de recherche (SHIELD, Carbon-Aware, Deep RL)</a:t>
-            </a:r>
-            <a:endParaRPr lang="en-US" sz="1250" dirty="0"/>
-          </a:p>
-          <a:p>
-            <a:pPr marL="228600" indent="-228600">
-              <a:spcAft>
-                <a:spcPts val="1300"/>
-              </a:spcAft>
-              <a:buSzPct val="100000"/>
-              <a:buChar char="▪"/>
-            </a:pPr>
-            <a:r>
-              <a:rPr lang="en-US" sz="1250" dirty="0">
-                <a:solidFill>
-                  <a:srgbClr val="1E2530"/>
-                </a:solidFill>
-                <a:latin typeface="Calibri" pitchFamily="34" charset="0"/>
-                <a:ea typeface="Calibri" pitchFamily="34" charset="-122"/>
-                <a:cs typeface="Calibri" pitchFamily="34" charset="-120"/>
-              </a:rPr>
-              <a:t>Écosystème riche de bibliothèques scientifiques</a:t>
-            </a:r>
-            <a:endParaRPr lang="en-US" sz="1250" dirty="0"/>
-          </a:p>
-          <a:p>
-            <a:pPr marL="228600" indent="-228600">
-              <a:spcAft>
-                <a:spcPts val="1300"/>
-              </a:spcAft>
-              <a:buSzPct val="100000"/>
-              <a:buChar char="▪"/>
-            </a:pPr>
-            <a:r>
-              <a:rPr lang="en-US" sz="1250" dirty="0">
-                <a:solidFill>
-                  <a:srgbClr val="1E2530"/>
-                </a:solidFill>
-                <a:latin typeface="Calibri" pitchFamily="34" charset="0"/>
-                <a:ea typeface="Calibri" pitchFamily="34" charset="-122"/>
-                <a:cs typeface="Calibri" pitchFamily="34" charset="-120"/>
-              </a:rPr>
-              <a:t>Accessible, lisible et facilement maintenable — essentiel pour un déploiement industriel</a:t>
-            </a:r>
-            <a:endParaRPr lang="en-US" sz="1250" dirty="0"/>
-          </a:p>
-        </p:txBody>
-      </p:sp>
-      <p:sp>
-        <p:nvSpPr>
-          <p:cNvPr id="8" name="Shape 6"/>
-          <p:cNvSpPr/>
-          <p:nvPr/>
-        </p:nvSpPr>
-        <p:spPr>
-          <a:xfrm>
-            <a:off x="6035040" y="1737360"/>
-            <a:ext cx="5623560" cy="1280160"/>
-          </a:xfrm>
-          <a:prstGeom prst="roundRect">
-            <a:avLst>
-              <a:gd name="adj" fmla="val 5714"/>
-            </a:avLst>
-          </a:prstGeom>
-          <a:solidFill>
-            <a:srgbClr val="FFFFFF"/>
-          </a:solidFill>
-          <a:ln/>
-          <a:effectLst>
-            <a:outerShdw blurRad="76200" dist="25400" dir="5400000" algn="bl" rotWithShape="0">
-              <a:srgbClr val="1A1A1A">
-                <a:alpha val="18000"/>
-              </a:srgbClr>
-            </a:outerShdw>
-          </a:effectLst>
-        </p:spPr>
-      </p:sp>
-      <p:sp>
-        <p:nvSpPr>
-          <p:cNvPr id="9" name="Shape 7"/>
-          <p:cNvSpPr/>
-          <p:nvPr/>
-        </p:nvSpPr>
-        <p:spPr>
-          <a:xfrm>
-            <a:off x="6263640" y="1993392"/>
-            <a:ext cx="1371600" cy="768096"/>
-          </a:xfrm>
-          <a:prstGeom prst="roundRect">
-            <a:avLst>
-              <a:gd name="adj" fmla="val 7143"/>
-            </a:avLst>
-          </a:prstGeom>
-          <a:solidFill>
-            <a:srgbClr val="1B7A8C"/>
-          </a:solidFill>
-          <a:ln/>
-        </p:spPr>
-      </p:sp>
-      <p:sp>
-        <p:nvSpPr>
-          <p:cNvPr id="10" name="Text 8"/>
-          <p:cNvSpPr/>
-          <p:nvPr/>
-        </p:nvSpPr>
-        <p:spPr>
-          <a:xfrm>
-            <a:off x="6263640" y="1993392"/>
-            <a:ext cx="1371600" cy="768096"/>
-          </a:xfrm>
-          <a:prstGeom prst="rect">
-            <a:avLst/>
-          </a:prstGeom>
-          <a:noFill/>
-          <a:ln/>
-        </p:spPr>
-        <p:txBody>
-          <a:bodyPr wrap="square" rtlCol="0" anchor="ctr"/>
-          <a:lstStyle/>
-          <a:p>
-            <a:pPr marL="0" indent="0" algn="ctr">
-              <a:buNone/>
-            </a:pPr>
-            <a:r>
-              <a:rPr lang="en-US" sz="1300" b="1" dirty="0">
-                <a:solidFill>
-                  <a:srgbClr val="FFFFFF"/>
-                </a:solidFill>
-                <a:latin typeface="Calibri" pitchFamily="34" charset="0"/>
-                <a:ea typeface="Calibri" pitchFamily="34" charset="-122"/>
-                <a:cs typeface="Calibri" pitchFamily="34" charset="-120"/>
-              </a:rPr>
-              <a:t>NumPy</a:t>
-            </a:r>
-            <a:endParaRPr lang="en-US" sz="1300" dirty="0"/>
-          </a:p>
-        </p:txBody>
-      </p:sp>
-      <p:sp>
-        <p:nvSpPr>
-          <p:cNvPr id="11" name="Text 9"/>
-          <p:cNvSpPr/>
-          <p:nvPr/>
-        </p:nvSpPr>
-        <p:spPr>
-          <a:xfrm>
-            <a:off x="7818120" y="1737360"/>
-            <a:ext cx="3657600" cy="1280160"/>
-          </a:xfrm>
-          <a:prstGeom prst="rect">
-            <a:avLst/>
-          </a:prstGeom>
-          <a:noFill/>
-          <a:ln/>
-        </p:spPr>
-        <p:txBody>
-          <a:bodyPr wrap="square" rtlCol="0" anchor="ctr"/>
-          <a:lstStyle/>
-          <a:p>
-            <a:pPr marL="0" indent="0">
-              <a:buNone/>
-            </a:pPr>
-            <a:r>
-              <a:rPr lang="en-US" sz="1150" dirty="0">
-                <a:solidFill>
-                  <a:srgbClr val="1E2530"/>
-                </a:solidFill>
-                <a:latin typeface="Calibri" pitchFamily="34" charset="0"/>
-                <a:ea typeface="Calibri" pitchFamily="34" charset="-122"/>
-                <a:cs typeface="Calibri" pitchFamily="34" charset="-120"/>
-              </a:rPr>
-              <a:t>Calculs mathématiques : formules du HRR, du Score H2V et des indicateurs classiques</a:t>
-            </a:r>
-            <a:endParaRPr lang="en-US" sz="1150" dirty="0"/>
-          </a:p>
-        </p:txBody>
-      </p:sp>
-      <p:sp>
-        <p:nvSpPr>
-          <p:cNvPr id="12" name="Shape 10"/>
-          <p:cNvSpPr/>
-          <p:nvPr/>
-        </p:nvSpPr>
-        <p:spPr>
-          <a:xfrm>
-            <a:off x="6035040" y="3200400"/>
-            <a:ext cx="5623560" cy="1280160"/>
-          </a:xfrm>
-          <a:prstGeom prst="roundRect">
-            <a:avLst>
-              <a:gd name="adj" fmla="val 5714"/>
-            </a:avLst>
-          </a:prstGeom>
-          <a:solidFill>
-            <a:srgbClr val="FFFFFF"/>
-          </a:solidFill>
-          <a:ln/>
-          <a:effectLst>
-            <a:outerShdw blurRad="76200" dist="25400" dir="5400000" algn="bl" rotWithShape="0">
-              <a:srgbClr val="1A1A1A">
-                <a:alpha val="18000"/>
-              </a:srgbClr>
-            </a:outerShdw>
-          </a:effectLst>
-        </p:spPr>
-      </p:sp>
-      <p:sp>
-        <p:nvSpPr>
-          <p:cNvPr id="13" name="Shape 11"/>
-          <p:cNvSpPr/>
-          <p:nvPr/>
-        </p:nvSpPr>
-        <p:spPr>
-          <a:xfrm>
-            <a:off x="6263640" y="3456432"/>
-            <a:ext cx="1371600" cy="768096"/>
-          </a:xfrm>
-          <a:prstGeom prst="roundRect">
-            <a:avLst>
-              <a:gd name="adj" fmla="val 7143"/>
-            </a:avLst>
-          </a:prstGeom>
-          <a:solidFill>
-            <a:srgbClr val="1B7A8C"/>
-          </a:solidFill>
-          <a:ln/>
-        </p:spPr>
-      </p:sp>
-      <p:sp>
-        <p:nvSpPr>
-          <p:cNvPr id="14" name="Text 12"/>
-          <p:cNvSpPr/>
-          <p:nvPr/>
-        </p:nvSpPr>
-        <p:spPr>
-          <a:xfrm>
-            <a:off x="6263640" y="3456432"/>
-            <a:ext cx="1371600" cy="768096"/>
-          </a:xfrm>
-          <a:prstGeom prst="rect">
-            <a:avLst/>
-          </a:prstGeom>
-          <a:noFill/>
-          <a:ln/>
-        </p:spPr>
-        <p:txBody>
-          <a:bodyPr wrap="square" rtlCol="0" anchor="ctr"/>
-          <a:lstStyle/>
-          <a:p>
-            <a:pPr marL="0" indent="0" algn="ctr">
-              <a:buNone/>
-            </a:pPr>
-            <a:r>
-              <a:rPr lang="en-US" sz="1300" b="1" dirty="0">
-                <a:solidFill>
-                  <a:srgbClr val="FFFFFF"/>
-                </a:solidFill>
-                <a:latin typeface="Calibri" pitchFamily="34" charset="0"/>
-                <a:ea typeface="Calibri" pitchFamily="34" charset="-122"/>
-                <a:cs typeface="Calibri" pitchFamily="34" charset="-120"/>
-              </a:rPr>
-              <a:t>Pandas</a:t>
-            </a:r>
-            <a:endParaRPr lang="en-US" sz="1300" dirty="0"/>
-          </a:p>
-        </p:txBody>
-      </p:sp>
-      <p:sp>
-        <p:nvSpPr>
-          <p:cNvPr id="15" name="Text 13"/>
-          <p:cNvSpPr/>
-          <p:nvPr/>
-        </p:nvSpPr>
-        <p:spPr>
-          <a:xfrm>
-            <a:off x="7818120" y="3200400"/>
-            <a:ext cx="3657600" cy="1280160"/>
-          </a:xfrm>
-          <a:prstGeom prst="rect">
-            <a:avLst/>
-          </a:prstGeom>
-          <a:noFill/>
-          <a:ln/>
-        </p:spPr>
-        <p:txBody>
-          <a:bodyPr wrap="square" rtlCol="0" anchor="ctr"/>
-          <a:lstStyle/>
-          <a:p>
-            <a:pPr marL="0" indent="0">
-              <a:buNone/>
-            </a:pPr>
-            <a:r>
-              <a:rPr lang="en-US" sz="1150" dirty="0">
-                <a:solidFill>
-                  <a:srgbClr val="1E2530"/>
-                </a:solidFill>
-                <a:latin typeface="Calibri" pitchFamily="34" charset="0"/>
-                <a:ea typeface="Calibri" pitchFamily="34" charset="-122"/>
-                <a:cs typeface="Calibri" pitchFamily="34" charset="-120"/>
-              </a:rPr>
-              <a:t>Gestion des données temporelles : mesures toutes les 15 minutes sur 24 heures</a:t>
-            </a:r>
-            <a:endParaRPr lang="en-US" sz="1150" dirty="0"/>
-          </a:p>
-        </p:txBody>
-      </p:sp>
-      <p:sp>
-        <p:nvSpPr>
-          <p:cNvPr id="16" name="Shape 14"/>
-          <p:cNvSpPr/>
-          <p:nvPr/>
-        </p:nvSpPr>
-        <p:spPr>
-          <a:xfrm>
-            <a:off x="6035040" y="4663440"/>
-            <a:ext cx="5623560" cy="1280160"/>
-          </a:xfrm>
-          <a:prstGeom prst="roundRect">
-            <a:avLst>
-              <a:gd name="adj" fmla="val 5714"/>
-            </a:avLst>
-          </a:prstGeom>
-          <a:solidFill>
-            <a:srgbClr val="FFFFFF"/>
-          </a:solidFill>
-          <a:ln/>
-          <a:effectLst>
-            <a:outerShdw blurRad="76200" dist="25400" dir="5400000" algn="bl" rotWithShape="0">
-              <a:srgbClr val="1A1A1A">
-                <a:alpha val="18000"/>
-              </a:srgbClr>
-            </a:outerShdw>
-          </a:effectLst>
-        </p:spPr>
-      </p:sp>
-      <p:sp>
-        <p:nvSpPr>
-          <p:cNvPr id="17" name="Shape 15"/>
-          <p:cNvSpPr/>
-          <p:nvPr/>
-        </p:nvSpPr>
-        <p:spPr>
-          <a:xfrm>
-            <a:off x="6263640" y="4919472"/>
-            <a:ext cx="1371600" cy="768096"/>
-          </a:xfrm>
-          <a:prstGeom prst="roundRect">
-            <a:avLst>
-              <a:gd name="adj" fmla="val 7143"/>
-            </a:avLst>
-          </a:prstGeom>
-          <a:solidFill>
-            <a:srgbClr val="1B7A8C"/>
-          </a:solidFill>
-          <a:ln/>
-        </p:spPr>
-      </p:sp>
-      <p:sp>
-        <p:nvSpPr>
-          <p:cNvPr id="18" name="Text 16"/>
-          <p:cNvSpPr/>
-          <p:nvPr/>
-        </p:nvSpPr>
-        <p:spPr>
-          <a:xfrm>
-            <a:off x="6263640" y="4919472"/>
-            <a:ext cx="1371600" cy="768096"/>
-          </a:xfrm>
-          <a:prstGeom prst="rect">
-            <a:avLst/>
-          </a:prstGeom>
-          <a:noFill/>
-          <a:ln/>
-        </p:spPr>
-        <p:txBody>
-          <a:bodyPr wrap="square" rtlCol="0" anchor="ctr"/>
-          <a:lstStyle/>
-          <a:p>
-            <a:pPr marL="0" indent="0" algn="ctr">
-              <a:buNone/>
-            </a:pPr>
-            <a:r>
-              <a:rPr lang="en-US" sz="1300" b="1" dirty="0">
-                <a:solidFill>
-                  <a:srgbClr val="FFFFFF"/>
-                </a:solidFill>
-                <a:latin typeface="Calibri" pitchFamily="34" charset="0"/>
-                <a:ea typeface="Calibri" pitchFamily="34" charset="-122"/>
-                <a:cs typeface="Calibri" pitchFamily="34" charset="-120"/>
-              </a:rPr>
-              <a:t>Matplotlib</a:t>
-            </a:r>
-            <a:endParaRPr lang="en-US" sz="1300" dirty="0"/>
-          </a:p>
-        </p:txBody>
-      </p:sp>
-      <p:sp>
-        <p:nvSpPr>
-          <p:cNvPr id="19" name="Text 17"/>
-          <p:cNvSpPr/>
-          <p:nvPr/>
-        </p:nvSpPr>
-        <p:spPr>
-          <a:xfrm>
-            <a:off x="7818120" y="4663440"/>
-            <a:ext cx="3657600" cy="1280160"/>
-          </a:xfrm>
-          <a:prstGeom prst="rect">
-            <a:avLst/>
-          </a:prstGeom>
-          <a:noFill/>
-          <a:ln/>
-        </p:spPr>
-        <p:txBody>
-          <a:bodyPr wrap="square" rtlCol="0" anchor="ctr"/>
-          <a:lstStyle/>
-          <a:p>
-            <a:pPr marL="0" indent="0">
-              <a:buNone/>
-            </a:pPr>
-            <a:r>
-              <a:rPr lang="en-US" sz="1150" dirty="0">
-                <a:solidFill>
-                  <a:srgbClr val="1E2530"/>
-                </a:solidFill>
-                <a:latin typeface="Calibri" pitchFamily="34" charset="0"/>
-                <a:ea typeface="Calibri" pitchFamily="34" charset="-122"/>
-                <a:cs typeface="Calibri" pitchFamily="34" charset="-120"/>
-              </a:rPr>
-              <a:t>Visualisation des résultats : graphiques de comparaison avant/après HEAT2VALUE</a:t>
-            </a:r>
-            <a:endParaRPr lang="en-US" sz="1150" dirty="0"/>
-          </a:p>
-        </p:txBody>
-      </p:sp>
-    </p:spTree>
-  </p:cSld>
-  <p:clrMapOvr>
-    <a:masterClrMapping/>
-  </p:clrMapOvr>
-</p:sld>
-</file>
-
-<file path=ppt/slides/slide21.xml><?xml version="1.0" encoding="utf-8"?>
-<p:sld xmlns:a="http://schemas.openxmlformats.org/drawingml/2006/main" xmlns:r="http://schemas.openxmlformats.org/officeDocument/2006/relationships" xmlns:p="http://schemas.openxmlformats.org/presentationml/2006/main">
   <p:cSld name="Slide 21">
     <p:bg>
       <p:bgPr>
@@ -15183,7 +14463,7 @@
 </p:sld>
 </file>
 
-<file path=ppt/slides/slide22.xml><?xml version="1.0" encoding="utf-8"?>
+<file path=ppt/slides/slide21.xml><?xml version="1.0" encoding="utf-8"?>
 <p:sld xmlns:a="http://schemas.openxmlformats.org/drawingml/2006/main" xmlns:r="http://schemas.openxmlformats.org/officeDocument/2006/relationships" xmlns:p="http://schemas.openxmlformats.org/presentationml/2006/main">
   <p:cSld name="Slide 22">
     <p:bg>
@@ -15816,7 +15096,7 @@
 </p:sld>
 </file>
 
-<file path=ppt/slides/slide23.xml><?xml version="1.0" encoding="utf-8"?>
+<file path=ppt/slides/slide22.xml><?xml version="1.0" encoding="utf-8"?>
 <p:sld xmlns:a="http://schemas.openxmlformats.org/drawingml/2006/main" xmlns:r="http://schemas.openxmlformats.org/officeDocument/2006/relationships" xmlns:p="http://schemas.openxmlformats.org/presentationml/2006/main">
   <p:cSld name="Slide 23">
     <p:bg>
@@ -16164,7 +15444,7 @@
 </p:sld>
 </file>
 
-<file path=ppt/slides/slide24.xml><?xml version="1.0" encoding="utf-8"?>
+<file path=ppt/slides/slide23.xml><?xml version="1.0" encoding="utf-8"?>
 <p:sld xmlns:a="http://schemas.openxmlformats.org/drawingml/2006/main" xmlns:r="http://schemas.openxmlformats.org/officeDocument/2006/relationships" xmlns:p="http://schemas.openxmlformats.org/presentationml/2006/main">
   <p:cSld name="Slide 24">
     <p:bg>
@@ -16491,7 +15771,7 @@
 </p:sld>
 </file>
 
-<file path=ppt/slides/slide25.xml><?xml version="1.0" encoding="utf-8"?>
+<file path=ppt/slides/slide24.xml><?xml version="1.0" encoding="utf-8"?>
 <p:sld xmlns:a="http://schemas.openxmlformats.org/drawingml/2006/main" xmlns:r="http://schemas.openxmlformats.org/officeDocument/2006/relationships" xmlns:p="http://schemas.openxmlformats.org/presentationml/2006/main">
   <p:cSld name="Slide 25">
     <p:bg>
@@ -16842,7 +16122,7 @@
 </p:sld>
 </file>
 
-<file path=ppt/slides/slide26.xml><?xml version="1.0" encoding="utf-8"?>
+<file path=ppt/slides/slide25.xml><?xml version="1.0" encoding="utf-8"?>
 <p:sld xmlns:a="http://schemas.openxmlformats.org/drawingml/2006/main" xmlns:r="http://schemas.openxmlformats.org/officeDocument/2006/relationships" xmlns:p="http://schemas.openxmlformats.org/presentationml/2006/main">
   <p:cSld name="Slide 26">
     <p:bg>
@@ -17473,7 +16753,7 @@
 </p:sld>
 </file>
 
-<file path=ppt/slides/slide27.xml><?xml version="1.0" encoding="utf-8"?>
+<file path=ppt/slides/slide26.xml><?xml version="1.0" encoding="utf-8"?>
 <p:sld xmlns:a="http://schemas.openxmlformats.org/drawingml/2006/main" xmlns:r="http://schemas.openxmlformats.org/officeDocument/2006/relationships" xmlns:p="http://schemas.openxmlformats.org/presentationml/2006/main">
   <p:cSld name="Slide 27">
     <p:bg>
@@ -17819,7 +17099,7 @@
 </p:sld>
 </file>
 
-<file path=ppt/slides/slide28.xml><?xml version="1.0" encoding="utf-8"?>
+<file path=ppt/slides/slide27.xml><?xml version="1.0" encoding="utf-8"?>
 <p:sld xmlns:a="http://schemas.openxmlformats.org/drawingml/2006/main" xmlns:r="http://schemas.openxmlformats.org/officeDocument/2006/relationships" xmlns:p="http://schemas.openxmlformats.org/presentationml/2006/main">
   <p:cSld name="Slide 28">
     <p:bg>
@@ -20403,7 +19683,7 @@
 </p:sld>
 </file>
 
-<file path=ppt/slides/slide29.xml><?xml version="1.0" encoding="utf-8"?>
+<file path=ppt/slides/slide28.xml><?xml version="1.0" encoding="utf-8"?>
 <p:sld xmlns:a="http://schemas.openxmlformats.org/drawingml/2006/main" xmlns:r="http://schemas.openxmlformats.org/officeDocument/2006/relationships" xmlns:p="http://schemas.openxmlformats.org/presentationml/2006/main">
   <p:cSld name="Slide 29">
     <p:bg>
@@ -20991,6 +20271,867 @@
               <a:t>4 scénarios estivaux : HRR = 0%, PUE = 1.30, WUE = 1.80 — comportement classique</a:t>
             </a:r>
             <a:endParaRPr lang="en-US" sz="1100" dirty="0"/>
+          </a:p>
+        </p:txBody>
+      </p:sp>
+    </p:spTree>
+  </p:cSld>
+  <p:clrMapOvr>
+    <a:masterClrMapping/>
+  </p:clrMapOvr>
+</p:sld>
+</file>
+
+<file path=ppt/slides/slide29.xml><?xml version="1.0" encoding="utf-8"?>
+<p:sld xmlns:a="http://schemas.openxmlformats.org/drawingml/2006/main" xmlns:r="http://schemas.openxmlformats.org/officeDocument/2006/relationships" xmlns:p="http://schemas.openxmlformats.org/presentationml/2006/main">
+  <p:cSld name="Slide 30">
+    <p:bg>
+      <p:bgPr>
+        <a:solidFill>
+          <a:srgbClr val="FFFFFF"/>
+        </a:solidFill>
+        <a:effectLst/>
+      </p:bgPr>
+    </p:bg>
+    <p:spTree>
+      <p:nvGrpSpPr>
+        <p:cNvPr id="1" name=""/>
+        <p:cNvGrpSpPr/>
+        <p:nvPr/>
+      </p:nvGrpSpPr>
+      <p:grpSpPr>
+        <a:xfrm>
+          <a:off x="0" y="0"/>
+          <a:ext cx="0" cy="0"/>
+          <a:chOff x="0" y="0"/>
+          <a:chExt cx="0" cy="0"/>
+        </a:xfrm>
+      </p:grpSpPr>
+      <p:sp>
+        <p:nvSpPr>
+          <p:cNvPr id="2" name="Text 0"/>
+          <p:cNvSpPr/>
+          <p:nvPr/>
+        </p:nvSpPr>
+        <p:spPr>
+          <a:xfrm>
+            <a:off x="548640" y="384048"/>
+            <a:ext cx="7315200" cy="320040"/>
+          </a:xfrm>
+          <a:prstGeom prst="rect">
+            <a:avLst/>
+          </a:prstGeom>
+          <a:noFill/>
+          <a:ln/>
+        </p:spPr>
+        <p:txBody>
+          <a:bodyPr wrap="square" rtlCol="0" anchor="ctr"/>
+          <a:lstStyle/>
+          <a:p>
+            <a:pPr marL="0" indent="0">
+              <a:buNone/>
+            </a:pPr>
+            <a:r>
+              <a:rPr lang="en-US" sz="1200" b="1" kern="0" spc="200" dirty="0">
+                <a:solidFill>
+                  <a:srgbClr val="E67E22"/>
+                </a:solidFill>
+                <a:latin typeface="Calibri" pitchFamily="34" charset="0"/>
+                <a:ea typeface="Calibri" pitchFamily="34" charset="-122"/>
+                <a:cs typeface="Calibri" pitchFamily="34" charset="-120"/>
+              </a:rPr>
+              <a:t>PARTIE 2 · CHAPITRE 3 — ÉVALUATION</a:t>
+            </a:r>
+            <a:endParaRPr lang="en-US" sz="1200" dirty="0"/>
+          </a:p>
+        </p:txBody>
+      </p:sp>
+      <p:sp>
+        <p:nvSpPr>
+          <p:cNvPr id="3" name="Text 1"/>
+          <p:cNvSpPr/>
+          <p:nvPr/>
+        </p:nvSpPr>
+        <p:spPr>
+          <a:xfrm>
+            <a:off x="548640" y="658368"/>
+            <a:ext cx="11064240" cy="822960"/>
+          </a:xfrm>
+          <a:prstGeom prst="rect">
+            <a:avLst/>
+          </a:prstGeom>
+          <a:noFill/>
+          <a:ln/>
+        </p:spPr>
+        <p:txBody>
+          <a:bodyPr wrap="square" rtlCol="0" anchor="ctr"/>
+          <a:lstStyle/>
+          <a:p>
+            <a:pPr marL="0" indent="0" algn="l">
+              <a:buNone/>
+            </a:pPr>
+            <a:r>
+              <a:rPr lang="en-US" sz="3000" b="1" dirty="0">
+                <a:solidFill>
+                  <a:srgbClr val="0B3D56"/>
+                </a:solidFill>
+                <a:latin typeface="Cambria" pitchFamily="34" charset="0"/>
+                <a:ea typeface="Cambria" pitchFamily="34" charset="-122"/>
+                <a:cs typeface="Cambria" pitchFamily="34" charset="-120"/>
+              </a:rPr>
+              <a:t>Métriques et synthèse des résultats par indicateur</a:t>
+            </a:r>
+            <a:endParaRPr lang="en-US" sz="3000" dirty="0"/>
+          </a:p>
+        </p:txBody>
+      </p:sp>
+      <p:sp>
+        <p:nvSpPr>
+          <p:cNvPr id="4" name="Text 2"/>
+          <p:cNvSpPr/>
+          <p:nvPr/>
+        </p:nvSpPr>
+        <p:spPr>
+          <a:xfrm>
+            <a:off x="11503152" y="6473952"/>
+            <a:ext cx="457200" cy="274320"/>
+          </a:xfrm>
+          <a:prstGeom prst="rect">
+            <a:avLst/>
+          </a:prstGeom>
+          <a:noFill/>
+          <a:ln/>
+        </p:spPr>
+        <p:txBody>
+          <a:bodyPr wrap="square" rtlCol="0" anchor="ctr"/>
+          <a:lstStyle/>
+          <a:p>
+            <a:pPr marL="0" indent="0" algn="r">
+              <a:buNone/>
+            </a:pPr>
+            <a:r>
+              <a:rPr lang="en-US" sz="1000" dirty="0">
+                <a:solidFill>
+                  <a:srgbClr val="6B7280"/>
+                </a:solidFill>
+                <a:latin typeface="Calibri" pitchFamily="34" charset="0"/>
+                <a:ea typeface="Calibri" pitchFamily="34" charset="-122"/>
+                <a:cs typeface="Calibri" pitchFamily="34" charset="-120"/>
+              </a:rPr>
+              <a:t>30</a:t>
+            </a:r>
+            <a:endParaRPr lang="en-US" sz="1000" dirty="0"/>
+          </a:p>
+        </p:txBody>
+      </p:sp>
+      <p:sp>
+        <p:nvSpPr>
+          <p:cNvPr id="5" name="Shape 3"/>
+          <p:cNvSpPr/>
+          <p:nvPr/>
+        </p:nvSpPr>
+        <p:spPr>
+          <a:xfrm>
+            <a:off x="548640" y="1737360"/>
+            <a:ext cx="11109960" cy="960120"/>
+          </a:xfrm>
+          <a:prstGeom prst="roundRect">
+            <a:avLst>
+              <a:gd name="adj" fmla="val 7619"/>
+            </a:avLst>
+          </a:prstGeom>
+          <a:solidFill>
+            <a:srgbClr val="F4F7F8"/>
+          </a:solidFill>
+          <a:ln/>
+          <a:effectLst>
+            <a:outerShdw blurRad="76200" dist="25400" dir="5400000" algn="bl" rotWithShape="0">
+              <a:srgbClr val="1A1A1A">
+                <a:alpha val="18000"/>
+              </a:srgbClr>
+            </a:outerShdw>
+          </a:effectLst>
+        </p:spPr>
+      </p:sp>
+      <p:sp>
+        <p:nvSpPr>
+          <p:cNvPr id="6" name="Shape 4"/>
+          <p:cNvSpPr/>
+          <p:nvPr/>
+        </p:nvSpPr>
+        <p:spPr>
+          <a:xfrm>
+            <a:off x="777240" y="1938528"/>
+            <a:ext cx="960120" cy="548640"/>
+          </a:xfrm>
+          <a:prstGeom prst="roundRect">
+            <a:avLst>
+              <a:gd name="adj" fmla="val 10000"/>
+            </a:avLst>
+          </a:prstGeom>
+          <a:solidFill>
+            <a:srgbClr val="1B7A8C"/>
+          </a:solidFill>
+          <a:ln/>
+        </p:spPr>
+      </p:sp>
+      <p:sp>
+        <p:nvSpPr>
+          <p:cNvPr id="7" name="Text 5"/>
+          <p:cNvSpPr/>
+          <p:nvPr/>
+        </p:nvSpPr>
+        <p:spPr>
+          <a:xfrm>
+            <a:off x="777240" y="1938528"/>
+            <a:ext cx="960120" cy="548640"/>
+          </a:xfrm>
+          <a:prstGeom prst="rect">
+            <a:avLst/>
+          </a:prstGeom>
+          <a:noFill/>
+          <a:ln/>
+        </p:spPr>
+        <p:txBody>
+          <a:bodyPr wrap="square" rtlCol="0" anchor="ctr"/>
+          <a:lstStyle/>
+          <a:p>
+            <a:pPr marL="0" indent="0" algn="ctr">
+              <a:buNone/>
+            </a:pPr>
+            <a:r>
+              <a:rPr lang="en-US" sz="1500" b="1" dirty="0">
+                <a:solidFill>
+                  <a:srgbClr val="FFFFFF"/>
+                </a:solidFill>
+                <a:latin typeface="Calibri" pitchFamily="34" charset="0"/>
+                <a:ea typeface="Calibri" pitchFamily="34" charset="-122"/>
+                <a:cs typeface="Calibri" pitchFamily="34" charset="-120"/>
+              </a:rPr>
+              <a:t>PUE</a:t>
+            </a:r>
+            <a:endParaRPr lang="en-US" sz="1500" dirty="0"/>
+          </a:p>
+        </p:txBody>
+      </p:sp>
+      <p:sp>
+        <p:nvSpPr>
+          <p:cNvPr id="8" name="Text 6"/>
+          <p:cNvSpPr/>
+          <p:nvPr/>
+        </p:nvSpPr>
+        <p:spPr>
+          <a:xfrm>
+            <a:off x="1965960" y="1847088"/>
+            <a:ext cx="3749040" cy="731520"/>
+          </a:xfrm>
+          <a:prstGeom prst="rect">
+            <a:avLst/>
+          </a:prstGeom>
+          <a:noFill/>
+          <a:ln/>
+        </p:spPr>
+        <p:txBody>
+          <a:bodyPr wrap="square" rtlCol="0" anchor="ctr"/>
+          <a:lstStyle/>
+          <a:p>
+            <a:pPr marL="0" indent="0">
+              <a:buNone/>
+            </a:pPr>
+            <a:r>
+              <a:rPr lang="en-US" sz="1150" i="1" dirty="0">
+                <a:solidFill>
+                  <a:srgbClr val="6B7280"/>
+                </a:solidFill>
+                <a:latin typeface="Calibri" pitchFamily="34" charset="0"/>
+                <a:ea typeface="Calibri" pitchFamily="34" charset="-122"/>
+                <a:cs typeface="Calibri" pitchFamily="34" charset="-120"/>
+              </a:rPr>
+              <a:t>Réf. : 1.30 (refroidissement classique 30%)</a:t>
+            </a:r>
+            <a:endParaRPr lang="en-US" sz="1150" dirty="0"/>
+          </a:p>
+        </p:txBody>
+      </p:sp>
+      <p:sp>
+        <p:nvSpPr>
+          <p:cNvPr id="9" name="Text 7"/>
+          <p:cNvSpPr/>
+          <p:nvPr/>
+        </p:nvSpPr>
+        <p:spPr>
+          <a:xfrm>
+            <a:off x="5852160" y="1847088"/>
+            <a:ext cx="5623560" cy="731520"/>
+          </a:xfrm>
+          <a:prstGeom prst="rect">
+            <a:avLst/>
+          </a:prstGeom>
+          <a:noFill/>
+          <a:ln/>
+        </p:spPr>
+        <p:txBody>
+          <a:bodyPr wrap="square" rtlCol="0" anchor="ctr"/>
+          <a:lstStyle/>
+          <a:p>
+            <a:pPr marL="0" indent="0">
+              <a:buNone/>
+            </a:pPr>
+            <a:r>
+              <a:rPr lang="en-US" sz="1200" dirty="0">
+                <a:solidFill>
+                  <a:srgbClr val="1E2530"/>
+                </a:solidFill>
+                <a:latin typeface="Calibri" pitchFamily="34" charset="0"/>
+                <a:ea typeface="Calibri" pitchFamily="34" charset="-122"/>
+                <a:cs typeface="Calibri" pitchFamily="34" charset="-120"/>
+              </a:rPr>
+              <a:t>Réduction systématique à 1.05 (-19%) dès que la réutilisation est possible</a:t>
+            </a:r>
+            <a:endParaRPr lang="en-US" sz="1200" dirty="0"/>
+          </a:p>
+        </p:txBody>
+      </p:sp>
+      <p:sp>
+        <p:nvSpPr>
+          <p:cNvPr id="10" name="Shape 8"/>
+          <p:cNvSpPr/>
+          <p:nvPr/>
+        </p:nvSpPr>
+        <p:spPr>
+          <a:xfrm>
+            <a:off x="548640" y="2834640"/>
+            <a:ext cx="11109960" cy="960120"/>
+          </a:xfrm>
+          <a:prstGeom prst="roundRect">
+            <a:avLst>
+              <a:gd name="adj" fmla="val 7619"/>
+            </a:avLst>
+          </a:prstGeom>
+          <a:solidFill>
+            <a:srgbClr val="F4F7F8"/>
+          </a:solidFill>
+          <a:ln/>
+          <a:effectLst>
+            <a:outerShdw blurRad="76200" dist="25400" dir="5400000" algn="bl" rotWithShape="0">
+              <a:srgbClr val="1A1A1A">
+                <a:alpha val="18000"/>
+              </a:srgbClr>
+            </a:outerShdw>
+          </a:effectLst>
+        </p:spPr>
+      </p:sp>
+      <p:sp>
+        <p:nvSpPr>
+          <p:cNvPr id="11" name="Shape 9"/>
+          <p:cNvSpPr/>
+          <p:nvPr/>
+        </p:nvSpPr>
+        <p:spPr>
+          <a:xfrm>
+            <a:off x="777240" y="3035808"/>
+            <a:ext cx="960120" cy="548640"/>
+          </a:xfrm>
+          <a:prstGeom prst="roundRect">
+            <a:avLst>
+              <a:gd name="adj" fmla="val 10000"/>
+            </a:avLst>
+          </a:prstGeom>
+          <a:solidFill>
+            <a:srgbClr val="E67E22"/>
+          </a:solidFill>
+          <a:ln/>
+        </p:spPr>
+      </p:sp>
+      <p:sp>
+        <p:nvSpPr>
+          <p:cNvPr id="12" name="Text 10"/>
+          <p:cNvSpPr/>
+          <p:nvPr/>
+        </p:nvSpPr>
+        <p:spPr>
+          <a:xfrm>
+            <a:off x="777240" y="3035808"/>
+            <a:ext cx="960120" cy="548640"/>
+          </a:xfrm>
+          <a:prstGeom prst="rect">
+            <a:avLst/>
+          </a:prstGeom>
+          <a:noFill/>
+          <a:ln/>
+        </p:spPr>
+        <p:txBody>
+          <a:bodyPr wrap="square" rtlCol="0" anchor="ctr"/>
+          <a:lstStyle/>
+          <a:p>
+            <a:pPr marL="0" indent="0" algn="ctr">
+              <a:buNone/>
+            </a:pPr>
+            <a:r>
+              <a:rPr lang="en-US" sz="1500" b="1" dirty="0">
+                <a:solidFill>
+                  <a:srgbClr val="FFFFFF"/>
+                </a:solidFill>
+                <a:latin typeface="Calibri" pitchFamily="34" charset="0"/>
+                <a:ea typeface="Calibri" pitchFamily="34" charset="-122"/>
+                <a:cs typeface="Calibri" pitchFamily="34" charset="-120"/>
+              </a:rPr>
+              <a:t>CUE</a:t>
+            </a:r>
+            <a:endParaRPr lang="en-US" sz="1500" dirty="0"/>
+          </a:p>
+        </p:txBody>
+      </p:sp>
+      <p:sp>
+        <p:nvSpPr>
+          <p:cNvPr id="13" name="Text 11"/>
+          <p:cNvSpPr/>
+          <p:nvPr/>
+        </p:nvSpPr>
+        <p:spPr>
+          <a:xfrm>
+            <a:off x="1965960" y="2944368"/>
+            <a:ext cx="3749040" cy="731520"/>
+          </a:xfrm>
+          <a:prstGeom prst="rect">
+            <a:avLst/>
+          </a:prstGeom>
+          <a:noFill/>
+          <a:ln/>
+        </p:spPr>
+        <p:txBody>
+          <a:bodyPr wrap="square" rtlCol="0" anchor="ctr"/>
+          <a:lstStyle/>
+          <a:p>
+            <a:pPr marL="0" indent="0">
+              <a:buNone/>
+            </a:pPr>
+            <a:r>
+              <a:rPr lang="en-US" sz="1150" i="1" dirty="0">
+                <a:solidFill>
+                  <a:srgbClr val="6B7280"/>
+                </a:solidFill>
+                <a:latin typeface="Calibri" pitchFamily="34" charset="0"/>
+                <a:ea typeface="Calibri" pitchFamily="34" charset="-122"/>
+                <a:cs typeface="Calibri" pitchFamily="34" charset="-120"/>
+              </a:rPr>
+              <a:t>Réf. : sans déduction d'émissions évitées</a:t>
+            </a:r>
+            <a:endParaRPr lang="en-US" sz="1150" dirty="0"/>
+          </a:p>
+        </p:txBody>
+      </p:sp>
+      <p:sp>
+        <p:nvSpPr>
+          <p:cNvPr id="14" name="Text 12"/>
+          <p:cNvSpPr/>
+          <p:nvPr/>
+        </p:nvSpPr>
+        <p:spPr>
+          <a:xfrm>
+            <a:off x="5852160" y="2944368"/>
+            <a:ext cx="5623560" cy="731520"/>
+          </a:xfrm>
+          <a:prstGeom prst="rect">
+            <a:avLst/>
+          </a:prstGeom>
+          <a:noFill/>
+          <a:ln/>
+        </p:spPr>
+        <p:txBody>
+          <a:bodyPr wrap="square" rtlCol="0" anchor="ctr"/>
+          <a:lstStyle/>
+          <a:p>
+            <a:pPr marL="0" indent="0">
+              <a:buNone/>
+            </a:pPr>
+            <a:r>
+              <a:rPr lang="en-US" sz="1200" dirty="0">
+                <a:solidFill>
+                  <a:srgbClr val="1E2530"/>
+                </a:solidFill>
+                <a:latin typeface="Calibri" pitchFamily="34" charset="0"/>
+                <a:ea typeface="Calibri" pitchFamily="34" charset="-122"/>
+                <a:cs typeface="Calibri" pitchFamily="34" charset="-120"/>
+              </a:rPr>
+              <a:t>Tend vers 0 en hiver (réseau propre) ; reste positif mais réduit en été / réseau carboné</a:t>
+            </a:r>
+            <a:endParaRPr lang="en-US" sz="1200" dirty="0"/>
+          </a:p>
+        </p:txBody>
+      </p:sp>
+      <p:sp>
+        <p:nvSpPr>
+          <p:cNvPr id="15" name="Shape 13"/>
+          <p:cNvSpPr/>
+          <p:nvPr/>
+        </p:nvSpPr>
+        <p:spPr>
+          <a:xfrm>
+            <a:off x="548640" y="3931920"/>
+            <a:ext cx="11109960" cy="960120"/>
+          </a:xfrm>
+          <a:prstGeom prst="roundRect">
+            <a:avLst>
+              <a:gd name="adj" fmla="val 7619"/>
+            </a:avLst>
+          </a:prstGeom>
+          <a:solidFill>
+            <a:srgbClr val="F4F7F8"/>
+          </a:solidFill>
+          <a:ln/>
+          <a:effectLst>
+            <a:outerShdw blurRad="76200" dist="25400" dir="5400000" algn="bl" rotWithShape="0">
+              <a:srgbClr val="1A1A1A">
+                <a:alpha val="18000"/>
+              </a:srgbClr>
+            </a:outerShdw>
+          </a:effectLst>
+        </p:spPr>
+      </p:sp>
+      <p:sp>
+        <p:nvSpPr>
+          <p:cNvPr id="16" name="Shape 14"/>
+          <p:cNvSpPr/>
+          <p:nvPr/>
+        </p:nvSpPr>
+        <p:spPr>
+          <a:xfrm>
+            <a:off x="777240" y="4133088"/>
+            <a:ext cx="960120" cy="548640"/>
+          </a:xfrm>
+          <a:prstGeom prst="roundRect">
+            <a:avLst>
+              <a:gd name="adj" fmla="val 10000"/>
+            </a:avLst>
+          </a:prstGeom>
+          <a:solidFill>
+            <a:srgbClr val="2E8B57"/>
+          </a:solidFill>
+          <a:ln/>
+        </p:spPr>
+      </p:sp>
+      <p:sp>
+        <p:nvSpPr>
+          <p:cNvPr id="17" name="Text 15"/>
+          <p:cNvSpPr/>
+          <p:nvPr/>
+        </p:nvSpPr>
+        <p:spPr>
+          <a:xfrm>
+            <a:off x="777240" y="4133088"/>
+            <a:ext cx="960120" cy="548640"/>
+          </a:xfrm>
+          <a:prstGeom prst="rect">
+            <a:avLst/>
+          </a:prstGeom>
+          <a:noFill/>
+          <a:ln/>
+        </p:spPr>
+        <p:txBody>
+          <a:bodyPr wrap="square" rtlCol="0" anchor="ctr"/>
+          <a:lstStyle/>
+          <a:p>
+            <a:pPr marL="0" indent="0" algn="ctr">
+              <a:buNone/>
+            </a:pPr>
+            <a:r>
+              <a:rPr lang="en-US" sz="1500" b="1" dirty="0">
+                <a:solidFill>
+                  <a:srgbClr val="FFFFFF"/>
+                </a:solidFill>
+                <a:latin typeface="Calibri" pitchFamily="34" charset="0"/>
+                <a:ea typeface="Calibri" pitchFamily="34" charset="-122"/>
+                <a:cs typeface="Calibri" pitchFamily="34" charset="-120"/>
+              </a:rPr>
+              <a:t>WUE</a:t>
+            </a:r>
+            <a:endParaRPr lang="en-US" sz="1500" dirty="0"/>
+          </a:p>
+        </p:txBody>
+      </p:sp>
+      <p:sp>
+        <p:nvSpPr>
+          <p:cNvPr id="18" name="Text 16"/>
+          <p:cNvSpPr/>
+          <p:nvPr/>
+        </p:nvSpPr>
+        <p:spPr>
+          <a:xfrm>
+            <a:off x="1965960" y="4041648"/>
+            <a:ext cx="3749040" cy="731520"/>
+          </a:xfrm>
+          <a:prstGeom prst="rect">
+            <a:avLst/>
+          </a:prstGeom>
+          <a:noFill/>
+          <a:ln/>
+        </p:spPr>
+        <p:txBody>
+          <a:bodyPr wrap="square" rtlCol="0" anchor="ctr"/>
+          <a:lstStyle/>
+          <a:p>
+            <a:pPr marL="0" indent="0">
+              <a:buNone/>
+            </a:pPr>
+            <a:r>
+              <a:rPr lang="en-US" sz="1150" i="1" dirty="0">
+                <a:solidFill>
+                  <a:srgbClr val="6B7280"/>
+                </a:solidFill>
+                <a:latin typeface="Calibri" pitchFamily="34" charset="0"/>
+                <a:ea typeface="Calibri" pitchFamily="34" charset="-122"/>
+                <a:cs typeface="Calibri" pitchFamily="34" charset="-120"/>
+              </a:rPr>
+              <a:t>Réf. : 1.8 L/kWh (climatisation par évaporation)</a:t>
+            </a:r>
+            <a:endParaRPr lang="en-US" sz="1150" dirty="0"/>
+          </a:p>
+        </p:txBody>
+      </p:sp>
+      <p:sp>
+        <p:nvSpPr>
+          <p:cNvPr id="19" name="Text 17"/>
+          <p:cNvSpPr/>
+          <p:nvPr/>
+        </p:nvSpPr>
+        <p:spPr>
+          <a:xfrm>
+            <a:off x="5852160" y="4041648"/>
+            <a:ext cx="5623560" cy="731520"/>
+          </a:xfrm>
+          <a:prstGeom prst="rect">
+            <a:avLst/>
+          </a:prstGeom>
+          <a:noFill/>
+          <a:ln/>
+        </p:spPr>
+        <p:txBody>
+          <a:bodyPr wrap="square" rtlCol="0" anchor="ctr"/>
+          <a:lstStyle/>
+          <a:p>
+            <a:pPr marL="0" indent="0">
+              <a:buNone/>
+            </a:pPr>
+            <a:r>
+              <a:rPr lang="en-US" sz="1200" dirty="0">
+                <a:solidFill>
+                  <a:srgbClr val="1E2530"/>
+                </a:solidFill>
+                <a:latin typeface="Calibri" pitchFamily="34" charset="0"/>
+                <a:ea typeface="Calibri" pitchFamily="34" charset="-122"/>
+                <a:cs typeface="Calibri" pitchFamily="34" charset="-120"/>
+              </a:rPr>
+              <a:t>Réduction significative selon le mode de refroidissement retenu</a:t>
+            </a:r>
+            <a:endParaRPr lang="en-US" sz="1200" dirty="0"/>
+          </a:p>
+        </p:txBody>
+      </p:sp>
+      <p:sp>
+        <p:nvSpPr>
+          <p:cNvPr id="20" name="Shape 18"/>
+          <p:cNvSpPr/>
+          <p:nvPr/>
+        </p:nvSpPr>
+        <p:spPr>
+          <a:xfrm>
+            <a:off x="548640" y="5029200"/>
+            <a:ext cx="11109960" cy="960120"/>
+          </a:xfrm>
+          <a:prstGeom prst="roundRect">
+            <a:avLst>
+              <a:gd name="adj" fmla="val 7619"/>
+            </a:avLst>
+          </a:prstGeom>
+          <a:solidFill>
+            <a:srgbClr val="F4F7F8"/>
+          </a:solidFill>
+          <a:ln/>
+          <a:effectLst>
+            <a:outerShdw blurRad="76200" dist="25400" dir="5400000" algn="bl" rotWithShape="0">
+              <a:srgbClr val="1A1A1A">
+                <a:alpha val="18000"/>
+              </a:srgbClr>
+            </a:outerShdw>
+          </a:effectLst>
+        </p:spPr>
+      </p:sp>
+      <p:sp>
+        <p:nvSpPr>
+          <p:cNvPr id="21" name="Shape 19"/>
+          <p:cNvSpPr/>
+          <p:nvPr/>
+        </p:nvSpPr>
+        <p:spPr>
+          <a:xfrm>
+            <a:off x="777240" y="5230368"/>
+            <a:ext cx="960120" cy="548640"/>
+          </a:xfrm>
+          <a:prstGeom prst="roundRect">
+            <a:avLst>
+              <a:gd name="adj" fmla="val 10000"/>
+            </a:avLst>
+          </a:prstGeom>
+          <a:solidFill>
+            <a:srgbClr val="0B3D56"/>
+          </a:solidFill>
+          <a:ln/>
+        </p:spPr>
+      </p:sp>
+      <p:sp>
+        <p:nvSpPr>
+          <p:cNvPr id="22" name="Text 20"/>
+          <p:cNvSpPr/>
+          <p:nvPr/>
+        </p:nvSpPr>
+        <p:spPr>
+          <a:xfrm>
+            <a:off x="777240" y="5230368"/>
+            <a:ext cx="960120" cy="548640"/>
+          </a:xfrm>
+          <a:prstGeom prst="rect">
+            <a:avLst/>
+          </a:prstGeom>
+          <a:noFill/>
+          <a:ln/>
+        </p:spPr>
+        <p:txBody>
+          <a:bodyPr wrap="square" rtlCol="0" anchor="ctr"/>
+          <a:lstStyle/>
+          <a:p>
+            <a:pPr marL="0" indent="0" algn="ctr">
+              <a:buNone/>
+            </a:pPr>
+            <a:r>
+              <a:rPr lang="en-US" sz="1500" b="1" dirty="0">
+                <a:solidFill>
+                  <a:srgbClr val="FFFFFF"/>
+                </a:solidFill>
+                <a:latin typeface="Calibri" pitchFamily="34" charset="0"/>
+                <a:ea typeface="Calibri" pitchFamily="34" charset="-122"/>
+                <a:cs typeface="Calibri" pitchFamily="34" charset="-120"/>
+              </a:rPr>
+              <a:t>HRR</a:t>
+            </a:r>
+            <a:endParaRPr lang="en-US" sz="1500" dirty="0"/>
+          </a:p>
+        </p:txBody>
+      </p:sp>
+      <p:sp>
+        <p:nvSpPr>
+          <p:cNvPr id="23" name="Text 21"/>
+          <p:cNvSpPr/>
+          <p:nvPr/>
+        </p:nvSpPr>
+        <p:spPr>
+          <a:xfrm>
+            <a:off x="1965960" y="5138928"/>
+            <a:ext cx="3749040" cy="731520"/>
+          </a:xfrm>
+          <a:prstGeom prst="rect">
+            <a:avLst/>
+          </a:prstGeom>
+          <a:noFill/>
+          <a:ln/>
+        </p:spPr>
+        <p:txBody>
+          <a:bodyPr wrap="square" rtlCol="0" anchor="ctr"/>
+          <a:lstStyle/>
+          <a:p>
+            <a:pPr marL="0" indent="0">
+              <a:buNone/>
+            </a:pPr>
+            <a:r>
+              <a:rPr lang="en-US" sz="1150" i="1" dirty="0">
+                <a:solidFill>
+                  <a:srgbClr val="6B7280"/>
+                </a:solidFill>
+                <a:latin typeface="Calibri" pitchFamily="34" charset="0"/>
+                <a:ea typeface="Calibri" pitchFamily="34" charset="-122"/>
+                <a:cs typeface="Calibri" pitchFamily="34" charset="-120"/>
+              </a:rPr>
+              <a:t>Réf. : 0 (aucune valorisation)</a:t>
+            </a:r>
+            <a:endParaRPr lang="en-US" sz="1150" dirty="0"/>
+          </a:p>
+        </p:txBody>
+      </p:sp>
+      <p:sp>
+        <p:nvSpPr>
+          <p:cNvPr id="24" name="Text 22"/>
+          <p:cNvSpPr/>
+          <p:nvPr/>
+        </p:nvSpPr>
+        <p:spPr>
+          <a:xfrm>
+            <a:off x="5852160" y="5138928"/>
+            <a:ext cx="5623560" cy="731520"/>
+          </a:xfrm>
+          <a:prstGeom prst="rect">
+            <a:avLst/>
+          </a:prstGeom>
+          <a:noFill/>
+          <a:ln/>
+        </p:spPr>
+        <p:txBody>
+          <a:bodyPr wrap="square" rtlCol="0" anchor="ctr"/>
+          <a:lstStyle/>
+          <a:p>
+            <a:pPr marL="0" indent="0">
+              <a:buNone/>
+            </a:pPr>
+            <a:r>
+              <a:rPr lang="en-US" sz="1200" dirty="0">
+                <a:solidFill>
+                  <a:srgbClr val="1E2530"/>
+                </a:solidFill>
+                <a:latin typeface="Calibri" pitchFamily="34" charset="0"/>
+                <a:ea typeface="Calibri" pitchFamily="34" charset="-122"/>
+                <a:cs typeface="Calibri" pitchFamily="34" charset="-120"/>
+              </a:rPr>
+              <a:t>0.80 en scénarios froids, 37%–78% en transition, 0 en été</a:t>
+            </a:r>
+            <a:endParaRPr lang="en-US" sz="1200" dirty="0"/>
+          </a:p>
+        </p:txBody>
+      </p:sp>
+      <p:sp>
+        <p:nvSpPr>
+          <p:cNvPr id="25" name="Text 23"/>
+          <p:cNvSpPr/>
+          <p:nvPr/>
+        </p:nvSpPr>
+        <p:spPr>
+          <a:xfrm>
+            <a:off x="548640" y="6172200"/>
+            <a:ext cx="11109960" cy="457200"/>
+          </a:xfrm>
+          <a:prstGeom prst="rect">
+            <a:avLst/>
+          </a:prstGeom>
+          <a:noFill/>
+          <a:ln/>
+        </p:spPr>
+        <p:txBody>
+          <a:bodyPr wrap="square" rtlCol="0" anchor="ctr"/>
+          <a:lstStyle/>
+          <a:p>
+            <a:pPr marL="0" indent="0" algn="ctr">
+              <a:buNone/>
+            </a:pPr>
+            <a:r>
+              <a:rPr lang="en-US" sz="1200" i="1" dirty="0">
+                <a:solidFill>
+                  <a:srgbClr val="6B7280"/>
+                </a:solidFill>
+                <a:latin typeface="Calibri" pitchFamily="34" charset="0"/>
+                <a:ea typeface="Calibri" pitchFamily="34" charset="-122"/>
+                <a:cs typeface="Calibri" pitchFamily="34" charset="-120"/>
+              </a:rPr>
+              <a:t>Performance globale mesurée par le Score H2V — un score bas indique une meilleure performance environnementale.</a:t>
+            </a:r>
+            <a:endParaRPr lang="en-US" sz="1200" dirty="0"/>
           </a:p>
         </p:txBody>
       </p:sp>
@@ -21222,867 +21363,6 @@
 
 <file path=ppt/slides/slide30.xml><?xml version="1.0" encoding="utf-8"?>
 <p:sld xmlns:a="http://schemas.openxmlformats.org/drawingml/2006/main" xmlns:r="http://schemas.openxmlformats.org/officeDocument/2006/relationships" xmlns:p="http://schemas.openxmlformats.org/presentationml/2006/main">
-  <p:cSld name="Slide 30">
-    <p:bg>
-      <p:bgPr>
-        <a:solidFill>
-          <a:srgbClr val="FFFFFF"/>
-        </a:solidFill>
-        <a:effectLst/>
-      </p:bgPr>
-    </p:bg>
-    <p:spTree>
-      <p:nvGrpSpPr>
-        <p:cNvPr id="1" name=""/>
-        <p:cNvGrpSpPr/>
-        <p:nvPr/>
-      </p:nvGrpSpPr>
-      <p:grpSpPr>
-        <a:xfrm>
-          <a:off x="0" y="0"/>
-          <a:ext cx="0" cy="0"/>
-          <a:chOff x="0" y="0"/>
-          <a:chExt cx="0" cy="0"/>
-        </a:xfrm>
-      </p:grpSpPr>
-      <p:sp>
-        <p:nvSpPr>
-          <p:cNvPr id="2" name="Text 0"/>
-          <p:cNvSpPr/>
-          <p:nvPr/>
-        </p:nvSpPr>
-        <p:spPr>
-          <a:xfrm>
-            <a:off x="548640" y="384048"/>
-            <a:ext cx="7315200" cy="320040"/>
-          </a:xfrm>
-          <a:prstGeom prst="rect">
-            <a:avLst/>
-          </a:prstGeom>
-          <a:noFill/>
-          <a:ln/>
-        </p:spPr>
-        <p:txBody>
-          <a:bodyPr wrap="square" rtlCol="0" anchor="ctr"/>
-          <a:lstStyle/>
-          <a:p>
-            <a:pPr marL="0" indent="0">
-              <a:buNone/>
-            </a:pPr>
-            <a:r>
-              <a:rPr lang="en-US" sz="1200" b="1" kern="0" spc="200" dirty="0">
-                <a:solidFill>
-                  <a:srgbClr val="E67E22"/>
-                </a:solidFill>
-                <a:latin typeface="Calibri" pitchFamily="34" charset="0"/>
-                <a:ea typeface="Calibri" pitchFamily="34" charset="-122"/>
-                <a:cs typeface="Calibri" pitchFamily="34" charset="-120"/>
-              </a:rPr>
-              <a:t>PARTIE 2 · CHAPITRE 3 — ÉVALUATION</a:t>
-            </a:r>
-            <a:endParaRPr lang="en-US" sz="1200" dirty="0"/>
-          </a:p>
-        </p:txBody>
-      </p:sp>
-      <p:sp>
-        <p:nvSpPr>
-          <p:cNvPr id="3" name="Text 1"/>
-          <p:cNvSpPr/>
-          <p:nvPr/>
-        </p:nvSpPr>
-        <p:spPr>
-          <a:xfrm>
-            <a:off x="548640" y="658368"/>
-            <a:ext cx="11064240" cy="822960"/>
-          </a:xfrm>
-          <a:prstGeom prst="rect">
-            <a:avLst/>
-          </a:prstGeom>
-          <a:noFill/>
-          <a:ln/>
-        </p:spPr>
-        <p:txBody>
-          <a:bodyPr wrap="square" rtlCol="0" anchor="ctr"/>
-          <a:lstStyle/>
-          <a:p>
-            <a:pPr marL="0" indent="0" algn="l">
-              <a:buNone/>
-            </a:pPr>
-            <a:r>
-              <a:rPr lang="en-US" sz="3000" b="1" dirty="0">
-                <a:solidFill>
-                  <a:srgbClr val="0B3D56"/>
-                </a:solidFill>
-                <a:latin typeface="Cambria" pitchFamily="34" charset="0"/>
-                <a:ea typeface="Cambria" pitchFamily="34" charset="-122"/>
-                <a:cs typeface="Cambria" pitchFamily="34" charset="-120"/>
-              </a:rPr>
-              <a:t>Métriques et synthèse des résultats par indicateur</a:t>
-            </a:r>
-            <a:endParaRPr lang="en-US" sz="3000" dirty="0"/>
-          </a:p>
-        </p:txBody>
-      </p:sp>
-      <p:sp>
-        <p:nvSpPr>
-          <p:cNvPr id="4" name="Text 2"/>
-          <p:cNvSpPr/>
-          <p:nvPr/>
-        </p:nvSpPr>
-        <p:spPr>
-          <a:xfrm>
-            <a:off x="11503152" y="6473952"/>
-            <a:ext cx="457200" cy="274320"/>
-          </a:xfrm>
-          <a:prstGeom prst="rect">
-            <a:avLst/>
-          </a:prstGeom>
-          <a:noFill/>
-          <a:ln/>
-        </p:spPr>
-        <p:txBody>
-          <a:bodyPr wrap="square" rtlCol="0" anchor="ctr"/>
-          <a:lstStyle/>
-          <a:p>
-            <a:pPr marL="0" indent="0" algn="r">
-              <a:buNone/>
-            </a:pPr>
-            <a:r>
-              <a:rPr lang="en-US" sz="1000" dirty="0">
-                <a:solidFill>
-                  <a:srgbClr val="6B7280"/>
-                </a:solidFill>
-                <a:latin typeface="Calibri" pitchFamily="34" charset="0"/>
-                <a:ea typeface="Calibri" pitchFamily="34" charset="-122"/>
-                <a:cs typeface="Calibri" pitchFamily="34" charset="-120"/>
-              </a:rPr>
-              <a:t>30</a:t>
-            </a:r>
-            <a:endParaRPr lang="en-US" sz="1000" dirty="0"/>
-          </a:p>
-        </p:txBody>
-      </p:sp>
-      <p:sp>
-        <p:nvSpPr>
-          <p:cNvPr id="5" name="Shape 3"/>
-          <p:cNvSpPr/>
-          <p:nvPr/>
-        </p:nvSpPr>
-        <p:spPr>
-          <a:xfrm>
-            <a:off x="548640" y="1737360"/>
-            <a:ext cx="11109960" cy="960120"/>
-          </a:xfrm>
-          <a:prstGeom prst="roundRect">
-            <a:avLst>
-              <a:gd name="adj" fmla="val 7619"/>
-            </a:avLst>
-          </a:prstGeom>
-          <a:solidFill>
-            <a:srgbClr val="F4F7F8"/>
-          </a:solidFill>
-          <a:ln/>
-          <a:effectLst>
-            <a:outerShdw blurRad="76200" dist="25400" dir="5400000" algn="bl" rotWithShape="0">
-              <a:srgbClr val="1A1A1A">
-                <a:alpha val="18000"/>
-              </a:srgbClr>
-            </a:outerShdw>
-          </a:effectLst>
-        </p:spPr>
-      </p:sp>
-      <p:sp>
-        <p:nvSpPr>
-          <p:cNvPr id="6" name="Shape 4"/>
-          <p:cNvSpPr/>
-          <p:nvPr/>
-        </p:nvSpPr>
-        <p:spPr>
-          <a:xfrm>
-            <a:off x="777240" y="1938528"/>
-            <a:ext cx="960120" cy="548640"/>
-          </a:xfrm>
-          <a:prstGeom prst="roundRect">
-            <a:avLst>
-              <a:gd name="adj" fmla="val 10000"/>
-            </a:avLst>
-          </a:prstGeom>
-          <a:solidFill>
-            <a:srgbClr val="1B7A8C"/>
-          </a:solidFill>
-          <a:ln/>
-        </p:spPr>
-      </p:sp>
-      <p:sp>
-        <p:nvSpPr>
-          <p:cNvPr id="7" name="Text 5"/>
-          <p:cNvSpPr/>
-          <p:nvPr/>
-        </p:nvSpPr>
-        <p:spPr>
-          <a:xfrm>
-            <a:off x="777240" y="1938528"/>
-            <a:ext cx="960120" cy="548640"/>
-          </a:xfrm>
-          <a:prstGeom prst="rect">
-            <a:avLst/>
-          </a:prstGeom>
-          <a:noFill/>
-          <a:ln/>
-        </p:spPr>
-        <p:txBody>
-          <a:bodyPr wrap="square" rtlCol="0" anchor="ctr"/>
-          <a:lstStyle/>
-          <a:p>
-            <a:pPr marL="0" indent="0" algn="ctr">
-              <a:buNone/>
-            </a:pPr>
-            <a:r>
-              <a:rPr lang="en-US" sz="1500" b="1" dirty="0">
-                <a:solidFill>
-                  <a:srgbClr val="FFFFFF"/>
-                </a:solidFill>
-                <a:latin typeface="Calibri" pitchFamily="34" charset="0"/>
-                <a:ea typeface="Calibri" pitchFamily="34" charset="-122"/>
-                <a:cs typeface="Calibri" pitchFamily="34" charset="-120"/>
-              </a:rPr>
-              <a:t>PUE</a:t>
-            </a:r>
-            <a:endParaRPr lang="en-US" sz="1500" dirty="0"/>
-          </a:p>
-        </p:txBody>
-      </p:sp>
-      <p:sp>
-        <p:nvSpPr>
-          <p:cNvPr id="8" name="Text 6"/>
-          <p:cNvSpPr/>
-          <p:nvPr/>
-        </p:nvSpPr>
-        <p:spPr>
-          <a:xfrm>
-            <a:off x="1965960" y="1847088"/>
-            <a:ext cx="3749040" cy="731520"/>
-          </a:xfrm>
-          <a:prstGeom prst="rect">
-            <a:avLst/>
-          </a:prstGeom>
-          <a:noFill/>
-          <a:ln/>
-        </p:spPr>
-        <p:txBody>
-          <a:bodyPr wrap="square" rtlCol="0" anchor="ctr"/>
-          <a:lstStyle/>
-          <a:p>
-            <a:pPr marL="0" indent="0">
-              <a:buNone/>
-            </a:pPr>
-            <a:r>
-              <a:rPr lang="en-US" sz="1150" i="1" dirty="0">
-                <a:solidFill>
-                  <a:srgbClr val="6B7280"/>
-                </a:solidFill>
-                <a:latin typeface="Calibri" pitchFamily="34" charset="0"/>
-                <a:ea typeface="Calibri" pitchFamily="34" charset="-122"/>
-                <a:cs typeface="Calibri" pitchFamily="34" charset="-120"/>
-              </a:rPr>
-              <a:t>Réf. : 1.30 (refroidissement classique 30%)</a:t>
-            </a:r>
-            <a:endParaRPr lang="en-US" sz="1150" dirty="0"/>
-          </a:p>
-        </p:txBody>
-      </p:sp>
-      <p:sp>
-        <p:nvSpPr>
-          <p:cNvPr id="9" name="Text 7"/>
-          <p:cNvSpPr/>
-          <p:nvPr/>
-        </p:nvSpPr>
-        <p:spPr>
-          <a:xfrm>
-            <a:off x="5852160" y="1847088"/>
-            <a:ext cx="5623560" cy="731520"/>
-          </a:xfrm>
-          <a:prstGeom prst="rect">
-            <a:avLst/>
-          </a:prstGeom>
-          <a:noFill/>
-          <a:ln/>
-        </p:spPr>
-        <p:txBody>
-          <a:bodyPr wrap="square" rtlCol="0" anchor="ctr"/>
-          <a:lstStyle/>
-          <a:p>
-            <a:pPr marL="0" indent="0">
-              <a:buNone/>
-            </a:pPr>
-            <a:r>
-              <a:rPr lang="en-US" sz="1200" dirty="0">
-                <a:solidFill>
-                  <a:srgbClr val="1E2530"/>
-                </a:solidFill>
-                <a:latin typeface="Calibri" pitchFamily="34" charset="0"/>
-                <a:ea typeface="Calibri" pitchFamily="34" charset="-122"/>
-                <a:cs typeface="Calibri" pitchFamily="34" charset="-120"/>
-              </a:rPr>
-              <a:t>Réduction systématique à 1.05 (-19%) dès que la réutilisation est possible</a:t>
-            </a:r>
-            <a:endParaRPr lang="en-US" sz="1200" dirty="0"/>
-          </a:p>
-        </p:txBody>
-      </p:sp>
-      <p:sp>
-        <p:nvSpPr>
-          <p:cNvPr id="10" name="Shape 8"/>
-          <p:cNvSpPr/>
-          <p:nvPr/>
-        </p:nvSpPr>
-        <p:spPr>
-          <a:xfrm>
-            <a:off x="548640" y="2834640"/>
-            <a:ext cx="11109960" cy="960120"/>
-          </a:xfrm>
-          <a:prstGeom prst="roundRect">
-            <a:avLst>
-              <a:gd name="adj" fmla="val 7619"/>
-            </a:avLst>
-          </a:prstGeom>
-          <a:solidFill>
-            <a:srgbClr val="F4F7F8"/>
-          </a:solidFill>
-          <a:ln/>
-          <a:effectLst>
-            <a:outerShdw blurRad="76200" dist="25400" dir="5400000" algn="bl" rotWithShape="0">
-              <a:srgbClr val="1A1A1A">
-                <a:alpha val="18000"/>
-              </a:srgbClr>
-            </a:outerShdw>
-          </a:effectLst>
-        </p:spPr>
-      </p:sp>
-      <p:sp>
-        <p:nvSpPr>
-          <p:cNvPr id="11" name="Shape 9"/>
-          <p:cNvSpPr/>
-          <p:nvPr/>
-        </p:nvSpPr>
-        <p:spPr>
-          <a:xfrm>
-            <a:off x="777240" y="3035808"/>
-            <a:ext cx="960120" cy="548640"/>
-          </a:xfrm>
-          <a:prstGeom prst="roundRect">
-            <a:avLst>
-              <a:gd name="adj" fmla="val 10000"/>
-            </a:avLst>
-          </a:prstGeom>
-          <a:solidFill>
-            <a:srgbClr val="E67E22"/>
-          </a:solidFill>
-          <a:ln/>
-        </p:spPr>
-      </p:sp>
-      <p:sp>
-        <p:nvSpPr>
-          <p:cNvPr id="12" name="Text 10"/>
-          <p:cNvSpPr/>
-          <p:nvPr/>
-        </p:nvSpPr>
-        <p:spPr>
-          <a:xfrm>
-            <a:off x="777240" y="3035808"/>
-            <a:ext cx="960120" cy="548640"/>
-          </a:xfrm>
-          <a:prstGeom prst="rect">
-            <a:avLst/>
-          </a:prstGeom>
-          <a:noFill/>
-          <a:ln/>
-        </p:spPr>
-        <p:txBody>
-          <a:bodyPr wrap="square" rtlCol="0" anchor="ctr"/>
-          <a:lstStyle/>
-          <a:p>
-            <a:pPr marL="0" indent="0" algn="ctr">
-              <a:buNone/>
-            </a:pPr>
-            <a:r>
-              <a:rPr lang="en-US" sz="1500" b="1" dirty="0">
-                <a:solidFill>
-                  <a:srgbClr val="FFFFFF"/>
-                </a:solidFill>
-                <a:latin typeface="Calibri" pitchFamily="34" charset="0"/>
-                <a:ea typeface="Calibri" pitchFamily="34" charset="-122"/>
-                <a:cs typeface="Calibri" pitchFamily="34" charset="-120"/>
-              </a:rPr>
-              <a:t>CUE</a:t>
-            </a:r>
-            <a:endParaRPr lang="en-US" sz="1500" dirty="0"/>
-          </a:p>
-        </p:txBody>
-      </p:sp>
-      <p:sp>
-        <p:nvSpPr>
-          <p:cNvPr id="13" name="Text 11"/>
-          <p:cNvSpPr/>
-          <p:nvPr/>
-        </p:nvSpPr>
-        <p:spPr>
-          <a:xfrm>
-            <a:off x="1965960" y="2944368"/>
-            <a:ext cx="3749040" cy="731520"/>
-          </a:xfrm>
-          <a:prstGeom prst="rect">
-            <a:avLst/>
-          </a:prstGeom>
-          <a:noFill/>
-          <a:ln/>
-        </p:spPr>
-        <p:txBody>
-          <a:bodyPr wrap="square" rtlCol="0" anchor="ctr"/>
-          <a:lstStyle/>
-          <a:p>
-            <a:pPr marL="0" indent="0">
-              <a:buNone/>
-            </a:pPr>
-            <a:r>
-              <a:rPr lang="en-US" sz="1150" i="1" dirty="0">
-                <a:solidFill>
-                  <a:srgbClr val="6B7280"/>
-                </a:solidFill>
-                <a:latin typeface="Calibri" pitchFamily="34" charset="0"/>
-                <a:ea typeface="Calibri" pitchFamily="34" charset="-122"/>
-                <a:cs typeface="Calibri" pitchFamily="34" charset="-120"/>
-              </a:rPr>
-              <a:t>Réf. : sans déduction d'émissions évitées</a:t>
-            </a:r>
-            <a:endParaRPr lang="en-US" sz="1150" dirty="0"/>
-          </a:p>
-        </p:txBody>
-      </p:sp>
-      <p:sp>
-        <p:nvSpPr>
-          <p:cNvPr id="14" name="Text 12"/>
-          <p:cNvSpPr/>
-          <p:nvPr/>
-        </p:nvSpPr>
-        <p:spPr>
-          <a:xfrm>
-            <a:off x="5852160" y="2944368"/>
-            <a:ext cx="5623560" cy="731520"/>
-          </a:xfrm>
-          <a:prstGeom prst="rect">
-            <a:avLst/>
-          </a:prstGeom>
-          <a:noFill/>
-          <a:ln/>
-        </p:spPr>
-        <p:txBody>
-          <a:bodyPr wrap="square" rtlCol="0" anchor="ctr"/>
-          <a:lstStyle/>
-          <a:p>
-            <a:pPr marL="0" indent="0">
-              <a:buNone/>
-            </a:pPr>
-            <a:r>
-              <a:rPr lang="en-US" sz="1200" dirty="0">
-                <a:solidFill>
-                  <a:srgbClr val="1E2530"/>
-                </a:solidFill>
-                <a:latin typeface="Calibri" pitchFamily="34" charset="0"/>
-                <a:ea typeface="Calibri" pitchFamily="34" charset="-122"/>
-                <a:cs typeface="Calibri" pitchFamily="34" charset="-120"/>
-              </a:rPr>
-              <a:t>Tend vers 0 en hiver (réseau propre) ; reste positif mais réduit en été / réseau carboné</a:t>
-            </a:r>
-            <a:endParaRPr lang="en-US" sz="1200" dirty="0"/>
-          </a:p>
-        </p:txBody>
-      </p:sp>
-      <p:sp>
-        <p:nvSpPr>
-          <p:cNvPr id="15" name="Shape 13"/>
-          <p:cNvSpPr/>
-          <p:nvPr/>
-        </p:nvSpPr>
-        <p:spPr>
-          <a:xfrm>
-            <a:off x="548640" y="3931920"/>
-            <a:ext cx="11109960" cy="960120"/>
-          </a:xfrm>
-          <a:prstGeom prst="roundRect">
-            <a:avLst>
-              <a:gd name="adj" fmla="val 7619"/>
-            </a:avLst>
-          </a:prstGeom>
-          <a:solidFill>
-            <a:srgbClr val="F4F7F8"/>
-          </a:solidFill>
-          <a:ln/>
-          <a:effectLst>
-            <a:outerShdw blurRad="76200" dist="25400" dir="5400000" algn="bl" rotWithShape="0">
-              <a:srgbClr val="1A1A1A">
-                <a:alpha val="18000"/>
-              </a:srgbClr>
-            </a:outerShdw>
-          </a:effectLst>
-        </p:spPr>
-      </p:sp>
-      <p:sp>
-        <p:nvSpPr>
-          <p:cNvPr id="16" name="Shape 14"/>
-          <p:cNvSpPr/>
-          <p:nvPr/>
-        </p:nvSpPr>
-        <p:spPr>
-          <a:xfrm>
-            <a:off x="777240" y="4133088"/>
-            <a:ext cx="960120" cy="548640"/>
-          </a:xfrm>
-          <a:prstGeom prst="roundRect">
-            <a:avLst>
-              <a:gd name="adj" fmla="val 10000"/>
-            </a:avLst>
-          </a:prstGeom>
-          <a:solidFill>
-            <a:srgbClr val="2E8B57"/>
-          </a:solidFill>
-          <a:ln/>
-        </p:spPr>
-      </p:sp>
-      <p:sp>
-        <p:nvSpPr>
-          <p:cNvPr id="17" name="Text 15"/>
-          <p:cNvSpPr/>
-          <p:nvPr/>
-        </p:nvSpPr>
-        <p:spPr>
-          <a:xfrm>
-            <a:off x="777240" y="4133088"/>
-            <a:ext cx="960120" cy="548640"/>
-          </a:xfrm>
-          <a:prstGeom prst="rect">
-            <a:avLst/>
-          </a:prstGeom>
-          <a:noFill/>
-          <a:ln/>
-        </p:spPr>
-        <p:txBody>
-          <a:bodyPr wrap="square" rtlCol="0" anchor="ctr"/>
-          <a:lstStyle/>
-          <a:p>
-            <a:pPr marL="0" indent="0" algn="ctr">
-              <a:buNone/>
-            </a:pPr>
-            <a:r>
-              <a:rPr lang="en-US" sz="1500" b="1" dirty="0">
-                <a:solidFill>
-                  <a:srgbClr val="FFFFFF"/>
-                </a:solidFill>
-                <a:latin typeface="Calibri" pitchFamily="34" charset="0"/>
-                <a:ea typeface="Calibri" pitchFamily="34" charset="-122"/>
-                <a:cs typeface="Calibri" pitchFamily="34" charset="-120"/>
-              </a:rPr>
-              <a:t>WUE</a:t>
-            </a:r>
-            <a:endParaRPr lang="en-US" sz="1500" dirty="0"/>
-          </a:p>
-        </p:txBody>
-      </p:sp>
-      <p:sp>
-        <p:nvSpPr>
-          <p:cNvPr id="18" name="Text 16"/>
-          <p:cNvSpPr/>
-          <p:nvPr/>
-        </p:nvSpPr>
-        <p:spPr>
-          <a:xfrm>
-            <a:off x="1965960" y="4041648"/>
-            <a:ext cx="3749040" cy="731520"/>
-          </a:xfrm>
-          <a:prstGeom prst="rect">
-            <a:avLst/>
-          </a:prstGeom>
-          <a:noFill/>
-          <a:ln/>
-        </p:spPr>
-        <p:txBody>
-          <a:bodyPr wrap="square" rtlCol="0" anchor="ctr"/>
-          <a:lstStyle/>
-          <a:p>
-            <a:pPr marL="0" indent="0">
-              <a:buNone/>
-            </a:pPr>
-            <a:r>
-              <a:rPr lang="en-US" sz="1150" i="1" dirty="0">
-                <a:solidFill>
-                  <a:srgbClr val="6B7280"/>
-                </a:solidFill>
-                <a:latin typeface="Calibri" pitchFamily="34" charset="0"/>
-                <a:ea typeface="Calibri" pitchFamily="34" charset="-122"/>
-                <a:cs typeface="Calibri" pitchFamily="34" charset="-120"/>
-              </a:rPr>
-              <a:t>Réf. : 1.8 L/kWh (climatisation par évaporation)</a:t>
-            </a:r>
-            <a:endParaRPr lang="en-US" sz="1150" dirty="0"/>
-          </a:p>
-        </p:txBody>
-      </p:sp>
-      <p:sp>
-        <p:nvSpPr>
-          <p:cNvPr id="19" name="Text 17"/>
-          <p:cNvSpPr/>
-          <p:nvPr/>
-        </p:nvSpPr>
-        <p:spPr>
-          <a:xfrm>
-            <a:off x="5852160" y="4041648"/>
-            <a:ext cx="5623560" cy="731520"/>
-          </a:xfrm>
-          <a:prstGeom prst="rect">
-            <a:avLst/>
-          </a:prstGeom>
-          <a:noFill/>
-          <a:ln/>
-        </p:spPr>
-        <p:txBody>
-          <a:bodyPr wrap="square" rtlCol="0" anchor="ctr"/>
-          <a:lstStyle/>
-          <a:p>
-            <a:pPr marL="0" indent="0">
-              <a:buNone/>
-            </a:pPr>
-            <a:r>
-              <a:rPr lang="en-US" sz="1200" dirty="0">
-                <a:solidFill>
-                  <a:srgbClr val="1E2530"/>
-                </a:solidFill>
-                <a:latin typeface="Calibri" pitchFamily="34" charset="0"/>
-                <a:ea typeface="Calibri" pitchFamily="34" charset="-122"/>
-                <a:cs typeface="Calibri" pitchFamily="34" charset="-120"/>
-              </a:rPr>
-              <a:t>Réduction significative selon le mode de refroidissement retenu</a:t>
-            </a:r>
-            <a:endParaRPr lang="en-US" sz="1200" dirty="0"/>
-          </a:p>
-        </p:txBody>
-      </p:sp>
-      <p:sp>
-        <p:nvSpPr>
-          <p:cNvPr id="20" name="Shape 18"/>
-          <p:cNvSpPr/>
-          <p:nvPr/>
-        </p:nvSpPr>
-        <p:spPr>
-          <a:xfrm>
-            <a:off x="548640" y="5029200"/>
-            <a:ext cx="11109960" cy="960120"/>
-          </a:xfrm>
-          <a:prstGeom prst="roundRect">
-            <a:avLst>
-              <a:gd name="adj" fmla="val 7619"/>
-            </a:avLst>
-          </a:prstGeom>
-          <a:solidFill>
-            <a:srgbClr val="F4F7F8"/>
-          </a:solidFill>
-          <a:ln/>
-          <a:effectLst>
-            <a:outerShdw blurRad="76200" dist="25400" dir="5400000" algn="bl" rotWithShape="0">
-              <a:srgbClr val="1A1A1A">
-                <a:alpha val="18000"/>
-              </a:srgbClr>
-            </a:outerShdw>
-          </a:effectLst>
-        </p:spPr>
-      </p:sp>
-      <p:sp>
-        <p:nvSpPr>
-          <p:cNvPr id="21" name="Shape 19"/>
-          <p:cNvSpPr/>
-          <p:nvPr/>
-        </p:nvSpPr>
-        <p:spPr>
-          <a:xfrm>
-            <a:off x="777240" y="5230368"/>
-            <a:ext cx="960120" cy="548640"/>
-          </a:xfrm>
-          <a:prstGeom prst="roundRect">
-            <a:avLst>
-              <a:gd name="adj" fmla="val 10000"/>
-            </a:avLst>
-          </a:prstGeom>
-          <a:solidFill>
-            <a:srgbClr val="0B3D56"/>
-          </a:solidFill>
-          <a:ln/>
-        </p:spPr>
-      </p:sp>
-      <p:sp>
-        <p:nvSpPr>
-          <p:cNvPr id="22" name="Text 20"/>
-          <p:cNvSpPr/>
-          <p:nvPr/>
-        </p:nvSpPr>
-        <p:spPr>
-          <a:xfrm>
-            <a:off x="777240" y="5230368"/>
-            <a:ext cx="960120" cy="548640"/>
-          </a:xfrm>
-          <a:prstGeom prst="rect">
-            <a:avLst/>
-          </a:prstGeom>
-          <a:noFill/>
-          <a:ln/>
-        </p:spPr>
-        <p:txBody>
-          <a:bodyPr wrap="square" rtlCol="0" anchor="ctr"/>
-          <a:lstStyle/>
-          <a:p>
-            <a:pPr marL="0" indent="0" algn="ctr">
-              <a:buNone/>
-            </a:pPr>
-            <a:r>
-              <a:rPr lang="en-US" sz="1500" b="1" dirty="0">
-                <a:solidFill>
-                  <a:srgbClr val="FFFFFF"/>
-                </a:solidFill>
-                <a:latin typeface="Calibri" pitchFamily="34" charset="0"/>
-                <a:ea typeface="Calibri" pitchFamily="34" charset="-122"/>
-                <a:cs typeface="Calibri" pitchFamily="34" charset="-120"/>
-              </a:rPr>
-              <a:t>HRR</a:t>
-            </a:r>
-            <a:endParaRPr lang="en-US" sz="1500" dirty="0"/>
-          </a:p>
-        </p:txBody>
-      </p:sp>
-      <p:sp>
-        <p:nvSpPr>
-          <p:cNvPr id="23" name="Text 21"/>
-          <p:cNvSpPr/>
-          <p:nvPr/>
-        </p:nvSpPr>
-        <p:spPr>
-          <a:xfrm>
-            <a:off x="1965960" y="5138928"/>
-            <a:ext cx="3749040" cy="731520"/>
-          </a:xfrm>
-          <a:prstGeom prst="rect">
-            <a:avLst/>
-          </a:prstGeom>
-          <a:noFill/>
-          <a:ln/>
-        </p:spPr>
-        <p:txBody>
-          <a:bodyPr wrap="square" rtlCol="0" anchor="ctr"/>
-          <a:lstStyle/>
-          <a:p>
-            <a:pPr marL="0" indent="0">
-              <a:buNone/>
-            </a:pPr>
-            <a:r>
-              <a:rPr lang="en-US" sz="1150" i="1" dirty="0">
-                <a:solidFill>
-                  <a:srgbClr val="6B7280"/>
-                </a:solidFill>
-                <a:latin typeface="Calibri" pitchFamily="34" charset="0"/>
-                <a:ea typeface="Calibri" pitchFamily="34" charset="-122"/>
-                <a:cs typeface="Calibri" pitchFamily="34" charset="-120"/>
-              </a:rPr>
-              <a:t>Réf. : 0 (aucune valorisation)</a:t>
-            </a:r>
-            <a:endParaRPr lang="en-US" sz="1150" dirty="0"/>
-          </a:p>
-        </p:txBody>
-      </p:sp>
-      <p:sp>
-        <p:nvSpPr>
-          <p:cNvPr id="24" name="Text 22"/>
-          <p:cNvSpPr/>
-          <p:nvPr/>
-        </p:nvSpPr>
-        <p:spPr>
-          <a:xfrm>
-            <a:off x="5852160" y="5138928"/>
-            <a:ext cx="5623560" cy="731520"/>
-          </a:xfrm>
-          <a:prstGeom prst="rect">
-            <a:avLst/>
-          </a:prstGeom>
-          <a:noFill/>
-          <a:ln/>
-        </p:spPr>
-        <p:txBody>
-          <a:bodyPr wrap="square" rtlCol="0" anchor="ctr"/>
-          <a:lstStyle/>
-          <a:p>
-            <a:pPr marL="0" indent="0">
-              <a:buNone/>
-            </a:pPr>
-            <a:r>
-              <a:rPr lang="en-US" sz="1200" dirty="0">
-                <a:solidFill>
-                  <a:srgbClr val="1E2530"/>
-                </a:solidFill>
-                <a:latin typeface="Calibri" pitchFamily="34" charset="0"/>
-                <a:ea typeface="Calibri" pitchFamily="34" charset="-122"/>
-                <a:cs typeface="Calibri" pitchFamily="34" charset="-120"/>
-              </a:rPr>
-              <a:t>0.80 en scénarios froids, 37%–78% en transition, 0 en été</a:t>
-            </a:r>
-            <a:endParaRPr lang="en-US" sz="1200" dirty="0"/>
-          </a:p>
-        </p:txBody>
-      </p:sp>
-      <p:sp>
-        <p:nvSpPr>
-          <p:cNvPr id="25" name="Text 23"/>
-          <p:cNvSpPr/>
-          <p:nvPr/>
-        </p:nvSpPr>
-        <p:spPr>
-          <a:xfrm>
-            <a:off x="548640" y="6172200"/>
-            <a:ext cx="11109960" cy="457200"/>
-          </a:xfrm>
-          <a:prstGeom prst="rect">
-            <a:avLst/>
-          </a:prstGeom>
-          <a:noFill/>
-          <a:ln/>
-        </p:spPr>
-        <p:txBody>
-          <a:bodyPr wrap="square" rtlCol="0" anchor="ctr"/>
-          <a:lstStyle/>
-          <a:p>
-            <a:pPr marL="0" indent="0" algn="ctr">
-              <a:buNone/>
-            </a:pPr>
-            <a:r>
-              <a:rPr lang="en-US" sz="1200" i="1" dirty="0">
-                <a:solidFill>
-                  <a:srgbClr val="6B7280"/>
-                </a:solidFill>
-                <a:latin typeface="Calibri" pitchFamily="34" charset="0"/>
-                <a:ea typeface="Calibri" pitchFamily="34" charset="-122"/>
-                <a:cs typeface="Calibri" pitchFamily="34" charset="-120"/>
-              </a:rPr>
-              <a:t>Performance globale mesurée par le Score H2V — un score bas indique une meilleure performance environnementale.</a:t>
-            </a:r>
-            <a:endParaRPr lang="en-US" sz="1200" dirty="0"/>
-          </a:p>
-        </p:txBody>
-      </p:sp>
-    </p:spTree>
-  </p:cSld>
-  <p:clrMapOvr>
-    <a:masterClrMapping/>
-  </p:clrMapOvr>
-</p:sld>
-</file>
-
-<file path=ppt/slides/slide31.xml><?xml version="1.0" encoding="utf-8"?>
-<p:sld xmlns:a="http://schemas.openxmlformats.org/drawingml/2006/main" xmlns:r="http://schemas.openxmlformats.org/officeDocument/2006/relationships" xmlns:p="http://schemas.openxmlformats.org/presentationml/2006/main">
   <p:cSld name="Slide 31">
     <p:bg>
       <p:bgPr>
@@ -22558,7 +21838,7 @@
 </p:sld>
 </file>
 
-<file path=ppt/slides/slide32.xml><?xml version="1.0" encoding="utf-8"?>
+<file path=ppt/slides/slide31.xml><?xml version="1.0" encoding="utf-8"?>
 <p:sld xmlns:a="http://schemas.openxmlformats.org/drawingml/2006/main" xmlns:r="http://schemas.openxmlformats.org/officeDocument/2006/relationships" xmlns:p="http://schemas.openxmlformats.org/presentationml/2006/main">
   <p:cSld name="Slide 32">
     <p:bg>
@@ -23563,7 +22843,7 @@
 </p:sld>
 </file>
 
-<file path=ppt/slides/slide33.xml><?xml version="1.0" encoding="utf-8"?>
+<file path=ppt/slides/slide32.xml><?xml version="1.0" encoding="utf-8"?>
 <p:sld xmlns:a="http://schemas.openxmlformats.org/drawingml/2006/main" xmlns:r="http://schemas.openxmlformats.org/officeDocument/2006/relationships" xmlns:p="http://schemas.openxmlformats.org/presentationml/2006/main">
   <p:cSld name="Slide 33">
     <p:bg>
@@ -24044,7 +23324,7 @@
 </p:sld>
 </file>
 
-<file path=ppt/slides/slide34.xml><?xml version="1.0" encoding="utf-8"?>
+<file path=ppt/slides/slide33.xml><?xml version="1.0" encoding="utf-8"?>
 <p:sld xmlns:a="http://schemas.openxmlformats.org/drawingml/2006/main" xmlns:r="http://schemas.openxmlformats.org/officeDocument/2006/relationships" xmlns:p="http://schemas.openxmlformats.org/presentationml/2006/main">
   <p:cSld name="Slide 34">
     <p:bg>
@@ -24283,93 +23563,82 @@
             <a:pPr marL="0" indent="0">
               <a:buNone/>
             </a:pPr>
-            <a:r>
-              <a:rPr lang="en-US" sz="1200" b="1" kern="0" spc="200" dirty="0">
-                <a:solidFill>
-                  <a:srgbClr val="E67E22"/>
+            <a:endParaRPr lang="en-US" sz="1200" dirty="0"/>
+          </a:p>
+        </p:txBody>
+      </p:sp>
+      <p:sp>
+        <p:nvSpPr>
+          <p:cNvPr id="3" name="Text 1"/>
+          <p:cNvSpPr/>
+          <p:nvPr/>
+        </p:nvSpPr>
+        <p:spPr>
+          <a:xfrm>
+            <a:off x="548640" y="658368"/>
+            <a:ext cx="11064240" cy="822960"/>
+          </a:xfrm>
+          <a:prstGeom prst="rect">
+            <a:avLst/>
+          </a:prstGeom>
+          <a:noFill/>
+          <a:ln/>
+        </p:spPr>
+        <p:txBody>
+          <a:bodyPr wrap="square" rtlCol="0" anchor="ctr"/>
+          <a:lstStyle/>
+          <a:p>
+            <a:pPr marL="0" indent="0" algn="l">
+              <a:buNone/>
+            </a:pPr>
+            <a:r>
+              <a:rPr lang="en-US" sz="3000" b="1" dirty="0">
+                <a:solidFill>
+                  <a:srgbClr val="0B3D56"/>
+                </a:solidFill>
+                <a:latin typeface="Cambria" pitchFamily="34" charset="0"/>
+                <a:ea typeface="Cambria" pitchFamily="34" charset="-122"/>
+                <a:cs typeface="Cambria" pitchFamily="34" charset="-120"/>
+              </a:rPr>
+              <a:t>L'entreprise ISOAR et ses clients</a:t>
+            </a:r>
+            <a:endParaRPr lang="en-US" sz="3000" dirty="0"/>
+          </a:p>
+        </p:txBody>
+      </p:sp>
+      <p:sp>
+        <p:nvSpPr>
+          <p:cNvPr id="4" name="Text 2"/>
+          <p:cNvSpPr/>
+          <p:nvPr/>
+        </p:nvSpPr>
+        <p:spPr>
+          <a:xfrm>
+            <a:off x="11503152" y="6473952"/>
+            <a:ext cx="457200" cy="274320"/>
+          </a:xfrm>
+          <a:prstGeom prst="rect">
+            <a:avLst/>
+          </a:prstGeom>
+          <a:noFill/>
+          <a:ln/>
+        </p:spPr>
+        <p:txBody>
+          <a:bodyPr wrap="square" rtlCol="0" anchor="ctr"/>
+          <a:lstStyle/>
+          <a:p>
+            <a:pPr marL="0" indent="0" algn="r">
+              <a:buNone/>
+            </a:pPr>
+            <a:r>
+              <a:rPr lang="en-US" sz="1000" dirty="0">
+                <a:solidFill>
+                  <a:srgbClr val="6B7280"/>
                 </a:solidFill>
                 <a:latin typeface="Calibri" pitchFamily="34" charset="0"/>
                 <a:ea typeface="Calibri" pitchFamily="34" charset="-122"/>
                 <a:cs typeface="Calibri" pitchFamily="34" charset="-120"/>
               </a:rPr>
-              <a:t>PARTIE 1 · ENTREPRISE</a:t>
-            </a:r>
-            <a:endParaRPr lang="en-US" sz="1200" dirty="0"/>
-          </a:p>
-        </p:txBody>
-      </p:sp>
-      <p:sp>
-        <p:nvSpPr>
-          <p:cNvPr id="3" name="Text 1"/>
-          <p:cNvSpPr/>
-          <p:nvPr/>
-        </p:nvSpPr>
-        <p:spPr>
-          <a:xfrm>
-            <a:off x="548640" y="658368"/>
-            <a:ext cx="11064240" cy="822960"/>
-          </a:xfrm>
-          <a:prstGeom prst="rect">
-            <a:avLst/>
-          </a:prstGeom>
-          <a:noFill/>
-          <a:ln/>
-        </p:spPr>
-        <p:txBody>
-          <a:bodyPr wrap="square" rtlCol="0" anchor="ctr"/>
-          <a:lstStyle/>
-          <a:p>
-            <a:pPr marL="0" indent="0" algn="l">
-              <a:buNone/>
-            </a:pPr>
-            <a:r>
-              <a:rPr lang="en-US" sz="3000" b="1" dirty="0">
-                <a:solidFill>
-                  <a:srgbClr val="0B3D56"/>
-                </a:solidFill>
-                <a:latin typeface="Cambria" pitchFamily="34" charset="0"/>
-                <a:ea typeface="Cambria" pitchFamily="34" charset="-122"/>
-                <a:cs typeface="Cambria" pitchFamily="34" charset="-120"/>
-              </a:rPr>
-              <a:t>L'entreprise ISOAR et ses clients</a:t>
-            </a:r>
-            <a:endParaRPr lang="en-US" sz="3000" dirty="0"/>
-          </a:p>
-        </p:txBody>
-      </p:sp>
-      <p:sp>
-        <p:nvSpPr>
-          <p:cNvPr id="4" name="Text 2"/>
-          <p:cNvSpPr/>
-          <p:nvPr/>
-        </p:nvSpPr>
-        <p:spPr>
-          <a:xfrm>
-            <a:off x="11503152" y="6473952"/>
-            <a:ext cx="457200" cy="274320"/>
-          </a:xfrm>
-          <a:prstGeom prst="rect">
-            <a:avLst/>
-          </a:prstGeom>
-          <a:noFill/>
-          <a:ln/>
-        </p:spPr>
-        <p:txBody>
-          <a:bodyPr wrap="square" rtlCol="0" anchor="ctr"/>
-          <a:lstStyle/>
-          <a:p>
-            <a:pPr marL="0" indent="0" algn="r">
-              <a:buNone/>
-            </a:pPr>
-            <a:r>
-              <a:rPr lang="en-US" sz="1000" dirty="0">
-                <a:solidFill>
-                  <a:srgbClr val="6B7280"/>
-                </a:solidFill>
-                <a:latin typeface="Calibri" pitchFamily="34" charset="0"/>
-                <a:ea typeface="Calibri" pitchFamily="34" charset="-122"/>
-                <a:cs typeface="Calibri" pitchFamily="34" charset="-120"/>
-              </a:rPr>
               <a:t>4</a:t>
             </a:r>
             <a:endParaRPr lang="en-US" sz="1000" dirty="0"/>
@@ -24384,7 +23653,7 @@
         </p:nvSpPr>
         <p:spPr>
           <a:xfrm>
-            <a:off x="548640" y="1691640"/>
+            <a:off x="431292" y="1783080"/>
             <a:ext cx="5943600" cy="4343400"/>
           </a:xfrm>
           <a:prstGeom prst="roundRect">
@@ -24413,8 +23682,8 @@
         </p:nvSpPr>
         <p:spPr>
           <a:xfrm>
-            <a:off x="914400" y="2061882"/>
-            <a:ext cx="5212080" cy="837304"/>
+            <a:off x="914400" y="2061880"/>
+            <a:ext cx="5212080" cy="3693461"/>
           </a:xfrm>
           <a:prstGeom prst="rect">
             <a:avLst/>
@@ -24452,31 +23721,142 @@
                 <a:ea typeface="Calibri" pitchFamily="34" charset="-122"/>
                 <a:cs typeface="Calibri" pitchFamily="34" charset="-120"/>
               </a:rPr>
-              <a:t> · Rungis (94)
-</a:t>
-            </a:r>
-            <a:r>
-              <a:rPr lang="en-US" sz="1350" b="1" dirty="0">
-                <a:solidFill>
-                  <a:srgbClr val="0B3D56"/>
+              <a:t> · Rungis (94)</a:t>
+            </a:r>
+          </a:p>
+          <a:p>
+            <a:pPr>
+              <a:lnSpc>
+                <a:spcPts val="2000"/>
+              </a:lnSpc>
+            </a:pPr>
+            <a:r>
+              <a:rPr lang="fr-FR" sz="1400" dirty="0"/>
+              <a:t>Spécialisée dans l'édition de logiciels ERP pour l'industrie</a:t>
+            </a:r>
+          </a:p>
+          <a:p>
+            <a:pPr>
+              <a:lnSpc>
+                <a:spcPts val="2000"/>
+              </a:lnSpc>
+            </a:pPr>
+            <a:r>
+              <a:rPr lang="en-US" sz="1350" dirty="0">
+                <a:solidFill>
+                  <a:srgbClr val="1E2530"/>
                 </a:solidFill>
                 <a:latin typeface="Calibri" pitchFamily="34" charset="0"/>
                 <a:ea typeface="Calibri" pitchFamily="34" charset="-122"/>
                 <a:cs typeface="Calibri" pitchFamily="34" charset="-120"/>
               </a:rPr>
-              <a:t>Secteur : </a:t>
-            </a:r>
-            <a:r>
-              <a:rPr lang="en-US" sz="1350" dirty="0">
-                <a:solidFill>
-                  <a:srgbClr val="1E2530"/>
-                </a:solidFill>
-                <a:latin typeface="Calibri" pitchFamily="34" charset="0"/>
-                <a:ea typeface="Calibri" pitchFamily="34" charset="-122"/>
-                <a:cs typeface="Calibri" pitchFamily="34" charset="-120"/>
-              </a:rPr>
-              <a:t>Édition de logiciels ERP, qualité industrielle</a:t>
-            </a:r>
+              <a:t>
+</a:t>
+            </a:r>
+            <a:r>
+              <a:rPr lang="fr-FR" sz="1400" b="1" dirty="0">
+                <a:solidFill>
+                  <a:schemeClr val="accent1">
+                    <a:lumMod val="50000"/>
+                  </a:schemeClr>
+                </a:solidFill>
+              </a:rPr>
+              <a:t>Produit phare : </a:t>
+            </a:r>
+            <a:r>
+              <a:rPr lang="fr-FR" sz="1400" dirty="0"/>
+              <a:t>ERP SQUALP</a:t>
+            </a:r>
+          </a:p>
+          <a:p>
+            <a:pPr>
+              <a:lnSpc>
+                <a:spcPts val="2000"/>
+              </a:lnSpc>
+            </a:pPr>
+            <a:r>
+              <a:rPr lang="fr-FR" sz="1400" dirty="0"/>
+              <a:t>Progiciel de gestion industrielle intégrant la qualité à l'ensemble des processus métiers</a:t>
+            </a:r>
+          </a:p>
+          <a:p>
+            <a:pPr>
+              <a:lnSpc>
+                <a:spcPts val="2000"/>
+              </a:lnSpc>
+            </a:pPr>
+            <a:endParaRPr lang="fr-FR" sz="1400" dirty="0"/>
+          </a:p>
+          <a:p>
+            <a:pPr>
+              <a:lnSpc>
+                <a:spcPts val="2000"/>
+              </a:lnSpc>
+            </a:pPr>
+            <a:r>
+              <a:rPr lang="fr-FR" sz="1400" b="1" dirty="0">
+                <a:solidFill>
+                  <a:schemeClr val="accent1">
+                    <a:lumMod val="50000"/>
+                  </a:schemeClr>
+                </a:solidFill>
+              </a:rPr>
+              <a:t>Mon département : </a:t>
+            </a:r>
+            <a:r>
+              <a:rPr lang="fr-FR" sz="1400" dirty="0"/>
+              <a:t>Pôle développement informatique</a:t>
+            </a:r>
+          </a:p>
+          <a:p>
+            <a:pPr>
+              <a:lnSpc>
+                <a:spcPts val="2000"/>
+              </a:lnSpc>
+            </a:pPr>
+            <a:r>
+              <a:rPr lang="fr-FR" sz="1400" dirty="0"/>
+              <a:t>Développement web/mobile, API REST, évolutions de l'ERP SQUALP</a:t>
+            </a:r>
+          </a:p>
+          <a:p>
+            <a:pPr>
+              <a:lnSpc>
+                <a:spcPts val="2000"/>
+              </a:lnSpc>
+            </a:pPr>
+            <a:endParaRPr lang="fr-FR" sz="1400" dirty="0"/>
+          </a:p>
+          <a:p>
+            <a:pPr>
+              <a:lnSpc>
+                <a:spcPts val="2000"/>
+              </a:lnSpc>
+            </a:pPr>
+            <a:r>
+              <a:rPr lang="fr-FR" sz="1400" b="1" dirty="0">
+                <a:solidFill>
+                  <a:schemeClr val="accent1">
+                    <a:lumMod val="50000"/>
+                  </a:schemeClr>
+                </a:solidFill>
+              </a:rPr>
+              <a:t>Secteurs clients :</a:t>
+            </a:r>
+            <a:br>
+              <a:rPr lang="fr-FR" sz="1400" dirty="0"/>
+            </a:br>
+            <a:r>
+              <a:rPr lang="fr-FR" sz="1400" dirty="0"/>
+              <a:t>Bois · Polymères · Médical · Bâtiment · Biologique</a:t>
+            </a:r>
+          </a:p>
+          <a:p>
+            <a:pPr>
+              <a:lnSpc>
+                <a:spcPts val="2000"/>
+              </a:lnSpc>
+            </a:pPr>
             <a:endParaRPr lang="en-US" sz="1350" dirty="0"/>
           </a:p>
         </p:txBody>
@@ -24489,8 +23869,8 @@
         </p:nvSpPr>
         <p:spPr>
           <a:xfrm>
-            <a:off x="914400" y="2899186"/>
-            <a:ext cx="5212080" cy="1919702"/>
+            <a:off x="914400" y="3940706"/>
+            <a:ext cx="4249271" cy="1957174"/>
           </a:xfrm>
           <a:prstGeom prst="rect">
             <a:avLst/>
@@ -24502,66 +23882,12 @@
           <a:bodyPr wrap="square" rtlCol="0" anchor="t"/>
           <a:lstStyle/>
           <a:p>
-            <a:pPr marL="228600" indent="-228600">
+            <a:pPr>
               <a:spcAft>
                 <a:spcPts val="1200"/>
               </a:spcAft>
               <a:buSzPct val="100000"/>
-              <a:buChar char="▪"/>
-            </a:pPr>
-            <a:r>
-              <a:rPr lang="en-US" sz="1350" dirty="0">
-                <a:solidFill>
-                  <a:srgbClr val="1E2530"/>
-                </a:solidFill>
-                <a:latin typeface="Calibri" pitchFamily="34" charset="0"/>
-                <a:ea typeface="Calibri" pitchFamily="34" charset="-122"/>
-                <a:cs typeface="Calibri" pitchFamily="34" charset="-120"/>
-              </a:rPr>
-              <a:t>Éditeur de l'ERP SQUALP, progiciel de gestion industrielle intégrant la qualité aux processus métiers</a:t>
-            </a:r>
-            <a:endParaRPr lang="en-US" sz="1350" dirty="0"/>
-          </a:p>
-          <a:p>
-            <a:pPr marL="228600" indent="-228600">
-              <a:spcAft>
-                <a:spcPts val="1200"/>
-              </a:spcAft>
-              <a:buSzPct val="100000"/>
-              <a:buChar char="▪"/>
-            </a:pPr>
-            <a:r>
-              <a:rPr lang="en-US" sz="1350" dirty="0">
-                <a:solidFill>
-                  <a:srgbClr val="1E2530"/>
-                </a:solidFill>
-                <a:latin typeface="Calibri" pitchFamily="34" charset="0"/>
-                <a:ea typeface="Calibri" pitchFamily="34" charset="-122"/>
-                <a:cs typeface="Calibri" pitchFamily="34" charset="-120"/>
-              </a:rPr>
-              <a:t>Clients industriels variés : bois, polymères, médical, bâtiment, produits biologiques</a:t>
-            </a:r>
-            <a:endParaRPr lang="en-US" sz="1350" dirty="0"/>
-          </a:p>
-          <a:p>
-            <a:pPr marL="228600" indent="-228600">
-              <a:spcAft>
-                <a:spcPts val="1200"/>
-              </a:spcAft>
-              <a:buSzPct val="100000"/>
-              <a:buChar char="▪"/>
-            </a:pPr>
-            <a:r>
-              <a:rPr lang="en-US" sz="1350" dirty="0">
-                <a:solidFill>
-                  <a:srgbClr val="1E2530"/>
-                </a:solidFill>
-                <a:latin typeface="Calibri" pitchFamily="34" charset="0"/>
-                <a:ea typeface="Calibri" pitchFamily="34" charset="-122"/>
-                <a:cs typeface="Calibri" pitchFamily="34" charset="-120"/>
-              </a:rPr>
-              <a:t>Département d'accueil : pôle développement informatique (ERP, web/mobile, API REST)</a:t>
-            </a:r>
+            </a:pPr>
             <a:endParaRPr lang="en-US" sz="1350" dirty="0"/>
           </a:p>
         </p:txBody>
@@ -24672,8 +23998,8 @@
         </p:blipFill>
         <p:spPr>
           <a:xfrm>
-            <a:off x="7531100" y="2441448"/>
-            <a:ext cx="1259840" cy="566928"/>
+            <a:off x="7531100" y="2441449"/>
+            <a:ext cx="1083982" cy="487792"/>
           </a:xfrm>
           <a:prstGeom prst="rect">
             <a:avLst/>
@@ -24758,7 +24084,7 @@
         <p:spPr>
           <a:xfrm>
             <a:off x="10045700" y="2441448"/>
-            <a:ext cx="1259840" cy="566928"/>
+            <a:ext cx="1231900" cy="554355"/>
           </a:xfrm>
           <a:prstGeom prst="rect">
             <a:avLst/>
@@ -24928,7 +24254,7 @@
         <p:spPr>
           <a:xfrm>
             <a:off x="9906896" y="3661905"/>
-            <a:ext cx="1259840" cy="566928"/>
+            <a:ext cx="1173480" cy="528066"/>
           </a:xfrm>
           <a:prstGeom prst="rect">
             <a:avLst/>
@@ -25013,7 +24339,7 @@
         <p:spPr>
           <a:xfrm>
             <a:off x="7531100" y="4983481"/>
-            <a:ext cx="1259840" cy="560653"/>
+            <a:ext cx="1155700" cy="514309"/>
           </a:xfrm>
           <a:prstGeom prst="rect">
             <a:avLst/>
@@ -25098,7 +24424,7 @@
         <p:spPr>
           <a:xfrm>
             <a:off x="10045700" y="4996392"/>
-            <a:ext cx="1259840" cy="566928"/>
+            <a:ext cx="1151218" cy="518048"/>
           </a:xfrm>
           <a:prstGeom prst="rect">
             <a:avLst/>
@@ -25201,17 +24527,6 @@
             <a:pPr marL="0" indent="0">
               <a:buNone/>
             </a:pPr>
-            <a:r>
-              <a:rPr lang="en-US" sz="1200" b="1" kern="0" spc="200" dirty="0">
-                <a:solidFill>
-                  <a:srgbClr val="E67E22"/>
-                </a:solidFill>
-                <a:latin typeface="Calibri" pitchFamily="34" charset="0"/>
-                <a:ea typeface="Calibri" pitchFamily="34" charset="-122"/>
-                <a:cs typeface="Calibri" pitchFamily="34" charset="-120"/>
-              </a:rPr>
-              <a:t>PARTIE 1 · ENTREPRISE</a:t>
-            </a:r>
             <a:endParaRPr lang="en-US" sz="1200" dirty="0"/>
           </a:p>
         </p:txBody>
@@ -25468,8 +24783,8 @@
         </p:nvSpPr>
         <p:spPr>
           <a:xfrm>
-            <a:off x="914400" y="3246120"/>
-            <a:ext cx="4480560" cy="2743200"/>
+            <a:off x="914400" y="3316940"/>
+            <a:ext cx="4480560" cy="2672379"/>
           </a:xfrm>
           <a:prstGeom prst="rect">
             <a:avLst/>
@@ -25560,20 +24875,10 @@
                 <a:ea typeface="Calibri" pitchFamily="34" charset="-122"/>
                 <a:cs typeface="Calibri" pitchFamily="34" charset="-120"/>
               </a:rPr>
-              <a:t>Support technique et formation des utilisateurs</a:t>
-            </a:r>
-            <a:endParaRPr lang="en-US" sz="1300" dirty="0"/>
-          </a:p>
-          <a:p>
-            <a:pPr marL="228600" indent="-228600">
-              <a:spcAft>
-                <a:spcPts val="1000"/>
-              </a:spcAft>
-              <a:buSzPct val="100000"/>
-              <a:buChar char="▪"/>
-            </a:pPr>
-            <a:r>
-              <a:rPr lang="en-US" sz="1300" dirty="0">
+              <a:t>Support technique et formation des </a:t>
+            </a:r>
+            <a:r>
+              <a:rPr lang="en-US" sz="1300" dirty="0" err="1">
                 <a:solidFill>
                   <a:srgbClr val="1E2530"/>
                 </a:solidFill>
@@ -25581,9 +24886,16 @@
                 <a:ea typeface="Calibri" pitchFamily="34" charset="-122"/>
                 <a:cs typeface="Calibri" pitchFamily="34" charset="-120"/>
               </a:rPr>
-              <a:t>M'a accompagnée avec des missions progressives et responsabilisantes</a:t>
-            </a:r>
-            <a:endParaRPr lang="en-US" sz="1300" dirty="0"/>
+              <a:t>utilisateur</a:t>
+            </a:r>
+            <a:endParaRPr lang="en-US" sz="1300" dirty="0">
+              <a:solidFill>
+                <a:srgbClr val="1E2530"/>
+              </a:solidFill>
+              <a:latin typeface="Calibri" pitchFamily="34" charset="0"/>
+              <a:ea typeface="Calibri" pitchFamily="34" charset="-122"/>
+              <a:cs typeface="Calibri" pitchFamily="34" charset="-120"/>
+            </a:endParaRPr>
           </a:p>
         </p:txBody>
       </p:sp>
@@ -25736,17 +25048,6 @@
             <a:pPr marL="0" indent="0">
               <a:buNone/>
             </a:pPr>
-            <a:r>
-              <a:rPr lang="en-US" sz="1200" b="1" kern="0" spc="200" dirty="0">
-                <a:solidFill>
-                  <a:srgbClr val="E67E22"/>
-                </a:solidFill>
-                <a:latin typeface="Calibri" pitchFamily="34" charset="0"/>
-                <a:ea typeface="Calibri" pitchFamily="34" charset="-122"/>
-                <a:cs typeface="Calibri" pitchFamily="34" charset="-120"/>
-              </a:rPr>
-              <a:t>PARTIE 1 · MISSIONS</a:t>
-            </a:r>
             <a:endParaRPr lang="en-US" sz="1200" dirty="0"/>
           </a:p>
         </p:txBody>
@@ -25784,7 +25085,29 @@
                 <a:ea typeface="Cambria" pitchFamily="34" charset="-122"/>
                 <a:cs typeface="Cambria" pitchFamily="34" charset="-120"/>
               </a:rPr>
-              <a:t>Résumé des travaux proposés par l'entreprise</a:t>
+              <a:t>Les travaux </a:t>
+            </a:r>
+            <a:r>
+              <a:rPr lang="en-US" sz="3000" b="1" dirty="0" err="1">
+                <a:solidFill>
+                  <a:srgbClr val="0B3D56"/>
+                </a:solidFill>
+                <a:latin typeface="Cambria" pitchFamily="34" charset="0"/>
+                <a:ea typeface="Cambria" pitchFamily="34" charset="-122"/>
+                <a:cs typeface="Cambria" pitchFamily="34" charset="-120"/>
+              </a:rPr>
+              <a:t>réalisés</a:t>
+            </a:r>
+            <a:r>
+              <a:rPr lang="en-US" sz="3000" b="1" dirty="0">
+                <a:solidFill>
+                  <a:srgbClr val="0B3D56"/>
+                </a:solidFill>
+                <a:latin typeface="Cambria" pitchFamily="34" charset="0"/>
+                <a:ea typeface="Cambria" pitchFamily="34" charset="-122"/>
+                <a:cs typeface="Cambria" pitchFamily="34" charset="-120"/>
+              </a:rPr>
+              <a:t> chez ISOAR</a:t>
             </a:r>
             <a:endParaRPr lang="en-US" sz="3000" dirty="0"/>
           </a:p>
@@ -25940,21 +25263,23 @@
           <a:bodyPr wrap="square" rtlCol="0" anchor="ctr"/>
           <a:lstStyle/>
           <a:p>
-            <a:pPr marL="0" indent="0">
-              <a:buNone/>
-            </a:pPr>
-            <a:r>
-              <a:rPr lang="en-US" sz="1450" b="1" dirty="0">
-                <a:solidFill>
-                  <a:srgbClr val="0B3D56"/>
-                </a:solidFill>
-                <a:latin typeface="Cambria" pitchFamily="34" charset="0"/>
-                <a:ea typeface="Cambria" pitchFamily="34" charset="-122"/>
-                <a:cs typeface="Cambria" pitchFamily="34" charset="-120"/>
-              </a:rPr>
-              <a:t>Missions demandées</a:t>
-            </a:r>
-            <a:endParaRPr lang="en-US" sz="1450" dirty="0"/>
+            <a:r>
+              <a:rPr lang="fr-FR" sz="1600" b="1" dirty="0">
+                <a:solidFill>
+                  <a:schemeClr val="accent1">
+                    <a:lumMod val="50000"/>
+                  </a:schemeClr>
+                </a:solidFill>
+              </a:rPr>
+              <a:t>SQUALP Web</a:t>
+            </a:r>
+            <a:endParaRPr lang="en-US" sz="1450" b="1" dirty="0">
+              <a:solidFill>
+                <a:schemeClr val="accent1">
+                  <a:lumMod val="50000"/>
+                </a:schemeClr>
+              </a:solidFill>
+            </a:endParaRPr>
           </a:p>
         </p:txBody>
       </p:sp>
@@ -25979,24 +25304,43 @@
           <a:bodyPr wrap="square" rtlCol="0" anchor="t"/>
           <a:lstStyle/>
           <a:p>
-            <a:pPr marL="0" indent="0">
-              <a:lnSpc>
-                <a:spcPts val="1500"/>
-              </a:lnSpc>
-              <a:buNone/>
-            </a:pPr>
-            <a:r>
-              <a:rPr lang="en-US" sz="1150" dirty="0">
-                <a:solidFill>
-                  <a:srgbClr val="1E2530"/>
-                </a:solidFill>
-                <a:latin typeface="Calibri" pitchFamily="34" charset="0"/>
-                <a:ea typeface="Calibri" pitchFamily="34" charset="-122"/>
-                <a:cs typeface="Calibri" pitchFamily="34" charset="-120"/>
-              </a:rPr>
-              <a:t>Développement web (front/back), adaptation de SQUALP vers le web/mobile, conception d'API REST, amélioration des interfaces utilisateurs.</a:t>
-            </a:r>
-            <a:endParaRPr lang="en-US" sz="1150" dirty="0"/>
+            <a:r>
+              <a:rPr lang="fr-FR" sz="1200" dirty="0"/>
+              <a:t>Adaptation de l'ERP vers le web/mobile</a:t>
+            </a:r>
+          </a:p>
+          <a:p>
+            <a:endParaRPr lang="fr-FR" sz="1200" dirty="0"/>
+          </a:p>
+          <a:p>
+            <a:pPr marL="171450" indent="-171450">
+              <a:buFont typeface="Arial" panose="020B0604020202020204" pitchFamily="34" charset="0"/>
+              <a:buChar char="•"/>
+            </a:pPr>
+            <a:r>
+              <a:rPr lang="fr-FR" sz="1200" dirty="0"/>
+              <a:t>Transfert de stocks, inventaires, ordres de services</a:t>
+            </a:r>
+          </a:p>
+          <a:p>
+            <a:pPr marL="171450" indent="-171450">
+              <a:buFont typeface="Arial" panose="020B0604020202020204" pitchFamily="34" charset="0"/>
+              <a:buChar char="•"/>
+            </a:pPr>
+            <a:r>
+              <a:rPr lang="fr-FR" sz="1200" dirty="0"/>
+              <a:t>Interfaces réactives + scanner de codes-barres</a:t>
+            </a:r>
+          </a:p>
+          <a:p>
+            <a:pPr marL="171450" indent="-171450">
+              <a:buFont typeface="Arial" panose="020B0604020202020204" pitchFamily="34" charset="0"/>
+              <a:buChar char="•"/>
+            </a:pPr>
+            <a:r>
+              <a:rPr lang="fr-FR" sz="1200" dirty="0"/>
+              <a:t>Fenêtres modales pour gestion d'articles</a:t>
+            </a:r>
           </a:p>
         </p:txBody>
       </p:sp>
@@ -26028,6 +25372,13 @@
             </a:outerShdw>
           </a:effectLst>
         </p:spPr>
+        <p:txBody>
+          <a:bodyPr/>
+          <a:lstStyle/>
+          <a:p>
+            <a:endParaRPr lang="fr-FR" dirty="0"/>
+          </a:p>
+        </p:txBody>
       </p:sp>
       <p:sp>
         <p:nvSpPr>
@@ -26111,21 +25462,23 @@
           <a:bodyPr wrap="square" rtlCol="0" anchor="ctr"/>
           <a:lstStyle/>
           <a:p>
-            <a:pPr marL="0" indent="0">
-              <a:buNone/>
-            </a:pPr>
-            <a:r>
-              <a:rPr lang="en-US" sz="1450" b="1" dirty="0">
-                <a:solidFill>
-                  <a:srgbClr val="0B3D56"/>
-                </a:solidFill>
-                <a:latin typeface="Cambria" pitchFamily="34" charset="0"/>
-                <a:ea typeface="Cambria" pitchFamily="34" charset="-122"/>
-                <a:cs typeface="Cambria" pitchFamily="34" charset="-120"/>
-              </a:rPr>
-              <a:t>Existant avant mon arrivée</a:t>
-            </a:r>
-            <a:endParaRPr lang="en-US" sz="1450" dirty="0"/>
+            <a:r>
+              <a:rPr lang="fr-FR" sz="1600" b="1" dirty="0">
+                <a:solidFill>
+                  <a:schemeClr val="accent1">
+                    <a:lumMod val="50000"/>
+                  </a:schemeClr>
+                </a:solidFill>
+              </a:rPr>
+              <a:t>Projet IXAO</a:t>
+            </a:r>
+            <a:endParaRPr lang="en-US" sz="1450" b="1" dirty="0">
+              <a:solidFill>
+                <a:schemeClr val="accent1">
+                  <a:lumMod val="50000"/>
+                </a:schemeClr>
+              </a:solidFill>
+            </a:endParaRPr>
           </a:p>
         </p:txBody>
       </p:sp>
@@ -26150,24 +25503,46 @@
           <a:bodyPr wrap="square" rtlCol="0" anchor="t"/>
           <a:lstStyle/>
           <a:p>
-            <a:pPr marL="0" indent="0">
-              <a:lnSpc>
-                <a:spcPts val="1500"/>
-              </a:lnSpc>
-              <a:buNone/>
-            </a:pPr>
-            <a:r>
-              <a:rPr lang="en-US" sz="1150" dirty="0">
-                <a:solidFill>
-                  <a:srgbClr val="1E2530"/>
-                </a:solidFill>
-                <a:latin typeface="Calibri" pitchFamily="34" charset="0"/>
-                <a:ea typeface="Calibri" pitchFamily="34" charset="-122"/>
-                <a:cs typeface="Calibri" pitchFamily="34" charset="-120"/>
-              </a:rPr>
-              <a:t>ERP SQUALP existant en desktop, API REST partielles ou inexistantes, interfaces nécessitant une amélioration ergonomique.</a:t>
-            </a:r>
-            <a:endParaRPr lang="en-US" sz="1150" dirty="0"/>
+            <a:r>
+              <a:rPr lang="fr-FR" sz="1200" dirty="0"/>
+              <a:t>Système de gestion des demandes</a:t>
+            </a:r>
+          </a:p>
+          <a:p>
+            <a:endParaRPr lang="fr-FR" sz="1200" dirty="0"/>
+          </a:p>
+          <a:p>
+            <a:pPr marL="171450" indent="-171450">
+              <a:buFont typeface="Arial" panose="020B0604020202020204" pitchFamily="34" charset="0"/>
+              <a:buChar char="•"/>
+            </a:pPr>
+            <a:r>
+              <a:rPr lang="fr-FR" sz="1200" dirty="0"/>
+              <a:t>Évolutions </a:t>
+            </a:r>
+            <a:r>
+              <a:rPr lang="fr-FR" sz="1200" dirty="0" err="1"/>
+              <a:t>front-end</a:t>
+            </a:r>
+            <a:r>
+              <a:rPr lang="fr-FR" sz="1200" dirty="0"/>
+              <a:t> &amp; </a:t>
+            </a:r>
+            <a:r>
+              <a:rPr lang="fr-FR" sz="1200" dirty="0" err="1"/>
+              <a:t>back-end</a:t>
+            </a:r>
+            <a:endParaRPr lang="fr-FR" sz="1200" dirty="0"/>
+          </a:p>
+          <a:p>
+            <a:pPr marL="171450" indent="-171450">
+              <a:buFont typeface="Arial" panose="020B0604020202020204" pitchFamily="34" charset="0"/>
+              <a:buChar char="•"/>
+            </a:pPr>
+            <a:r>
+              <a:rPr lang="fr-FR" sz="1200" dirty="0"/>
+              <a:t>Nouvelles fonctionnalités &amp; amélioration UX</a:t>
+            </a:r>
           </a:p>
         </p:txBody>
       </p:sp>
@@ -26179,7 +25554,7 @@
         </p:nvSpPr>
         <p:spPr>
           <a:xfrm>
-            <a:off x="548640" y="4050792"/>
+            <a:off x="534745" y="4050792"/>
             <a:ext cx="5440680" cy="2084832"/>
           </a:xfrm>
           <a:prstGeom prst="roundRect">
@@ -26282,21 +25657,23 @@
           <a:bodyPr wrap="square" rtlCol="0" anchor="ctr"/>
           <a:lstStyle/>
           <a:p>
-            <a:pPr marL="0" indent="0">
-              <a:buNone/>
-            </a:pPr>
-            <a:r>
-              <a:rPr lang="en-US" sz="1450" b="1" dirty="0">
-                <a:solidFill>
-                  <a:srgbClr val="0B3D56"/>
-                </a:solidFill>
-                <a:latin typeface="Cambria" pitchFamily="34" charset="0"/>
-                <a:ea typeface="Cambria" pitchFamily="34" charset="-122"/>
-                <a:cs typeface="Cambria" pitchFamily="34" charset="-120"/>
-              </a:rPr>
-              <a:t>Planning prévisionnel</a:t>
-            </a:r>
-            <a:endParaRPr lang="en-US" sz="1450" dirty="0"/>
+            <a:r>
+              <a:rPr lang="fr-FR" sz="1600" b="1" dirty="0">
+                <a:solidFill>
+                  <a:schemeClr val="accent1">
+                    <a:lumMod val="50000"/>
+                  </a:schemeClr>
+                </a:solidFill>
+              </a:rPr>
+              <a:t>API REST — Gascogne Bois</a:t>
+            </a:r>
+            <a:endParaRPr lang="en-US" sz="1450" b="1" dirty="0">
+              <a:solidFill>
+                <a:schemeClr val="accent1">
+                  <a:lumMod val="50000"/>
+                </a:schemeClr>
+              </a:solidFill>
+            </a:endParaRPr>
           </a:p>
         </p:txBody>
       </p:sp>
@@ -26321,24 +25698,33 @@
           <a:bodyPr wrap="square" rtlCol="0" anchor="t"/>
           <a:lstStyle/>
           <a:p>
-            <a:pPr marL="0" indent="0">
-              <a:lnSpc>
-                <a:spcPts val="1500"/>
-              </a:lnSpc>
-              <a:buNone/>
-            </a:pPr>
-            <a:r>
-              <a:rPr lang="en-US" sz="1150" dirty="0">
-                <a:solidFill>
-                  <a:srgbClr val="1E2530"/>
-                </a:solidFill>
-                <a:latin typeface="Calibri" pitchFamily="34" charset="0"/>
-                <a:ea typeface="Calibri" pitchFamily="34" charset="-122"/>
-                <a:cs typeface="Calibri" pitchFamily="34" charset="-120"/>
-              </a:rPr>
-              <a:t>Défini avec souplesse selon les priorités clients, les urgences de production et les phases de tests/validation.</a:t>
-            </a:r>
-            <a:endParaRPr lang="en-US" sz="1150" dirty="0"/>
+            <a:r>
+              <a:rPr lang="fr-FR" sz="1200" dirty="0"/>
+              <a:t>Conception d'APIs en JavaScript &amp; PHP</a:t>
+            </a:r>
+          </a:p>
+          <a:p>
+            <a:endParaRPr lang="fr-FR" sz="1200" dirty="0"/>
+          </a:p>
+          <a:p>
+            <a:pPr marL="171450" indent="-171450">
+              <a:buFont typeface="Arial" panose="020B0604020202020204" pitchFamily="34" charset="0"/>
+              <a:buChar char="•"/>
+            </a:pPr>
+            <a:r>
+              <a:rPr lang="fr-FR" sz="1200" dirty="0"/>
+              <a:t>Module des commandes</a:t>
+            </a:r>
+          </a:p>
+          <a:p>
+            <a:pPr marL="171450" indent="-171450">
+              <a:buFont typeface="Arial" panose="020B0604020202020204" pitchFamily="34" charset="0"/>
+              <a:buChar char="•"/>
+            </a:pPr>
+            <a:r>
+              <a:rPr lang="fr-FR" sz="1200" dirty="0"/>
+              <a:t>Procédures stockées SQL + tests Postman</a:t>
+            </a:r>
           </a:p>
         </p:txBody>
       </p:sp>
@@ -26370,6 +25756,13 @@
             </a:outerShdw>
           </a:effectLst>
         </p:spPr>
+        <p:txBody>
+          <a:bodyPr/>
+          <a:lstStyle/>
+          <a:p>
+            <a:endParaRPr lang="fr-FR" dirty="0"/>
+          </a:p>
+        </p:txBody>
       </p:sp>
       <p:sp>
         <p:nvSpPr>
@@ -26453,21 +25846,43 @@
           <a:bodyPr wrap="square" rtlCol="0" anchor="ctr"/>
           <a:lstStyle/>
           <a:p>
-            <a:pPr marL="0" indent="0">
-              <a:buNone/>
-            </a:pPr>
-            <a:r>
-              <a:rPr lang="en-US" sz="1450" b="1" dirty="0">
-                <a:solidFill>
-                  <a:srgbClr val="0B3D56"/>
-                </a:solidFill>
-                <a:latin typeface="Cambria" pitchFamily="34" charset="0"/>
-                <a:ea typeface="Cambria" pitchFamily="34" charset="-122"/>
-                <a:cs typeface="Cambria" pitchFamily="34" charset="-120"/>
-              </a:rPr>
-              <a:t>Contexte de travail</a:t>
-            </a:r>
-            <a:endParaRPr lang="en-US" sz="1450" dirty="0"/>
+            <a:r>
+              <a:rPr lang="fr-FR" sz="1600" b="1" dirty="0">
+                <a:solidFill>
+                  <a:schemeClr val="accent1">
+                    <a:lumMod val="50000"/>
+                  </a:schemeClr>
+                </a:solidFill>
+              </a:rPr>
+              <a:t>Statistiques Ventes</a:t>
+            </a:r>
+            <a:r>
+              <a:rPr lang="fr-FR" sz="1600" dirty="0">
+                <a:solidFill>
+                  <a:schemeClr val="accent1">
+                    <a:lumMod val="50000"/>
+                  </a:schemeClr>
+                </a:solidFill>
+              </a:rPr>
+              <a:t> </a:t>
+            </a:r>
+            <a:r>
+              <a:rPr lang="fr-FR" sz="1600" i="1" dirty="0">
+                <a:solidFill>
+                  <a:schemeClr val="accent1">
+                    <a:lumMod val="50000"/>
+                  </a:schemeClr>
+                </a:solidFill>
+              </a:rPr>
+              <a:t>(mission actuelle)</a:t>
+            </a:r>
+            <a:endParaRPr lang="en-US" sz="1450" dirty="0">
+              <a:solidFill>
+                <a:schemeClr val="accent1">
+                  <a:lumMod val="50000"/>
+                </a:schemeClr>
+              </a:solidFill>
+            </a:endParaRPr>
           </a:p>
         </p:txBody>
       </p:sp>
@@ -26492,24 +25907,61 @@
           <a:bodyPr wrap="square" rtlCol="0" anchor="t"/>
           <a:lstStyle/>
           <a:p>
-            <a:pPr marL="0" indent="0">
-              <a:lnSpc>
-                <a:spcPts val="1500"/>
-              </a:lnSpc>
-              <a:buNone/>
-            </a:pPr>
-            <a:r>
-              <a:rPr lang="en-US" sz="1150" dirty="0">
-                <a:solidFill>
-                  <a:srgbClr val="1E2530"/>
-                </a:solidFill>
-                <a:latin typeface="Calibri" pitchFamily="34" charset="0"/>
-                <a:ea typeface="Calibri" pitchFamily="34" charset="-122"/>
-                <a:cs typeface="Calibri" pitchFamily="34" charset="-120"/>
-              </a:rPr>
-              <a:t>En collaboration avec l'équipe ISOAR, en autonomie sur certaines tâches, en environnement professionnel réel.</a:t>
-            </a:r>
-            <a:endParaRPr lang="en-US" sz="1150" dirty="0"/>
+            <a:r>
+              <a:rPr lang="fr-FR" sz="1200" dirty="0"/>
+              <a:t>Développement d'un module de visualisation de données</a:t>
+            </a:r>
+          </a:p>
+          <a:p>
+            <a:endParaRPr lang="fr-FR" sz="1200" dirty="0"/>
+          </a:p>
+          <a:p>
+            <a:pPr marL="171450" indent="-171450">
+              <a:buFont typeface="Arial" panose="020B0604020202020204" pitchFamily="34" charset="0"/>
+              <a:buChar char="•"/>
+            </a:pPr>
+            <a:r>
+              <a:rPr lang="fr-FR" sz="1200" dirty="0"/>
+              <a:t>Graphiques interactifs avec </a:t>
+            </a:r>
+            <a:r>
+              <a:rPr lang="fr-FR" sz="1200" b="1" dirty="0"/>
+              <a:t>Chart.js</a:t>
+            </a:r>
+            <a:r>
+              <a:rPr lang="fr-FR" sz="1200" dirty="0"/>
+              <a:t> (barres, camembert, courbes)</a:t>
+            </a:r>
+          </a:p>
+          <a:p>
+            <a:pPr marL="171450" indent="-171450">
+              <a:buFont typeface="Arial" panose="020B0604020202020204" pitchFamily="34" charset="0"/>
+              <a:buChar char="•"/>
+            </a:pPr>
+            <a:r>
+              <a:rPr lang="fr-FR" sz="1200" dirty="0"/>
+              <a:t>Comparaison annuelle CA/Coût/Marge</a:t>
+            </a:r>
+          </a:p>
+          <a:p>
+            <a:pPr marL="171450" indent="-171450">
+              <a:buFont typeface="Arial" panose="020B0604020202020204" pitchFamily="34" charset="0"/>
+              <a:buChar char="•"/>
+            </a:pPr>
+            <a:r>
+              <a:rPr lang="fr-FR" sz="1200" dirty="0"/>
+              <a:t>Export PDF et impression</a:t>
+            </a:r>
+          </a:p>
+          <a:p>
+            <a:pPr marL="171450" indent="-171450">
+              <a:buFont typeface="Arial" panose="020B0604020202020204" pitchFamily="34" charset="0"/>
+              <a:buChar char="•"/>
+            </a:pPr>
+            <a:r>
+              <a:rPr lang="fr-FR" sz="1200" dirty="0"/>
+              <a:t>Données dynamiques via API REST &amp; SQL Server</a:t>
+            </a:r>
           </a:p>
         </p:txBody>
       </p:sp>
@@ -26570,93 +26022,82 @@
             <a:pPr marL="0" indent="0">
               <a:buNone/>
             </a:pPr>
-            <a:r>
-              <a:rPr lang="en-US" sz="1200" b="1" kern="0" spc="200" dirty="0">
-                <a:solidFill>
-                  <a:srgbClr val="E67E22"/>
+            <a:endParaRPr lang="en-US" sz="1200" dirty="0"/>
+          </a:p>
+        </p:txBody>
+      </p:sp>
+      <p:sp>
+        <p:nvSpPr>
+          <p:cNvPr id="3" name="Text 1"/>
+          <p:cNvSpPr/>
+          <p:nvPr/>
+        </p:nvSpPr>
+        <p:spPr>
+          <a:xfrm>
+            <a:off x="548640" y="658368"/>
+            <a:ext cx="11064240" cy="822960"/>
+          </a:xfrm>
+          <a:prstGeom prst="rect">
+            <a:avLst/>
+          </a:prstGeom>
+          <a:noFill/>
+          <a:ln/>
+        </p:spPr>
+        <p:txBody>
+          <a:bodyPr wrap="square" rtlCol="0" anchor="ctr"/>
+          <a:lstStyle/>
+          <a:p>
+            <a:pPr marL="0" indent="0" algn="l">
+              <a:buNone/>
+            </a:pPr>
+            <a:r>
+              <a:rPr lang="en-US" sz="3000" b="1" dirty="0">
+                <a:solidFill>
+                  <a:srgbClr val="0B3D56"/>
+                </a:solidFill>
+                <a:latin typeface="Cambria" pitchFamily="34" charset="0"/>
+                <a:ea typeface="Cambria" pitchFamily="34" charset="-122"/>
+                <a:cs typeface="Cambria" pitchFamily="34" charset="-120"/>
+              </a:rPr>
+              <a:t>Évolution des missions vers la gestion de projet</a:t>
+            </a:r>
+            <a:endParaRPr lang="en-US" sz="3000" dirty="0"/>
+          </a:p>
+        </p:txBody>
+      </p:sp>
+      <p:sp>
+        <p:nvSpPr>
+          <p:cNvPr id="4" name="Text 2"/>
+          <p:cNvSpPr/>
+          <p:nvPr/>
+        </p:nvSpPr>
+        <p:spPr>
+          <a:xfrm>
+            <a:off x="11503152" y="6473952"/>
+            <a:ext cx="457200" cy="274320"/>
+          </a:xfrm>
+          <a:prstGeom prst="rect">
+            <a:avLst/>
+          </a:prstGeom>
+          <a:noFill/>
+          <a:ln/>
+        </p:spPr>
+        <p:txBody>
+          <a:bodyPr wrap="square" rtlCol="0" anchor="ctr"/>
+          <a:lstStyle/>
+          <a:p>
+            <a:pPr marL="0" indent="0" algn="r">
+              <a:buNone/>
+            </a:pPr>
+            <a:r>
+              <a:rPr lang="en-US" sz="1000" dirty="0">
+                <a:solidFill>
+                  <a:srgbClr val="6B7280"/>
                 </a:solidFill>
                 <a:latin typeface="Calibri" pitchFamily="34" charset="0"/>
                 <a:ea typeface="Calibri" pitchFamily="34" charset="-122"/>
                 <a:cs typeface="Calibri" pitchFamily="34" charset="-120"/>
               </a:rPr>
-              <a:t>PARTIE 1 · MISSIONS</a:t>
-            </a:r>
-            <a:endParaRPr lang="en-US" sz="1200" dirty="0"/>
-          </a:p>
-        </p:txBody>
-      </p:sp>
-      <p:sp>
-        <p:nvSpPr>
-          <p:cNvPr id="3" name="Text 1"/>
-          <p:cNvSpPr/>
-          <p:nvPr/>
-        </p:nvSpPr>
-        <p:spPr>
-          <a:xfrm>
-            <a:off x="548640" y="658368"/>
-            <a:ext cx="11064240" cy="822960"/>
-          </a:xfrm>
-          <a:prstGeom prst="rect">
-            <a:avLst/>
-          </a:prstGeom>
-          <a:noFill/>
-          <a:ln/>
-        </p:spPr>
-        <p:txBody>
-          <a:bodyPr wrap="square" rtlCol="0" anchor="ctr"/>
-          <a:lstStyle/>
-          <a:p>
-            <a:pPr marL="0" indent="0" algn="l">
-              <a:buNone/>
-            </a:pPr>
-            <a:r>
-              <a:rPr lang="en-US" sz="3000" b="1" dirty="0">
-                <a:solidFill>
-                  <a:srgbClr val="0B3D56"/>
-                </a:solidFill>
-                <a:latin typeface="Cambria" pitchFamily="34" charset="0"/>
-                <a:ea typeface="Cambria" pitchFamily="34" charset="-122"/>
-                <a:cs typeface="Cambria" pitchFamily="34" charset="-120"/>
-              </a:rPr>
-              <a:t>Évolution des missions vers la gestion de projet</a:t>
-            </a:r>
-            <a:endParaRPr lang="en-US" sz="3000" dirty="0"/>
-          </a:p>
-        </p:txBody>
-      </p:sp>
-      <p:sp>
-        <p:nvSpPr>
-          <p:cNvPr id="4" name="Text 2"/>
-          <p:cNvSpPr/>
-          <p:nvPr/>
-        </p:nvSpPr>
-        <p:spPr>
-          <a:xfrm>
-            <a:off x="11503152" y="6473952"/>
-            <a:ext cx="457200" cy="274320"/>
-          </a:xfrm>
-          <a:prstGeom prst="rect">
-            <a:avLst/>
-          </a:prstGeom>
-          <a:noFill/>
-          <a:ln/>
-        </p:spPr>
-        <p:txBody>
-          <a:bodyPr wrap="square" rtlCol="0" anchor="ctr"/>
-          <a:lstStyle/>
-          <a:p>
-            <a:pPr marL="0" indent="0" algn="r">
-              <a:buNone/>
-            </a:pPr>
-            <a:r>
-              <a:rPr lang="en-US" sz="1000" dirty="0">
-                <a:solidFill>
-                  <a:srgbClr val="6B7280"/>
-                </a:solidFill>
-                <a:latin typeface="Calibri" pitchFamily="34" charset="0"/>
-                <a:ea typeface="Calibri" pitchFamily="34" charset="-122"/>
-                <a:cs typeface="Calibri" pitchFamily="34" charset="-120"/>
-              </a:rPr>
               <a:t>7</a:t>
             </a:r>
             <a:endParaRPr lang="en-US" sz="1000" dirty="0"/>
@@ -26671,8 +26112,8 @@
         </p:nvSpPr>
         <p:spPr>
           <a:xfrm>
-            <a:off x="548640" y="1737360"/>
-            <a:ext cx="5486400" cy="4251960"/>
+            <a:off x="367553" y="1737359"/>
+            <a:ext cx="5027407" cy="4874111"/>
           </a:xfrm>
           <a:prstGeom prst="roundRect">
             <a:avLst>
@@ -26691,6 +26132,13 @@
             </a:outerShdw>
           </a:effectLst>
         </p:spPr>
+        <p:txBody>
+          <a:bodyPr/>
+          <a:lstStyle/>
+          <a:p>
+            <a:endParaRPr lang="fr-FR" dirty="0"/>
+          </a:p>
+        </p:txBody>
       </p:sp>
       <p:sp>
         <p:nvSpPr>
@@ -26700,8 +26148,8 @@
         </p:nvSpPr>
         <p:spPr>
           <a:xfrm>
-            <a:off x="868680" y="1965960"/>
-            <a:ext cx="4846320" cy="365760"/>
+            <a:off x="466165" y="1965960"/>
+            <a:ext cx="4105835" cy="365760"/>
           </a:xfrm>
           <a:prstGeom prst="rect">
             <a:avLst/>
@@ -26725,7 +26173,18 @@
                 <a:ea typeface="Cambria" pitchFamily="34" charset="-122"/>
                 <a:cs typeface="Cambria" pitchFamily="34" charset="-120"/>
               </a:rPr>
-              <a:t>Travaux réalisés en entreprise</a:t>
+              <a:t>Gestion de </a:t>
+            </a:r>
+            <a:r>
+              <a:rPr lang="en-US" sz="1500" b="1" dirty="0" err="1">
+                <a:solidFill>
+                  <a:srgbClr val="0B3D56"/>
+                </a:solidFill>
+                <a:latin typeface="Cambria" pitchFamily="34" charset="0"/>
+                <a:ea typeface="Cambria" pitchFamily="34" charset="-122"/>
+                <a:cs typeface="Cambria" pitchFamily="34" charset="-120"/>
+              </a:rPr>
+              <a:t>projet</a:t>
             </a:r>
             <a:endParaRPr lang="en-US" sz="1500" dirty="0"/>
           </a:p>
@@ -26767,8 +26226,8 @@
         </p:nvSpPr>
         <p:spPr>
           <a:xfrm>
-            <a:off x="868680" y="2331720"/>
-            <a:ext cx="4846320" cy="3520440"/>
+            <a:off x="533400" y="2331719"/>
+            <a:ext cx="4861560" cy="4279751"/>
           </a:xfrm>
           <a:prstGeom prst="rect">
             <a:avLst/>
@@ -26780,62 +26239,256 @@
           <a:bodyPr wrap="square" rtlCol="0" anchor="t"/>
           <a:lstStyle/>
           <a:p>
-            <a:pPr marL="0" indent="0">
+            <a:pPr>
               <a:lnSpc>
                 <a:spcPts val="1700"/>
               </a:lnSpc>
-              <a:buNone/>
-            </a:pPr>
-            <a:r>
-              <a:rPr lang="en-US" sz="1350" b="1" dirty="0">
-                <a:solidFill>
-                  <a:srgbClr val="0B3D56"/>
-                </a:solidFill>
-              </a:rPr>
-              <a:t>SQUALP Web</a:t>
-            </a:r>
-            <a:r>
-              <a:rPr lang="en-US" sz="1250" dirty="0">
-                <a:solidFill>
-                  <a:srgbClr val="1E2530"/>
-                </a:solidFill>
-              </a:rPr>
-              <a:t>  — transfert de stocks, inventaires, classement des stocks, ordres de service ; interfaces réactives, filtres dynamiques, scanner code-barres, fenêtres modales.
-</a:t>
-            </a:r>
-            <a:r>
-              <a:rPr lang="en-US" sz="1350" b="1" dirty="0">
-                <a:solidFill>
-                  <a:srgbClr val="0B3D56"/>
-                </a:solidFill>
-              </a:rPr>
-              <a:t>Projet IXAO</a:t>
-            </a:r>
-            <a:r>
-              <a:rPr lang="en-US" sz="1250" dirty="0">
-                <a:solidFill>
-                  <a:srgbClr val="1E2530"/>
-                </a:solidFill>
-              </a:rPr>
-              <a:t>  — gestion des demandes internes et clients : évolutions front-end, ajustements back-end/BDD, nouvelles fonctionnalités.
-</a:t>
-            </a:r>
-            <a:r>
-              <a:rPr lang="en-US" sz="1350" b="1" dirty="0">
-                <a:solidFill>
-                  <a:srgbClr val="0B3D56"/>
-                </a:solidFill>
-              </a:rPr>
-              <a:t>API REST — client Gascogne Bois</a:t>
-            </a:r>
-            <a:r>
-              <a:rPr lang="en-US" sz="1250" dirty="0">
-                <a:solidFill>
-                  <a:srgbClr val="1E2530"/>
-                </a:solidFill>
-              </a:rPr>
-              <a:t>  — API en JavaScript/PHP sur procédures stockées SQL, tests et validation via Postman.</a:t>
-            </a:r>
+            </a:pPr>
+            <a:r>
+              <a:rPr lang="fr-FR" sz="1400" dirty="0"/>
+              <a:t>Mon rôle a évolué au fil de l'alternance avec une montée en autonomie progressive, m'ouvrant à des responsabilités de gestion de projet aux côtés de mon maître d'apprentissage.</a:t>
+            </a:r>
+          </a:p>
+          <a:p>
+            <a:pPr>
+              <a:lnSpc>
+                <a:spcPts val="1700"/>
+              </a:lnSpc>
+            </a:pPr>
+            <a:endParaRPr lang="fr-FR" sz="1400" dirty="0"/>
+          </a:p>
+          <a:p>
+            <a:r>
+              <a:rPr lang="fr-FR" sz="1400" b="1" dirty="0">
+                <a:solidFill>
+                  <a:schemeClr val="accent1">
+                    <a:lumMod val="50000"/>
+                  </a:schemeClr>
+                </a:solidFill>
+              </a:rPr>
+              <a:t>Ce que ça implique concrètement :</a:t>
+            </a:r>
+            <a:endParaRPr lang="fr-FR" sz="1400" dirty="0"/>
+          </a:p>
+          <a:p>
+            <a:pPr marL="285750" indent="-285750">
+              <a:buFont typeface="Arial" panose="020B0604020202020204" pitchFamily="34" charset="0"/>
+              <a:buChar char="•"/>
+            </a:pPr>
+            <a:r>
+              <a:rPr lang="fr-FR" sz="1400" b="1" dirty="0"/>
+              <a:t>Analyse des besoins fonctionnels</a:t>
+            </a:r>
+            <a:br>
+              <a:rPr lang="fr-FR" sz="1400" dirty="0"/>
+            </a:br>
+            <a:r>
+              <a:rPr lang="fr-FR" sz="1400" dirty="0"/>
+              <a:t>Recueil et compréhension des besoins clients</a:t>
+            </a:r>
+          </a:p>
+          <a:p>
+            <a:endParaRPr lang="fr-FR" sz="1400" dirty="0"/>
+          </a:p>
+          <a:p>
+            <a:pPr marL="285750" indent="-285750">
+              <a:buFont typeface="Arial" panose="020B0604020202020204" pitchFamily="34" charset="0"/>
+              <a:buChar char="•"/>
+            </a:pPr>
+            <a:r>
+              <a:rPr lang="fr-FR" sz="1400" b="1" dirty="0"/>
+              <a:t>Priorisation des tâches</a:t>
+            </a:r>
+            <a:br>
+              <a:rPr lang="fr-FR" sz="1400" dirty="0"/>
+            </a:br>
+            <a:r>
+              <a:rPr lang="fr-FR" sz="1400" dirty="0"/>
+              <a:t>Organisation et planification des développements</a:t>
+            </a:r>
+          </a:p>
+          <a:p>
+            <a:endParaRPr lang="fr-FR" sz="1400" dirty="0"/>
+          </a:p>
+          <a:p>
+            <a:pPr marL="285750" indent="-285750">
+              <a:buFont typeface="Arial" panose="020B0604020202020204" pitchFamily="34" charset="0"/>
+              <a:buChar char="•"/>
+            </a:pPr>
+            <a:r>
+              <a:rPr lang="fr-FR" sz="1400" b="1" dirty="0"/>
+              <a:t>Suivi des projets</a:t>
+            </a:r>
+            <a:br>
+              <a:rPr lang="fr-FR" sz="1400" dirty="0"/>
+            </a:br>
+            <a:r>
+              <a:rPr lang="fr-FR" sz="1400" dirty="0"/>
+              <a:t>Coordination des phases et respect des délais</a:t>
+            </a:r>
+          </a:p>
+          <a:p>
+            <a:endParaRPr lang="fr-FR" sz="1400" dirty="0"/>
+          </a:p>
+          <a:p>
+            <a:pPr marL="285750" indent="-285750">
+              <a:buFont typeface="Arial" panose="020B0604020202020204" pitchFamily="34" charset="0"/>
+              <a:buChar char="•"/>
+            </a:pPr>
+            <a:r>
+              <a:rPr lang="fr-FR" sz="1400" b="1" dirty="0"/>
+              <a:t>Coordination des équipes</a:t>
+            </a:r>
+            <a:br>
+              <a:rPr lang="fr-FR" sz="1400" dirty="0"/>
+            </a:br>
+            <a:r>
+              <a:rPr lang="fr-FR" sz="1400" dirty="0"/>
+              <a:t>Lien entre les différentes phases de développement</a:t>
+            </a:r>
+          </a:p>
+          <a:p>
+            <a:pPr marL="285750" indent="-285750">
+              <a:buFont typeface="Arial" panose="020B0604020202020204" pitchFamily="34" charset="0"/>
+              <a:buChar char="•"/>
+            </a:pPr>
+            <a:endParaRPr lang="fr-FR" sz="1400" dirty="0"/>
+          </a:p>
+          <a:p>
+            <a:pPr>
+              <a:lnSpc>
+                <a:spcPts val="1700"/>
+              </a:lnSpc>
+            </a:pPr>
+            <a:r>
+              <a:rPr lang="en-US" sz="1400" i="1" dirty="0">
+                <a:solidFill>
+                  <a:srgbClr val="E67E22"/>
+                </a:solidFill>
+                <a:latin typeface="Calibri" pitchFamily="34" charset="0"/>
+                <a:ea typeface="Calibri" pitchFamily="34" charset="-122"/>
+                <a:cs typeface="Calibri" pitchFamily="34" charset="-120"/>
+              </a:rPr>
+              <a:t>→ Vision plus </a:t>
+            </a:r>
+            <a:r>
+              <a:rPr lang="en-US" sz="1400" i="1" dirty="0" err="1">
+                <a:solidFill>
+                  <a:srgbClr val="E67E22"/>
+                </a:solidFill>
+                <a:latin typeface="Calibri" pitchFamily="34" charset="0"/>
+                <a:ea typeface="Calibri" pitchFamily="34" charset="-122"/>
+                <a:cs typeface="Calibri" pitchFamily="34" charset="-120"/>
+              </a:rPr>
+              <a:t>globale</a:t>
+            </a:r>
+            <a:r>
+              <a:rPr lang="en-US" sz="1400" i="1" dirty="0">
+                <a:solidFill>
+                  <a:srgbClr val="E67E22"/>
+                </a:solidFill>
+                <a:latin typeface="Calibri" pitchFamily="34" charset="0"/>
+                <a:ea typeface="Calibri" pitchFamily="34" charset="-122"/>
+                <a:cs typeface="Calibri" pitchFamily="34" charset="-120"/>
+              </a:rPr>
+              <a:t> du cycle de vie des </a:t>
+            </a:r>
+            <a:r>
+              <a:rPr lang="en-US" sz="1400" i="1" dirty="0" err="1">
+                <a:solidFill>
+                  <a:srgbClr val="E67E22"/>
+                </a:solidFill>
+                <a:latin typeface="Calibri" pitchFamily="34" charset="0"/>
+                <a:ea typeface="Calibri" pitchFamily="34" charset="-122"/>
+                <a:cs typeface="Calibri" pitchFamily="34" charset="-120"/>
+              </a:rPr>
+              <a:t>projets</a:t>
+            </a:r>
+            <a:r>
+              <a:rPr lang="en-US" sz="1400" i="1" dirty="0">
+                <a:solidFill>
+                  <a:srgbClr val="E67E22"/>
+                </a:solidFill>
+                <a:latin typeface="Calibri" pitchFamily="34" charset="0"/>
+                <a:ea typeface="Calibri" pitchFamily="34" charset="-122"/>
+                <a:cs typeface="Calibri" pitchFamily="34" charset="-120"/>
+              </a:rPr>
+              <a:t> </a:t>
+            </a:r>
+            <a:r>
+              <a:rPr lang="en-US" sz="1400" i="1" dirty="0" err="1">
+                <a:solidFill>
+                  <a:srgbClr val="E67E22"/>
+                </a:solidFill>
+                <a:latin typeface="Calibri" pitchFamily="34" charset="0"/>
+                <a:ea typeface="Calibri" pitchFamily="34" charset="-122"/>
+                <a:cs typeface="Calibri" pitchFamily="34" charset="-120"/>
+              </a:rPr>
+              <a:t>informatiques</a:t>
+            </a:r>
+            <a:r>
+              <a:rPr lang="en-US" sz="1400" i="1" dirty="0">
+                <a:solidFill>
+                  <a:srgbClr val="E67E22"/>
+                </a:solidFill>
+                <a:latin typeface="Calibri" pitchFamily="34" charset="0"/>
+                <a:ea typeface="Calibri" pitchFamily="34" charset="-122"/>
+                <a:cs typeface="Calibri" pitchFamily="34" charset="-120"/>
+              </a:rPr>
+              <a:t> </a:t>
+            </a:r>
+            <a:r>
+              <a:rPr lang="en-US" sz="1400" i="1" dirty="0" err="1">
+                <a:solidFill>
+                  <a:srgbClr val="E67E22"/>
+                </a:solidFill>
+                <a:latin typeface="Calibri" pitchFamily="34" charset="0"/>
+                <a:ea typeface="Calibri" pitchFamily="34" charset="-122"/>
+                <a:cs typeface="Calibri" pitchFamily="34" charset="-120"/>
+              </a:rPr>
+              <a:t>en</a:t>
+            </a:r>
+            <a:r>
+              <a:rPr lang="en-US" sz="1400" i="1" dirty="0">
+                <a:solidFill>
+                  <a:srgbClr val="E67E22"/>
+                </a:solidFill>
+                <a:latin typeface="Calibri" pitchFamily="34" charset="0"/>
+                <a:ea typeface="Calibri" pitchFamily="34" charset="-122"/>
+                <a:cs typeface="Calibri" pitchFamily="34" charset="-120"/>
+              </a:rPr>
+              <a:t> </a:t>
+            </a:r>
+            <a:r>
+              <a:rPr lang="en-US" sz="1400" i="1" dirty="0" err="1">
+                <a:solidFill>
+                  <a:srgbClr val="E67E22"/>
+                </a:solidFill>
+                <a:latin typeface="Calibri" pitchFamily="34" charset="0"/>
+                <a:ea typeface="Calibri" pitchFamily="34" charset="-122"/>
+                <a:cs typeface="Calibri" pitchFamily="34" charset="-120"/>
+              </a:rPr>
+              <a:t>entreprise</a:t>
+            </a:r>
+            <a:r>
+              <a:rPr lang="en-US" sz="1400" i="1" dirty="0">
+                <a:solidFill>
+                  <a:srgbClr val="E67E22"/>
+                </a:solidFill>
+                <a:latin typeface="Calibri" pitchFamily="34" charset="0"/>
+                <a:ea typeface="Calibri" pitchFamily="34" charset="-122"/>
+                <a:cs typeface="Calibri" pitchFamily="34" charset="-120"/>
+              </a:rPr>
+              <a:t>.</a:t>
+            </a:r>
+            <a:endParaRPr lang="en-US" sz="1400" dirty="0"/>
+          </a:p>
+          <a:p>
+            <a:pPr>
+              <a:lnSpc>
+                <a:spcPts val="1700"/>
+              </a:lnSpc>
+            </a:pPr>
             <a:endParaRPr lang="en-US" sz="1350" dirty="0"/>
           </a:p>
         </p:txBody>
@@ -26848,8 +26501,8 @@
         </p:nvSpPr>
         <p:spPr>
           <a:xfrm>
-            <a:off x="6309360" y="1737360"/>
-            <a:ext cx="5349240" cy="4251960"/>
+            <a:off x="5714999" y="1737360"/>
+            <a:ext cx="6109447" cy="4874110"/>
           </a:xfrm>
           <a:prstGeom prst="roundRect">
             <a:avLst>
@@ -26868,6 +26521,13 @@
             </a:outerShdw>
           </a:effectLst>
         </p:spPr>
+        <p:txBody>
+          <a:bodyPr/>
+          <a:lstStyle/>
+          <a:p>
+            <a:endParaRPr lang="fr-FR" dirty="0"/>
+          </a:p>
+        </p:txBody>
       </p:sp>
       <p:sp>
         <p:nvSpPr>
@@ -26890,21 +26550,55 @@
           <a:bodyPr wrap="square" rtlCol="0" anchor="ctr"/>
           <a:lstStyle/>
           <a:p>
-            <a:pPr marL="0" indent="0">
-              <a:buNone/>
-            </a:pPr>
-            <a:r>
-              <a:rPr lang="en-US" sz="1500" b="1" dirty="0">
-                <a:solidFill>
-                  <a:srgbClr val="FFFFFF"/>
+            <a:r>
+              <a:rPr lang="en-US" sz="1600" b="1" dirty="0">
+                <a:solidFill>
+                  <a:schemeClr val="bg1"/>
                 </a:solidFill>
                 <a:latin typeface="Cambria" pitchFamily="34" charset="0"/>
                 <a:ea typeface="Cambria" pitchFamily="34" charset="-122"/>
                 <a:cs typeface="Cambria" pitchFamily="34" charset="-120"/>
               </a:rPr>
-              <a:t>Vers la gestion de projet</a:t>
-            </a:r>
-            <a:endParaRPr lang="en-US" sz="1500" dirty="0"/>
+              <a:t>Technologies et </a:t>
+            </a:r>
+            <a:r>
+              <a:rPr lang="en-US" sz="1600" b="1" dirty="0" err="1">
+                <a:solidFill>
+                  <a:schemeClr val="bg1"/>
+                </a:solidFill>
+                <a:latin typeface="Cambria" pitchFamily="34" charset="0"/>
+                <a:ea typeface="Cambria" pitchFamily="34" charset="-122"/>
+                <a:cs typeface="Cambria" pitchFamily="34" charset="-120"/>
+              </a:rPr>
+              <a:t>outils</a:t>
+            </a:r>
+            <a:r>
+              <a:rPr lang="en-US" sz="1600" b="1" dirty="0">
+                <a:solidFill>
+                  <a:schemeClr val="bg1"/>
+                </a:solidFill>
+                <a:latin typeface="Cambria" pitchFamily="34" charset="0"/>
+                <a:ea typeface="Cambria" pitchFamily="34" charset="-122"/>
+                <a:cs typeface="Cambria" pitchFamily="34" charset="-120"/>
+              </a:rPr>
+              <a:t> </a:t>
+            </a:r>
+            <a:r>
+              <a:rPr lang="en-US" sz="1600" b="1" dirty="0" err="1">
+                <a:solidFill>
+                  <a:schemeClr val="bg1"/>
+                </a:solidFill>
+                <a:latin typeface="Cambria" pitchFamily="34" charset="0"/>
+                <a:ea typeface="Cambria" pitchFamily="34" charset="-122"/>
+                <a:cs typeface="Cambria" pitchFamily="34" charset="-120"/>
+              </a:rPr>
+              <a:t>utilisés</a:t>
+            </a:r>
+            <a:endParaRPr lang="en-US" sz="1600" dirty="0">
+              <a:solidFill>
+                <a:schemeClr val="bg1"/>
+              </a:solidFill>
+            </a:endParaRPr>
           </a:p>
         </p:txBody>
       </p:sp>
@@ -26935,41 +26629,417 @@
               </a:lnSpc>
               <a:buNone/>
             </a:pPr>
-            <a:r>
-              <a:rPr lang="en-US" sz="1250" dirty="0">
-                <a:solidFill>
-                  <a:srgbClr val="CADCFC"/>
+            <a:endParaRPr lang="en-US" sz="1250" dirty="0"/>
+          </a:p>
+        </p:txBody>
+      </p:sp>
+      <p:sp>
+        <p:nvSpPr>
+          <p:cNvPr id="12" name="Text 10"/>
+          <p:cNvSpPr/>
+          <p:nvPr/>
+        </p:nvSpPr>
+        <p:spPr>
+          <a:xfrm>
+            <a:off x="6629400" y="3429000"/>
+            <a:ext cx="4754880" cy="1554480"/>
+          </a:xfrm>
+          <a:prstGeom prst="rect">
+            <a:avLst/>
+          </a:prstGeom>
+          <a:noFill/>
+          <a:ln/>
+        </p:spPr>
+        <p:txBody>
+          <a:bodyPr wrap="square" rtlCol="0" anchor="t"/>
+          <a:lstStyle/>
+          <a:p>
+            <a:pPr>
+              <a:spcAft>
+                <a:spcPts val="1000"/>
+              </a:spcAft>
+              <a:buSzPct val="100000"/>
+            </a:pPr>
+            <a:endParaRPr lang="en-US" sz="1250" dirty="0"/>
+          </a:p>
+        </p:txBody>
+      </p:sp>
+      <p:sp>
+        <p:nvSpPr>
+          <p:cNvPr id="13" name="Text 11"/>
+          <p:cNvSpPr/>
+          <p:nvPr/>
+        </p:nvSpPr>
+        <p:spPr>
+          <a:xfrm>
+            <a:off x="6629400" y="5074920"/>
+            <a:ext cx="4800600" cy="777240"/>
+          </a:xfrm>
+          <a:prstGeom prst="rect">
+            <a:avLst/>
+          </a:prstGeom>
+          <a:noFill/>
+          <a:ln/>
+        </p:spPr>
+        <p:txBody>
+          <a:bodyPr wrap="square" rtlCol="0" anchor="t"/>
+          <a:lstStyle/>
+          <a:p>
+            <a:pPr marL="0" indent="0">
+              <a:buNone/>
+            </a:pPr>
+            <a:endParaRPr lang="en-US" sz="1200" dirty="0"/>
+          </a:p>
+        </p:txBody>
+      </p:sp>
+      <p:sp>
+        <p:nvSpPr>
+          <p:cNvPr id="15" name="Shape 3">
+            <a:extLst>
+              <a:ext uri="{FF2B5EF4-FFF2-40B4-BE49-F238E27FC236}">
+                <a16:creationId xmlns:a16="http://schemas.microsoft.com/office/drawing/2014/main" id="{A66712AE-77E7-3BB6-C44B-1674B9A840F3}"/>
+              </a:ext>
+            </a:extLst>
+          </p:cNvPr>
+          <p:cNvSpPr/>
+          <p:nvPr/>
+        </p:nvSpPr>
+        <p:spPr>
+          <a:xfrm>
+            <a:off x="6189234" y="2444674"/>
+            <a:ext cx="1780390" cy="1779853"/>
+          </a:xfrm>
+          <a:prstGeom prst="roundRect">
+            <a:avLst>
+              <a:gd name="adj" fmla="val 2759"/>
+            </a:avLst>
+          </a:prstGeom>
+          <a:solidFill>
+            <a:srgbClr val="F4F7F8"/>
+          </a:solidFill>
+          <a:ln/>
+          <a:effectLst>
+            <a:outerShdw blurRad="76200" dist="25400" dir="5400000" algn="bl" rotWithShape="0">
+              <a:srgbClr val="1A1A1A">
+                <a:alpha val="18000"/>
+              </a:srgbClr>
+            </a:outerShdw>
+          </a:effectLst>
+        </p:spPr>
+        <p:txBody>
+          <a:bodyPr/>
+          <a:lstStyle/>
+          <a:p>
+            <a:endParaRPr lang="fr-FR" dirty="0"/>
+          </a:p>
+          <a:p>
+            <a:r>
+              <a:rPr lang="en-US" sz="1350" b="1" dirty="0" err="1">
+                <a:solidFill>
+                  <a:srgbClr val="0B3D56"/>
+                </a:solidFill>
+                <a:latin typeface="Cambria" pitchFamily="34" charset="0"/>
+                <a:ea typeface="Cambria" pitchFamily="34" charset="-122"/>
+                <a:cs typeface="Cambria" pitchFamily="34" charset="-120"/>
+              </a:rPr>
+              <a:t>Langages</a:t>
+            </a:r>
+            <a:endParaRPr lang="en-US" sz="1350" b="1" dirty="0">
+              <a:solidFill>
+                <a:srgbClr val="0B3D56"/>
+              </a:solidFill>
+              <a:latin typeface="Cambria" pitchFamily="34" charset="0"/>
+              <a:ea typeface="Cambria" pitchFamily="34" charset="-122"/>
+              <a:cs typeface="Cambria" pitchFamily="34" charset="-120"/>
+            </a:endParaRPr>
+          </a:p>
+          <a:p>
+            <a:endParaRPr lang="en-US" sz="1350" dirty="0"/>
+          </a:p>
+          <a:p>
+            <a:pPr marL="285750" indent="-285750">
+              <a:buSzPct val="100000"/>
+              <a:buFont typeface="Arial" panose="020B0604020202020204" pitchFamily="34" charset="0"/>
+              <a:buChar char="•"/>
+            </a:pPr>
+            <a:r>
+              <a:rPr lang="en-US" sz="1350" dirty="0">
+                <a:solidFill>
+                  <a:srgbClr val="1E2530"/>
                 </a:solidFill>
                 <a:latin typeface="Calibri" pitchFamily="34" charset="0"/>
                 <a:ea typeface="Calibri" pitchFamily="34" charset="-122"/>
                 <a:cs typeface="Calibri" pitchFamily="34" charset="-120"/>
               </a:rPr>
-              <a:t>Mon rôle a évolué avec une montée en autonomie progressive et une implication plus importante sur les aspects web et API que prévu initialement.</a:t>
-            </a:r>
-            <a:endParaRPr lang="en-US" sz="1250" dirty="0"/>
-          </a:p>
-        </p:txBody>
-      </p:sp>
-      <p:sp>
-        <p:nvSpPr>
-          <p:cNvPr id="12" name="Text 10"/>
-          <p:cNvSpPr/>
-          <p:nvPr/>
-        </p:nvSpPr>
-        <p:spPr>
-          <a:xfrm>
-            <a:off x="6629400" y="3429000"/>
-            <a:ext cx="4754880" cy="1554480"/>
-          </a:xfrm>
-          <a:prstGeom prst="rect">
-            <a:avLst/>
-          </a:prstGeom>
-          <a:noFill/>
-          <a:ln/>
-        </p:spPr>
-        <p:txBody>
-          <a:bodyPr wrap="square" rtlCol="0" anchor="t"/>
-          <a:lstStyle/>
+              <a:t>JavaScript</a:t>
+            </a:r>
+            <a:endParaRPr lang="en-US" sz="1350" dirty="0"/>
+          </a:p>
+          <a:p>
+            <a:pPr marL="285750" indent="-285750">
+              <a:buSzPct val="100000"/>
+              <a:buFont typeface="Arial" panose="020B0604020202020204" pitchFamily="34" charset="0"/>
+              <a:buChar char="•"/>
+            </a:pPr>
+            <a:r>
+              <a:rPr lang="en-US" sz="1350" dirty="0">
+                <a:solidFill>
+                  <a:srgbClr val="1E2530"/>
+                </a:solidFill>
+                <a:latin typeface="Calibri" pitchFamily="34" charset="0"/>
+                <a:ea typeface="Calibri" pitchFamily="34" charset="-122"/>
+                <a:cs typeface="Calibri" pitchFamily="34" charset="-120"/>
+              </a:rPr>
+              <a:t>PHP</a:t>
+            </a:r>
+            <a:endParaRPr lang="en-US" sz="1350" dirty="0"/>
+          </a:p>
+          <a:p>
+            <a:pPr marL="285750" indent="-285750">
+              <a:buSzPct val="100000"/>
+              <a:buFont typeface="Arial" panose="020B0604020202020204" pitchFamily="34" charset="0"/>
+              <a:buChar char="•"/>
+            </a:pPr>
+            <a:r>
+              <a:rPr lang="en-US" sz="1350" dirty="0">
+                <a:solidFill>
+                  <a:srgbClr val="1E2530"/>
+                </a:solidFill>
+                <a:latin typeface="Calibri" pitchFamily="34" charset="0"/>
+                <a:ea typeface="Calibri" pitchFamily="34" charset="-122"/>
+                <a:cs typeface="Calibri" pitchFamily="34" charset="-120"/>
+              </a:rPr>
+              <a:t>SQL</a:t>
+            </a:r>
+            <a:endParaRPr lang="en-US" sz="1350" dirty="0"/>
+          </a:p>
+          <a:p>
+            <a:pPr marL="285750" indent="-285750">
+              <a:buSzPct val="100000"/>
+              <a:buFont typeface="Arial" panose="020B0604020202020204" pitchFamily="34" charset="0"/>
+              <a:buChar char="•"/>
+            </a:pPr>
+            <a:r>
+              <a:rPr lang="en-US" sz="1350" dirty="0">
+                <a:solidFill>
+                  <a:srgbClr val="1E2530"/>
+                </a:solidFill>
+                <a:latin typeface="Calibri" pitchFamily="34" charset="0"/>
+                <a:ea typeface="Calibri" pitchFamily="34" charset="-122"/>
+                <a:cs typeface="Calibri" pitchFamily="34" charset="-120"/>
+              </a:rPr>
+              <a:t>Delphi (lecture</a:t>
+            </a:r>
+            <a:r>
+              <a:rPr lang="en-US" dirty="0">
+                <a:solidFill>
+                  <a:srgbClr val="1E2530"/>
+                </a:solidFill>
+                <a:latin typeface="Calibri" pitchFamily="34" charset="0"/>
+                <a:ea typeface="Calibri" pitchFamily="34" charset="-122"/>
+                <a:cs typeface="Calibri" pitchFamily="34" charset="-120"/>
+              </a:rPr>
+              <a:t>)</a:t>
+            </a:r>
+            <a:endParaRPr lang="en-US" dirty="0"/>
+          </a:p>
+          <a:p>
+            <a:endParaRPr lang="fr-FR" dirty="0"/>
+          </a:p>
+        </p:txBody>
+      </p:sp>
+      <p:sp>
+        <p:nvSpPr>
+          <p:cNvPr id="17" name="Shape 4">
+            <a:extLst>
+              <a:ext uri="{FF2B5EF4-FFF2-40B4-BE49-F238E27FC236}">
+                <a16:creationId xmlns:a16="http://schemas.microsoft.com/office/drawing/2014/main" id="{4F524EE8-AEC7-0930-6A7A-C7BCD842156C}"/>
+              </a:ext>
+            </a:extLst>
+          </p:cNvPr>
+          <p:cNvSpPr/>
+          <p:nvPr/>
+        </p:nvSpPr>
+        <p:spPr>
+          <a:xfrm>
+            <a:off x="6245351" y="2601647"/>
+            <a:ext cx="384048" cy="73152"/>
+          </a:xfrm>
+          <a:prstGeom prst="roundRect">
+            <a:avLst>
+              <a:gd name="adj" fmla="val 50000"/>
+            </a:avLst>
+          </a:prstGeom>
+          <a:solidFill>
+            <a:srgbClr val="1B7A8C"/>
+          </a:solidFill>
+          <a:ln/>
+        </p:spPr>
+      </p:sp>
+      <p:sp>
+        <p:nvSpPr>
+          <p:cNvPr id="19" name="Shape 7">
+            <a:extLst>
+              <a:ext uri="{FF2B5EF4-FFF2-40B4-BE49-F238E27FC236}">
+                <a16:creationId xmlns:a16="http://schemas.microsoft.com/office/drawing/2014/main" id="{46411B72-E048-22EB-C74A-9CFA988A056E}"/>
+              </a:ext>
+            </a:extLst>
+          </p:cNvPr>
+          <p:cNvSpPr/>
+          <p:nvPr/>
+        </p:nvSpPr>
+        <p:spPr>
+          <a:xfrm>
+            <a:off x="6189234" y="4528072"/>
+            <a:ext cx="1780390" cy="1779853"/>
+          </a:xfrm>
+          <a:prstGeom prst="roundRect">
+            <a:avLst>
+              <a:gd name="adj" fmla="val 2759"/>
+            </a:avLst>
+          </a:prstGeom>
+          <a:solidFill>
+            <a:srgbClr val="F4F7F8"/>
+          </a:solidFill>
+          <a:ln/>
+          <a:effectLst>
+            <a:outerShdw blurRad="76200" dist="25400" dir="5400000" algn="bl" rotWithShape="0">
+              <a:srgbClr val="1A1A1A">
+                <a:alpha val="18000"/>
+              </a:srgbClr>
+            </a:outerShdw>
+          </a:effectLst>
+        </p:spPr>
+        <p:txBody>
+          <a:bodyPr/>
+          <a:lstStyle/>
+          <a:p>
+            <a:endParaRPr lang="fr-FR" dirty="0"/>
+          </a:p>
+          <a:p>
+            <a:r>
+              <a:rPr lang="en-US" sz="1350" b="1" dirty="0">
+                <a:solidFill>
+                  <a:srgbClr val="0B3D56"/>
+                </a:solidFill>
+                <a:latin typeface="Cambria" pitchFamily="34" charset="0"/>
+                <a:ea typeface="Cambria" pitchFamily="34" charset="-122"/>
+                <a:cs typeface="Cambria" pitchFamily="34" charset="-120"/>
+              </a:rPr>
+              <a:t>Base de données</a:t>
+            </a:r>
+          </a:p>
+          <a:p>
+            <a:endParaRPr lang="en-US" sz="1350" dirty="0"/>
+          </a:p>
+          <a:p>
+            <a:pPr marL="285750" indent="-285750">
+              <a:buFont typeface="Arial" panose="020B0604020202020204" pitchFamily="34" charset="0"/>
+              <a:buChar char="•"/>
+            </a:pPr>
+            <a:r>
+              <a:rPr lang="en-US" sz="1350" dirty="0">
+                <a:solidFill>
+                  <a:srgbClr val="1E2530"/>
+                </a:solidFill>
+                <a:latin typeface="Calibri" pitchFamily="34" charset="0"/>
+                <a:ea typeface="Calibri" pitchFamily="34" charset="-122"/>
+                <a:cs typeface="Calibri" pitchFamily="34" charset="-120"/>
+              </a:rPr>
+              <a:t>Microsoft SQL Server</a:t>
+            </a:r>
+            <a:endParaRPr lang="en-US" sz="1350" dirty="0"/>
+          </a:p>
+          <a:p>
+            <a:endParaRPr lang="fr-FR" dirty="0"/>
+          </a:p>
+        </p:txBody>
+      </p:sp>
+      <p:sp>
+        <p:nvSpPr>
+          <p:cNvPr id="21" name="Shape 8">
+            <a:extLst>
+              <a:ext uri="{FF2B5EF4-FFF2-40B4-BE49-F238E27FC236}">
+                <a16:creationId xmlns:a16="http://schemas.microsoft.com/office/drawing/2014/main" id="{877B23FF-C392-4E6A-E976-8FF50F39F918}"/>
+              </a:ext>
+            </a:extLst>
+          </p:cNvPr>
+          <p:cNvSpPr/>
+          <p:nvPr/>
+        </p:nvSpPr>
+        <p:spPr>
+          <a:xfrm>
+            <a:off x="6279869" y="4691858"/>
+            <a:ext cx="384048" cy="73152"/>
+          </a:xfrm>
+          <a:prstGeom prst="roundRect">
+            <a:avLst>
+              <a:gd name="adj" fmla="val 50000"/>
+            </a:avLst>
+          </a:prstGeom>
+          <a:solidFill>
+            <a:srgbClr val="0B3D56"/>
+          </a:solidFill>
+          <a:ln/>
+        </p:spPr>
+      </p:sp>
+      <p:sp>
+        <p:nvSpPr>
+          <p:cNvPr id="23" name="Shape 11">
+            <a:extLst>
+              <a:ext uri="{FF2B5EF4-FFF2-40B4-BE49-F238E27FC236}">
+                <a16:creationId xmlns:a16="http://schemas.microsoft.com/office/drawing/2014/main" id="{D4644795-FDD5-5A34-0830-D0AA78504161}"/>
+              </a:ext>
+            </a:extLst>
+          </p:cNvPr>
+          <p:cNvSpPr/>
+          <p:nvPr/>
+        </p:nvSpPr>
+        <p:spPr>
+          <a:xfrm>
+            <a:off x="9018494" y="2444674"/>
+            <a:ext cx="2223248" cy="3863251"/>
+          </a:xfrm>
+          <a:prstGeom prst="roundRect">
+            <a:avLst>
+              <a:gd name="adj" fmla="val 2759"/>
+            </a:avLst>
+          </a:prstGeom>
+          <a:solidFill>
+            <a:srgbClr val="F4F7F8"/>
+          </a:solidFill>
+          <a:ln/>
+          <a:effectLst>
+            <a:outerShdw blurRad="76200" dist="25400" dir="5400000" algn="bl" rotWithShape="0">
+              <a:srgbClr val="1A1A1A">
+                <a:alpha val="18000"/>
+              </a:srgbClr>
+            </a:outerShdw>
+          </a:effectLst>
+        </p:spPr>
+        <p:txBody>
+          <a:bodyPr/>
+          <a:lstStyle/>
+          <a:p>
+            <a:endParaRPr lang="fr-FR" dirty="0"/>
+          </a:p>
+          <a:p>
+            <a:r>
+              <a:rPr lang="en-US" sz="1350" b="1" dirty="0" err="1">
+                <a:solidFill>
+                  <a:srgbClr val="0B3D56"/>
+                </a:solidFill>
+                <a:latin typeface="Cambria" pitchFamily="34" charset="0"/>
+                <a:ea typeface="Cambria" pitchFamily="34" charset="-122"/>
+                <a:cs typeface="Cambria" pitchFamily="34" charset="-120"/>
+              </a:rPr>
+              <a:t>Outils</a:t>
+            </a:r>
+            <a:endParaRPr lang="en-US" sz="1350" dirty="0"/>
+          </a:p>
+          <a:p>
+            <a:endParaRPr lang="fr-FR" dirty="0"/>
+          </a:p>
           <a:p>
             <a:pPr marL="228600" indent="-228600">
               <a:spcAft>
@@ -26979,17 +27049,17 @@
               <a:buChar char="▪"/>
             </a:pPr>
             <a:r>
-              <a:rPr lang="en-US" sz="1250" dirty="0">
-                <a:solidFill>
-                  <a:srgbClr val="FFFFFF"/>
+              <a:rPr lang="en-US" sz="1350" dirty="0">
+                <a:solidFill>
+                  <a:srgbClr val="1E2530"/>
                 </a:solidFill>
                 <a:latin typeface="Calibri" pitchFamily="34" charset="0"/>
                 <a:ea typeface="Calibri" pitchFamily="34" charset="-122"/>
                 <a:cs typeface="Calibri" pitchFamily="34" charset="-120"/>
               </a:rPr>
-              <a:t>Analyse des besoins fonctionnels</a:t>
-            </a:r>
-            <a:endParaRPr lang="en-US" sz="1250" dirty="0"/>
+              <a:t>Git</a:t>
+            </a:r>
+            <a:endParaRPr lang="en-US" sz="1350" dirty="0"/>
           </a:p>
           <a:p>
             <a:pPr marL="228600" indent="-228600">
@@ -27000,17 +27070,17 @@
               <a:buChar char="▪"/>
             </a:pPr>
             <a:r>
-              <a:rPr lang="en-US" sz="1250" dirty="0">
-                <a:solidFill>
-                  <a:srgbClr val="FFFFFF"/>
+              <a:rPr lang="en-US" sz="1350" dirty="0">
+                <a:solidFill>
+                  <a:srgbClr val="1E2530"/>
                 </a:solidFill>
                 <a:latin typeface="Calibri" pitchFamily="34" charset="0"/>
                 <a:ea typeface="Calibri" pitchFamily="34" charset="-122"/>
                 <a:cs typeface="Calibri" pitchFamily="34" charset="-120"/>
               </a:rPr>
-              <a:t>Priorisation des tâches</a:t>
-            </a:r>
-            <a:endParaRPr lang="en-US" sz="1250" dirty="0"/>
+              <a:t>VS Code</a:t>
+            </a:r>
+            <a:endParaRPr lang="en-US" sz="1350" dirty="0"/>
           </a:p>
           <a:p>
             <a:pPr marL="228600" indent="-228600">
@@ -27021,17 +27091,17 @@
               <a:buChar char="▪"/>
             </a:pPr>
             <a:r>
-              <a:rPr lang="en-US" sz="1250" dirty="0">
-                <a:solidFill>
-                  <a:srgbClr val="FFFFFF"/>
+              <a:rPr lang="en-US" sz="1350" dirty="0">
+                <a:solidFill>
+                  <a:srgbClr val="1E2530"/>
                 </a:solidFill>
                 <a:latin typeface="Calibri" pitchFamily="34" charset="0"/>
                 <a:ea typeface="Calibri" pitchFamily="34" charset="-122"/>
                 <a:cs typeface="Calibri" pitchFamily="34" charset="-120"/>
               </a:rPr>
-              <a:t>Suivi des projets</a:t>
-            </a:r>
-            <a:endParaRPr lang="en-US" sz="1250" dirty="0"/>
+              <a:t>XAMPP</a:t>
+            </a:r>
+            <a:endParaRPr lang="en-US" sz="1350" dirty="0"/>
           </a:p>
           <a:p>
             <a:pPr marL="228600" indent="-228600">
@@ -27042,58 +27112,92 @@
               <a:buChar char="▪"/>
             </a:pPr>
             <a:r>
-              <a:rPr lang="en-US" sz="1250" dirty="0">
-                <a:solidFill>
-                  <a:srgbClr val="FFFFFF"/>
+              <a:rPr lang="en-US" sz="1350" dirty="0">
+                <a:solidFill>
+                  <a:srgbClr val="1E2530"/>
                 </a:solidFill>
                 <a:latin typeface="Calibri" pitchFamily="34" charset="0"/>
                 <a:ea typeface="Calibri" pitchFamily="34" charset="-122"/>
                 <a:cs typeface="Calibri" pitchFamily="34" charset="-120"/>
               </a:rPr>
-              <a:t>Coordination des phases de développement</a:t>
-            </a:r>
-            <a:endParaRPr lang="en-US" sz="1250" dirty="0"/>
-          </a:p>
-        </p:txBody>
-      </p:sp>
-      <p:sp>
-        <p:nvSpPr>
-          <p:cNvPr id="13" name="Text 11"/>
-          <p:cNvSpPr/>
-          <p:nvPr/>
-        </p:nvSpPr>
-        <p:spPr>
-          <a:xfrm>
-            <a:off x="6629400" y="5074920"/>
-            <a:ext cx="4800600" cy="777240"/>
-          </a:xfrm>
-          <a:prstGeom prst="rect">
-            <a:avLst/>
-          </a:prstGeom>
-          <a:noFill/>
-          <a:ln/>
-        </p:spPr>
-        <p:txBody>
-          <a:bodyPr wrap="square" rtlCol="0" anchor="t"/>
-          <a:lstStyle/>
-          <a:p>
-            <a:pPr marL="0" indent="0">
-              <a:buNone/>
-            </a:pPr>
-            <a:r>
-              <a:rPr lang="en-US" sz="1200" i="1" dirty="0">
-                <a:solidFill>
-                  <a:srgbClr val="E67E22"/>
+              <a:t>Postman</a:t>
+            </a:r>
+            <a:endParaRPr lang="en-US" sz="1350" dirty="0"/>
+          </a:p>
+          <a:p>
+            <a:pPr marL="228600" indent="-228600">
+              <a:spcAft>
+                <a:spcPts val="1000"/>
+              </a:spcAft>
+              <a:buSzPct val="100000"/>
+              <a:buChar char="▪"/>
+            </a:pPr>
+            <a:r>
+              <a:rPr lang="en-US" sz="1350" dirty="0">
+                <a:solidFill>
+                  <a:srgbClr val="1E2530"/>
                 </a:solidFill>
                 <a:latin typeface="Calibri" pitchFamily="34" charset="0"/>
                 <a:ea typeface="Calibri" pitchFamily="34" charset="-122"/>
                 <a:cs typeface="Calibri" pitchFamily="34" charset="-120"/>
               </a:rPr>
-              <a:t>→ Vision plus globale du cycle de vie des projets informatiques en entreprise.</a:t>
-            </a:r>
-            <a:endParaRPr lang="en-US" sz="1200" dirty="0"/>
-          </a:p>
-        </p:txBody>
+              <a:t>SQL Server Profiler</a:t>
+            </a:r>
+            <a:endParaRPr lang="en-US" sz="1350" dirty="0"/>
+          </a:p>
+          <a:p>
+            <a:pPr marL="228600" indent="-228600">
+              <a:spcAft>
+                <a:spcPts val="1000"/>
+              </a:spcAft>
+              <a:buSzPct val="100000"/>
+              <a:buChar char="▪"/>
+            </a:pPr>
+            <a:r>
+              <a:rPr lang="en-US" sz="1350" dirty="0">
+                <a:solidFill>
+                  <a:srgbClr val="1E2530"/>
+                </a:solidFill>
+                <a:latin typeface="Calibri" pitchFamily="34" charset="0"/>
+                <a:ea typeface="Calibri" pitchFamily="34" charset="-122"/>
+                <a:cs typeface="Calibri" pitchFamily="34" charset="-120"/>
+              </a:rPr>
+              <a:t>Trello</a:t>
+            </a:r>
+            <a:endParaRPr lang="en-US" sz="1350" dirty="0"/>
+          </a:p>
+          <a:p>
+            <a:endParaRPr lang="fr-FR" dirty="0"/>
+          </a:p>
+        </p:txBody>
+      </p:sp>
+      <p:sp>
+        <p:nvSpPr>
+          <p:cNvPr id="25" name="Shape 12">
+            <a:extLst>
+              <a:ext uri="{FF2B5EF4-FFF2-40B4-BE49-F238E27FC236}">
+                <a16:creationId xmlns:a16="http://schemas.microsoft.com/office/drawing/2014/main" id="{C5F465A9-AD71-6323-41B8-DC22236292A4}"/>
+              </a:ext>
+            </a:extLst>
+          </p:cNvPr>
+          <p:cNvSpPr/>
+          <p:nvPr/>
+        </p:nvSpPr>
+        <p:spPr>
+          <a:xfrm>
+            <a:off x="9190437" y="2601647"/>
+            <a:ext cx="384048" cy="73152"/>
+          </a:xfrm>
+          <a:prstGeom prst="roundRect">
+            <a:avLst>
+              <a:gd name="adj" fmla="val 50000"/>
+            </a:avLst>
+          </a:prstGeom>
+          <a:solidFill>
+            <a:srgbClr val="E67E22"/>
+          </a:solidFill>
+          <a:ln/>
+        </p:spPr>
       </p:sp>
     </p:spTree>
   </p:cSld>
@@ -27104,966 +27208,6 @@
 </file>
 
 <file path=ppt/slides/slide8.xml><?xml version="1.0" encoding="utf-8"?>
-<p:sld xmlns:a="http://schemas.openxmlformats.org/drawingml/2006/main" xmlns:r="http://schemas.openxmlformats.org/officeDocument/2006/relationships" xmlns:p="http://schemas.openxmlformats.org/presentationml/2006/main">
-  <p:cSld name="Slide 8">
-    <p:bg>
-      <p:bgPr>
-        <a:solidFill>
-          <a:srgbClr val="FFFFFF"/>
-        </a:solidFill>
-        <a:effectLst/>
-      </p:bgPr>
-    </p:bg>
-    <p:spTree>
-      <p:nvGrpSpPr>
-        <p:cNvPr id="1" name=""/>
-        <p:cNvGrpSpPr/>
-        <p:nvPr/>
-      </p:nvGrpSpPr>
-      <p:grpSpPr>
-        <a:xfrm>
-          <a:off x="0" y="0"/>
-          <a:ext cx="0" cy="0"/>
-          <a:chOff x="0" y="0"/>
-          <a:chExt cx="0" cy="0"/>
-        </a:xfrm>
-      </p:grpSpPr>
-      <p:sp>
-        <p:nvSpPr>
-          <p:cNvPr id="2" name="Text 0"/>
-          <p:cNvSpPr/>
-          <p:nvPr/>
-        </p:nvSpPr>
-        <p:spPr>
-          <a:xfrm>
-            <a:off x="548640" y="384048"/>
-            <a:ext cx="7315200" cy="320040"/>
-          </a:xfrm>
-          <a:prstGeom prst="rect">
-            <a:avLst/>
-          </a:prstGeom>
-          <a:noFill/>
-          <a:ln/>
-        </p:spPr>
-        <p:txBody>
-          <a:bodyPr wrap="square" rtlCol="0" anchor="ctr"/>
-          <a:lstStyle/>
-          <a:p>
-            <a:pPr marL="0" indent="0">
-              <a:buNone/>
-            </a:pPr>
-            <a:r>
-              <a:rPr lang="en-US" sz="1200" b="1" kern="0" spc="200" dirty="0">
-                <a:solidFill>
-                  <a:srgbClr val="E67E22"/>
-                </a:solidFill>
-                <a:latin typeface="Calibri" pitchFamily="34" charset="0"/>
-                <a:ea typeface="Calibri" pitchFamily="34" charset="-122"/>
-                <a:cs typeface="Calibri" pitchFamily="34" charset="-120"/>
-              </a:rPr>
-              <a:t>PARTIE 1 · ENVIRONNEMENT TECHNIQUE</a:t>
-            </a:r>
-            <a:endParaRPr lang="en-US" sz="1200" dirty="0"/>
-          </a:p>
-        </p:txBody>
-      </p:sp>
-      <p:sp>
-        <p:nvSpPr>
-          <p:cNvPr id="3" name="Text 1"/>
-          <p:cNvSpPr/>
-          <p:nvPr/>
-        </p:nvSpPr>
-        <p:spPr>
-          <a:xfrm>
-            <a:off x="548640" y="658368"/>
-            <a:ext cx="11064240" cy="822960"/>
-          </a:xfrm>
-          <a:prstGeom prst="rect">
-            <a:avLst/>
-          </a:prstGeom>
-          <a:noFill/>
-          <a:ln/>
-        </p:spPr>
-        <p:txBody>
-          <a:bodyPr wrap="square" rtlCol="0" anchor="ctr"/>
-          <a:lstStyle/>
-          <a:p>
-            <a:pPr marL="0" indent="0" algn="l">
-              <a:buNone/>
-            </a:pPr>
-            <a:r>
-              <a:rPr lang="en-US" sz="3000" b="1" dirty="0">
-                <a:solidFill>
-                  <a:srgbClr val="0B3D56"/>
-                </a:solidFill>
-                <a:latin typeface="Cambria" pitchFamily="34" charset="0"/>
-                <a:ea typeface="Cambria" pitchFamily="34" charset="-122"/>
-                <a:cs typeface="Cambria" pitchFamily="34" charset="-120"/>
-              </a:rPr>
-              <a:t>Technologies et outils utilisés</a:t>
-            </a:r>
-            <a:endParaRPr lang="en-US" sz="3000" dirty="0"/>
-          </a:p>
-        </p:txBody>
-      </p:sp>
-      <p:sp>
-        <p:nvSpPr>
-          <p:cNvPr id="4" name="Text 2"/>
-          <p:cNvSpPr/>
-          <p:nvPr/>
-        </p:nvSpPr>
-        <p:spPr>
-          <a:xfrm>
-            <a:off x="11503152" y="6473952"/>
-            <a:ext cx="457200" cy="274320"/>
-          </a:xfrm>
-          <a:prstGeom prst="rect">
-            <a:avLst/>
-          </a:prstGeom>
-          <a:noFill/>
-          <a:ln/>
-        </p:spPr>
-        <p:txBody>
-          <a:bodyPr wrap="square" rtlCol="0" anchor="ctr"/>
-          <a:lstStyle/>
-          <a:p>
-            <a:pPr marL="0" indent="0" algn="r">
-              <a:buNone/>
-            </a:pPr>
-            <a:r>
-              <a:rPr lang="en-US" sz="1000" dirty="0">
-                <a:solidFill>
-                  <a:srgbClr val="6B7280"/>
-                </a:solidFill>
-                <a:latin typeface="Calibri" pitchFamily="34" charset="0"/>
-                <a:ea typeface="Calibri" pitchFamily="34" charset="-122"/>
-                <a:cs typeface="Calibri" pitchFamily="34" charset="-120"/>
-              </a:rPr>
-              <a:t>8</a:t>
-            </a:r>
-            <a:endParaRPr lang="en-US" sz="1000" dirty="0"/>
-          </a:p>
-        </p:txBody>
-      </p:sp>
-      <p:sp>
-        <p:nvSpPr>
-          <p:cNvPr id="5" name="Shape 3"/>
-          <p:cNvSpPr/>
-          <p:nvPr/>
-        </p:nvSpPr>
-        <p:spPr>
-          <a:xfrm>
-            <a:off x="548640" y="1737360"/>
-            <a:ext cx="2651760" cy="4206240"/>
-          </a:xfrm>
-          <a:prstGeom prst="roundRect">
-            <a:avLst>
-              <a:gd name="adj" fmla="val 2759"/>
-            </a:avLst>
-          </a:prstGeom>
-          <a:solidFill>
-            <a:srgbClr val="F4F7F8"/>
-          </a:solidFill>
-          <a:ln/>
-          <a:effectLst>
-            <a:outerShdw blurRad="76200" dist="25400" dir="5400000" algn="bl" rotWithShape="0">
-              <a:srgbClr val="1A1A1A">
-                <a:alpha val="18000"/>
-              </a:srgbClr>
-            </a:outerShdw>
-          </a:effectLst>
-        </p:spPr>
-      </p:sp>
-      <p:sp>
-        <p:nvSpPr>
-          <p:cNvPr id="6" name="Shape 4"/>
-          <p:cNvSpPr/>
-          <p:nvPr/>
-        </p:nvSpPr>
-        <p:spPr>
-          <a:xfrm>
-            <a:off x="777240" y="1993392"/>
-            <a:ext cx="384048" cy="73152"/>
-          </a:xfrm>
-          <a:prstGeom prst="roundRect">
-            <a:avLst>
-              <a:gd name="adj" fmla="val 50000"/>
-            </a:avLst>
-          </a:prstGeom>
-          <a:solidFill>
-            <a:srgbClr val="1B7A8C"/>
-          </a:solidFill>
-          <a:ln/>
-        </p:spPr>
-      </p:sp>
-      <p:sp>
-        <p:nvSpPr>
-          <p:cNvPr id="7" name="Text 5"/>
-          <p:cNvSpPr/>
-          <p:nvPr/>
-        </p:nvSpPr>
-        <p:spPr>
-          <a:xfrm>
-            <a:off x="777240" y="2148840"/>
-            <a:ext cx="2194560" cy="457200"/>
-          </a:xfrm>
-          <a:prstGeom prst="rect">
-            <a:avLst/>
-          </a:prstGeom>
-          <a:noFill/>
-          <a:ln/>
-        </p:spPr>
-        <p:txBody>
-          <a:bodyPr wrap="square" rtlCol="0" anchor="ctr"/>
-          <a:lstStyle/>
-          <a:p>
-            <a:pPr marL="0" indent="0">
-              <a:buNone/>
-            </a:pPr>
-            <a:r>
-              <a:rPr lang="en-US" sz="1500" b="1" dirty="0">
-                <a:solidFill>
-                  <a:srgbClr val="0B3D56"/>
-                </a:solidFill>
-                <a:latin typeface="Cambria" pitchFamily="34" charset="0"/>
-                <a:ea typeface="Cambria" pitchFamily="34" charset="-122"/>
-                <a:cs typeface="Cambria" pitchFamily="34" charset="-120"/>
-              </a:rPr>
-              <a:t>Langages</a:t>
-            </a:r>
-            <a:endParaRPr lang="en-US" sz="1500" dirty="0"/>
-          </a:p>
-        </p:txBody>
-      </p:sp>
-      <p:sp>
-        <p:nvSpPr>
-          <p:cNvPr id="8" name="Text 6"/>
-          <p:cNvSpPr/>
-          <p:nvPr/>
-        </p:nvSpPr>
-        <p:spPr>
-          <a:xfrm>
-            <a:off x="804672" y="2697480"/>
-            <a:ext cx="2148840" cy="3017520"/>
-          </a:xfrm>
-          <a:prstGeom prst="rect">
-            <a:avLst/>
-          </a:prstGeom>
-          <a:noFill/>
-          <a:ln/>
-        </p:spPr>
-        <p:txBody>
-          <a:bodyPr wrap="square" rtlCol="0" anchor="t"/>
-          <a:lstStyle/>
-          <a:p>
-            <a:pPr marL="228600" indent="-228600">
-              <a:spcAft>
-                <a:spcPts val="1000"/>
-              </a:spcAft>
-              <a:buSzPct val="100000"/>
-              <a:buChar char="▪"/>
-            </a:pPr>
-            <a:r>
-              <a:rPr lang="en-US" sz="1200" dirty="0">
-                <a:solidFill>
-                  <a:srgbClr val="1E2530"/>
-                </a:solidFill>
-                <a:latin typeface="Calibri" pitchFamily="34" charset="0"/>
-                <a:ea typeface="Calibri" pitchFamily="34" charset="-122"/>
-                <a:cs typeface="Calibri" pitchFamily="34" charset="-120"/>
-              </a:rPr>
-              <a:t>JavaScript</a:t>
-            </a:r>
-            <a:endParaRPr lang="en-US" sz="1200" dirty="0"/>
-          </a:p>
-          <a:p>
-            <a:pPr marL="228600" indent="-228600">
-              <a:spcAft>
-                <a:spcPts val="1000"/>
-              </a:spcAft>
-              <a:buSzPct val="100000"/>
-              <a:buChar char="▪"/>
-            </a:pPr>
-            <a:r>
-              <a:rPr lang="en-US" sz="1200" dirty="0">
-                <a:solidFill>
-                  <a:srgbClr val="1E2530"/>
-                </a:solidFill>
-                <a:latin typeface="Calibri" pitchFamily="34" charset="0"/>
-                <a:ea typeface="Calibri" pitchFamily="34" charset="-122"/>
-                <a:cs typeface="Calibri" pitchFamily="34" charset="-120"/>
-              </a:rPr>
-              <a:t>PHP</a:t>
-            </a:r>
-            <a:endParaRPr lang="en-US" sz="1200" dirty="0"/>
-          </a:p>
-          <a:p>
-            <a:pPr marL="228600" indent="-228600">
-              <a:spcAft>
-                <a:spcPts val="1000"/>
-              </a:spcAft>
-              <a:buSzPct val="100000"/>
-              <a:buChar char="▪"/>
-            </a:pPr>
-            <a:r>
-              <a:rPr lang="en-US" sz="1200" dirty="0">
-                <a:solidFill>
-                  <a:srgbClr val="1E2530"/>
-                </a:solidFill>
-                <a:latin typeface="Calibri" pitchFamily="34" charset="0"/>
-                <a:ea typeface="Calibri" pitchFamily="34" charset="-122"/>
-                <a:cs typeface="Calibri" pitchFamily="34" charset="-120"/>
-              </a:rPr>
-              <a:t>SQL</a:t>
-            </a:r>
-            <a:endParaRPr lang="en-US" sz="1200" dirty="0"/>
-          </a:p>
-          <a:p>
-            <a:pPr marL="228600" indent="-228600">
-              <a:spcAft>
-                <a:spcPts val="1000"/>
-              </a:spcAft>
-              <a:buSzPct val="100000"/>
-              <a:buChar char="▪"/>
-            </a:pPr>
-            <a:r>
-              <a:rPr lang="en-US" sz="1200" dirty="0">
-                <a:solidFill>
-                  <a:srgbClr val="1E2530"/>
-                </a:solidFill>
-                <a:latin typeface="Calibri" pitchFamily="34" charset="0"/>
-                <a:ea typeface="Calibri" pitchFamily="34" charset="-122"/>
-                <a:cs typeface="Calibri" pitchFamily="34" charset="-120"/>
-              </a:rPr>
-              <a:t>Delphi (lecture)</a:t>
-            </a:r>
-            <a:endParaRPr lang="en-US" sz="1200" dirty="0"/>
-          </a:p>
-        </p:txBody>
-      </p:sp>
-      <p:sp>
-        <p:nvSpPr>
-          <p:cNvPr id="9" name="Shape 7"/>
-          <p:cNvSpPr/>
-          <p:nvPr/>
-        </p:nvSpPr>
-        <p:spPr>
-          <a:xfrm>
-            <a:off x="3401568" y="1737360"/>
-            <a:ext cx="2651760" cy="4206240"/>
-          </a:xfrm>
-          <a:prstGeom prst="roundRect">
-            <a:avLst>
-              <a:gd name="adj" fmla="val 2759"/>
-            </a:avLst>
-          </a:prstGeom>
-          <a:solidFill>
-            <a:srgbClr val="F4F7F8"/>
-          </a:solidFill>
-          <a:ln/>
-          <a:effectLst>
-            <a:outerShdw blurRad="76200" dist="25400" dir="5400000" algn="bl" rotWithShape="0">
-              <a:srgbClr val="1A1A1A">
-                <a:alpha val="18000"/>
-              </a:srgbClr>
-            </a:outerShdw>
-          </a:effectLst>
-        </p:spPr>
-      </p:sp>
-      <p:sp>
-        <p:nvSpPr>
-          <p:cNvPr id="10" name="Shape 8"/>
-          <p:cNvSpPr/>
-          <p:nvPr/>
-        </p:nvSpPr>
-        <p:spPr>
-          <a:xfrm>
-            <a:off x="3630168" y="1993392"/>
-            <a:ext cx="384048" cy="73152"/>
-          </a:xfrm>
-          <a:prstGeom prst="roundRect">
-            <a:avLst>
-              <a:gd name="adj" fmla="val 50000"/>
-            </a:avLst>
-          </a:prstGeom>
-          <a:solidFill>
-            <a:srgbClr val="0B3D56"/>
-          </a:solidFill>
-          <a:ln/>
-        </p:spPr>
-      </p:sp>
-      <p:sp>
-        <p:nvSpPr>
-          <p:cNvPr id="11" name="Text 9"/>
-          <p:cNvSpPr/>
-          <p:nvPr/>
-        </p:nvSpPr>
-        <p:spPr>
-          <a:xfrm>
-            <a:off x="3630168" y="2148840"/>
-            <a:ext cx="2194560" cy="457200"/>
-          </a:xfrm>
-          <a:prstGeom prst="rect">
-            <a:avLst/>
-          </a:prstGeom>
-          <a:noFill/>
-          <a:ln/>
-        </p:spPr>
-        <p:txBody>
-          <a:bodyPr wrap="square" rtlCol="0" anchor="ctr"/>
-          <a:lstStyle/>
-          <a:p>
-            <a:pPr marL="0" indent="0">
-              <a:buNone/>
-            </a:pPr>
-            <a:r>
-              <a:rPr lang="en-US" sz="1500" b="1" dirty="0">
-                <a:solidFill>
-                  <a:srgbClr val="0B3D56"/>
-                </a:solidFill>
-                <a:latin typeface="Cambria" pitchFamily="34" charset="0"/>
-                <a:ea typeface="Cambria" pitchFamily="34" charset="-122"/>
-                <a:cs typeface="Cambria" pitchFamily="34" charset="-120"/>
-              </a:rPr>
-              <a:t>Base de données</a:t>
-            </a:r>
-            <a:endParaRPr lang="en-US" sz="1500" dirty="0"/>
-          </a:p>
-        </p:txBody>
-      </p:sp>
-      <p:sp>
-        <p:nvSpPr>
-          <p:cNvPr id="12" name="Text 10"/>
-          <p:cNvSpPr/>
-          <p:nvPr/>
-        </p:nvSpPr>
-        <p:spPr>
-          <a:xfrm>
-            <a:off x="3657600" y="2697480"/>
-            <a:ext cx="2148840" cy="3017520"/>
-          </a:xfrm>
-          <a:prstGeom prst="rect">
-            <a:avLst/>
-          </a:prstGeom>
-          <a:noFill/>
-          <a:ln/>
-        </p:spPr>
-        <p:txBody>
-          <a:bodyPr wrap="square" rtlCol="0" anchor="t"/>
-          <a:lstStyle/>
-          <a:p>
-            <a:pPr marL="228600" indent="-228600">
-              <a:spcAft>
-                <a:spcPts val="1000"/>
-              </a:spcAft>
-              <a:buSzPct val="100000"/>
-              <a:buChar char="▪"/>
-            </a:pPr>
-            <a:r>
-              <a:rPr lang="en-US" sz="1200" dirty="0">
-                <a:solidFill>
-                  <a:srgbClr val="1E2530"/>
-                </a:solidFill>
-                <a:latin typeface="Calibri" pitchFamily="34" charset="0"/>
-                <a:ea typeface="Calibri" pitchFamily="34" charset="-122"/>
-                <a:cs typeface="Calibri" pitchFamily="34" charset="-120"/>
-              </a:rPr>
-              <a:t>Microsoft SQL Server</a:t>
-            </a:r>
-            <a:endParaRPr lang="en-US" sz="1200" dirty="0"/>
-          </a:p>
-        </p:txBody>
-      </p:sp>
-      <p:sp>
-        <p:nvSpPr>
-          <p:cNvPr id="13" name="Shape 11"/>
-          <p:cNvSpPr/>
-          <p:nvPr/>
-        </p:nvSpPr>
-        <p:spPr>
-          <a:xfrm>
-            <a:off x="6254496" y="1737360"/>
-            <a:ext cx="2651760" cy="4206240"/>
-          </a:xfrm>
-          <a:prstGeom prst="roundRect">
-            <a:avLst>
-              <a:gd name="adj" fmla="val 2759"/>
-            </a:avLst>
-          </a:prstGeom>
-          <a:solidFill>
-            <a:srgbClr val="F4F7F8"/>
-          </a:solidFill>
-          <a:ln/>
-          <a:effectLst>
-            <a:outerShdw blurRad="76200" dist="25400" dir="5400000" algn="bl" rotWithShape="0">
-              <a:srgbClr val="1A1A1A">
-                <a:alpha val="18000"/>
-              </a:srgbClr>
-            </a:outerShdw>
-          </a:effectLst>
-        </p:spPr>
-      </p:sp>
-      <p:sp>
-        <p:nvSpPr>
-          <p:cNvPr id="14" name="Shape 12"/>
-          <p:cNvSpPr/>
-          <p:nvPr/>
-        </p:nvSpPr>
-        <p:spPr>
-          <a:xfrm>
-            <a:off x="6483096" y="1993392"/>
-            <a:ext cx="384048" cy="73152"/>
-          </a:xfrm>
-          <a:prstGeom prst="roundRect">
-            <a:avLst>
-              <a:gd name="adj" fmla="val 50000"/>
-            </a:avLst>
-          </a:prstGeom>
-          <a:solidFill>
-            <a:srgbClr val="E67E22"/>
-          </a:solidFill>
-          <a:ln/>
-        </p:spPr>
-      </p:sp>
-      <p:sp>
-        <p:nvSpPr>
-          <p:cNvPr id="15" name="Text 13"/>
-          <p:cNvSpPr/>
-          <p:nvPr/>
-        </p:nvSpPr>
-        <p:spPr>
-          <a:xfrm>
-            <a:off x="6483096" y="2148840"/>
-            <a:ext cx="2194560" cy="457200"/>
-          </a:xfrm>
-          <a:prstGeom prst="rect">
-            <a:avLst/>
-          </a:prstGeom>
-          <a:noFill/>
-          <a:ln/>
-        </p:spPr>
-        <p:txBody>
-          <a:bodyPr wrap="square" rtlCol="0" anchor="ctr"/>
-          <a:lstStyle/>
-          <a:p>
-            <a:pPr marL="0" indent="0">
-              <a:buNone/>
-            </a:pPr>
-            <a:r>
-              <a:rPr lang="en-US" sz="1500" b="1" dirty="0">
-                <a:solidFill>
-                  <a:srgbClr val="0B3D56"/>
-                </a:solidFill>
-                <a:latin typeface="Cambria" pitchFamily="34" charset="0"/>
-                <a:ea typeface="Cambria" pitchFamily="34" charset="-122"/>
-                <a:cs typeface="Cambria" pitchFamily="34" charset="-120"/>
-              </a:rPr>
-              <a:t>Outils</a:t>
-            </a:r>
-            <a:endParaRPr lang="en-US" sz="1500" dirty="0"/>
-          </a:p>
-        </p:txBody>
-      </p:sp>
-      <p:sp>
-        <p:nvSpPr>
-          <p:cNvPr id="16" name="Text 14"/>
-          <p:cNvSpPr/>
-          <p:nvPr/>
-        </p:nvSpPr>
-        <p:spPr>
-          <a:xfrm>
-            <a:off x="6510528" y="2697480"/>
-            <a:ext cx="2148840" cy="3017520"/>
-          </a:xfrm>
-          <a:prstGeom prst="rect">
-            <a:avLst/>
-          </a:prstGeom>
-          <a:noFill/>
-          <a:ln/>
-        </p:spPr>
-        <p:txBody>
-          <a:bodyPr wrap="square" rtlCol="0" anchor="t"/>
-          <a:lstStyle/>
-          <a:p>
-            <a:pPr marL="228600" indent="-228600">
-              <a:spcAft>
-                <a:spcPts val="1000"/>
-              </a:spcAft>
-              <a:buSzPct val="100000"/>
-              <a:buChar char="▪"/>
-            </a:pPr>
-            <a:r>
-              <a:rPr lang="en-US" sz="1200" dirty="0">
-                <a:solidFill>
-                  <a:srgbClr val="1E2530"/>
-                </a:solidFill>
-                <a:latin typeface="Calibri" pitchFamily="34" charset="0"/>
-                <a:ea typeface="Calibri" pitchFamily="34" charset="-122"/>
-                <a:cs typeface="Calibri" pitchFamily="34" charset="-120"/>
-              </a:rPr>
-              <a:t>Git</a:t>
-            </a:r>
-            <a:endParaRPr lang="en-US" sz="1200" dirty="0"/>
-          </a:p>
-          <a:p>
-            <a:pPr marL="228600" indent="-228600">
-              <a:spcAft>
-                <a:spcPts val="1000"/>
-              </a:spcAft>
-              <a:buSzPct val="100000"/>
-              <a:buChar char="▪"/>
-            </a:pPr>
-            <a:r>
-              <a:rPr lang="en-US" sz="1200" dirty="0">
-                <a:solidFill>
-                  <a:srgbClr val="1E2530"/>
-                </a:solidFill>
-                <a:latin typeface="Calibri" pitchFamily="34" charset="0"/>
-                <a:ea typeface="Calibri" pitchFamily="34" charset="-122"/>
-                <a:cs typeface="Calibri" pitchFamily="34" charset="-120"/>
-              </a:rPr>
-              <a:t>VS Code</a:t>
-            </a:r>
-            <a:endParaRPr lang="en-US" sz="1200" dirty="0"/>
-          </a:p>
-          <a:p>
-            <a:pPr marL="228600" indent="-228600">
-              <a:spcAft>
-                <a:spcPts val="1000"/>
-              </a:spcAft>
-              <a:buSzPct val="100000"/>
-              <a:buChar char="▪"/>
-            </a:pPr>
-            <a:r>
-              <a:rPr lang="en-US" sz="1200" dirty="0">
-                <a:solidFill>
-                  <a:srgbClr val="1E2530"/>
-                </a:solidFill>
-                <a:latin typeface="Calibri" pitchFamily="34" charset="0"/>
-                <a:ea typeface="Calibri" pitchFamily="34" charset="-122"/>
-                <a:cs typeface="Calibri" pitchFamily="34" charset="-120"/>
-              </a:rPr>
-              <a:t>XAMPP</a:t>
-            </a:r>
-            <a:endParaRPr lang="en-US" sz="1200" dirty="0"/>
-          </a:p>
-          <a:p>
-            <a:pPr marL="228600" indent="-228600">
-              <a:spcAft>
-                <a:spcPts val="1000"/>
-              </a:spcAft>
-              <a:buSzPct val="100000"/>
-              <a:buChar char="▪"/>
-            </a:pPr>
-            <a:r>
-              <a:rPr lang="en-US" sz="1200" dirty="0">
-                <a:solidFill>
-                  <a:srgbClr val="1E2530"/>
-                </a:solidFill>
-                <a:latin typeface="Calibri" pitchFamily="34" charset="0"/>
-                <a:ea typeface="Calibri" pitchFamily="34" charset="-122"/>
-                <a:cs typeface="Calibri" pitchFamily="34" charset="-120"/>
-              </a:rPr>
-              <a:t>Postman</a:t>
-            </a:r>
-            <a:endParaRPr lang="en-US" sz="1200" dirty="0"/>
-          </a:p>
-          <a:p>
-            <a:pPr marL="228600" indent="-228600">
-              <a:spcAft>
-                <a:spcPts val="1000"/>
-              </a:spcAft>
-              <a:buSzPct val="100000"/>
-              <a:buChar char="▪"/>
-            </a:pPr>
-            <a:r>
-              <a:rPr lang="en-US" sz="1200" dirty="0">
-                <a:solidFill>
-                  <a:srgbClr val="1E2530"/>
-                </a:solidFill>
-                <a:latin typeface="Calibri" pitchFamily="34" charset="0"/>
-                <a:ea typeface="Calibri" pitchFamily="34" charset="-122"/>
-                <a:cs typeface="Calibri" pitchFamily="34" charset="-120"/>
-              </a:rPr>
-              <a:t>SQL Server Profiler</a:t>
-            </a:r>
-            <a:endParaRPr lang="en-US" sz="1200" dirty="0"/>
-          </a:p>
-          <a:p>
-            <a:pPr marL="228600" indent="-228600">
-              <a:spcAft>
-                <a:spcPts val="1000"/>
-              </a:spcAft>
-              <a:buSzPct val="100000"/>
-              <a:buChar char="▪"/>
-            </a:pPr>
-            <a:r>
-              <a:rPr lang="en-US" sz="1200" dirty="0">
-                <a:solidFill>
-                  <a:srgbClr val="1E2530"/>
-                </a:solidFill>
-                <a:latin typeface="Calibri" pitchFamily="34" charset="0"/>
-                <a:ea typeface="Calibri" pitchFamily="34" charset="-122"/>
-                <a:cs typeface="Calibri" pitchFamily="34" charset="-120"/>
-              </a:rPr>
-              <a:t>Trello</a:t>
-            </a:r>
-            <a:endParaRPr lang="en-US" sz="1200" dirty="0"/>
-          </a:p>
-        </p:txBody>
-      </p:sp>
-      <p:sp>
-        <p:nvSpPr>
-          <p:cNvPr id="17" name="Shape 15"/>
-          <p:cNvSpPr/>
-          <p:nvPr/>
-        </p:nvSpPr>
-        <p:spPr>
-          <a:xfrm>
-            <a:off x="9107424" y="1737360"/>
-            <a:ext cx="2651760" cy="4206240"/>
-          </a:xfrm>
-          <a:prstGeom prst="roundRect">
-            <a:avLst>
-              <a:gd name="adj" fmla="val 2759"/>
-            </a:avLst>
-          </a:prstGeom>
-          <a:solidFill>
-            <a:srgbClr val="F4F7F8"/>
-          </a:solidFill>
-          <a:ln/>
-          <a:effectLst>
-            <a:outerShdw blurRad="76200" dist="25400" dir="5400000" algn="bl" rotWithShape="0">
-              <a:srgbClr val="1A1A1A">
-                <a:alpha val="18000"/>
-              </a:srgbClr>
-            </a:outerShdw>
-          </a:effectLst>
-        </p:spPr>
-      </p:sp>
-      <p:sp>
-        <p:nvSpPr>
-          <p:cNvPr id="18" name="Shape 16"/>
-          <p:cNvSpPr/>
-          <p:nvPr/>
-        </p:nvSpPr>
-        <p:spPr>
-          <a:xfrm>
-            <a:off x="9336024" y="1993392"/>
-            <a:ext cx="384048" cy="73152"/>
-          </a:xfrm>
-          <a:prstGeom prst="roundRect">
-            <a:avLst>
-              <a:gd name="adj" fmla="val 50000"/>
-            </a:avLst>
-          </a:prstGeom>
-          <a:solidFill>
-            <a:srgbClr val="2E8B57"/>
-          </a:solidFill>
-          <a:ln/>
-        </p:spPr>
-      </p:sp>
-      <p:sp>
-        <p:nvSpPr>
-          <p:cNvPr id="19" name="Text 17"/>
-          <p:cNvSpPr/>
-          <p:nvPr/>
-        </p:nvSpPr>
-        <p:spPr>
-          <a:xfrm>
-            <a:off x="9336024" y="2148840"/>
-            <a:ext cx="2194560" cy="457200"/>
-          </a:xfrm>
-          <a:prstGeom prst="rect">
-            <a:avLst/>
-          </a:prstGeom>
-          <a:noFill/>
-          <a:ln/>
-        </p:spPr>
-        <p:txBody>
-          <a:bodyPr wrap="square" rtlCol="0" anchor="ctr"/>
-          <a:lstStyle/>
-          <a:p>
-            <a:pPr marL="0" indent="0">
-              <a:buNone/>
-            </a:pPr>
-            <a:r>
-              <a:rPr lang="en-US" sz="1500" b="1" dirty="0">
-                <a:solidFill>
-                  <a:srgbClr val="0B3D56"/>
-                </a:solidFill>
-                <a:latin typeface="Cambria" pitchFamily="34" charset="0"/>
-                <a:ea typeface="Cambria" pitchFamily="34" charset="-122"/>
-                <a:cs typeface="Cambria" pitchFamily="34" charset="-120"/>
-              </a:rPr>
-              <a:t>Méthodes</a:t>
-            </a:r>
-            <a:endParaRPr lang="en-US" sz="1500" dirty="0"/>
-          </a:p>
-        </p:txBody>
-      </p:sp>
-      <p:sp>
-        <p:nvSpPr>
-          <p:cNvPr id="20" name="Text 18"/>
-          <p:cNvSpPr/>
-          <p:nvPr/>
-        </p:nvSpPr>
-        <p:spPr>
-          <a:xfrm>
-            <a:off x="9363456" y="2697480"/>
-            <a:ext cx="2148840" cy="3017520"/>
-          </a:xfrm>
-          <a:prstGeom prst="rect">
-            <a:avLst/>
-          </a:prstGeom>
-          <a:noFill/>
-          <a:ln/>
-        </p:spPr>
-        <p:txBody>
-          <a:bodyPr wrap="square" rtlCol="0" anchor="t"/>
-          <a:lstStyle/>
-          <a:p>
-            <a:pPr marL="228600" indent="-228600">
-              <a:spcAft>
-                <a:spcPts val="1000"/>
-              </a:spcAft>
-              <a:buSzPct val="100000"/>
-              <a:buChar char="▪"/>
-            </a:pPr>
-            <a:r>
-              <a:rPr lang="en-US" sz="1200" dirty="0">
-                <a:solidFill>
-                  <a:srgbClr val="1E2530"/>
-                </a:solidFill>
-                <a:latin typeface="Calibri" pitchFamily="34" charset="0"/>
-                <a:ea typeface="Calibri" pitchFamily="34" charset="-122"/>
-                <a:cs typeface="Calibri" pitchFamily="34" charset="-120"/>
-              </a:rPr>
-              <a:t>Développement itératif</a:t>
-            </a:r>
-            <a:endParaRPr lang="en-US" sz="1200" dirty="0"/>
-          </a:p>
-          <a:p>
-            <a:pPr marL="228600" indent="-228600">
-              <a:spcAft>
-                <a:spcPts val="1000"/>
-              </a:spcAft>
-              <a:buSzPct val="100000"/>
-              <a:buChar char="▪"/>
-            </a:pPr>
-            <a:r>
-              <a:rPr lang="en-US" sz="1200" dirty="0">
-                <a:solidFill>
-                  <a:srgbClr val="1E2530"/>
-                </a:solidFill>
-                <a:latin typeface="Calibri" pitchFamily="34" charset="0"/>
-                <a:ea typeface="Calibri" pitchFamily="34" charset="-122"/>
-                <a:cs typeface="Calibri" pitchFamily="34" charset="-120"/>
-              </a:rPr>
-              <a:t>Tests fonctionnels</a:t>
-            </a:r>
-            <a:endParaRPr lang="en-US" sz="1200" dirty="0"/>
-          </a:p>
-          <a:p>
-            <a:pPr marL="228600" indent="-228600">
-              <a:spcAft>
-                <a:spcPts val="1000"/>
-              </a:spcAft>
-              <a:buSzPct val="100000"/>
-              <a:buChar char="▪"/>
-            </a:pPr>
-            <a:r>
-              <a:rPr lang="en-US" sz="1200" dirty="0">
-                <a:solidFill>
-                  <a:srgbClr val="1E2530"/>
-                </a:solidFill>
-                <a:latin typeface="Calibri" pitchFamily="34" charset="0"/>
-                <a:ea typeface="Calibri" pitchFamily="34" charset="-122"/>
-                <a:cs typeface="Calibri" pitchFamily="34" charset="-120"/>
-              </a:rPr>
-              <a:t>Gestion de versions</a:t>
-            </a:r>
-            <a:endParaRPr lang="en-US" sz="1200" dirty="0"/>
-          </a:p>
-        </p:txBody>
-      </p:sp>
-      <p:sp>
-        <p:nvSpPr>
-          <p:cNvPr id="21" name="Shape 19"/>
-          <p:cNvSpPr/>
-          <p:nvPr/>
-        </p:nvSpPr>
-        <p:spPr>
-          <a:xfrm>
-            <a:off x="548640" y="6144768"/>
-            <a:ext cx="11109960" cy="777240"/>
-          </a:xfrm>
-          <a:prstGeom prst="roundRect">
-            <a:avLst>
-              <a:gd name="adj" fmla="val 9412"/>
-            </a:avLst>
-          </a:prstGeom>
-          <a:solidFill>
-            <a:srgbClr val="0B3D56"/>
-          </a:solidFill>
-          <a:ln/>
-          <a:effectLst>
-            <a:outerShdw blurRad="76200" dist="25400" dir="5400000" algn="bl" rotWithShape="0">
-              <a:srgbClr val="1A1A1A">
-                <a:alpha val="18000"/>
-              </a:srgbClr>
-            </a:outerShdw>
-          </a:effectLst>
-        </p:spPr>
-      </p:sp>
-      <p:sp>
-        <p:nvSpPr>
-          <p:cNvPr id="22" name="Text 20"/>
-          <p:cNvSpPr/>
-          <p:nvPr/>
-        </p:nvSpPr>
-        <p:spPr>
-          <a:xfrm>
-            <a:off x="868680" y="6144768"/>
-            <a:ext cx="10515600" cy="777240"/>
-          </a:xfrm>
-          <a:prstGeom prst="rect">
-            <a:avLst/>
-          </a:prstGeom>
-          <a:noFill/>
-          <a:ln/>
-        </p:spPr>
-        <p:txBody>
-          <a:bodyPr wrap="square" rtlCol="0" anchor="ctr"/>
-          <a:lstStyle/>
-          <a:p>
-            <a:pPr marL="0" indent="0">
-              <a:buNone/>
-            </a:pPr>
-            <a:r>
-              <a:rPr lang="en-US" sz="1250" i="1" dirty="0">
-                <a:solidFill>
-                  <a:srgbClr val="FFFFFF"/>
-                </a:solidFill>
-                <a:latin typeface="Calibri" pitchFamily="34" charset="0"/>
-                <a:ea typeface="Calibri" pitchFamily="34" charset="-122"/>
-                <a:cs typeface="Calibri" pitchFamily="34" charset="-120"/>
-              </a:rPr>
-              <a:t>Compétences Master mobilisées : bases de données relationnelles, développement web, conception d'API, méthodes de test, génie logiciel.</a:t>
-            </a:r>
-            <a:endParaRPr lang="en-US" sz="1250" dirty="0"/>
-          </a:p>
-        </p:txBody>
-      </p:sp>
-    </p:spTree>
-  </p:cSld>
-  <p:clrMapOvr>
-    <a:masterClrMapping/>
-  </p:clrMapOvr>
-</p:sld>
-</file>
-
-<file path=ppt/slides/slide9.xml><?xml version="1.0" encoding="utf-8"?>
 <p:sld xmlns:a="http://schemas.openxmlformats.org/drawingml/2006/main" xmlns:r="http://schemas.openxmlformats.org/officeDocument/2006/relationships" xmlns:p="http://schemas.openxmlformats.org/presentationml/2006/main">
   <p:cSld name="Slide 9">
     <p:bg>
@@ -28136,7 +27280,7 @@
         </p:nvSpPr>
         <p:spPr>
           <a:xfrm>
-            <a:off x="822960" y="2331720"/>
+            <a:off x="822960" y="1759758"/>
             <a:ext cx="7315200" cy="457200"/>
           </a:xfrm>
           <a:prstGeom prst="rect">
@@ -28153,7 +27297,7 @@
               <a:buNone/>
             </a:pPr>
             <a:r>
-              <a:rPr lang="en-US" sz="1500" b="1" kern="0" spc="300" dirty="0">
+              <a:rPr lang="en-US" sz="2000" b="1" kern="0" spc="300" dirty="0">
                 <a:solidFill>
                   <a:srgbClr val="E67E22"/>
                 </a:solidFill>
@@ -28163,7 +27307,7 @@
               </a:rPr>
               <a:t>PARTIE 2</a:t>
             </a:r>
-            <a:endParaRPr lang="en-US" sz="1500" dirty="0"/>
+            <a:endParaRPr lang="en-US" sz="2000" dirty="0"/>
           </a:p>
         </p:txBody>
       </p:sp>
@@ -28175,7 +27319,7 @@
         </p:nvSpPr>
         <p:spPr>
           <a:xfrm>
-            <a:off x="822960" y="2788920"/>
+            <a:off x="1349433" y="2884978"/>
             <a:ext cx="9875520" cy="1463040"/>
           </a:xfrm>
           <a:prstGeom prst="rect">
@@ -28214,7 +27358,7 @@
         </p:nvSpPr>
         <p:spPr>
           <a:xfrm>
-            <a:off x="822960" y="4160520"/>
+            <a:off x="1506451" y="4348018"/>
             <a:ext cx="8961120" cy="731520"/>
           </a:xfrm>
           <a:prstGeom prst="rect">
@@ -28230,20 +27374,301 @@
             <a:pPr marL="0" indent="0">
               <a:buNone/>
             </a:pPr>
-            <a:r>
-              <a:rPr lang="en-US" sz="1600" dirty="0">
-                <a:solidFill>
-                  <a:srgbClr val="CADCFC"/>
+            <a:endParaRPr lang="en-US" sz="1600" dirty="0"/>
+          </a:p>
+        </p:txBody>
+      </p:sp>
+      <p:sp>
+        <p:nvSpPr>
+          <p:cNvPr id="7" name="Text 5"/>
+          <p:cNvSpPr/>
+          <p:nvPr/>
+        </p:nvSpPr>
+        <p:spPr>
+          <a:xfrm>
+            <a:off x="10058400" y="502920"/>
+            <a:ext cx="1645920" cy="1645920"/>
+          </a:xfrm>
+          <a:prstGeom prst="rect">
+            <a:avLst/>
+          </a:prstGeom>
+          <a:noFill/>
+          <a:ln/>
+        </p:spPr>
+        <p:txBody>
+          <a:bodyPr wrap="square" rtlCol="0" anchor="ctr"/>
+          <a:lstStyle/>
+          <a:p>
+            <a:pPr marL="0" indent="0" algn="r">
+              <a:buNone/>
+            </a:pPr>
+            <a:r>
+              <a:rPr lang="en-US" sz="6000" b="1" dirty="0">
+                <a:solidFill>
+                  <a:srgbClr val="082C3E"/>
+                </a:solidFill>
+                <a:latin typeface="Cambria" pitchFamily="34" charset="0"/>
+                <a:ea typeface="Cambria" pitchFamily="34" charset="-122"/>
+                <a:cs typeface="Cambria" pitchFamily="34" charset="-120"/>
+              </a:rPr>
+              <a:t>02</a:t>
+            </a:r>
+            <a:endParaRPr lang="en-US" sz="6000" dirty="0"/>
+          </a:p>
+        </p:txBody>
+      </p:sp>
+    </p:spTree>
+  </p:cSld>
+  <p:clrMapOvr>
+    <a:masterClrMapping/>
+  </p:clrMapOvr>
+</p:sld>
+</file>
+
+<file path=ppt/slides/slide9.xml><?xml version="1.0" encoding="utf-8"?>
+<p:sld xmlns:a="http://schemas.openxmlformats.org/drawingml/2006/main" xmlns:r="http://schemas.openxmlformats.org/officeDocument/2006/relationships" xmlns:p="http://schemas.openxmlformats.org/presentationml/2006/main">
+  <p:cSld name="Slide 10">
+    <p:bg>
+      <p:bgPr>
+        <a:solidFill>
+          <a:srgbClr val="FFFFFF"/>
+        </a:solidFill>
+        <a:effectLst/>
+      </p:bgPr>
+    </p:bg>
+    <p:spTree>
+      <p:nvGrpSpPr>
+        <p:cNvPr id="1" name=""/>
+        <p:cNvGrpSpPr/>
+        <p:nvPr/>
+      </p:nvGrpSpPr>
+      <p:grpSpPr>
+        <a:xfrm>
+          <a:off x="0" y="0"/>
+          <a:ext cx="0" cy="0"/>
+          <a:chOff x="0" y="0"/>
+          <a:chExt cx="0" cy="0"/>
+        </a:xfrm>
+      </p:grpSpPr>
+      <p:sp>
+        <p:nvSpPr>
+          <p:cNvPr id="2" name="Text 0"/>
+          <p:cNvSpPr/>
+          <p:nvPr/>
+        </p:nvSpPr>
+        <p:spPr>
+          <a:xfrm>
+            <a:off x="548640" y="384048"/>
+            <a:ext cx="7315200" cy="320040"/>
+          </a:xfrm>
+          <a:prstGeom prst="rect">
+            <a:avLst/>
+          </a:prstGeom>
+          <a:noFill/>
+          <a:ln/>
+        </p:spPr>
+        <p:txBody>
+          <a:bodyPr wrap="square" rtlCol="0" anchor="ctr"/>
+          <a:lstStyle/>
+          <a:p>
+            <a:pPr marL="0" indent="0">
+              <a:buNone/>
+            </a:pPr>
+            <a:endParaRPr lang="en-US" sz="1200" dirty="0"/>
+          </a:p>
+        </p:txBody>
+      </p:sp>
+      <p:sp>
+        <p:nvSpPr>
+          <p:cNvPr id="3" name="Text 1"/>
+          <p:cNvSpPr/>
+          <p:nvPr/>
+        </p:nvSpPr>
+        <p:spPr>
+          <a:xfrm>
+            <a:off x="548640" y="658368"/>
+            <a:ext cx="11064240" cy="822960"/>
+          </a:xfrm>
+          <a:prstGeom prst="rect">
+            <a:avLst/>
+          </a:prstGeom>
+          <a:noFill/>
+          <a:ln/>
+        </p:spPr>
+        <p:txBody>
+          <a:bodyPr wrap="square" rtlCol="0" anchor="ctr"/>
+          <a:lstStyle/>
+          <a:p>
+            <a:pPr marL="0" indent="0" algn="l">
+              <a:buNone/>
+            </a:pPr>
+            <a:r>
+              <a:rPr lang="en-US" sz="3000" b="1" dirty="0">
+                <a:solidFill>
+                  <a:srgbClr val="0B3D56"/>
+                </a:solidFill>
+                <a:latin typeface="Cambria" pitchFamily="34" charset="0"/>
+                <a:ea typeface="Cambria" pitchFamily="34" charset="-122"/>
+                <a:cs typeface="Cambria" pitchFamily="34" charset="-120"/>
+              </a:rPr>
+              <a:t>Introduction &amp; problématique</a:t>
+            </a:r>
+            <a:endParaRPr lang="en-US" sz="3000" dirty="0"/>
+          </a:p>
+        </p:txBody>
+      </p:sp>
+      <p:sp>
+        <p:nvSpPr>
+          <p:cNvPr id="4" name="Text 2"/>
+          <p:cNvSpPr/>
+          <p:nvPr/>
+        </p:nvSpPr>
+        <p:spPr>
+          <a:xfrm>
+            <a:off x="11503152" y="6473952"/>
+            <a:ext cx="457200" cy="274320"/>
+          </a:xfrm>
+          <a:prstGeom prst="rect">
+            <a:avLst/>
+          </a:prstGeom>
+          <a:noFill/>
+          <a:ln/>
+        </p:spPr>
+        <p:txBody>
+          <a:bodyPr wrap="square" rtlCol="0" anchor="ctr"/>
+          <a:lstStyle/>
+          <a:p>
+            <a:pPr marL="0" indent="0" algn="r">
+              <a:buNone/>
+            </a:pPr>
+            <a:r>
+              <a:rPr lang="en-US" sz="1000" dirty="0">
+                <a:solidFill>
+                  <a:srgbClr val="6B7280"/>
                 </a:solidFill>
                 <a:latin typeface="Calibri" pitchFamily="34" charset="0"/>
                 <a:ea typeface="Calibri" pitchFamily="34" charset="-122"/>
                 <a:cs typeface="Calibri" pitchFamily="34" charset="-120"/>
               </a:rPr>
-              <a:t>HEAT2VALUE — Un algorithme de valorisation thermique pour l'optimisation énergétique des Data Centers Cloud</a:t>
-            </a:r>
-            <a:endParaRPr lang="en-US" sz="1600" dirty="0"/>
-          </a:p>
-        </p:txBody>
+              <a:t>10</a:t>
+            </a:r>
+            <a:endParaRPr lang="en-US" sz="1000" dirty="0"/>
+          </a:p>
+        </p:txBody>
+      </p:sp>
+      <p:sp>
+        <p:nvSpPr>
+          <p:cNvPr id="5" name="Text 3"/>
+          <p:cNvSpPr/>
+          <p:nvPr/>
+        </p:nvSpPr>
+        <p:spPr>
+          <a:xfrm>
+            <a:off x="548640" y="1783080"/>
+            <a:ext cx="6492240" cy="2743200"/>
+          </a:xfrm>
+          <a:prstGeom prst="rect">
+            <a:avLst/>
+          </a:prstGeom>
+          <a:noFill/>
+          <a:ln/>
+        </p:spPr>
+        <p:txBody>
+          <a:bodyPr wrap="square" rtlCol="0" anchor="t"/>
+          <a:lstStyle/>
+          <a:p>
+            <a:pPr marL="228600" indent="-228600">
+              <a:spcAft>
+                <a:spcPts val="1600"/>
+              </a:spcAft>
+              <a:buSzPct val="100000"/>
+              <a:buChar char="▪"/>
+            </a:pPr>
+            <a:r>
+              <a:rPr lang="en-US" sz="1550" dirty="0">
+                <a:solidFill>
+                  <a:srgbClr val="1E2530"/>
+                </a:solidFill>
+                <a:latin typeface="Calibri" pitchFamily="34" charset="0"/>
+                <a:ea typeface="Calibri" pitchFamily="34" charset="-122"/>
+                <a:cs typeface="Calibri" pitchFamily="34" charset="-120"/>
+              </a:rPr>
+              <a:t>Les Data Centers, piliers du numérique, consomment des quantités massives d'électricité et rejettent beaucoup de CO₂</a:t>
+            </a:r>
+            <a:endParaRPr lang="en-US" sz="1550" dirty="0"/>
+          </a:p>
+          <a:p>
+            <a:pPr marL="228600" indent="-228600">
+              <a:spcAft>
+                <a:spcPts val="1600"/>
+              </a:spcAft>
+              <a:buSzPct val="100000"/>
+              <a:buChar char="▪"/>
+            </a:pPr>
+            <a:r>
+              <a:rPr lang="en-US" sz="1550" dirty="0">
+                <a:solidFill>
+                  <a:srgbClr val="1E2530"/>
+                </a:solidFill>
+                <a:latin typeface="Calibri" pitchFamily="34" charset="0"/>
+                <a:ea typeface="Calibri" pitchFamily="34" charset="-122"/>
+                <a:cs typeface="Calibri" pitchFamily="34" charset="-120"/>
+              </a:rPr>
+              <a:t>L'essor de l'intelligence artificielle amplifie cette consommation encore plus rapidement</a:t>
+            </a:r>
+            <a:endParaRPr lang="en-US" sz="1550" dirty="0"/>
+          </a:p>
+          <a:p>
+            <a:pPr marL="228600" indent="-228600">
+              <a:spcAft>
+                <a:spcPts val="1600"/>
+              </a:spcAft>
+              <a:buSzPct val="100000"/>
+              <a:buChar char="▪"/>
+            </a:pPr>
+            <a:r>
+              <a:rPr lang="en-US" sz="1550" dirty="0">
+                <a:solidFill>
+                  <a:srgbClr val="1E2530"/>
+                </a:solidFill>
+                <a:latin typeface="Calibri" pitchFamily="34" charset="0"/>
+                <a:ea typeface="Calibri" pitchFamily="34" charset="-122"/>
+                <a:cs typeface="Calibri" pitchFamily="34" charset="-120"/>
+              </a:rPr>
+              <a:t>Les infrastructures doivent rester performantes tout en réduisant leur impact environnemental</a:t>
+            </a:r>
+            <a:endParaRPr lang="en-US" sz="1550" dirty="0"/>
+          </a:p>
+        </p:txBody>
+      </p:sp>
+      <p:sp>
+        <p:nvSpPr>
+          <p:cNvPr id="6" name="Shape 4"/>
+          <p:cNvSpPr/>
+          <p:nvPr/>
+        </p:nvSpPr>
+        <p:spPr>
+          <a:xfrm>
+            <a:off x="548640" y="4617720"/>
+            <a:ext cx="6492240" cy="1417320"/>
+          </a:xfrm>
+          <a:prstGeom prst="roundRect">
+            <a:avLst>
+              <a:gd name="adj" fmla="val 5161"/>
+            </a:avLst>
+          </a:prstGeom>
+          <a:solidFill>
+            <a:srgbClr val="0B3D56"/>
+          </a:solidFill>
+          <a:ln/>
+          <a:effectLst>
+            <a:outerShdw blurRad="76200" dist="25400" dir="5400000" algn="bl" rotWithShape="0">
+              <a:srgbClr val="1A1A1A">
+                <a:alpha val="18000"/>
+              </a:srgbClr>
+            </a:outerShdw>
+          </a:effectLst>
+        </p:spPr>
       </p:sp>
       <p:sp>
         <p:nvSpPr>
@@ -28253,8 +27678,8 @@
         </p:nvSpPr>
         <p:spPr>
           <a:xfrm>
-            <a:off x="10058400" y="502920"/>
-            <a:ext cx="1645920" cy="1645920"/>
+            <a:off x="868680" y="4617720"/>
+            <a:ext cx="5943600" cy="1417320"/>
           </a:xfrm>
           <a:prstGeom prst="rect">
             <a:avLst/>
@@ -28266,21 +27691,342 @@
           <a:bodyPr wrap="square" rtlCol="0" anchor="ctr"/>
           <a:lstStyle/>
           <a:p>
-            <a:pPr marL="0" indent="0" algn="r">
+            <a:pPr marL="0" indent="0">
               <a:buNone/>
             </a:pPr>
             <a:r>
-              <a:rPr lang="en-US" sz="6000" b="1" dirty="0">
-                <a:solidFill>
-                  <a:srgbClr val="082C3E"/>
+              <a:rPr lang="en-US" sz="1600" b="1" i="1" dirty="0">
+                <a:solidFill>
+                  <a:srgbClr val="FFFFFF"/>
                 </a:solidFill>
                 <a:latin typeface="Cambria" pitchFamily="34" charset="0"/>
                 <a:ea typeface="Cambria" pitchFamily="34" charset="-122"/>
                 <a:cs typeface="Cambria" pitchFamily="34" charset="-120"/>
               </a:rPr>
-              <a:t>02</a:t>
-            </a:r>
-            <a:endParaRPr lang="en-US" sz="6000" dirty="0"/>
+              <a:t>Comment optimiser la performance énergétique des Data Centers Cloud afin de réduire durablement leur empreinte carbone ?</a:t>
+            </a:r>
+            <a:endParaRPr lang="en-US" sz="1600" dirty="0"/>
+          </a:p>
+        </p:txBody>
+      </p:sp>
+      <p:sp>
+        <p:nvSpPr>
+          <p:cNvPr id="8" name="Shape 6"/>
+          <p:cNvSpPr/>
+          <p:nvPr/>
+        </p:nvSpPr>
+        <p:spPr>
+          <a:xfrm>
+            <a:off x="7360920" y="1783080"/>
+            <a:ext cx="4297680" cy="1280160"/>
+          </a:xfrm>
+          <a:prstGeom prst="roundRect">
+            <a:avLst>
+              <a:gd name="adj" fmla="val 5714"/>
+            </a:avLst>
+          </a:prstGeom>
+          <a:solidFill>
+            <a:srgbClr val="F4F7F8"/>
+          </a:solidFill>
+          <a:ln/>
+          <a:effectLst>
+            <a:outerShdw blurRad="76200" dist="25400" dir="5400000" algn="bl" rotWithShape="0">
+              <a:srgbClr val="1A1A1A">
+                <a:alpha val="18000"/>
+              </a:srgbClr>
+            </a:outerShdw>
+          </a:effectLst>
+        </p:spPr>
+      </p:sp>
+      <p:sp>
+        <p:nvSpPr>
+          <p:cNvPr id="9" name="Text 7"/>
+          <p:cNvSpPr/>
+          <p:nvPr/>
+        </p:nvSpPr>
+        <p:spPr>
+          <a:xfrm>
+            <a:off x="7589520" y="1920240"/>
+            <a:ext cx="1463040" cy="1005840"/>
+          </a:xfrm>
+          <a:prstGeom prst="rect">
+            <a:avLst/>
+          </a:prstGeom>
+          <a:noFill/>
+          <a:ln/>
+        </p:spPr>
+        <p:txBody>
+          <a:bodyPr wrap="square" rtlCol="0" anchor="ctr"/>
+          <a:lstStyle/>
+          <a:p>
+            <a:pPr marL="0" indent="0">
+              <a:buNone/>
+            </a:pPr>
+            <a:r>
+              <a:rPr lang="en-US" sz="2600" b="1" dirty="0">
+                <a:solidFill>
+                  <a:srgbClr val="1B7A8C"/>
+                </a:solidFill>
+                <a:latin typeface="Cambria" pitchFamily="34" charset="0"/>
+                <a:ea typeface="Cambria" pitchFamily="34" charset="-122"/>
+                <a:cs typeface="Cambria" pitchFamily="34" charset="-120"/>
+              </a:rPr>
+              <a:t>PUE</a:t>
+            </a:r>
+            <a:endParaRPr lang="en-US" sz="2600" dirty="0"/>
+          </a:p>
+        </p:txBody>
+      </p:sp>
+      <p:sp>
+        <p:nvSpPr>
+          <p:cNvPr id="10" name="Text 8"/>
+          <p:cNvSpPr/>
+          <p:nvPr/>
+        </p:nvSpPr>
+        <p:spPr>
+          <a:xfrm>
+            <a:off x="9052560" y="1783080"/>
+            <a:ext cx="2514600" cy="1280160"/>
+          </a:xfrm>
+          <a:prstGeom prst="rect">
+            <a:avLst/>
+          </a:prstGeom>
+          <a:noFill/>
+          <a:ln/>
+        </p:spPr>
+        <p:txBody>
+          <a:bodyPr wrap="square" rtlCol="0" anchor="ctr"/>
+          <a:lstStyle/>
+          <a:p>
+            <a:pPr marL="0" indent="0">
+              <a:buNone/>
+            </a:pPr>
+            <a:r>
+              <a:rPr lang="en-US" sz="1300" dirty="0">
+                <a:solidFill>
+                  <a:srgbClr val="1E2530"/>
+                </a:solidFill>
+                <a:latin typeface="Calibri" pitchFamily="34" charset="0"/>
+                <a:ea typeface="Calibri" pitchFamily="34" charset="-122"/>
+                <a:cs typeface="Calibri" pitchFamily="34" charset="-120"/>
+              </a:rPr>
+              <a:t>Efficacité électrique</a:t>
+            </a:r>
+            <a:endParaRPr lang="en-US" sz="1300" dirty="0"/>
+          </a:p>
+        </p:txBody>
+      </p:sp>
+      <p:sp>
+        <p:nvSpPr>
+          <p:cNvPr id="11" name="Shape 9"/>
+          <p:cNvSpPr/>
+          <p:nvPr/>
+        </p:nvSpPr>
+        <p:spPr>
+          <a:xfrm>
+            <a:off x="7360920" y="3264408"/>
+            <a:ext cx="4297680" cy="1280160"/>
+          </a:xfrm>
+          <a:prstGeom prst="roundRect">
+            <a:avLst>
+              <a:gd name="adj" fmla="val 5714"/>
+            </a:avLst>
+          </a:prstGeom>
+          <a:solidFill>
+            <a:srgbClr val="F4F7F8"/>
+          </a:solidFill>
+          <a:ln/>
+          <a:effectLst>
+            <a:outerShdw blurRad="76200" dist="25400" dir="5400000" algn="bl" rotWithShape="0">
+              <a:srgbClr val="1A1A1A">
+                <a:alpha val="18000"/>
+              </a:srgbClr>
+            </a:outerShdw>
+          </a:effectLst>
+        </p:spPr>
+      </p:sp>
+      <p:sp>
+        <p:nvSpPr>
+          <p:cNvPr id="12" name="Text 10"/>
+          <p:cNvSpPr/>
+          <p:nvPr/>
+        </p:nvSpPr>
+        <p:spPr>
+          <a:xfrm>
+            <a:off x="7589520" y="3401568"/>
+            <a:ext cx="1463040" cy="1005840"/>
+          </a:xfrm>
+          <a:prstGeom prst="rect">
+            <a:avLst/>
+          </a:prstGeom>
+          <a:noFill/>
+          <a:ln/>
+        </p:spPr>
+        <p:txBody>
+          <a:bodyPr wrap="square" rtlCol="0" anchor="ctr"/>
+          <a:lstStyle/>
+          <a:p>
+            <a:pPr marL="0" indent="0">
+              <a:buNone/>
+            </a:pPr>
+            <a:r>
+              <a:rPr lang="en-US" sz="2600" b="1" dirty="0">
+                <a:solidFill>
+                  <a:srgbClr val="E67E22"/>
+                </a:solidFill>
+                <a:latin typeface="Cambria" pitchFamily="34" charset="0"/>
+                <a:ea typeface="Cambria" pitchFamily="34" charset="-122"/>
+                <a:cs typeface="Cambria" pitchFamily="34" charset="-120"/>
+              </a:rPr>
+              <a:t>CUE</a:t>
+            </a:r>
+            <a:endParaRPr lang="en-US" sz="2600" dirty="0"/>
+          </a:p>
+        </p:txBody>
+      </p:sp>
+      <p:sp>
+        <p:nvSpPr>
+          <p:cNvPr id="13" name="Text 11"/>
+          <p:cNvSpPr/>
+          <p:nvPr/>
+        </p:nvSpPr>
+        <p:spPr>
+          <a:xfrm>
+            <a:off x="9052560" y="3264408"/>
+            <a:ext cx="2514600" cy="1280160"/>
+          </a:xfrm>
+          <a:prstGeom prst="rect">
+            <a:avLst/>
+          </a:prstGeom>
+          <a:noFill/>
+          <a:ln/>
+        </p:spPr>
+        <p:txBody>
+          <a:bodyPr wrap="square" rtlCol="0" anchor="ctr"/>
+          <a:lstStyle/>
+          <a:p>
+            <a:pPr marL="0" indent="0">
+              <a:buNone/>
+            </a:pPr>
+            <a:r>
+              <a:rPr lang="en-US" sz="1300" dirty="0">
+                <a:solidFill>
+                  <a:srgbClr val="1E2530"/>
+                </a:solidFill>
+                <a:latin typeface="Calibri" pitchFamily="34" charset="0"/>
+                <a:ea typeface="Calibri" pitchFamily="34" charset="-122"/>
+                <a:cs typeface="Calibri" pitchFamily="34" charset="-120"/>
+              </a:rPr>
+              <a:t>Émissions de carbone</a:t>
+            </a:r>
+            <a:endParaRPr lang="en-US" sz="1300" dirty="0"/>
+          </a:p>
+        </p:txBody>
+      </p:sp>
+      <p:sp>
+        <p:nvSpPr>
+          <p:cNvPr id="14" name="Shape 12"/>
+          <p:cNvSpPr/>
+          <p:nvPr/>
+        </p:nvSpPr>
+        <p:spPr>
+          <a:xfrm>
+            <a:off x="7360920" y="4745736"/>
+            <a:ext cx="4297680" cy="1280160"/>
+          </a:xfrm>
+          <a:prstGeom prst="roundRect">
+            <a:avLst>
+              <a:gd name="adj" fmla="val 5714"/>
+            </a:avLst>
+          </a:prstGeom>
+          <a:solidFill>
+            <a:srgbClr val="F4F7F8"/>
+          </a:solidFill>
+          <a:ln/>
+          <a:effectLst>
+            <a:outerShdw blurRad="76200" dist="25400" dir="5400000" algn="bl" rotWithShape="0">
+              <a:srgbClr val="1A1A1A">
+                <a:alpha val="18000"/>
+              </a:srgbClr>
+            </a:outerShdw>
+          </a:effectLst>
+        </p:spPr>
+      </p:sp>
+      <p:sp>
+        <p:nvSpPr>
+          <p:cNvPr id="15" name="Text 13"/>
+          <p:cNvSpPr/>
+          <p:nvPr/>
+        </p:nvSpPr>
+        <p:spPr>
+          <a:xfrm>
+            <a:off x="7589520" y="4882896"/>
+            <a:ext cx="1463040" cy="1005840"/>
+          </a:xfrm>
+          <a:prstGeom prst="rect">
+            <a:avLst/>
+          </a:prstGeom>
+          <a:noFill/>
+          <a:ln/>
+        </p:spPr>
+        <p:txBody>
+          <a:bodyPr wrap="square" rtlCol="0" anchor="ctr"/>
+          <a:lstStyle/>
+          <a:p>
+            <a:pPr marL="0" indent="0">
+              <a:buNone/>
+            </a:pPr>
+            <a:r>
+              <a:rPr lang="en-US" sz="2600" b="1" dirty="0">
+                <a:solidFill>
+                  <a:srgbClr val="2E8B57"/>
+                </a:solidFill>
+                <a:latin typeface="Cambria" pitchFamily="34" charset="0"/>
+                <a:ea typeface="Cambria" pitchFamily="34" charset="-122"/>
+                <a:cs typeface="Cambria" pitchFamily="34" charset="-120"/>
+              </a:rPr>
+              <a:t>WUE</a:t>
+            </a:r>
+            <a:endParaRPr lang="en-US" sz="2600" dirty="0"/>
+          </a:p>
+        </p:txBody>
+      </p:sp>
+      <p:sp>
+        <p:nvSpPr>
+          <p:cNvPr id="16" name="Text 14"/>
+          <p:cNvSpPr/>
+          <p:nvPr/>
+        </p:nvSpPr>
+        <p:spPr>
+          <a:xfrm>
+            <a:off x="9052560" y="4745736"/>
+            <a:ext cx="2514600" cy="1280160"/>
+          </a:xfrm>
+          <a:prstGeom prst="rect">
+            <a:avLst/>
+          </a:prstGeom>
+          <a:noFill/>
+          <a:ln/>
+        </p:spPr>
+        <p:txBody>
+          <a:bodyPr wrap="square" rtlCol="0" anchor="ctr"/>
+          <a:lstStyle/>
+          <a:p>
+            <a:pPr marL="0" indent="0">
+              <a:buNone/>
+            </a:pPr>
+            <a:r>
+              <a:rPr lang="en-US" sz="1300" dirty="0">
+                <a:solidFill>
+                  <a:srgbClr val="1E2530"/>
+                </a:solidFill>
+                <a:latin typeface="Calibri" pitchFamily="34" charset="0"/>
+                <a:ea typeface="Calibri" pitchFamily="34" charset="-122"/>
+                <a:cs typeface="Calibri" pitchFamily="34" charset="-120"/>
+              </a:rPr>
+              <a:t>Consommation d'eau</a:t>
+            </a:r>
+            <a:endParaRPr lang="en-US" sz="1300" dirty="0"/>
           </a:p>
         </p:txBody>
       </p:sp>
